--- a/data/archive/pulse_2026-03-14.pptx
+++ b/data/archive/pulse_2026-03-14.pptx
@@ -23,6 +23,8 @@
     <p:sldId id="271" r:id="rId22"/>
     <p:sldId id="272" r:id="rId23"/>
     <p:sldId id="273" r:id="rId24"/>
+    <p:sldId id="274" r:id="rId25"/>
+    <p:sldId id="275" r:id="rId26"/>
   </p:sldIdLst>
   <p:sldSz cx="12191695" cy="6858000" type="screen4x3"/>
   <p:notesSz cx="6858000" cy="9144000"/>
@@ -3305,7 +3307,7 @@
             <a:avLst/>
           </a:prstGeom>
           <a:solidFill>
-            <a:srgbClr val="AB47BC"/>
+            <a:srgbClr val="10B981"/>
           </a:solidFill>
           <a:ln>
             <a:noFill/>
@@ -3358,13 +3360,13 @@
             <a:pPr algn="l">
               <a:defRPr sz="1000" b="1">
                 <a:solidFill>
-                  <a:srgbClr val="AB47BC"/>
-                </a:solidFill>
-                <a:latin typeface="Calibri"/>
-              </a:defRPr>
-            </a:pPr>
-            <a:r>
-              <a:t>💡  OFFICE LIFE</a:t>
+                  <a:srgbClr val="10B981"/>
+                </a:solidFill>
+                <a:latin typeface="Calibri"/>
+              </a:defRPr>
+            </a:pPr>
+            <a:r>
+              <a:t>🚀  CLAPS</a:t>
             </a:r>
           </a:p>
         </p:txBody>
@@ -3394,13 +3396,13 @@
             <a:pPr algn="l">
               <a:defRPr sz="3200" b="1" i="0">
                 <a:solidFill>
-                  <a:srgbClr val="AB47BC"/>
-                </a:solidFill>
-                <a:latin typeface="Calibri"/>
-              </a:defRPr>
-            </a:pPr>
-            <a:r>
-              <a:t>Innovation Mindset</a:t>
+                  <a:srgbClr val="10B981"/>
+                </a:solidFill>
+                <a:latin typeface="Calibri"/>
+              </a:defRPr>
+            </a:pPr>
+            <a:r>
+              <a:t>Team Collaboration</a:t>
             </a:r>
           </a:p>
         </p:txBody>
@@ -3414,6 +3416,150 @@
         <p:spPr>
           <a:xfrm>
             <a:off x="1097280" y="2103120"/>
+            <a:ext cx="2743200" cy="548640"/>
+          </a:xfrm>
+          <a:prstGeom prst="rect">
+            <a:avLst/>
+          </a:prstGeom>
+          <a:noFill/>
+        </p:spPr>
+        <p:txBody>
+          <a:bodyPr wrap="square">
+            <a:spAutoFit/>
+          </a:bodyPr>
+          <a:lstStyle/>
+          <a:p>
+            <a:pPr algn="l">
+              <a:defRPr sz="2800" b="1" i="0">
+                <a:solidFill>
+                  <a:srgbClr val="10B981"/>
+                </a:solidFill>
+                <a:latin typeface="Calibri"/>
+              </a:defRPr>
+            </a:pPr>
+            <a:r>
+              <a:t>50</a:t>
+            </a:r>
+          </a:p>
+        </p:txBody>
+      </p:sp>
+      <p:sp>
+        <p:nvSpPr>
+          <p:cNvPr id="6" name="TextBox 5"/>
+          <p:cNvSpPr txBox="1"/>
+          <p:nvPr/>
+        </p:nvSpPr>
+        <p:spPr>
+          <a:xfrm>
+            <a:off x="1097280" y="2651760"/>
+            <a:ext cx="9966960" cy="365760"/>
+          </a:xfrm>
+          <a:prstGeom prst="rect">
+            <a:avLst/>
+          </a:prstGeom>
+          <a:noFill/>
+        </p:spPr>
+        <p:txBody>
+          <a:bodyPr wrap="square">
+            <a:spAutoFit/>
+          </a:bodyPr>
+          <a:lstStyle/>
+          <a:p>
+            <a:pPr algn="l">
+              <a:defRPr sz="1400" b="0" i="0">
+                <a:solidFill>
+                  <a:srgbClr val="E2E2EA"/>
+                </a:solidFill>
+                <a:latin typeface="Calibri"/>
+              </a:defRPr>
+            </a:pPr>
+            <a:r>
+              <a:t>from Michael Lotfy</a:t>
+            </a:r>
+          </a:p>
+        </p:txBody>
+      </p:sp>
+      <p:sp>
+        <p:nvSpPr>
+          <p:cNvPr id="7" name="TextBox 6"/>
+          <p:cNvSpPr txBox="1"/>
+          <p:nvPr/>
+        </p:nvSpPr>
+        <p:spPr>
+          <a:xfrm>
+            <a:off x="1097280" y="3108960"/>
+            <a:ext cx="9966960" cy="365760"/>
+          </a:xfrm>
+          <a:prstGeom prst="rect">
+            <a:avLst/>
+          </a:prstGeom>
+          <a:noFill/>
+        </p:spPr>
+        <p:txBody>
+          <a:bodyPr wrap="square">
+            <a:spAutoFit/>
+          </a:bodyPr>
+          <a:lstStyle/>
+          <a:p>
+            <a:pPr algn="l">
+              <a:defRPr sz="1400" b="1" i="0">
+                <a:solidFill>
+                  <a:srgbClr val="FFFFFF"/>
+                </a:solidFill>
+                <a:latin typeface="Calibri"/>
+              </a:defRPr>
+            </a:pPr>
+            <a:r>
+              <a:t>to: Isahakyan</a:t>
+            </a:r>
+          </a:p>
+        </p:txBody>
+      </p:sp>
+      <p:sp>
+        <p:nvSpPr>
+          <p:cNvPr id="8" name="TextBox 7"/>
+          <p:cNvSpPr txBox="1"/>
+          <p:nvPr/>
+        </p:nvSpPr>
+        <p:spPr>
+          <a:xfrm>
+            <a:off x="1097280" y="3749039"/>
+            <a:ext cx="9966960" cy="1097280"/>
+          </a:xfrm>
+          <a:prstGeom prst="rect">
+            <a:avLst/>
+          </a:prstGeom>
+          <a:noFill/>
+        </p:spPr>
+        <p:txBody>
+          <a:bodyPr wrap="square">
+            <a:spAutoFit/>
+          </a:bodyPr>
+          <a:lstStyle/>
+          <a:p>
+            <a:pPr algn="l">
+              <a:defRPr sz="1500" b="0" i="1">
+                <a:solidFill>
+                  <a:srgbClr val="E2E2EA"/>
+                </a:solidFill>
+                <a:latin typeface="Calibri"/>
+              </a:defRPr>
+            </a:pPr>
+            <a:r>
+              <a:t>"Exceptional teamwork and collaboration"</a:t>
+            </a:r>
+          </a:p>
+        </p:txBody>
+      </p:sp>
+      <p:sp>
+        <p:nvSpPr>
+          <p:cNvPr id="9" name="TextBox 8"/>
+          <p:cNvSpPr txBox="1"/>
+          <p:nvPr/>
+        </p:nvSpPr>
+        <p:spPr>
+          <a:xfrm>
+            <a:off x="1097280" y="5120640"/>
             <a:ext cx="9966960" cy="457200"/>
           </a:xfrm>
           <a:prstGeom prst="rect">
@@ -3428,159 +3574,15 @@
           <a:lstStyle/>
           <a:p>
             <a:pPr algn="l">
-              <a:defRPr sz="1800" b="1" i="0">
-                <a:solidFill>
-                  <a:srgbClr val="FFFFFF"/>
-                </a:solidFill>
-                <a:latin typeface="Calibri"/>
-              </a:defRPr>
-            </a:pPr>
-            <a:r>
-              <a:t>Build Fast, Learn Faster</a:t>
-            </a:r>
-          </a:p>
-        </p:txBody>
-      </p:sp>
-      <p:sp>
-        <p:nvSpPr>
-          <p:cNvPr id="6" name="TextBox 5"/>
-          <p:cNvSpPr txBox="1"/>
-          <p:nvPr/>
-        </p:nvSpPr>
-        <p:spPr>
-          <a:xfrm>
-            <a:off x="1371600" y="2743200"/>
-            <a:ext cx="9692640" cy="1828800"/>
-          </a:xfrm>
-          <a:prstGeom prst="rect">
-            <a:avLst/>
-          </a:prstGeom>
-          <a:noFill/>
-        </p:spPr>
-        <p:txBody>
-          <a:bodyPr wrap="square">
-            <a:spAutoFit/>
-          </a:bodyPr>
-          <a:lstStyle/>
-          <a:p>
-            <a:pPr algn="l">
-              <a:defRPr sz="1500" b="0" i="1">
-                <a:solidFill>
-                  <a:srgbClr val="E2E2EA"/>
-                </a:solidFill>
-                <a:latin typeface="Calibri"/>
-              </a:defRPr>
-            </a:pPr>
-            <a:r>
-              <a:t>"We're making great progress in building products, and it's especially exciting to see how quickly non-engineering teams have created so many useful tools. This is a strong sign that we're learning fast and moving in the right direction."</a:t>
-            </a:r>
-          </a:p>
-        </p:txBody>
-      </p:sp>
-      <p:sp>
-        <p:nvSpPr>
-          <p:cNvPr id="7" name="TextBox 6"/>
-          <p:cNvSpPr txBox="1"/>
-          <p:nvPr/>
-        </p:nvSpPr>
-        <p:spPr>
-          <a:xfrm>
-            <a:off x="1097280" y="4754880"/>
-            <a:ext cx="9966960" cy="365760"/>
-          </a:xfrm>
-          <a:prstGeom prst="rect">
-            <a:avLst/>
-          </a:prstGeom>
-          <a:noFill/>
-        </p:spPr>
-        <p:txBody>
-          <a:bodyPr wrap="square">
-            <a:spAutoFit/>
-          </a:bodyPr>
-          <a:lstStyle/>
-          <a:p>
-            <a:pPr algn="l">
-              <a:defRPr sz="1400" b="0" i="0">
-                <a:solidFill>
-                  <a:srgbClr val="8F95A3"/>
-                </a:solidFill>
-                <a:latin typeface="Calibri"/>
-              </a:defRPr>
-            </a:pPr>
-            <a:r>
-              <a:t>— Alexandr Zhitlukhin</a:t>
-            </a:r>
-          </a:p>
-        </p:txBody>
-      </p:sp>
-      <p:sp>
-        <p:nvSpPr>
-          <p:cNvPr id="8" name="TextBox 7"/>
-          <p:cNvSpPr txBox="1"/>
-          <p:nvPr/>
-        </p:nvSpPr>
-        <p:spPr>
-          <a:xfrm>
-            <a:off x="1097280" y="5212080"/>
-            <a:ext cx="9966960" cy="365760"/>
-          </a:xfrm>
-          <a:prstGeom prst="rect">
-            <a:avLst/>
-          </a:prstGeom>
-          <a:noFill/>
-        </p:spPr>
-        <p:txBody>
-          <a:bodyPr wrap="square">
-            <a:spAutoFit/>
-          </a:bodyPr>
-          <a:lstStyle/>
-          <a:p>
-            <a:pPr algn="l">
-              <a:defRPr sz="1400" b="1" i="0">
-                <a:solidFill>
-                  <a:srgbClr val="AB47BC"/>
-                </a:solidFill>
-                <a:latin typeface="Calibri"/>
-              </a:defRPr>
-            </a:pPr>
-            <a:r>
-              <a:t>59</a:t>
-            </a:r>
-          </a:p>
-        </p:txBody>
-      </p:sp>
-      <p:sp>
-        <p:nvSpPr>
-          <p:cNvPr id="9" name="TextBox 8"/>
-          <p:cNvSpPr txBox="1"/>
-          <p:nvPr/>
-        </p:nvSpPr>
-        <p:spPr>
-          <a:xfrm>
-            <a:off x="1097280" y="5760720"/>
-            <a:ext cx="9966960" cy="274320"/>
-          </a:xfrm>
-          <a:prstGeom prst="rect">
-            <a:avLst/>
-          </a:prstGeom>
-          <a:noFill/>
-        </p:spPr>
-        <p:txBody>
-          <a:bodyPr wrap="square">
-            <a:spAutoFit/>
-          </a:bodyPr>
-          <a:lstStyle/>
-          <a:p>
-            <a:pPr algn="l">
-              <a:defRPr sz="1100" b="0" i="0">
-                <a:solidFill>
-                  <a:srgbClr val="5C6270"/>
-                </a:solidFill>
-                <a:latin typeface="Calibri"/>
-              </a:defRPr>
-            </a:pPr>
-            <a:r>
-              <a:t>#general</a:t>
+              <a:defRPr sz="1200" b="1" i="0">
+                <a:solidFill>
+                  <a:srgbClr val="10B981"/>
+                </a:solidFill>
+                <a:latin typeface="Calibri"/>
+              </a:defRPr>
+            </a:pPr>
+            <a:r>
+              <a:t>Teamwork · Excellence</a:t>
             </a:r>
           </a:p>
         </p:txBody>
@@ -3626,7 +3628,7 @@
             <a:avLst/>
           </a:prstGeom>
           <a:solidFill>
-            <a:srgbClr val="66BB6A"/>
+            <a:srgbClr val="F59E0B"/>
           </a:solidFill>
           <a:ln>
             <a:noFill/>
@@ -3679,13 +3681,13 @@
             <a:pPr algn="l">
               <a:defRPr sz="1000" b="1">
                 <a:solidFill>
-                  <a:srgbClr val="66BB6A"/>
-                </a:solidFill>
-                <a:latin typeface="Calibri"/>
-              </a:defRPr>
-            </a:pPr>
-            <a:r>
-              <a:t>🌱  EVENT</a:t>
+                  <a:srgbClr val="F59E0B"/>
+                </a:solidFill>
+                <a:latin typeface="Calibri"/>
+              </a:defRPr>
+            </a:pPr>
+            <a:r>
+              <a:t>⚡  CLAPS</a:t>
             </a:r>
           </a:p>
         </p:txBody>
@@ -3715,13 +3717,13 @@
             <a:pPr algn="l">
               <a:defRPr sz="3200" b="1" i="0">
                 <a:solidFill>
-                  <a:srgbClr val="66BB6A"/>
-                </a:solidFill>
-                <a:latin typeface="Calibri"/>
-              </a:defRPr>
-            </a:pPr>
-            <a:r>
-              <a:t>Spring Launch</a:t>
+                  <a:srgbClr val="F59E0B"/>
+                </a:solidFill>
+                <a:latin typeface="Calibri"/>
+              </a:defRPr>
+            </a:pPr>
+            <a:r>
+              <a:t>Engineering Power</a:t>
             </a:r>
           </a:p>
         </p:txBody>
@@ -3735,21 +3737,93 @@
         <p:spPr>
           <a:xfrm>
             <a:off x="1097280" y="2103120"/>
-            <a:ext cx="9966960" cy="548640"/>
-          </a:xfrm>
-          <a:prstGeom prst="rect">
-            <a:avLst/>
-          </a:prstGeom>
-          <a:noFill/>
-        </p:spPr>
-        <p:txBody>
-          <a:bodyPr wrap="square">
-            <a:spAutoFit/>
-          </a:bodyPr>
-          <a:lstStyle/>
-          <a:p>
-            <a:pPr algn="l">
-              <a:defRPr sz="2200" b="1" i="0">
+            <a:ext cx="2743200" cy="548640"/>
+          </a:xfrm>
+          <a:prstGeom prst="rect">
+            <a:avLst/>
+          </a:prstGeom>
+          <a:noFill/>
+        </p:spPr>
+        <p:txBody>
+          <a:bodyPr wrap="square">
+            <a:spAutoFit/>
+          </a:bodyPr>
+          <a:lstStyle/>
+          <a:p>
+            <a:pPr algn="l">
+              <a:defRPr sz="2800" b="1" i="0">
+                <a:solidFill>
+                  <a:srgbClr val="F59E0B"/>
+                </a:solidFill>
+                <a:latin typeface="Calibri"/>
+              </a:defRPr>
+            </a:pPr>
+            <a:r>
+              <a:t>50</a:t>
+            </a:r>
+          </a:p>
+        </p:txBody>
+      </p:sp>
+      <p:sp>
+        <p:nvSpPr>
+          <p:cNvPr id="6" name="TextBox 5"/>
+          <p:cNvSpPr txBox="1"/>
+          <p:nvPr/>
+        </p:nvSpPr>
+        <p:spPr>
+          <a:xfrm>
+            <a:off x="1097280" y="2651760"/>
+            <a:ext cx="9966960" cy="365760"/>
+          </a:xfrm>
+          <a:prstGeom prst="rect">
+            <a:avLst/>
+          </a:prstGeom>
+          <a:noFill/>
+        </p:spPr>
+        <p:txBody>
+          <a:bodyPr wrap="square">
+            <a:spAutoFit/>
+          </a:bodyPr>
+          <a:lstStyle/>
+          <a:p>
+            <a:pPr algn="l">
+              <a:defRPr sz="1400" b="0" i="0">
+                <a:solidFill>
+                  <a:srgbClr val="E2E2EA"/>
+                </a:solidFill>
+                <a:latin typeface="Calibri"/>
+              </a:defRPr>
+            </a:pPr>
+            <a:r>
+              <a:t>from Valentino Agazzi Mandozzi</a:t>
+            </a:r>
+          </a:p>
+        </p:txBody>
+      </p:sp>
+      <p:sp>
+        <p:nvSpPr>
+          <p:cNvPr id="7" name="TextBox 6"/>
+          <p:cNvSpPr txBox="1"/>
+          <p:nvPr/>
+        </p:nvSpPr>
+        <p:spPr>
+          <a:xfrm>
+            <a:off x="1097280" y="3108960"/>
+            <a:ext cx="9966960" cy="365760"/>
+          </a:xfrm>
+          <a:prstGeom prst="rect">
+            <a:avLst/>
+          </a:prstGeom>
+          <a:noFill/>
+        </p:spPr>
+        <p:txBody>
+          <a:bodyPr wrap="square">
+            <a:spAutoFit/>
+          </a:bodyPr>
+          <a:lstStyle/>
+          <a:p>
+            <a:pPr algn="l">
+              <a:defRPr sz="1400" b="1" i="0">
                 <a:solidFill>
                   <a:srgbClr val="FFFFFF"/>
                 </a:solidFill>
@@ -3757,71 +3831,35 @@
               </a:defRPr>
             </a:pPr>
             <a:r>
-              <a:t>Connect Groups Spring Season</a:t>
-            </a:r>
-          </a:p>
-        </p:txBody>
-      </p:sp>
-      <p:sp>
-        <p:nvSpPr>
-          <p:cNvPr id="6" name="TextBox 5"/>
-          <p:cNvSpPr txBox="1"/>
-          <p:nvPr/>
-        </p:nvSpPr>
-        <p:spPr>
-          <a:xfrm>
-            <a:off x="1097280" y="2743200"/>
-            <a:ext cx="9966960" cy="365760"/>
-          </a:xfrm>
-          <a:prstGeom prst="rect">
-            <a:avLst/>
-          </a:prstGeom>
-          <a:noFill/>
-        </p:spPr>
-        <p:txBody>
-          <a:bodyPr wrap="square">
-            <a:spAutoFit/>
-          </a:bodyPr>
-          <a:lstStyle/>
-          <a:p>
-            <a:pPr algn="l">
-              <a:defRPr sz="1400" b="1" i="0">
-                <a:solidFill>
-                  <a:srgbClr val="66BB6A"/>
-                </a:solidFill>
-                <a:latin typeface="Calibri"/>
-              </a:defRPr>
-            </a:pPr>
-            <a:r>
-              <a:t>March–May 2026</a:t>
-            </a:r>
-          </a:p>
-        </p:txBody>
-      </p:sp>
-      <p:sp>
-        <p:nvSpPr>
-          <p:cNvPr id="7" name="TextBox 6"/>
-          <p:cNvSpPr txBox="1"/>
-          <p:nvPr/>
-        </p:nvSpPr>
-        <p:spPr>
-          <a:xfrm>
-            <a:off x="1097280" y="3291840"/>
-            <a:ext cx="9966960" cy="1371600"/>
-          </a:xfrm>
-          <a:prstGeom prst="rect">
-            <a:avLst/>
-          </a:prstGeom>
-          <a:noFill/>
-        </p:spPr>
-        <p:txBody>
-          <a:bodyPr wrap="square">
-            <a:spAutoFit/>
-          </a:bodyPr>
-          <a:lstStyle/>
-          <a:p>
-            <a:pPr algn="l">
-              <a:defRPr sz="1500" b="0" i="0">
+              <a:t>to: Eren Sakarya</a:t>
+            </a:r>
+          </a:p>
+        </p:txBody>
+      </p:sp>
+      <p:sp>
+        <p:nvSpPr>
+          <p:cNvPr id="8" name="TextBox 7"/>
+          <p:cNvSpPr txBox="1"/>
+          <p:nvPr/>
+        </p:nvSpPr>
+        <p:spPr>
+          <a:xfrm>
+            <a:off x="1097280" y="3749039"/>
+            <a:ext cx="9966960" cy="1097280"/>
+          </a:xfrm>
+          <a:prstGeom prst="rect">
+            <a:avLst/>
+          </a:prstGeom>
+          <a:noFill/>
+        </p:spPr>
+        <p:txBody>
+          <a:bodyPr wrap="square">
+            <a:spAutoFit/>
+          </a:bodyPr>
+          <a:lstStyle/>
+          <a:p>
+            <a:pPr algn="l">
+              <a:defRPr sz="1500" b="0" i="1">
                 <a:solidFill>
                   <a:srgbClr val="E2E2EA"/>
                 </a:solidFill>
@@ -3829,43 +3867,43 @@
               </a:defRPr>
             </a:pPr>
             <a:r>
-              <a:t>Employee-led communities on Circle connecting around shared interests, learning, and ideas — from sports and books to leadership and meaningful conversations</a:t>
-            </a:r>
-          </a:p>
-        </p:txBody>
-      </p:sp>
-      <p:sp>
-        <p:nvSpPr>
-          <p:cNvPr id="8" name="TextBox 7"/>
-          <p:cNvSpPr txBox="1"/>
-          <p:nvPr/>
-        </p:nvSpPr>
-        <p:spPr>
-          <a:xfrm>
-            <a:off x="1097280" y="5029200"/>
-            <a:ext cx="9966960" cy="365760"/>
-          </a:xfrm>
-          <a:prstGeom prst="rect">
-            <a:avLst/>
-          </a:prstGeom>
-          <a:noFill/>
-        </p:spPr>
-        <p:txBody>
-          <a:bodyPr wrap="square">
-            <a:spAutoFit/>
-          </a:bodyPr>
-          <a:lstStyle/>
-          <a:p>
-            <a:pPr algn="l">
-              <a:defRPr sz="1300" b="0" i="0">
-                <a:solidFill>
-                  <a:srgbClr val="8F95A3"/>
-                </a:solidFill>
-                <a:latin typeface="Calibri"/>
-              </a:defRPr>
-            </a:pPr>
-            <a:r>
-              <a:t>Organized by Katarzyna Raniszewska</a:t>
+              <a:t>"Brilliant engineering solutions and execution"</a:t>
+            </a:r>
+          </a:p>
+        </p:txBody>
+      </p:sp>
+      <p:sp>
+        <p:nvSpPr>
+          <p:cNvPr id="9" name="TextBox 8"/>
+          <p:cNvSpPr txBox="1"/>
+          <p:nvPr/>
+        </p:nvSpPr>
+        <p:spPr>
+          <a:xfrm>
+            <a:off x="1097280" y="5120640"/>
+            <a:ext cx="9966960" cy="457200"/>
+          </a:xfrm>
+          <a:prstGeom prst="rect">
+            <a:avLst/>
+          </a:prstGeom>
+          <a:noFill/>
+        </p:spPr>
+        <p:txBody>
+          <a:bodyPr wrap="square">
+            <a:spAutoFit/>
+          </a:bodyPr>
+          <a:lstStyle/>
+          <a:p>
+            <a:pPr algn="l">
+              <a:defRPr sz="1200" b="1" i="0">
+                <a:solidFill>
+                  <a:srgbClr val="F59E0B"/>
+                </a:solidFill>
+                <a:latin typeface="Calibri"/>
+              </a:defRPr>
+            </a:pPr>
+            <a:r>
+              <a:t>Innovation · Excellence</a:t>
             </a:r>
           </a:p>
         </p:txBody>
@@ -3911,7 +3949,7 @@
             <a:avLst/>
           </a:prstGeom>
           <a:solidFill>
-            <a:srgbClr val="FFA726"/>
+            <a:srgbClr val="06B6D4"/>
           </a:solidFill>
           <a:ln>
             <a:noFill/>
@@ -3964,7 +4002,7 @@
             <a:pPr algn="l">
               <a:defRPr sz="1000" b="1">
                 <a:solidFill>
-                  <a:srgbClr val="FFA726"/>
+                  <a:srgbClr val="06B6D4"/>
                 </a:solidFill>
                 <a:latin typeface="Calibri"/>
               </a:defRPr>
@@ -4000,13 +4038,13 @@
             <a:pPr algn="l">
               <a:defRPr sz="3200" b="1" i="0">
                 <a:solidFill>
-                  <a:srgbClr val="FFA726"/>
-                </a:solidFill>
-                <a:latin typeface="Calibri"/>
-              </a:defRPr>
-            </a:pPr>
-            <a:r>
-              <a:t>Cross-Team Excellence</a:t>
+                  <a:srgbClr val="06B6D4"/>
+                </a:solidFill>
+                <a:latin typeface="Calibri"/>
+              </a:defRPr>
+            </a:pPr>
+            <a:r>
+              <a:t>Management Excellence</a:t>
             </a:r>
           </a:p>
         </p:txBody>
@@ -4036,7 +4074,7 @@
             <a:pPr algn="l">
               <a:defRPr sz="2800" b="1" i="0">
                 <a:solidFill>
-                  <a:srgbClr val="FFA726"/>
+                  <a:srgbClr val="06B6D4"/>
                 </a:solidFill>
                 <a:latin typeface="Calibri"/>
               </a:defRPr>
@@ -4150,7 +4188,7 @@
               </a:defRPr>
             </a:pPr>
             <a:r>
-              <a:t>"Outstanding cross-functional collaboration and results delivery"</a:t>
+              <a:t>"Outstanding leadership and team management"</a:t>
             </a:r>
           </a:p>
         </p:txBody>
@@ -4180,13 +4218,13 @@
             <a:pPr algn="l">
               <a:defRPr sz="1200" b="1" i="0">
                 <a:solidFill>
-                  <a:srgbClr val="FFA726"/>
-                </a:solidFill>
-                <a:latin typeface="Calibri"/>
-              </a:defRPr>
-            </a:pPr>
-            <a:r>
-              <a:t>Collaboration · Results</a:t>
+                  <a:srgbClr val="06B6D4"/>
+                </a:solidFill>
+                <a:latin typeface="Calibri"/>
+              </a:defRPr>
+            </a:pPr>
+            <a:r>
+              <a:t>Leadership · Excellence</a:t>
             </a:r>
           </a:p>
         </p:txBody>
@@ -4232,7 +4270,7 @@
             <a:avLst/>
           </a:prstGeom>
           <a:solidFill>
-            <a:srgbClr val="8BC34A"/>
+            <a:srgbClr val="EC4899"/>
           </a:solidFill>
           <a:ln>
             <a:noFill/>
@@ -4285,13 +4323,13 @@
             <a:pPr algn="l">
               <a:defRPr sz="1000" b="1">
                 <a:solidFill>
-                  <a:srgbClr val="8BC34A"/>
-                </a:solidFill>
-                <a:latin typeface="Calibri"/>
-              </a:defRPr>
-            </a:pPr>
-            <a:r>
-              <a:t>🎖️  CLAPS</a:t>
+                  <a:srgbClr val="EC4899"/>
+                </a:solidFill>
+                <a:latin typeface="Calibri"/>
+              </a:defRPr>
+            </a:pPr>
+            <a:r>
+              <a:t>💎  CLAPS</a:t>
             </a:r>
           </a:p>
         </p:txBody>
@@ -4321,13 +4359,13 @@
             <a:pPr algn="l">
               <a:defRPr sz="3200" b="1" i="0">
                 <a:solidFill>
-                  <a:srgbClr val="8BC34A"/>
-                </a:solidFill>
-                <a:latin typeface="Calibri"/>
-              </a:defRPr>
-            </a:pPr>
-            <a:r>
-              <a:t>Multi-Team Recognition</a:t>
+                  <a:srgbClr val="EC4899"/>
+                </a:solidFill>
+                <a:latin typeface="Calibri"/>
+              </a:defRPr>
+            </a:pPr>
+            <a:r>
+              <a:t>Quality Delivery</a:t>
             </a:r>
           </a:p>
         </p:txBody>
@@ -4357,13 +4395,13 @@
             <a:pPr algn="l">
               <a:defRPr sz="2800" b="1" i="0">
                 <a:solidFill>
-                  <a:srgbClr val="8BC34A"/>
-                </a:solidFill>
-                <a:latin typeface="Calibri"/>
-              </a:defRPr>
-            </a:pPr>
-            <a:r>
-              <a:t>15</a:t>
+                  <a:srgbClr val="EC4899"/>
+                </a:solidFill>
+                <a:latin typeface="Calibri"/>
+              </a:defRPr>
+            </a:pPr>
+            <a:r>
+              <a:t>25</a:t>
             </a:r>
           </a:p>
         </p:txBody>
@@ -4399,7 +4437,7 @@
               </a:defRPr>
             </a:pPr>
             <a:r>
-              <a:t>from Agustin</a:t>
+              <a:t>from Iurii Kotov</a:t>
             </a:r>
           </a:p>
         </p:txBody>
@@ -4435,7 +4473,7 @@
               </a:defRPr>
             </a:pPr>
             <a:r>
-              <a:t>to: aleksandr.chigaleichik</a:t>
+              <a:t>to: Ana Abuseridze</a:t>
             </a:r>
           </a:p>
         </p:txBody>
@@ -4471,7 +4509,7 @@
               </a:defRPr>
             </a:pPr>
             <a:r>
-              <a:t>"Exceptional problem-solving and technical guidance"</a:t>
+              <a:t>"Exceptional quality and attention to detail"</a:t>
             </a:r>
           </a:p>
         </p:txBody>
@@ -4501,13 +4539,13 @@
             <a:pPr algn="l">
               <a:defRPr sz="1200" b="1" i="0">
                 <a:solidFill>
-                  <a:srgbClr val="8BC34A"/>
-                </a:solidFill>
-                <a:latin typeface="Calibri"/>
-              </a:defRPr>
-            </a:pPr>
-            <a:r>
-              <a:t>Problem Solving · Mentorship</a:t>
+                  <a:srgbClr val="EC4899"/>
+                </a:solidFill>
+                <a:latin typeface="Calibri"/>
+              </a:defRPr>
+            </a:pPr>
+            <a:r>
+              <a:t>Quality · Excellence</a:t>
             </a:r>
           </a:p>
         </p:txBody>
@@ -4553,7 +4591,7 @@
             <a:avLst/>
           </a:prstGeom>
           <a:solidFill>
-            <a:srgbClr val="29B6F6"/>
+            <a:srgbClr val="EF4444"/>
           </a:solidFill>
           <a:ln>
             <a:noFill/>
@@ -4606,13 +4644,13 @@
             <a:pPr algn="l">
               <a:defRPr sz="1000" b="1">
                 <a:solidFill>
-                  <a:srgbClr val="29B6F6"/>
-                </a:solidFill>
-                <a:latin typeface="Calibri"/>
-              </a:defRPr>
-            </a:pPr>
-            <a:r>
-              <a:t>🏆  CLAPS</a:t>
+                  <a:srgbClr val="EF4444"/>
+                </a:solidFill>
+                <a:latin typeface="Calibri"/>
+              </a:defRPr>
+            </a:pPr>
+            <a:r>
+              <a:t>🔥  CLAPS</a:t>
             </a:r>
           </a:p>
         </p:txBody>
@@ -4642,13 +4680,13 @@
             <a:pPr algn="l">
               <a:defRPr sz="3200" b="1" i="0">
                 <a:solidFill>
-                  <a:srgbClr val="29B6F6"/>
-                </a:solidFill>
-                <a:latin typeface="Calibri"/>
-              </a:defRPr>
-            </a:pPr>
-            <a:r>
-              <a:t>Team Collaboration</a:t>
+                  <a:srgbClr val="EF4444"/>
+                </a:solidFill>
+                <a:latin typeface="Calibri"/>
+              </a:defRPr>
+            </a:pPr>
+            <a:r>
+              <a:t>Technical Mastery</a:t>
             </a:r>
           </a:p>
         </p:txBody>
@@ -4678,7 +4716,7 @@
             <a:pPr algn="l">
               <a:defRPr sz="2800" b="1" i="0">
                 <a:solidFill>
-                  <a:srgbClr val="29B6F6"/>
+                  <a:srgbClr val="EF4444"/>
                 </a:solidFill>
                 <a:latin typeface="Calibri"/>
               </a:defRPr>
@@ -4756,7 +4794,7 @@
               </a:defRPr>
             </a:pPr>
             <a:r>
-              <a:t>to: Ana Abuseridze</a:t>
+              <a:t>to: Dima M.</a:t>
             </a:r>
           </a:p>
         </p:txBody>
@@ -4792,7 +4830,7 @@
               </a:defRPr>
             </a:pPr>
             <a:r>
-              <a:t>"Outstanding teamwork and collaborative spirit"</a:t>
+              <a:t>"Outstanding technical expertise and problem-solving"</a:t>
             </a:r>
           </a:p>
         </p:txBody>
@@ -4822,13 +4860,13 @@
             <a:pPr algn="l">
               <a:defRPr sz="1200" b="1" i="0">
                 <a:solidFill>
-                  <a:srgbClr val="29B6F6"/>
-                </a:solidFill>
-                <a:latin typeface="Calibri"/>
-              </a:defRPr>
-            </a:pPr>
-            <a:r>
-              <a:t>Teamwork · Collaboration</a:t>
+                  <a:srgbClr val="EF4444"/>
+                </a:solidFill>
+                <a:latin typeface="Calibri"/>
+              </a:defRPr>
+            </a:pPr>
+            <a:r>
+              <a:t>Technical Excellence · Innovation</a:t>
             </a:r>
           </a:p>
         </p:txBody>
@@ -4874,7 +4912,7 @@
             <a:avLst/>
           </a:prstGeom>
           <a:solidFill>
-            <a:srgbClr val="4CAF50"/>
+            <a:srgbClr val="8B5CF6"/>
           </a:solidFill>
           <a:ln>
             <a:noFill/>
@@ -4927,13 +4965,13 @@
             <a:pPr algn="l">
               <a:defRPr sz="1000" b="1">
                 <a:solidFill>
-                  <a:srgbClr val="4CAF50"/>
-                </a:solidFill>
-                <a:latin typeface="Calibri"/>
-              </a:defRPr>
-            </a:pPr>
-            <a:r>
-              <a:t>💰  MILESTONE</a:t>
+                  <a:srgbClr val="8B5CF6"/>
+                </a:solidFill>
+                <a:latin typeface="Calibri"/>
+              </a:defRPr>
+            </a:pPr>
+            <a:r>
+              <a:t>🤖  OFFICE LIFE</a:t>
             </a:r>
           </a:p>
         </p:txBody>
@@ -4963,13 +5001,13 @@
             <a:pPr algn="l">
               <a:defRPr sz="3200" b="1" i="0">
                 <a:solidFill>
-                  <a:srgbClr val="4CAF50"/>
-                </a:solidFill>
-                <a:latin typeface="Calibri"/>
-              </a:defRPr>
-            </a:pPr>
-            <a:r>
-              <a:t>Company Growth</a:t>
+                  <a:srgbClr val="8B5CF6"/>
+                </a:solidFill>
+                <a:latin typeface="Calibri"/>
+              </a:defRPr>
+            </a:pPr>
+            <a:r>
+              <a:t>Engineering Security First</a:t>
             </a:r>
           </a:p>
         </p:txBody>
@@ -4983,29 +5021,29 @@
         <p:spPr>
           <a:xfrm>
             <a:off x="1097280" y="2103120"/>
-            <a:ext cx="4572000" cy="822960"/>
-          </a:xfrm>
-          <a:prstGeom prst="rect">
-            <a:avLst/>
-          </a:prstGeom>
-          <a:noFill/>
-        </p:spPr>
-        <p:txBody>
-          <a:bodyPr wrap="square">
-            <a:spAutoFit/>
-          </a:bodyPr>
-          <a:lstStyle/>
-          <a:p>
-            <a:pPr algn="l">
-              <a:defRPr sz="5200" b="1" i="0">
-                <a:solidFill>
-                  <a:srgbClr val="4CAF50"/>
-                </a:solidFill>
-                <a:latin typeface="Calibri"/>
-              </a:defRPr>
-            </a:pPr>
-            <a:r>
-              <a:t>40%</a:t>
+            <a:ext cx="9966960" cy="457200"/>
+          </a:xfrm>
+          <a:prstGeom prst="rect">
+            <a:avLst/>
+          </a:prstGeom>
+          <a:noFill/>
+        </p:spPr>
+        <p:txBody>
+          <a:bodyPr wrap="square">
+            <a:spAutoFit/>
+          </a:bodyPr>
+          <a:lstStyle/>
+          <a:p>
+            <a:pPr algn="l">
+              <a:defRPr sz="1800" b="1" i="0">
+                <a:solidFill>
+                  <a:srgbClr val="FFFFFF"/>
+                </a:solidFill>
+                <a:latin typeface="Calibri"/>
+              </a:defRPr>
+            </a:pPr>
+            <a:r>
+              <a:t>Coolify: Power with Responsibility</a:t>
             </a:r>
           </a:p>
         </p:txBody>
@@ -5018,8 +5056,116 @@
         </p:nvSpPr>
         <p:spPr>
           <a:xfrm>
-            <a:off x="1097280" y="2926080"/>
-            <a:ext cx="4572000" cy="365760"/>
+            <a:off x="1371600" y="2743200"/>
+            <a:ext cx="9692640" cy="1828800"/>
+          </a:xfrm>
+          <a:prstGeom prst="rect">
+            <a:avLst/>
+          </a:prstGeom>
+          <a:noFill/>
+        </p:spPr>
+        <p:txBody>
+          <a:bodyPr wrap="square">
+            <a:spAutoFit/>
+          </a:bodyPr>
+          <a:lstStyle/>
+          <a:p>
+            <a:pPr algn="l">
+              <a:defRPr sz="1500" b="0" i="1">
+                <a:solidFill>
+                  <a:srgbClr val="E2E2EA"/>
+                </a:solidFill>
+                <a:latin typeface="Calibri"/>
+              </a:defRPr>
+            </a:pPr>
+            <a:r>
+              <a:t>"Unfortunately, AI doesn't always generate secure applications, so Coolify and all services deployed in it are accessible by everyone in the company"</a:t>
+            </a:r>
+          </a:p>
+        </p:txBody>
+      </p:sp>
+      <p:sp>
+        <p:nvSpPr>
+          <p:cNvPr id="7" name="TextBox 6"/>
+          <p:cNvSpPr txBox="1"/>
+          <p:nvPr/>
+        </p:nvSpPr>
+        <p:spPr>
+          <a:xfrm>
+            <a:off x="1097280" y="4754880"/>
+            <a:ext cx="9966960" cy="365760"/>
+          </a:xfrm>
+          <a:prstGeom prst="rect">
+            <a:avLst/>
+          </a:prstGeom>
+          <a:noFill/>
+        </p:spPr>
+        <p:txBody>
+          <a:bodyPr wrap="square">
+            <a:spAutoFit/>
+          </a:bodyPr>
+          <a:lstStyle/>
+          <a:p>
+            <a:pPr algn="l">
+              <a:defRPr sz="1400" b="0" i="0">
+                <a:solidFill>
+                  <a:srgbClr val="8F95A3"/>
+                </a:solidFill>
+                <a:latin typeface="Calibri"/>
+              </a:defRPr>
+            </a:pPr>
+            <a:r>
+              <a:t>— Gleb Krahotkin</a:t>
+            </a:r>
+          </a:p>
+        </p:txBody>
+      </p:sp>
+      <p:sp>
+        <p:nvSpPr>
+          <p:cNvPr id="8" name="TextBox 7"/>
+          <p:cNvSpPr txBox="1"/>
+          <p:nvPr/>
+        </p:nvSpPr>
+        <p:spPr>
+          <a:xfrm>
+            <a:off x="1097280" y="5212080"/>
+            <a:ext cx="9966960" cy="365760"/>
+          </a:xfrm>
+          <a:prstGeom prst="rect">
+            <a:avLst/>
+          </a:prstGeom>
+          <a:noFill/>
+        </p:spPr>
+        <p:txBody>
+          <a:bodyPr wrap="square">
+            <a:spAutoFit/>
+          </a:bodyPr>
+          <a:lstStyle/>
+          <a:p>
+            <a:pPr algn="l">
+              <a:defRPr sz="1400" b="1" i="0">
+                <a:solidFill>
+                  <a:srgbClr val="8B5CF6"/>
+                </a:solidFill>
+                <a:latin typeface="Calibri"/>
+              </a:defRPr>
+            </a:pPr>
+            <a:r>
+              <a:t>🔒 ⚠️ 🛡️</a:t>
+            </a:r>
+          </a:p>
+        </p:txBody>
+      </p:sp>
+      <p:sp>
+        <p:nvSpPr>
+          <p:cNvPr id="9" name="TextBox 8"/>
+          <p:cNvSpPr txBox="1"/>
+          <p:nvPr/>
+        </p:nvSpPr>
+        <p:spPr>
+          <a:xfrm>
+            <a:off x="1097280" y="5760720"/>
+            <a:ext cx="9966960" cy="274320"/>
           </a:xfrm>
           <a:prstGeom prst="rect">
             <a:avLst/>
@@ -5035,85 +5181,13 @@
             <a:pPr algn="l">
               <a:defRPr sz="1100" b="0" i="0">
                 <a:solidFill>
-                  <a:srgbClr val="8F95A3"/>
-                </a:solidFill>
-                <a:latin typeface="Calibri"/>
-              </a:defRPr>
-            </a:pPr>
-            <a:r>
-              <a:t>YoY Growth</a:t>
-            </a:r>
-          </a:p>
-        </p:txBody>
-      </p:sp>
-      <p:sp>
-        <p:nvSpPr>
-          <p:cNvPr id="7" name="TextBox 6"/>
-          <p:cNvSpPr txBox="1"/>
-          <p:nvPr/>
-        </p:nvSpPr>
-        <p:spPr>
-          <a:xfrm>
-            <a:off x="1097280" y="3566160"/>
-            <a:ext cx="9966960" cy="457200"/>
-          </a:xfrm>
-          <a:prstGeom prst="rect">
-            <a:avLst/>
-          </a:prstGeom>
-          <a:noFill/>
-        </p:spPr>
-        <p:txBody>
-          <a:bodyPr wrap="square">
-            <a:spAutoFit/>
-          </a:bodyPr>
-          <a:lstStyle/>
-          <a:p>
-            <a:pPr algn="l">
-              <a:defRPr sz="1800" b="1" i="0">
-                <a:solidFill>
-                  <a:srgbClr val="FFFFFF"/>
-                </a:solidFill>
-                <a:latin typeface="Calibri"/>
-              </a:defRPr>
-            </a:pPr>
-            <a:r>
-              <a:t>Record Financial Performance</a:t>
-            </a:r>
-          </a:p>
-        </p:txBody>
-      </p:sp>
-      <p:sp>
-        <p:nvSpPr>
-          <p:cNvPr id="8" name="TextBox 7"/>
-          <p:cNvSpPr txBox="1"/>
-          <p:nvPr/>
-        </p:nvSpPr>
-        <p:spPr>
-          <a:xfrm>
-            <a:off x="1097280" y="4206240"/>
-            <a:ext cx="9966960" cy="1371600"/>
-          </a:xfrm>
-          <a:prstGeom prst="rect">
-            <a:avLst/>
-          </a:prstGeom>
-          <a:noFill/>
-        </p:spPr>
-        <p:txBody>
-          <a:bodyPr wrap="square">
-            <a:spAutoFit/>
-          </a:bodyPr>
-          <a:lstStyle/>
-          <a:p>
-            <a:pPr algn="l">
-              <a:defRPr sz="1500" b="0" i="0">
-                <a:solidFill>
-                  <a:srgbClr val="E2E2EA"/>
-                </a:solidFill>
-                <a:latin typeface="Calibri"/>
-              </a:defRPr>
-            </a:pPr>
-            <a:r>
-              <a:t>Approaching $100M gross profit with $20M EBITDA, maintaining strong 40% year-over-year growth trajectory</a:t>
+                  <a:srgbClr val="5C6270"/>
+                </a:solidFill>
+                <a:latin typeface="Calibri"/>
+              </a:defRPr>
+            </a:pPr>
+            <a:r>
+              <a:t>#general</a:t>
             </a:r>
           </a:p>
         </p:txBody>
@@ -5159,7 +5233,7 @@
             <a:avLst/>
           </a:prstGeom>
           <a:solidFill>
-            <a:srgbClr val="E91E63"/>
+            <a:srgbClr val="10B981"/>
           </a:solidFill>
           <a:ln>
             <a:noFill/>
@@ -5212,13 +5286,13 @@
             <a:pPr algn="l">
               <a:defRPr sz="1000" b="1">
                 <a:solidFill>
-                  <a:srgbClr val="E91E63"/>
-                </a:solidFill>
-                <a:latin typeface="Calibri"/>
-              </a:defRPr>
-            </a:pPr>
-            <a:r>
-              <a:t>🎮  MILESTONE</a:t>
+                  <a:srgbClr val="10B981"/>
+                </a:solidFill>
+                <a:latin typeface="Calibri"/>
+              </a:defRPr>
+            </a:pPr>
+            <a:r>
+              <a:t>💰  MILESTONE</a:t>
             </a:r>
           </a:p>
         </p:txBody>
@@ -5248,13 +5322,13 @@
             <a:pPr algn="l">
               <a:defRPr sz="3200" b="1" i="0">
                 <a:solidFill>
-                  <a:srgbClr val="E91E63"/>
-                </a:solidFill>
-                <a:latin typeface="Calibri"/>
-              </a:defRPr>
-            </a:pPr>
-            <a:r>
-              <a:t>Gaming Success</a:t>
+                  <a:srgbClr val="10B981"/>
+                </a:solidFill>
+                <a:latin typeface="Calibri"/>
+              </a:defRPr>
+            </a:pPr>
+            <a:r>
+              <a:t>Revenue Powerhouse</a:t>
             </a:r>
           </a:p>
         </p:txBody>
@@ -5284,13 +5358,13 @@
             <a:pPr algn="l">
               <a:defRPr sz="5200" b="1" i="0">
                 <a:solidFill>
-                  <a:srgbClr val="E91E63"/>
-                </a:solidFill>
-                <a:latin typeface="Calibri"/>
-              </a:defRPr>
-            </a:pPr>
-            <a:r>
-              <a:t>200%</a:t>
+                  <a:srgbClr val="10B981"/>
+                </a:solidFill>
+                <a:latin typeface="Calibri"/>
+              </a:defRPr>
+            </a:pPr>
+            <a:r>
+              <a:t>$100M</a:t>
             </a:r>
           </a:p>
         </p:txBody>
@@ -5326,7 +5400,7 @@
               </a:defRPr>
             </a:pPr>
             <a:r>
-              <a:t>ROAS Milestone</a:t>
+              <a:t>gross profit achieved</a:t>
             </a:r>
           </a:p>
         </p:txBody>
@@ -5362,7 +5436,7 @@
               </a:defRPr>
             </a:pPr>
             <a:r>
-              <a:t>Gaming Division Turns Profitable</a:t>
+              <a:t>$100M Gross Profit Milestone</a:t>
             </a:r>
           </a:p>
         </p:txBody>
@@ -5398,7 +5472,7 @@
               </a:defRPr>
             </a:pPr>
             <a:r>
-              <a:t>Infinite Minesweeper hits 61% retention rate, Solitaire v540 achieves +21.67% D7 retention boost, and Crossword exceeds 200% ROAS</a:t>
+              <a:t>We've reached approximately $100M in gross profit with $20M EBITDA and 40% year-over-year growth projected. Our financial engine is firing on all cylinders.</a:t>
             </a:r>
           </a:p>
         </p:txBody>
@@ -5444,7 +5518,7 @@
             <a:avLst/>
           </a:prstGeom>
           <a:solidFill>
-            <a:srgbClr val="FF5722"/>
+            <a:srgbClr val="F59E0B"/>
           </a:solidFill>
           <a:ln>
             <a:noFill/>
@@ -5497,13 +5571,13 @@
             <a:pPr algn="l">
               <a:defRPr sz="1000" b="1">
                 <a:solidFill>
-                  <a:srgbClr val="FF5722"/>
-                </a:solidFill>
-                <a:latin typeface="Calibri"/>
-              </a:defRPr>
-            </a:pPr>
-            <a:r>
-              <a:t>🛡️  MILESTONE</a:t>
+                  <a:srgbClr val="F59E0B"/>
+                </a:solidFill>
+                <a:latin typeface="Calibri"/>
+              </a:defRPr>
+            </a:pPr>
+            <a:r>
+              <a:t>🎯  MILESTONE</a:t>
             </a:r>
           </a:p>
         </p:txBody>
@@ -5533,13 +5607,13 @@
             <a:pPr algn="l">
               <a:defRPr sz="3200" b="1" i="0">
                 <a:solidFill>
-                  <a:srgbClr val="FF5722"/>
-                </a:solidFill>
-                <a:latin typeface="Calibri"/>
-              </a:defRPr>
-            </a:pPr>
-            <a:r>
-              <a:t>Security Victory</a:t>
+                  <a:srgbClr val="F59E0B"/>
+                </a:solidFill>
+                <a:latin typeface="Calibri"/>
+              </a:defRPr>
+            </a:pPr>
+            <a:r>
+              <a:t>AI-Powered Workforce</a:t>
             </a:r>
           </a:p>
         </p:txBody>
@@ -5569,13 +5643,13 @@
             <a:pPr algn="l">
               <a:defRPr sz="5200" b="1" i="0">
                 <a:solidFill>
-                  <a:srgbClr val="FF5722"/>
-                </a:solidFill>
-                <a:latin typeface="Calibri"/>
-              </a:defRPr>
-            </a:pPr>
-            <a:r>
-              <a:t>82%</a:t>
+                  <a:srgbClr val="F59E0B"/>
+                </a:solidFill>
+                <a:latin typeface="Calibri"/>
+              </a:defRPr>
+            </a:pPr>
+            <a:r>
+              <a:t>1,500</a:t>
             </a:r>
           </a:p>
         </p:txBody>
@@ -5611,7 +5685,7 @@
               </a:defRPr>
             </a:pPr>
             <a:r>
-              <a:t>Fraud Reduction</a:t>
+              <a:t>employees × 10 AI agents</a:t>
             </a:r>
           </a:p>
         </p:txBody>
@@ -5647,7 +5721,7 @@
               </a:defRPr>
             </a:pPr>
             <a:r>
-              <a:t>Fraud Rate Dramatically Reduced</a:t>
+              <a:t>Every Employee + 5-10 AI Agents</a:t>
             </a:r>
           </a:p>
         </p:txBody>
@@ -5683,7 +5757,7 @@
               </a:defRPr>
             </a:pPr>
             <a:r>
-              <a:t>Dynamic SDK signatures successfully reduced fraud from 22% to under 4%, protecting revenue and user experience</a:t>
+              <a:t>Within 3-6 months, every Appodeal employee will manage 5-10 AI agents. We're not just using AI — we're becoming an AI-amplified organization where humans and machines work together seamlessly.</a:t>
             </a:r>
           </a:p>
         </p:txBody>
@@ -5729,7 +5803,7 @@
             <a:avLst/>
           </a:prstGeom>
           <a:solidFill>
-            <a:srgbClr val="9C27B0"/>
+            <a:srgbClr val="EC4899"/>
           </a:solidFill>
           <a:ln>
             <a:noFill/>
@@ -5782,13 +5856,13 @@
             <a:pPr algn="l">
               <a:defRPr sz="1000" b="1">
                 <a:solidFill>
-                  <a:srgbClr val="9C27B0"/>
-                </a:solidFill>
-                <a:latin typeface="Calibri"/>
-              </a:defRPr>
-            </a:pPr>
-            <a:r>
-              <a:t>🤖  MILESTONE</a:t>
+                  <a:srgbClr val="EC4899"/>
+                </a:solidFill>
+                <a:latin typeface="Calibri"/>
+              </a:defRPr>
+            </a:pPr>
+            <a:r>
+              <a:t>🎮  WIN</a:t>
             </a:r>
           </a:p>
         </p:txBody>
@@ -5818,13 +5892,13 @@
             <a:pPr algn="l">
               <a:defRPr sz="3200" b="1" i="0">
                 <a:solidFill>
-                  <a:srgbClr val="9C27B0"/>
-                </a:solidFill>
-                <a:latin typeface="Calibri"/>
-              </a:defRPr>
-            </a:pPr>
-            <a:r>
-              <a:t>AI Transformation</a:t>
+                  <a:srgbClr val="EC4899"/>
+                </a:solidFill>
+                <a:latin typeface="Calibri"/>
+              </a:defRPr>
+            </a:pPr>
+            <a:r>
+              <a:t>Gaming Goes Green</a:t>
             </a:r>
           </a:p>
         </p:txBody>
@@ -5852,15 +5926,15 @@
           <a:lstStyle/>
           <a:p>
             <a:pPr algn="l">
-              <a:defRPr sz="5200" b="1" i="0">
-                <a:solidFill>
-                  <a:srgbClr val="9C27B0"/>
-                </a:solidFill>
-                <a:latin typeface="Calibri"/>
-              </a:defRPr>
-            </a:pPr>
-            <a:r>
-              <a:t>1000+</a:t>
+              <a:defRPr sz="4800" b="1" i="0">
+                <a:solidFill>
+                  <a:srgbClr val="EC4899"/>
+                </a:solidFill>
+                <a:latin typeface="Calibri"/>
+              </a:defRPr>
+            </a:pPr>
+            <a:r>
+              <a:t>100%</a:t>
             </a:r>
           </a:p>
         </p:txBody>
@@ -5873,7 +5947,7 @@
         </p:nvSpPr>
         <p:spPr>
           <a:xfrm>
-            <a:off x="1097280" y="2926080"/>
+            <a:off x="1097280" y="2834640"/>
             <a:ext cx="4572000" cy="365760"/>
           </a:xfrm>
           <a:prstGeom prst="rect">
@@ -5888,7 +5962,7 @@
           <a:lstStyle/>
           <a:p>
             <a:pPr algn="l">
-              <a:defRPr sz="1100" b="0" i="0">
+              <a:defRPr sz="1200" b="0" i="0">
                 <a:solidFill>
                   <a:srgbClr val="8F95A3"/>
                 </a:solidFill>
@@ -5896,7 +5970,7 @@
               </a:defRPr>
             </a:pPr>
             <a:r>
-              <a:t>Daily AI Checks</a:t>
+              <a:t>profitable</a:t>
             </a:r>
           </a:p>
         </p:txBody>
@@ -5909,7 +5983,43 @@
         </p:nvSpPr>
         <p:spPr>
           <a:xfrm>
-            <a:off x="1097280" y="3566160"/>
+            <a:off x="1097280" y="3291840"/>
+            <a:ext cx="9966960" cy="365760"/>
+          </a:xfrm>
+          <a:prstGeom prst="rect">
+            <a:avLst/>
+          </a:prstGeom>
+          <a:noFill/>
+        </p:spPr>
+        <p:txBody>
+          <a:bodyPr wrap="square">
+            <a:spAutoFit/>
+          </a:bodyPr>
+          <a:lstStyle/>
+          <a:p>
+            <a:pPr algn="l">
+              <a:defRPr sz="1400" b="0" i="0">
+                <a:solidFill>
+                  <a:srgbClr val="E2E2EA"/>
+                </a:solidFill>
+                <a:latin typeface="Calibri"/>
+              </a:defRPr>
+            </a:pPr>
+            <a:r>
+              <a:t>by Gaming Division</a:t>
+            </a:r>
+          </a:p>
+        </p:txBody>
+      </p:sp>
+      <p:sp>
+        <p:nvSpPr>
+          <p:cNvPr id="8" name="TextBox 7"/>
+          <p:cNvSpPr txBox="1"/>
+          <p:nvPr/>
+        </p:nvSpPr>
+        <p:spPr>
+          <a:xfrm>
+            <a:off x="1097280" y="3840480"/>
             <a:ext cx="9966960" cy="457200"/>
           </a:xfrm>
           <a:prstGeom prst="rect">
@@ -5932,7 +6042,328 @@
               </a:defRPr>
             </a:pPr>
             <a:r>
-              <a:t>AI-First Future Accelerating</a:t>
+              <a:t>Gaming Division Hits Profitability</a:t>
+            </a:r>
+          </a:p>
+        </p:txBody>
+      </p:sp>
+      <p:sp>
+        <p:nvSpPr>
+          <p:cNvPr id="9" name="TextBox 8"/>
+          <p:cNvSpPr txBox="1"/>
+          <p:nvPr/>
+        </p:nvSpPr>
+        <p:spPr>
+          <a:xfrm>
+            <a:off x="1097280" y="4389120"/>
+            <a:ext cx="9966960" cy="914400"/>
+          </a:xfrm>
+          <a:prstGeom prst="rect">
+            <a:avLst/>
+          </a:prstGeom>
+          <a:noFill/>
+        </p:spPr>
+        <p:txBody>
+          <a:bodyPr wrap="square">
+            <a:spAutoFit/>
+          </a:bodyPr>
+          <a:lstStyle/>
+          <a:p>
+            <a:pPr algn="l">
+              <a:defRPr sz="1400" b="0" i="0">
+                <a:solidFill>
+                  <a:srgbClr val="E2E2EA"/>
+                </a:solidFill>
+                <a:latin typeface="Calibri"/>
+              </a:defRPr>
+            </a:pPr>
+            <a:r>
+              <a:t>After years of investment and optimization, our gaming division finally turned profitable in 2025. A testament to persistence and strategic execution.</a:t>
+            </a:r>
+          </a:p>
+        </p:txBody>
+      </p:sp>
+      <p:sp>
+        <p:nvSpPr>
+          <p:cNvPr id="10" name="TextBox 9"/>
+          <p:cNvSpPr txBox="1"/>
+          <p:nvPr/>
+        </p:nvSpPr>
+        <p:spPr>
+          <a:xfrm>
+            <a:off x="1097280" y="5486400"/>
+            <a:ext cx="9966960" cy="457200"/>
+          </a:xfrm>
+          <a:prstGeom prst="rect">
+            <a:avLst/>
+          </a:prstGeom>
+          <a:noFill/>
+        </p:spPr>
+        <p:txBody>
+          <a:bodyPr wrap="square">
+            <a:spAutoFit/>
+          </a:bodyPr>
+          <a:lstStyle/>
+          <a:p>
+            <a:pPr algn="l">
+              <a:defRPr sz="1300" b="0" i="1">
+                <a:solidFill>
+                  <a:srgbClr val="8F95A3"/>
+                </a:solidFill>
+                <a:latin typeface="Calibri"/>
+              </a:defRPr>
+            </a:pPr>
+            <a:r>
+              <a:t>💬 "Long-term vision pays off"</a:t>
+            </a:r>
+          </a:p>
+        </p:txBody>
+      </p:sp>
+    </p:spTree>
+  </p:cSld>
+  <p:clrMapOvr>
+    <a:masterClrMapping/>
+  </p:clrMapOvr>
+</p:sld>
+</file>
+
+<file path=ppt/slides/slide19.xml><?xml version="1.0" encoding="utf-8"?>
+<p:sld xmlns:a="http://schemas.openxmlformats.org/drawingml/2006/main" xmlns:p="http://schemas.openxmlformats.org/presentationml/2006/main" xmlns:r="http://schemas.openxmlformats.org/officeDocument/2006/relationships">
+  <p:cSld>
+    <p:bg>
+      <p:bgPr>
+        <a:solidFill>
+          <a:srgbClr val="08080C"/>
+        </a:solidFill>
+        <a:effectLst/>
+      </p:bgPr>
+    </p:bg>
+    <p:spTree>
+      <p:nvGrpSpPr>
+        <p:cNvPr id="1" name=""/>
+        <p:cNvGrpSpPr/>
+        <p:nvPr/>
+      </p:nvGrpSpPr>
+      <p:grpSpPr/>
+      <p:sp>
+        <p:nvSpPr>
+          <p:cNvPr id="2" name="Rectangle 1"/>
+          <p:cNvSpPr/>
+          <p:nvPr/>
+        </p:nvSpPr>
+        <p:spPr>
+          <a:xfrm>
+            <a:off x="0" y="365760"/>
+            <a:ext cx="12191695" cy="54864"/>
+          </a:xfrm>
+          <a:prstGeom prst="rect">
+            <a:avLst/>
+          </a:prstGeom>
+          <a:solidFill>
+            <a:srgbClr val="06B6D4"/>
+          </a:solidFill>
+          <a:ln>
+            <a:noFill/>
+          </a:ln>
+        </p:spPr>
+        <p:style>
+          <a:lnRef idx="1">
+            <a:schemeClr val="accent1"/>
+          </a:lnRef>
+          <a:fillRef idx="3">
+            <a:schemeClr val="accent1"/>
+          </a:fillRef>
+          <a:effectRef idx="2">
+            <a:schemeClr val="accent1"/>
+          </a:effectRef>
+          <a:fontRef idx="minor">
+            <a:schemeClr val="lt1"/>
+          </a:fontRef>
+        </p:style>
+        <p:txBody>
+          <a:bodyPr rtlCol="0" anchor="ctr"/>
+          <a:lstStyle/>
+          <a:p>
+            <a:pPr algn="ctr"/>
+          </a:p>
+        </p:txBody>
+      </p:sp>
+      <p:sp>
+        <p:nvSpPr>
+          <p:cNvPr id="3" name="TextBox 2"/>
+          <p:cNvSpPr txBox="1"/>
+          <p:nvPr/>
+        </p:nvSpPr>
+        <p:spPr>
+          <a:xfrm>
+            <a:off x="1097280" y="731520"/>
+            <a:ext cx="3657600" cy="365760"/>
+          </a:xfrm>
+          <a:prstGeom prst="rect">
+            <a:avLst/>
+          </a:prstGeom>
+          <a:noFill/>
+        </p:spPr>
+        <p:txBody>
+          <a:bodyPr wrap="none">
+            <a:spAutoFit/>
+          </a:bodyPr>
+          <a:lstStyle/>
+          <a:p>
+            <a:pPr algn="l">
+              <a:defRPr sz="1000" b="1">
+                <a:solidFill>
+                  <a:srgbClr val="06B6D4"/>
+                </a:solidFill>
+                <a:latin typeface="Calibri"/>
+              </a:defRPr>
+            </a:pPr>
+            <a:r>
+              <a:t>💎  WIN</a:t>
+            </a:r>
+          </a:p>
+        </p:txBody>
+      </p:sp>
+      <p:sp>
+        <p:nvSpPr>
+          <p:cNvPr id="4" name="TextBox 3"/>
+          <p:cNvSpPr txBox="1"/>
+          <p:nvPr/>
+        </p:nvSpPr>
+        <p:spPr>
+          <a:xfrm>
+            <a:off x="1097280" y="1188720"/>
+            <a:ext cx="9966960" cy="731520"/>
+          </a:xfrm>
+          <a:prstGeom prst="rect">
+            <a:avLst/>
+          </a:prstGeom>
+          <a:noFill/>
+        </p:spPr>
+        <p:txBody>
+          <a:bodyPr wrap="square">
+            <a:spAutoFit/>
+          </a:bodyPr>
+          <a:lstStyle/>
+          <a:p>
+            <a:pPr algn="l">
+              <a:defRPr sz="3200" b="1" i="0">
+                <a:solidFill>
+                  <a:srgbClr val="06B6D4"/>
+                </a:solidFill>
+                <a:latin typeface="Calibri"/>
+              </a:defRPr>
+            </a:pPr>
+            <a:r>
+              <a:t>Retention Champion</a:t>
+            </a:r>
+          </a:p>
+        </p:txBody>
+      </p:sp>
+      <p:sp>
+        <p:nvSpPr>
+          <p:cNvPr id="5" name="TextBox 4"/>
+          <p:cNvSpPr txBox="1"/>
+          <p:nvPr/>
+        </p:nvSpPr>
+        <p:spPr>
+          <a:xfrm>
+            <a:off x="1097280" y="2103120"/>
+            <a:ext cx="4572000" cy="822960"/>
+          </a:xfrm>
+          <a:prstGeom prst="rect">
+            <a:avLst/>
+          </a:prstGeom>
+          <a:noFill/>
+        </p:spPr>
+        <p:txBody>
+          <a:bodyPr wrap="square">
+            <a:spAutoFit/>
+          </a:bodyPr>
+          <a:lstStyle/>
+          <a:p>
+            <a:pPr algn="l">
+              <a:defRPr sz="4800" b="1" i="0">
+                <a:solidFill>
+                  <a:srgbClr val="06B6D4"/>
+                </a:solidFill>
+                <a:latin typeface="Calibri"/>
+              </a:defRPr>
+            </a:pPr>
+            <a:r>
+              <a:t>61%</a:t>
+            </a:r>
+          </a:p>
+        </p:txBody>
+      </p:sp>
+      <p:sp>
+        <p:nvSpPr>
+          <p:cNvPr id="6" name="TextBox 5"/>
+          <p:cNvSpPr txBox="1"/>
+          <p:nvPr/>
+        </p:nvSpPr>
+        <p:spPr>
+          <a:xfrm>
+            <a:off x="1097280" y="2834640"/>
+            <a:ext cx="4572000" cy="365760"/>
+          </a:xfrm>
+          <a:prstGeom prst="rect">
+            <a:avLst/>
+          </a:prstGeom>
+          <a:noFill/>
+        </p:spPr>
+        <p:txBody>
+          <a:bodyPr wrap="square">
+            <a:spAutoFit/>
+          </a:bodyPr>
+          <a:lstStyle/>
+          <a:p>
+            <a:pPr algn="l">
+              <a:defRPr sz="1200" b="0" i="0">
+                <a:solidFill>
+                  <a:srgbClr val="8F95A3"/>
+                </a:solidFill>
+                <a:latin typeface="Calibri"/>
+              </a:defRPr>
+            </a:pPr>
+            <a:r>
+              <a:t>retention</a:t>
+            </a:r>
+          </a:p>
+        </p:txBody>
+      </p:sp>
+      <p:sp>
+        <p:nvSpPr>
+          <p:cNvPr id="7" name="TextBox 6"/>
+          <p:cNvSpPr txBox="1"/>
+          <p:nvPr/>
+        </p:nvSpPr>
+        <p:spPr>
+          <a:xfrm>
+            <a:off x="1097280" y="3291840"/>
+            <a:ext cx="9966960" cy="365760"/>
+          </a:xfrm>
+          <a:prstGeom prst="rect">
+            <a:avLst/>
+          </a:prstGeom>
+          <a:noFill/>
+        </p:spPr>
+        <p:txBody>
+          <a:bodyPr wrap="square">
+            <a:spAutoFit/>
+          </a:bodyPr>
+          <a:lstStyle/>
+          <a:p>
+            <a:pPr algn="l">
+              <a:defRPr sz="1400" b="0" i="0">
+                <a:solidFill>
+                  <a:srgbClr val="E2E2EA"/>
+                </a:solidFill>
+                <a:latin typeface="Calibri"/>
+              </a:defRPr>
+            </a:pPr>
+            <a:r>
+              <a:t>by Infinite Minesweeper Team</a:t>
             </a:r>
           </a:p>
         </p:txBody>
@@ -5945,22 +6376,58 @@
         </p:nvSpPr>
         <p:spPr>
           <a:xfrm>
-            <a:off x="1097280" y="4206240"/>
-            <a:ext cx="9966960" cy="1371600"/>
-          </a:xfrm>
-          <a:prstGeom prst="rect">
-            <a:avLst/>
-          </a:prstGeom>
-          <a:noFill/>
-        </p:spPr>
-        <p:txBody>
-          <a:bodyPr wrap="square">
-            <a:spAutoFit/>
-          </a:bodyPr>
-          <a:lstStyle/>
-          <a:p>
-            <a:pPr algn="l">
-              <a:defRPr sz="1500" b="0" i="0">
+            <a:off x="1097280" y="3840480"/>
+            <a:ext cx="9966960" cy="457200"/>
+          </a:xfrm>
+          <a:prstGeom prst="rect">
+            <a:avLst/>
+          </a:prstGeom>
+          <a:noFill/>
+        </p:spPr>
+        <p:txBody>
+          <a:bodyPr wrap="square">
+            <a:spAutoFit/>
+          </a:bodyPr>
+          <a:lstStyle/>
+          <a:p>
+            <a:pPr algn="l">
+              <a:defRPr sz="1800" b="1" i="0">
+                <a:solidFill>
+                  <a:srgbClr val="FFFFFF"/>
+                </a:solidFill>
+                <a:latin typeface="Calibri"/>
+              </a:defRPr>
+            </a:pPr>
+            <a:r>
+              <a:t>Crushing Apple Benchmarks</a:t>
+            </a:r>
+          </a:p>
+        </p:txBody>
+      </p:sp>
+      <p:sp>
+        <p:nvSpPr>
+          <p:cNvPr id="9" name="TextBox 8"/>
+          <p:cNvSpPr txBox="1"/>
+          <p:nvPr/>
+        </p:nvSpPr>
+        <p:spPr>
+          <a:xfrm>
+            <a:off x="1097280" y="4389120"/>
+            <a:ext cx="9966960" cy="914400"/>
+          </a:xfrm>
+          <a:prstGeom prst="rect">
+            <a:avLst/>
+          </a:prstGeom>
+          <a:noFill/>
+        </p:spPr>
+        <p:txBody>
+          <a:bodyPr wrap="square">
+            <a:spAutoFit/>
+          </a:bodyPr>
+          <a:lstStyle/>
+          <a:p>
+            <a:pPr algn="l">
+              <a:defRPr sz="1400" b="0" i="0">
                 <a:solidFill>
                   <a:srgbClr val="E2E2EA"/>
                 </a:solidFill>
@@ -5968,7 +6435,43 @@
               </a:defRPr>
             </a:pPr>
             <a:r>
-              <a:t>Every employee will manage 5-10 AI agents within 3-6 months. OKR Auditor already checks 1,000+ OKRs daily, Daria AI saves $4k/week</a:t>
+              <a:t>Infinite Minesweeper achieved 61% retention, significantly outperforming Apple's benchmark ERA of 151-160%. Our gaming products are not just profitable — they're sticky.</a:t>
+            </a:r>
+          </a:p>
+        </p:txBody>
+      </p:sp>
+      <p:sp>
+        <p:nvSpPr>
+          <p:cNvPr id="10" name="TextBox 9"/>
+          <p:cNvSpPr txBox="1"/>
+          <p:nvPr/>
+        </p:nvSpPr>
+        <p:spPr>
+          <a:xfrm>
+            <a:off x="1097280" y="5486400"/>
+            <a:ext cx="9966960" cy="457200"/>
+          </a:xfrm>
+          <a:prstGeom prst="rect">
+            <a:avLst/>
+          </a:prstGeom>
+          <a:noFill/>
+        </p:spPr>
+        <p:txBody>
+          <a:bodyPr wrap="square">
+            <a:spAutoFit/>
+          </a:bodyPr>
+          <a:lstStyle/>
+          <a:p>
+            <a:pPr algn="l">
+              <a:defRPr sz="1300" b="0" i="1">
+                <a:solidFill>
+                  <a:srgbClr val="8F95A3"/>
+                </a:solidFill>
+                <a:latin typeface="Calibri"/>
+              </a:defRPr>
+            </a:pPr>
+            <a:r>
+              <a:t>💬 "Quality games = loyal players"</a:t>
             </a:r>
           </a:p>
         </p:txBody>
@@ -6014,7 +6517,7 @@
             <a:avLst/>
           </a:prstGeom>
           <a:solidFill>
-            <a:srgbClr val="FF6B9D"/>
+            <a:srgbClr val="FF6B35"/>
           </a:solidFill>
           <a:ln>
             <a:noFill/>
@@ -6067,13 +6570,13 @@
             <a:pPr algn="l">
               <a:defRPr sz="1000" b="1">
                 <a:solidFill>
-                  <a:srgbClr val="FF6B9D"/>
-                </a:solidFill>
-                <a:latin typeface="Calibri"/>
-              </a:defRPr>
-            </a:pPr>
-            <a:r>
-              <a:t>🎂  CELEBRATION</a:t>
+                  <a:srgbClr val="FF6B35"/>
+                </a:solidFill>
+                <a:latin typeface="Calibri"/>
+              </a:defRPr>
+            </a:pPr>
+            <a:r>
+              <a:t>🚀  WIN</a:t>
             </a:r>
           </a:p>
         </p:txBody>
@@ -6103,13 +6606,13 @@
             <a:pPr algn="l">
               <a:defRPr sz="3200" b="1" i="0">
                 <a:solidFill>
-                  <a:srgbClr val="FF6B9D"/>
-                </a:solidFill>
-                <a:latin typeface="Calibri"/>
-              </a:defRPr>
-            </a:pPr>
-            <a:r>
-              <a:t>Happy Birthday!</a:t>
+                  <a:srgbClr val="FF6B35"/>
+                </a:solidFill>
+                <a:latin typeface="Calibri"/>
+              </a:defRPr>
+            </a:pPr>
+            <a:r>
+              <a:t>Innovation Explosion</a:t>
             </a:r>
           </a:p>
         </p:txBody>
@@ -6123,21 +6626,129 @@
         <p:spPr>
           <a:xfrm>
             <a:off x="1097280" y="2103120"/>
-            <a:ext cx="9966960" cy="640080"/>
-          </a:xfrm>
-          <a:prstGeom prst="rect">
-            <a:avLst/>
-          </a:prstGeom>
-          <a:noFill/>
-        </p:spPr>
-        <p:txBody>
-          <a:bodyPr wrap="square">
-            <a:spAutoFit/>
-          </a:bodyPr>
-          <a:lstStyle/>
-          <a:p>
-            <a:pPr algn="l">
-              <a:defRPr sz="2800" b="1" i="0">
+            <a:ext cx="4572000" cy="822960"/>
+          </a:xfrm>
+          <a:prstGeom prst="rect">
+            <a:avLst/>
+          </a:prstGeom>
+          <a:noFill/>
+        </p:spPr>
+        <p:txBody>
+          <a:bodyPr wrap="square">
+            <a:spAutoFit/>
+          </a:bodyPr>
+          <a:lstStyle/>
+          <a:p>
+            <a:pPr algn="l">
+              <a:defRPr sz="4800" b="1" i="0">
+                <a:solidFill>
+                  <a:srgbClr val="FF6B35"/>
+                </a:solidFill>
+                <a:latin typeface="Calibri"/>
+              </a:defRPr>
+            </a:pPr>
+            <a:r>
+              <a:t>100+</a:t>
+            </a:r>
+          </a:p>
+        </p:txBody>
+      </p:sp>
+      <p:sp>
+        <p:nvSpPr>
+          <p:cNvPr id="6" name="TextBox 5"/>
+          <p:cNvSpPr txBox="1"/>
+          <p:nvPr/>
+        </p:nvSpPr>
+        <p:spPr>
+          <a:xfrm>
+            <a:off x="1097280" y="2834640"/>
+            <a:ext cx="4572000" cy="365760"/>
+          </a:xfrm>
+          <a:prstGeom prst="rect">
+            <a:avLst/>
+          </a:prstGeom>
+          <a:noFill/>
+        </p:spPr>
+        <p:txBody>
+          <a:bodyPr wrap="square">
+            <a:spAutoFit/>
+          </a:bodyPr>
+          <a:lstStyle/>
+          <a:p>
+            <a:pPr algn="l">
+              <a:defRPr sz="1200" b="0" i="0">
+                <a:solidFill>
+                  <a:srgbClr val="8F95A3"/>
+                </a:solidFill>
+                <a:latin typeface="Calibri"/>
+              </a:defRPr>
+            </a:pPr>
+            <a:r>
+              <a:t>AI tools built</a:t>
+            </a:r>
+          </a:p>
+        </p:txBody>
+      </p:sp>
+      <p:sp>
+        <p:nvSpPr>
+          <p:cNvPr id="7" name="TextBox 6"/>
+          <p:cNvSpPr txBox="1"/>
+          <p:nvPr/>
+        </p:nvSpPr>
+        <p:spPr>
+          <a:xfrm>
+            <a:off x="1097280" y="3291840"/>
+            <a:ext cx="9966960" cy="365760"/>
+          </a:xfrm>
+          <a:prstGeom prst="rect">
+            <a:avLst/>
+          </a:prstGeom>
+          <a:noFill/>
+        </p:spPr>
+        <p:txBody>
+          <a:bodyPr wrap="square">
+            <a:spAutoFit/>
+          </a:bodyPr>
+          <a:lstStyle/>
+          <a:p>
+            <a:pPr algn="l">
+              <a:defRPr sz="1400" b="0" i="0">
+                <a:solidFill>
+                  <a:srgbClr val="E2E2EA"/>
+                </a:solidFill>
+                <a:latin typeface="Calibri"/>
+              </a:defRPr>
+            </a:pPr>
+            <a:r>
+              <a:t>by Non-engineering teams</a:t>
+            </a:r>
+          </a:p>
+        </p:txBody>
+      </p:sp>
+      <p:sp>
+        <p:nvSpPr>
+          <p:cNvPr id="8" name="TextBox 7"/>
+          <p:cNvSpPr txBox="1"/>
+          <p:nvPr/>
+        </p:nvSpPr>
+        <p:spPr>
+          <a:xfrm>
+            <a:off x="1097280" y="3840480"/>
+            <a:ext cx="9966960" cy="457200"/>
+          </a:xfrm>
+          <a:prstGeom prst="rect">
+            <a:avLst/>
+          </a:prstGeom>
+          <a:noFill/>
+        </p:spPr>
+        <p:txBody>
+          <a:bodyPr wrap="square">
+            <a:spAutoFit/>
+          </a:bodyPr>
+          <a:lstStyle/>
+          <a:p>
+            <a:pPr algn="l">
+              <a:defRPr sz="1800" b="1" i="0">
                 <a:solidFill>
                   <a:srgbClr val="FFFFFF"/>
                 </a:solidFill>
@@ -6145,7 +6756,256 @@
               </a:defRPr>
             </a:pPr>
             <a:r>
-              <a:t>Kirill Khramkov</a:t>
+              <a:t>Everyone's Building the Future</a:t>
+            </a:r>
+          </a:p>
+        </p:txBody>
+      </p:sp>
+      <p:sp>
+        <p:nvSpPr>
+          <p:cNvPr id="9" name="TextBox 8"/>
+          <p:cNvSpPr txBox="1"/>
+          <p:nvPr/>
+        </p:nvSpPr>
+        <p:spPr>
+          <a:xfrm>
+            <a:off x="1097280" y="4389120"/>
+            <a:ext cx="9966960" cy="914400"/>
+          </a:xfrm>
+          <a:prstGeom prst="rect">
+            <a:avLst/>
+          </a:prstGeom>
+          <a:noFill/>
+        </p:spPr>
+        <p:txBody>
+          <a:bodyPr wrap="square">
+            <a:spAutoFit/>
+          </a:bodyPr>
+          <a:lstStyle/>
+          <a:p>
+            <a:pPr algn="l">
+              <a:defRPr sz="1400" b="0" i="0">
+                <a:solidFill>
+                  <a:srgbClr val="E2E2EA"/>
+                </a:solidFill>
+                <a:latin typeface="Calibri"/>
+              </a:defRPr>
+            </a:pPr>
+            <a:r>
+              <a:t>Our non-engineering teams have created countless useful AI tools, proving we're all builders now. This rapid innovation shows we're learning fast and moving in the right direction.</a:t>
+            </a:r>
+          </a:p>
+        </p:txBody>
+      </p:sp>
+      <p:sp>
+        <p:nvSpPr>
+          <p:cNvPr id="10" name="TextBox 9"/>
+          <p:cNvSpPr txBox="1"/>
+          <p:nvPr/>
+        </p:nvSpPr>
+        <p:spPr>
+          <a:xfrm>
+            <a:off x="1097280" y="5486400"/>
+            <a:ext cx="9966960" cy="457200"/>
+          </a:xfrm>
+          <a:prstGeom prst="rect">
+            <a:avLst/>
+          </a:prstGeom>
+          <a:noFill/>
+        </p:spPr>
+        <p:txBody>
+          <a:bodyPr wrap="square">
+            <a:spAutoFit/>
+          </a:bodyPr>
+          <a:lstStyle/>
+          <a:p>
+            <a:pPr algn="l">
+              <a:defRPr sz="1300" b="0" i="1">
+                <a:solidFill>
+                  <a:srgbClr val="8F95A3"/>
+                </a:solidFill>
+                <a:latin typeface="Calibri"/>
+              </a:defRPr>
+            </a:pPr>
+            <a:r>
+              <a:t>💬 "When everyone builds, everyone wins"</a:t>
+            </a:r>
+          </a:p>
+        </p:txBody>
+      </p:sp>
+    </p:spTree>
+  </p:cSld>
+  <p:clrMapOvr>
+    <a:masterClrMapping/>
+  </p:clrMapOvr>
+</p:sld>
+</file>
+
+<file path=ppt/slides/slide20.xml><?xml version="1.0" encoding="utf-8"?>
+<p:sld xmlns:a="http://schemas.openxmlformats.org/drawingml/2006/main" xmlns:p="http://schemas.openxmlformats.org/presentationml/2006/main" xmlns:r="http://schemas.openxmlformats.org/officeDocument/2006/relationships">
+  <p:cSld>
+    <p:bg>
+      <p:bgPr>
+        <a:solidFill>
+          <a:srgbClr val="08080C"/>
+        </a:solidFill>
+        <a:effectLst/>
+      </p:bgPr>
+    </p:bg>
+    <p:spTree>
+      <p:nvGrpSpPr>
+        <p:cNvPr id="1" name=""/>
+        <p:cNvGrpSpPr/>
+        <p:nvPr/>
+      </p:nvGrpSpPr>
+      <p:grpSpPr/>
+      <p:sp>
+        <p:nvSpPr>
+          <p:cNvPr id="2" name="Rectangle 1"/>
+          <p:cNvSpPr/>
+          <p:nvPr/>
+        </p:nvSpPr>
+        <p:spPr>
+          <a:xfrm>
+            <a:off x="0" y="365760"/>
+            <a:ext cx="12191695" cy="54864"/>
+          </a:xfrm>
+          <a:prstGeom prst="rect">
+            <a:avLst/>
+          </a:prstGeom>
+          <a:solidFill>
+            <a:srgbClr val="EF4444"/>
+          </a:solidFill>
+          <a:ln>
+            <a:noFill/>
+          </a:ln>
+        </p:spPr>
+        <p:style>
+          <a:lnRef idx="1">
+            <a:schemeClr val="accent1"/>
+          </a:lnRef>
+          <a:fillRef idx="3">
+            <a:schemeClr val="accent1"/>
+          </a:fillRef>
+          <a:effectRef idx="2">
+            <a:schemeClr val="accent1"/>
+          </a:effectRef>
+          <a:fontRef idx="minor">
+            <a:schemeClr val="lt1"/>
+          </a:fontRef>
+        </p:style>
+        <p:txBody>
+          <a:bodyPr rtlCol="0" anchor="ctr"/>
+          <a:lstStyle/>
+          <a:p>
+            <a:pPr algn="ctr"/>
+          </a:p>
+        </p:txBody>
+      </p:sp>
+      <p:sp>
+        <p:nvSpPr>
+          <p:cNvPr id="3" name="TextBox 2"/>
+          <p:cNvSpPr txBox="1"/>
+          <p:nvPr/>
+        </p:nvSpPr>
+        <p:spPr>
+          <a:xfrm>
+            <a:off x="1097280" y="731520"/>
+            <a:ext cx="3657600" cy="365760"/>
+          </a:xfrm>
+          <a:prstGeom prst="rect">
+            <a:avLst/>
+          </a:prstGeom>
+          <a:noFill/>
+        </p:spPr>
+        <p:txBody>
+          <a:bodyPr wrap="none">
+            <a:spAutoFit/>
+          </a:bodyPr>
+          <a:lstStyle/>
+          <a:p>
+            <a:pPr algn="l">
+              <a:defRPr sz="1000" b="1">
+                <a:solidFill>
+                  <a:srgbClr val="EF4444"/>
+                </a:solidFill>
+                <a:latin typeface="Calibri"/>
+              </a:defRPr>
+            </a:pPr>
+            <a:r>
+              <a:t>🛡️  WIN</a:t>
+            </a:r>
+          </a:p>
+        </p:txBody>
+      </p:sp>
+      <p:sp>
+        <p:nvSpPr>
+          <p:cNvPr id="4" name="TextBox 3"/>
+          <p:cNvSpPr txBox="1"/>
+          <p:nvPr/>
+        </p:nvSpPr>
+        <p:spPr>
+          <a:xfrm>
+            <a:off x="1097280" y="1188720"/>
+            <a:ext cx="9966960" cy="731520"/>
+          </a:xfrm>
+          <a:prstGeom prst="rect">
+            <a:avLst/>
+          </a:prstGeom>
+          <a:noFill/>
+        </p:spPr>
+        <p:txBody>
+          <a:bodyPr wrap="square">
+            <a:spAutoFit/>
+          </a:bodyPr>
+          <a:lstStyle/>
+          <a:p>
+            <a:pPr algn="l">
+              <a:defRPr sz="3200" b="1" i="0">
+                <a:solidFill>
+                  <a:srgbClr val="EF4444"/>
+                </a:solidFill>
+                <a:latin typeface="Calibri"/>
+              </a:defRPr>
+            </a:pPr>
+            <a:r>
+              <a:t>Fraud Defense Victory</a:t>
+            </a:r>
+          </a:p>
+        </p:txBody>
+      </p:sp>
+      <p:sp>
+        <p:nvSpPr>
+          <p:cNvPr id="5" name="TextBox 4"/>
+          <p:cNvSpPr txBox="1"/>
+          <p:nvPr/>
+        </p:nvSpPr>
+        <p:spPr>
+          <a:xfrm>
+            <a:off x="1097280" y="2103120"/>
+            <a:ext cx="4572000" cy="822960"/>
+          </a:xfrm>
+          <a:prstGeom prst="rect">
+            <a:avLst/>
+          </a:prstGeom>
+          <a:noFill/>
+        </p:spPr>
+        <p:txBody>
+          <a:bodyPr wrap="square">
+            <a:spAutoFit/>
+          </a:bodyPr>
+          <a:lstStyle/>
+          <a:p>
+            <a:pPr algn="l">
+              <a:defRPr sz="4800" b="1" i="0">
+                <a:solidFill>
+                  <a:srgbClr val="EF4444"/>
+                </a:solidFill>
+                <a:latin typeface="Calibri"/>
+              </a:defRPr>
+            </a:pPr>
+            <a:r>
+              <a:t>4%</a:t>
             </a:r>
           </a:p>
         </p:txBody>
@@ -6158,7 +7018,43 @@
         </p:nvSpPr>
         <p:spPr>
           <a:xfrm>
-            <a:off x="1097280" y="2743200"/>
+            <a:off x="1097280" y="2834640"/>
+            <a:ext cx="4572000" cy="365760"/>
+          </a:xfrm>
+          <a:prstGeom prst="rect">
+            <a:avLst/>
+          </a:prstGeom>
+          <a:noFill/>
+        </p:spPr>
+        <p:txBody>
+          <a:bodyPr wrap="square">
+            <a:spAutoFit/>
+          </a:bodyPr>
+          <a:lstStyle/>
+          <a:p>
+            <a:pPr algn="l">
+              <a:defRPr sz="1200" b="0" i="0">
+                <a:solidFill>
+                  <a:srgbClr val="8F95A3"/>
+                </a:solidFill>
+                <a:latin typeface="Calibri"/>
+              </a:defRPr>
+            </a:pPr>
+            <a:r>
+              <a:t>fraud rate</a:t>
+            </a:r>
+          </a:p>
+        </p:txBody>
+      </p:sp>
+      <p:sp>
+        <p:nvSpPr>
+          <p:cNvPr id="7" name="TextBox 6"/>
+          <p:cNvSpPr txBox="1"/>
+          <p:nvPr/>
+        </p:nvSpPr>
+        <p:spPr>
+          <a:xfrm>
+            <a:off x="1097280" y="3291840"/>
             <a:ext cx="9966960" cy="365760"/>
           </a:xfrm>
           <a:prstGeom prst="rect">
@@ -6175,85 +7071,121 @@
             <a:pPr algn="l">
               <a:defRPr sz="1400" b="0" i="0">
                 <a:solidFill>
+                  <a:srgbClr val="E2E2EA"/>
+                </a:solidFill>
+                <a:latin typeface="Calibri"/>
+              </a:defRPr>
+            </a:pPr>
+            <a:r>
+              <a:t>by Security Team</a:t>
+            </a:r>
+          </a:p>
+        </p:txBody>
+      </p:sp>
+      <p:sp>
+        <p:nvSpPr>
+          <p:cNvPr id="8" name="TextBox 7"/>
+          <p:cNvSpPr txBox="1"/>
+          <p:nvPr/>
+        </p:nvSpPr>
+        <p:spPr>
+          <a:xfrm>
+            <a:off x="1097280" y="3840480"/>
+            <a:ext cx="9966960" cy="457200"/>
+          </a:xfrm>
+          <a:prstGeom prst="rect">
+            <a:avLst/>
+          </a:prstGeom>
+          <a:noFill/>
+        </p:spPr>
+        <p:txBody>
+          <a:bodyPr wrap="square">
+            <a:spAutoFit/>
+          </a:bodyPr>
+          <a:lstStyle/>
+          <a:p>
+            <a:pPr algn="l">
+              <a:defRPr sz="1800" b="1" i="0">
+                <a:solidFill>
+                  <a:srgbClr val="FFFFFF"/>
+                </a:solidFill>
+                <a:latin typeface="Calibri"/>
+              </a:defRPr>
+            </a:pPr>
+            <a:r>
+              <a:t>Fraud Crushed: 22% → 4%</a:t>
+            </a:r>
+          </a:p>
+        </p:txBody>
+      </p:sp>
+      <p:sp>
+        <p:nvSpPr>
+          <p:cNvPr id="9" name="TextBox 8"/>
+          <p:cNvSpPr txBox="1"/>
+          <p:nvPr/>
+        </p:nvSpPr>
+        <p:spPr>
+          <a:xfrm>
+            <a:off x="1097280" y="4389120"/>
+            <a:ext cx="9966960" cy="914400"/>
+          </a:xfrm>
+          <a:prstGeom prst="rect">
+            <a:avLst/>
+          </a:prstGeom>
+          <a:noFill/>
+        </p:spPr>
+        <p:txBody>
+          <a:bodyPr wrap="square">
+            <a:spAutoFit/>
+          </a:bodyPr>
+          <a:lstStyle/>
+          <a:p>
+            <a:pPr algn="l">
+              <a:defRPr sz="1400" b="0" i="0">
+                <a:solidFill>
+                  <a:srgbClr val="E2E2EA"/>
+                </a:solidFill>
+                <a:latin typeface="Calibri"/>
+              </a:defRPr>
+            </a:pPr>
+            <a:r>
+              <a:t>Dynamic SDK signatures reduced fraud from 22% to under 4%. Our advanced security measures are protecting revenue and maintaining platform integrity.</a:t>
+            </a:r>
+          </a:p>
+        </p:txBody>
+      </p:sp>
+      <p:sp>
+        <p:nvSpPr>
+          <p:cNvPr id="10" name="TextBox 9"/>
+          <p:cNvSpPr txBox="1"/>
+          <p:nvPr/>
+        </p:nvSpPr>
+        <p:spPr>
+          <a:xfrm>
+            <a:off x="1097280" y="5486400"/>
+            <a:ext cx="9966960" cy="457200"/>
+          </a:xfrm>
+          <a:prstGeom prst="rect">
+            <a:avLst/>
+          </a:prstGeom>
+          <a:noFill/>
+        </p:spPr>
+        <p:txBody>
+          <a:bodyPr wrap="square">
+            <a:spAutoFit/>
+          </a:bodyPr>
+          <a:lstStyle/>
+          <a:p>
+            <a:pPr algn="l">
+              <a:defRPr sz="1300" b="0" i="1">
+                <a:solidFill>
                   <a:srgbClr val="8F95A3"/>
                 </a:solidFill>
                 <a:latin typeface="Calibri"/>
               </a:defRPr>
             </a:pPr>
             <a:r>
-              <a:t>March 14, 2026</a:t>
-            </a:r>
-          </a:p>
-        </p:txBody>
-      </p:sp>
-      <p:sp>
-        <p:nvSpPr>
-          <p:cNvPr id="7" name="TextBox 6"/>
-          <p:cNvSpPr txBox="1"/>
-          <p:nvPr/>
-        </p:nvSpPr>
-        <p:spPr>
-          <a:xfrm>
-            <a:off x="1097280" y="3291840"/>
-            <a:ext cx="9966960" cy="914400"/>
-          </a:xfrm>
-          <a:prstGeom prst="rect">
-            <a:avLst/>
-          </a:prstGeom>
-          <a:noFill/>
-        </p:spPr>
-        <p:txBody>
-          <a:bodyPr wrap="square">
-            <a:spAutoFit/>
-          </a:bodyPr>
-          <a:lstStyle/>
-          <a:p>
-            <a:pPr algn="l">
-              <a:defRPr sz="1600" b="0" i="0">
-                <a:solidFill>
-                  <a:srgbClr val="E2E2EA"/>
-                </a:solidFill>
-                <a:latin typeface="Calibri"/>
-              </a:defRPr>
-            </a:pPr>
-            <a:r>
-              <a:t>Thanks, everyone — your warm wishes truly made my day special!</a:t>
-            </a:r>
-          </a:p>
-        </p:txBody>
-      </p:sp>
-      <p:sp>
-        <p:nvSpPr>
-          <p:cNvPr id="8" name="TextBox 7"/>
-          <p:cNvSpPr txBox="1"/>
-          <p:nvPr/>
-        </p:nvSpPr>
-        <p:spPr>
-          <a:xfrm>
-            <a:off x="1097280" y="4572000"/>
-            <a:ext cx="9966960" cy="457200"/>
-          </a:xfrm>
-          <a:prstGeom prst="rect">
-            <a:avLst/>
-          </a:prstGeom>
-          <a:noFill/>
-        </p:spPr>
-        <p:txBody>
-          <a:bodyPr wrap="square">
-            <a:spAutoFit/>
-          </a:bodyPr>
-          <a:lstStyle/>
-          <a:p>
-            <a:pPr algn="l">
-              <a:defRPr sz="1400" b="0" i="1">
-                <a:solidFill>
-                  <a:srgbClr val="FF6B9D"/>
-                </a:solidFill>
-                <a:latin typeface="Calibri"/>
-              </a:defRPr>
-            </a:pPr>
-            <a:r>
-              <a:t>Engineering Team</a:t>
+              <a:t>💬 "Smart security = clean revenue"</a:t>
             </a:r>
           </a:p>
         </p:txBody>
@@ -6299,7 +7231,7 @@
             <a:avLst/>
           </a:prstGeom>
           <a:solidFill>
-            <a:srgbClr val="4ECDC4"/>
+            <a:srgbClr val="22C55E"/>
           </a:solidFill>
           <a:ln>
             <a:noFill/>
@@ -6352,13 +7284,13 @@
             <a:pPr algn="l">
               <a:defRPr sz="1000" b="1">
                 <a:solidFill>
-                  <a:srgbClr val="4ECDC4"/>
-                </a:solidFill>
-                <a:latin typeface="Calibri"/>
-              </a:defRPr>
-            </a:pPr>
-            <a:r>
-              <a:t>👏  CLAPS</a:t>
+                  <a:srgbClr val="22C55E"/>
+                </a:solidFill>
+                <a:latin typeface="Calibri"/>
+              </a:defRPr>
+            </a:pPr>
+            <a:r>
+              <a:t>🌱  EVENT</a:t>
             </a:r>
           </a:p>
         </p:txBody>
@@ -6388,13 +7320,13 @@
             <a:pPr algn="l">
               <a:defRPr sz="3200" b="1" i="0">
                 <a:solidFill>
-                  <a:srgbClr val="4ECDC4"/>
-                </a:solidFill>
-                <a:latin typeface="Calibri"/>
-              </a:defRPr>
-            </a:pPr>
-            <a:r>
-              <a:t>Recognition</a:t>
+                  <a:srgbClr val="22C55E"/>
+                </a:solidFill>
+                <a:latin typeface="Calibri"/>
+              </a:defRPr>
+            </a:pPr>
+            <a:r>
+              <a:t>Spring Connections Open</a:t>
             </a:r>
           </a:p>
         </p:txBody>
@@ -6408,29 +7340,29 @@
         <p:spPr>
           <a:xfrm>
             <a:off x="1097280" y="2103120"/>
-            <a:ext cx="2743200" cy="548640"/>
-          </a:xfrm>
-          <a:prstGeom prst="rect">
-            <a:avLst/>
-          </a:prstGeom>
-          <a:noFill/>
-        </p:spPr>
-        <p:txBody>
-          <a:bodyPr wrap="square">
-            <a:spAutoFit/>
-          </a:bodyPr>
-          <a:lstStyle/>
-          <a:p>
-            <a:pPr algn="l">
-              <a:defRPr sz="2800" b="1" i="0">
-                <a:solidFill>
-                  <a:srgbClr val="4ECDC4"/>
-                </a:solidFill>
-                <a:latin typeface="Calibri"/>
-              </a:defRPr>
-            </a:pPr>
-            <a:r>
-              <a:t>50</a:t>
+            <a:ext cx="9966960" cy="548640"/>
+          </a:xfrm>
+          <a:prstGeom prst="rect">
+            <a:avLst/>
+          </a:prstGeom>
+          <a:noFill/>
+        </p:spPr>
+        <p:txBody>
+          <a:bodyPr wrap="square">
+            <a:spAutoFit/>
+          </a:bodyPr>
+          <a:lstStyle/>
+          <a:p>
+            <a:pPr algn="l">
+              <a:defRPr sz="2200" b="1" i="0">
+                <a:solidFill>
+                  <a:srgbClr val="FFFFFF"/>
+                </a:solidFill>
+                <a:latin typeface="Calibri"/>
+              </a:defRPr>
+            </a:pPr>
+            <a:r>
+              <a:t>Connect Groups Spring Season</a:t>
             </a:r>
           </a:p>
         </p:txBody>
@@ -6443,7 +7375,7 @@
         </p:nvSpPr>
         <p:spPr>
           <a:xfrm>
-            <a:off x="1097280" y="2651760"/>
+            <a:off x="1097280" y="2743200"/>
             <a:ext cx="9966960" cy="365760"/>
           </a:xfrm>
           <a:prstGeom prst="rect">
@@ -6458,7 +7390,43 @@
           <a:lstStyle/>
           <a:p>
             <a:pPr algn="l">
-              <a:defRPr sz="1400" b="0" i="0">
+              <a:defRPr sz="1400" b="1" i="0">
+                <a:solidFill>
+                  <a:srgbClr val="22C55E"/>
+                </a:solidFill>
+                <a:latin typeface="Calibri"/>
+              </a:defRPr>
+            </a:pPr>
+            <a:r>
+              <a:t>March–May 2026</a:t>
+            </a:r>
+          </a:p>
+        </p:txBody>
+      </p:sp>
+      <p:sp>
+        <p:nvSpPr>
+          <p:cNvPr id="7" name="TextBox 6"/>
+          <p:cNvSpPr txBox="1"/>
+          <p:nvPr/>
+        </p:nvSpPr>
+        <p:spPr>
+          <a:xfrm>
+            <a:off x="1097280" y="3291840"/>
+            <a:ext cx="9966960" cy="1371600"/>
+          </a:xfrm>
+          <a:prstGeom prst="rect">
+            <a:avLst/>
+          </a:prstGeom>
+          <a:noFill/>
+        </p:spPr>
+        <p:txBody>
+          <a:bodyPr wrap="square">
+            <a:spAutoFit/>
+          </a:bodyPr>
+          <a:lstStyle/>
+          <a:p>
+            <a:pPr algn="l">
+              <a:defRPr sz="1500" b="0" i="0">
                 <a:solidFill>
                   <a:srgbClr val="E2E2EA"/>
                 </a:solidFill>
@@ -6466,20 +7434,20 @@
               </a:defRPr>
             </a:pPr>
             <a:r>
-              <a:t>from Mykhailo Kukharskyi</a:t>
-            </a:r>
-          </a:p>
-        </p:txBody>
-      </p:sp>
-      <p:sp>
-        <p:nvSpPr>
-          <p:cNvPr id="7" name="TextBox 6"/>
-          <p:cNvSpPr txBox="1"/>
-          <p:nvPr/>
-        </p:nvSpPr>
-        <p:spPr>
-          <a:xfrm>
-            <a:off x="1097280" y="3108960"/>
+              <a:t>Employee-led communities on Circle where we connect around shared interests, learning, and ideas — from sports and books to leadership, games, and meaningful conversations. Season officially launched!</a:t>
+            </a:r>
+          </a:p>
+        </p:txBody>
+      </p:sp>
+      <p:sp>
+        <p:nvSpPr>
+          <p:cNvPr id="8" name="TextBox 7"/>
+          <p:cNvSpPr txBox="1"/>
+          <p:nvPr/>
+        </p:nvSpPr>
+        <p:spPr>
+          <a:xfrm>
+            <a:off x="1097280" y="5029200"/>
             <a:ext cx="9966960" cy="365760"/>
           </a:xfrm>
           <a:prstGeom prst="rect">
@@ -6494,87 +7462,15 @@
           <a:lstStyle/>
           <a:p>
             <a:pPr algn="l">
-              <a:defRPr sz="1400" b="1" i="0">
-                <a:solidFill>
-                  <a:srgbClr val="FFFFFF"/>
-                </a:solidFill>
-                <a:latin typeface="Calibri"/>
-              </a:defRPr>
-            </a:pPr>
-            <a:r>
-              <a:t>to: Gleb Krahotkin</a:t>
-            </a:r>
-          </a:p>
-        </p:txBody>
-      </p:sp>
-      <p:sp>
-        <p:nvSpPr>
-          <p:cNvPr id="8" name="TextBox 7"/>
-          <p:cNvSpPr txBox="1"/>
-          <p:nvPr/>
-        </p:nvSpPr>
-        <p:spPr>
-          <a:xfrm>
-            <a:off x="1097280" y="3749039"/>
-            <a:ext cx="9966960" cy="1097280"/>
-          </a:xfrm>
-          <a:prstGeom prst="rect">
-            <a:avLst/>
-          </a:prstGeom>
-          <a:noFill/>
-        </p:spPr>
-        <p:txBody>
-          <a:bodyPr wrap="square">
-            <a:spAutoFit/>
-          </a:bodyPr>
-          <a:lstStyle/>
-          <a:p>
-            <a:pPr algn="l">
-              <a:defRPr sz="1500" b="0" i="1">
-                <a:solidFill>
-                  <a:srgbClr val="E2E2EA"/>
-                </a:solidFill>
-                <a:latin typeface="Calibri"/>
-              </a:defRPr>
-            </a:pPr>
-            <a:r>
-              <a:t>"Outstanding DevOps innovation with Coolify deployment platform"</a:t>
-            </a:r>
-          </a:p>
-        </p:txBody>
-      </p:sp>
-      <p:sp>
-        <p:nvSpPr>
-          <p:cNvPr id="9" name="TextBox 8"/>
-          <p:cNvSpPr txBox="1"/>
-          <p:nvPr/>
-        </p:nvSpPr>
-        <p:spPr>
-          <a:xfrm>
-            <a:off x="1097280" y="5120640"/>
-            <a:ext cx="9966960" cy="457200"/>
-          </a:xfrm>
-          <a:prstGeom prst="rect">
-            <a:avLst/>
-          </a:prstGeom>
-          <a:noFill/>
-        </p:spPr>
-        <p:txBody>
-          <a:bodyPr wrap="square">
-            <a:spAutoFit/>
-          </a:bodyPr>
-          <a:lstStyle/>
-          <a:p>
-            <a:pPr algn="l">
-              <a:defRPr sz="1200" b="1" i="0">
-                <a:solidFill>
-                  <a:srgbClr val="4ECDC4"/>
-                </a:solidFill>
-                <a:latin typeface="Calibri"/>
-              </a:defRPr>
-            </a:pPr>
-            <a:r>
-              <a:t>Innovation · Excellence</a:t>
+              <a:defRPr sz="1300" b="0" i="0">
+                <a:solidFill>
+                  <a:srgbClr val="8F95A3"/>
+                </a:solidFill>
+                <a:latin typeface="Calibri"/>
+              </a:defRPr>
+            </a:pPr>
+            <a:r>
+              <a:t>Organized by Katarzyna Raniszewska</a:t>
             </a:r>
           </a:p>
         </p:txBody>
@@ -6620,7 +7516,7 @@
             <a:avLst/>
           </a:prstGeom>
           <a:solidFill>
-            <a:srgbClr val="FFB74D"/>
+            <a:srgbClr val="8B5CF6"/>
           </a:solidFill>
           <a:ln>
             <a:noFill/>
@@ -6673,13 +7569,13 @@
             <a:pPr algn="l">
               <a:defRPr sz="1000" b="1">
                 <a:solidFill>
-                  <a:srgbClr val="FFB74D"/>
-                </a:solidFill>
-                <a:latin typeface="Calibri"/>
-              </a:defRPr>
-            </a:pPr>
-            <a:r>
-              <a:t>🔥  CLAPS</a:t>
+                  <a:srgbClr val="8B5CF6"/>
+                </a:solidFill>
+                <a:latin typeface="Calibri"/>
+              </a:defRPr>
+            </a:pPr>
+            <a:r>
+              <a:t>⚡  MILESTONE</a:t>
             </a:r>
           </a:p>
         </p:txBody>
@@ -6709,13 +7605,13 @@
             <a:pPr algn="l">
               <a:defRPr sz="3200" b="1" i="0">
                 <a:solidFill>
-                  <a:srgbClr val="FFB74D"/>
-                </a:solidFill>
-                <a:latin typeface="Calibri"/>
-              </a:defRPr>
-            </a:pPr>
-            <a:r>
-              <a:t>Team Recognition</a:t>
+                  <a:srgbClr val="8B5CF6"/>
+                </a:solidFill>
+                <a:latin typeface="Calibri"/>
+              </a:defRPr>
+            </a:pPr>
+            <a:r>
+              <a:t>DevOps Magic Unleashed</a:t>
             </a:r>
           </a:p>
         </p:txBody>
@@ -6729,29 +7625,29 @@
         <p:spPr>
           <a:xfrm>
             <a:off x="1097280" y="2103120"/>
-            <a:ext cx="2743200" cy="548640"/>
-          </a:xfrm>
-          <a:prstGeom prst="rect">
-            <a:avLst/>
-          </a:prstGeom>
-          <a:noFill/>
-        </p:spPr>
-        <p:txBody>
-          <a:bodyPr wrap="square">
-            <a:spAutoFit/>
-          </a:bodyPr>
-          <a:lstStyle/>
-          <a:p>
-            <a:pPr algn="l">
-              <a:defRPr sz="2800" b="1" i="0">
-                <a:solidFill>
-                  <a:srgbClr val="FFB74D"/>
-                </a:solidFill>
-                <a:latin typeface="Calibri"/>
-              </a:defRPr>
-            </a:pPr>
-            <a:r>
-              <a:t>50</a:t>
+            <a:ext cx="4572000" cy="822960"/>
+          </a:xfrm>
+          <a:prstGeom prst="rect">
+            <a:avLst/>
+          </a:prstGeom>
+          <a:noFill/>
+        </p:spPr>
+        <p:txBody>
+          <a:bodyPr wrap="square">
+            <a:spAutoFit/>
+          </a:bodyPr>
+          <a:lstStyle/>
+          <a:p>
+            <a:pPr algn="l">
+              <a:defRPr sz="5200" b="1" i="0">
+                <a:solidFill>
+                  <a:srgbClr val="8B5CF6"/>
+                </a:solidFill>
+                <a:latin typeface="Calibri"/>
+              </a:defRPr>
+            </a:pPr>
+            <a:r>
+              <a:t>100+</a:t>
             </a:r>
           </a:p>
         </p:txBody>
@@ -6764,22 +7660,94 @@
         </p:nvSpPr>
         <p:spPr>
           <a:xfrm>
-            <a:off x="1097280" y="2651760"/>
-            <a:ext cx="9966960" cy="365760"/>
-          </a:xfrm>
-          <a:prstGeom prst="rect">
-            <a:avLst/>
-          </a:prstGeom>
-          <a:noFill/>
-        </p:spPr>
-        <p:txBody>
-          <a:bodyPr wrap="square">
-            <a:spAutoFit/>
-          </a:bodyPr>
-          <a:lstStyle/>
-          <a:p>
-            <a:pPr algn="l">
-              <a:defRPr sz="1400" b="0" i="0">
+            <a:off x="1097280" y="2926080"/>
+            <a:ext cx="4572000" cy="365760"/>
+          </a:xfrm>
+          <a:prstGeom prst="rect">
+            <a:avLst/>
+          </a:prstGeom>
+          <a:noFill/>
+        </p:spPr>
+        <p:txBody>
+          <a:bodyPr wrap="square">
+            <a:spAutoFit/>
+          </a:bodyPr>
+          <a:lstStyle/>
+          <a:p>
+            <a:pPr algn="l">
+              <a:defRPr sz="1100" b="0" i="0">
+                <a:solidFill>
+                  <a:srgbClr val="8F95A3"/>
+                </a:solidFill>
+                <a:latin typeface="Calibri"/>
+              </a:defRPr>
+            </a:pPr>
+            <a:r>
+              <a:t>reactions &amp; celebrates</a:t>
+            </a:r>
+          </a:p>
+        </p:txBody>
+      </p:sp>
+      <p:sp>
+        <p:nvSpPr>
+          <p:cNvPr id="7" name="TextBox 6"/>
+          <p:cNvSpPr txBox="1"/>
+          <p:nvPr/>
+        </p:nvSpPr>
+        <p:spPr>
+          <a:xfrm>
+            <a:off x="1097280" y="3566160"/>
+            <a:ext cx="9966960" cy="457200"/>
+          </a:xfrm>
+          <a:prstGeom prst="rect">
+            <a:avLst/>
+          </a:prstGeom>
+          <a:noFill/>
+        </p:spPr>
+        <p:txBody>
+          <a:bodyPr wrap="square">
+            <a:spAutoFit/>
+          </a:bodyPr>
+          <a:lstStyle/>
+          <a:p>
+            <a:pPr algn="l">
+              <a:defRPr sz="1800" b="1" i="0">
+                <a:solidFill>
+                  <a:srgbClr val="FFFFFF"/>
+                </a:solidFill>
+                <a:latin typeface="Calibri"/>
+              </a:defRPr>
+            </a:pPr>
+            <a:r>
+              <a:t>One-Click Deployment Revolution</a:t>
+            </a:r>
+          </a:p>
+        </p:txBody>
+      </p:sp>
+      <p:sp>
+        <p:nvSpPr>
+          <p:cNvPr id="8" name="TextBox 7"/>
+          <p:cNvSpPr txBox="1"/>
+          <p:nvPr/>
+        </p:nvSpPr>
+        <p:spPr>
+          <a:xfrm>
+            <a:off x="1097280" y="4206240"/>
+            <a:ext cx="9966960" cy="1371600"/>
+          </a:xfrm>
+          <a:prstGeom prst="rect">
+            <a:avLst/>
+          </a:prstGeom>
+          <a:noFill/>
+        </p:spPr>
+        <p:txBody>
+          <a:bodyPr wrap="square">
+            <a:spAutoFit/>
+          </a:bodyPr>
+          <a:lstStyle/>
+          <a:p>
+            <a:pPr algn="l">
+              <a:defRPr sz="1500" b="0" i="0">
                 <a:solidFill>
                   <a:srgbClr val="E2E2EA"/>
                 </a:solidFill>
@@ -6787,115 +7755,7 @@
               </a:defRPr>
             </a:pPr>
             <a:r>
-              <a:t>from Viktor Trykolenko</a:t>
-            </a:r>
-          </a:p>
-        </p:txBody>
-      </p:sp>
-      <p:sp>
-        <p:nvSpPr>
-          <p:cNvPr id="7" name="TextBox 6"/>
-          <p:cNvSpPr txBox="1"/>
-          <p:nvPr/>
-        </p:nvSpPr>
-        <p:spPr>
-          <a:xfrm>
-            <a:off x="1097280" y="3108960"/>
-            <a:ext cx="9966960" cy="365760"/>
-          </a:xfrm>
-          <a:prstGeom prst="rect">
-            <a:avLst/>
-          </a:prstGeom>
-          <a:noFill/>
-        </p:spPr>
-        <p:txBody>
-          <a:bodyPr wrap="square">
-            <a:spAutoFit/>
-          </a:bodyPr>
-          <a:lstStyle/>
-          <a:p>
-            <a:pPr algn="l">
-              <a:defRPr sz="1400" b="1" i="0">
-                <a:solidFill>
-                  <a:srgbClr val="FFFFFF"/>
-                </a:solidFill>
-                <a:latin typeface="Calibri"/>
-              </a:defRPr>
-            </a:pPr>
-            <a:r>
-              <a:t>to: Iurii Kotov</a:t>
-            </a:r>
-          </a:p>
-        </p:txBody>
-      </p:sp>
-      <p:sp>
-        <p:nvSpPr>
-          <p:cNvPr id="8" name="TextBox 7"/>
-          <p:cNvSpPr txBox="1"/>
-          <p:nvPr/>
-        </p:nvSpPr>
-        <p:spPr>
-          <a:xfrm>
-            <a:off x="1097280" y="3749039"/>
-            <a:ext cx="9966960" cy="1097280"/>
-          </a:xfrm>
-          <a:prstGeom prst="rect">
-            <a:avLst/>
-          </a:prstGeom>
-          <a:noFill/>
-        </p:spPr>
-        <p:txBody>
-          <a:bodyPr wrap="square">
-            <a:spAutoFit/>
-          </a:bodyPr>
-          <a:lstStyle/>
-          <a:p>
-            <a:pPr algn="l">
-              <a:defRPr sz="1500" b="0" i="1">
-                <a:solidFill>
-                  <a:srgbClr val="E2E2EA"/>
-                </a:solidFill>
-                <a:latin typeface="Calibri"/>
-              </a:defRPr>
-            </a:pPr>
-            <a:r>
-              <a:t>"Exceptional technical leadership and project delivery"</a:t>
-            </a:r>
-          </a:p>
-        </p:txBody>
-      </p:sp>
-      <p:sp>
-        <p:nvSpPr>
-          <p:cNvPr id="9" name="TextBox 8"/>
-          <p:cNvSpPr txBox="1"/>
-          <p:nvPr/>
-        </p:nvSpPr>
-        <p:spPr>
-          <a:xfrm>
-            <a:off x="1097280" y="5120640"/>
-            <a:ext cx="9966960" cy="457200"/>
-          </a:xfrm>
-          <a:prstGeom prst="rect">
-            <a:avLst/>
-          </a:prstGeom>
-          <a:noFill/>
-        </p:spPr>
-        <p:txBody>
-          <a:bodyPr wrap="square">
-            <a:spAutoFit/>
-          </a:bodyPr>
-          <a:lstStyle/>
-          <a:p>
-            <a:pPr algn="l">
-              <a:defRPr sz="1200" b="1" i="0">
-                <a:solidFill>
-                  <a:srgbClr val="FFB74D"/>
-                </a:solidFill>
-                <a:latin typeface="Calibri"/>
-              </a:defRPr>
-            </a:pPr>
-            <a:r>
-              <a:t>Leadership · Delivery</a:t>
+              <a:t>Gleb and the DevOps team launched Coolify — deploy applications in just a few clicks. The community response has been explosive with massive engagement across all channels.</a:t>
             </a:r>
           </a:p>
         </p:txBody>
@@ -6941,7 +7801,7 @@
             <a:avLst/>
           </a:prstGeom>
           <a:solidFill>
-            <a:srgbClr val="9575CD"/>
+            <a:srgbClr val="06B6D4"/>
           </a:solidFill>
           <a:ln>
             <a:noFill/>
@@ -6994,13 +7854,13 @@
             <a:pPr algn="l">
               <a:defRPr sz="1000" b="1">
                 <a:solidFill>
-                  <a:srgbClr val="9575CD"/>
-                </a:solidFill>
-                <a:latin typeface="Calibri"/>
-              </a:defRPr>
-            </a:pPr>
-            <a:r>
-              <a:t>⭐  CLAPS</a:t>
+                  <a:srgbClr val="06B6D4"/>
+                </a:solidFill>
+                <a:latin typeface="Calibri"/>
+              </a:defRPr>
+            </a:pPr>
+            <a:r>
+              <a:t>🤖  WIN</a:t>
             </a:r>
           </a:p>
         </p:txBody>
@@ -7030,13 +7890,13 @@
             <a:pPr algn="l">
               <a:defRPr sz="3200" b="1" i="0">
                 <a:solidFill>
-                  <a:srgbClr val="9575CD"/>
-                </a:solidFill>
-                <a:latin typeface="Calibri"/>
-              </a:defRPr>
-            </a:pPr>
-            <a:r>
-              <a:t>Excellence</a:t>
+                  <a:srgbClr val="06B6D4"/>
+                </a:solidFill>
+                <a:latin typeface="Calibri"/>
+              </a:defRPr>
+            </a:pPr>
+            <a:r>
+              <a:t>Zero-Code AI Mastery</a:t>
             </a:r>
           </a:p>
         </p:txBody>
@@ -7050,29 +7910,29 @@
         <p:spPr>
           <a:xfrm>
             <a:off x="1097280" y="2103120"/>
-            <a:ext cx="2743200" cy="548640"/>
-          </a:xfrm>
-          <a:prstGeom prst="rect">
-            <a:avLst/>
-          </a:prstGeom>
-          <a:noFill/>
-        </p:spPr>
-        <p:txBody>
-          <a:bodyPr wrap="square">
-            <a:spAutoFit/>
-          </a:bodyPr>
-          <a:lstStyle/>
-          <a:p>
-            <a:pPr algn="l">
-              <a:defRPr sz="2800" b="1" i="0">
-                <a:solidFill>
-                  <a:srgbClr val="9575CD"/>
-                </a:solidFill>
-                <a:latin typeface="Calibri"/>
-              </a:defRPr>
-            </a:pPr>
-            <a:r>
-              <a:t>50</a:t>
+            <a:ext cx="4572000" cy="822960"/>
+          </a:xfrm>
+          <a:prstGeom prst="rect">
+            <a:avLst/>
+          </a:prstGeom>
+          <a:noFill/>
+        </p:spPr>
+        <p:txBody>
+          <a:bodyPr wrap="square">
+            <a:spAutoFit/>
+          </a:bodyPr>
+          <a:lstStyle/>
+          <a:p>
+            <a:pPr algn="l">
+              <a:defRPr sz="4800" b="1" i="0">
+                <a:solidFill>
+                  <a:srgbClr val="06B6D4"/>
+                </a:solidFill>
+                <a:latin typeface="Calibri"/>
+              </a:defRPr>
+            </a:pPr>
+            <a:r>
+              <a:t>100%</a:t>
             </a:r>
           </a:p>
         </p:txBody>
@@ -7085,7 +7945,43 @@
         </p:nvSpPr>
         <p:spPr>
           <a:xfrm>
-            <a:off x="1097280" y="2651760"/>
+            <a:off x="1097280" y="2834640"/>
+            <a:ext cx="4572000" cy="365760"/>
+          </a:xfrm>
+          <a:prstGeom prst="rect">
+            <a:avLst/>
+          </a:prstGeom>
+          <a:noFill/>
+        </p:spPr>
+        <p:txBody>
+          <a:bodyPr wrap="square">
+            <a:spAutoFit/>
+          </a:bodyPr>
+          <a:lstStyle/>
+          <a:p>
+            <a:pPr algn="l">
+              <a:defRPr sz="1200" b="0" i="0">
+                <a:solidFill>
+                  <a:srgbClr val="8F95A3"/>
+                </a:solidFill>
+                <a:latin typeface="Calibri"/>
+              </a:defRPr>
+            </a:pPr>
+            <a:r>
+              <a:t>AI-powered</a:t>
+            </a:r>
+          </a:p>
+        </p:txBody>
+      </p:sp>
+      <p:sp>
+        <p:nvSpPr>
+          <p:cNvPr id="7" name="TextBox 6"/>
+          <p:cNvSpPr txBox="1"/>
+          <p:nvPr/>
+        </p:nvSpPr>
+        <p:spPr>
+          <a:xfrm>
+            <a:off x="1097280" y="3291840"/>
             <a:ext cx="9966960" cy="365760"/>
           </a:xfrm>
           <a:prstGeom prst="rect">
@@ -7108,35 +8004,35 @@
               </a:defRPr>
             </a:pPr>
             <a:r>
-              <a:t>from Jasmine Nunez</a:t>
-            </a:r>
-          </a:p>
-        </p:txBody>
-      </p:sp>
-      <p:sp>
-        <p:nvSpPr>
-          <p:cNvPr id="7" name="TextBox 6"/>
-          <p:cNvSpPr txBox="1"/>
-          <p:nvPr/>
-        </p:nvSpPr>
-        <p:spPr>
-          <a:xfrm>
-            <a:off x="1097280" y="3108960"/>
-            <a:ext cx="9966960" cy="365760"/>
-          </a:xfrm>
-          <a:prstGeom prst="rect">
-            <a:avLst/>
-          </a:prstGeom>
-          <a:noFill/>
-        </p:spPr>
-        <p:txBody>
-          <a:bodyPr wrap="square">
-            <a:spAutoFit/>
-          </a:bodyPr>
-          <a:lstStyle/>
-          <a:p>
-            <a:pPr algn="l">
-              <a:defRPr sz="1400" b="1" i="0">
+              <a:t>by Liliya Garifullina</a:t>
+            </a:r>
+          </a:p>
+        </p:txBody>
+      </p:sp>
+      <p:sp>
+        <p:nvSpPr>
+          <p:cNvPr id="8" name="TextBox 7"/>
+          <p:cNvSpPr txBox="1"/>
+          <p:nvPr/>
+        </p:nvSpPr>
+        <p:spPr>
+          <a:xfrm>
+            <a:off x="1097280" y="3840480"/>
+            <a:ext cx="9966960" cy="457200"/>
+          </a:xfrm>
+          <a:prstGeom prst="rect">
+            <a:avLst/>
+          </a:prstGeom>
+          <a:noFill/>
+        </p:spPr>
+        <p:txBody>
+          <a:bodyPr wrap="square">
+            <a:spAutoFit/>
+          </a:bodyPr>
+          <a:lstStyle/>
+          <a:p>
+            <a:pPr algn="l">
+              <a:defRPr sz="1800" b="1" i="0">
                 <a:solidFill>
                   <a:srgbClr val="FFFFFF"/>
                 </a:solidFill>
@@ -7144,35 +8040,35 @@
               </a:defRPr>
             </a:pPr>
             <a:r>
-              <a:t>to: Michelle Walter</a:t>
-            </a:r>
-          </a:p>
-        </p:txBody>
-      </p:sp>
-      <p:sp>
-        <p:nvSpPr>
-          <p:cNvPr id="8" name="TextBox 7"/>
-          <p:cNvSpPr txBox="1"/>
-          <p:nvPr/>
-        </p:nvSpPr>
-        <p:spPr>
-          <a:xfrm>
-            <a:off x="1097280" y="3749039"/>
-            <a:ext cx="9966960" cy="1097280"/>
-          </a:xfrm>
-          <a:prstGeom prst="rect">
-            <a:avLst/>
-          </a:prstGeom>
-          <a:noFill/>
-        </p:spPr>
-        <p:txBody>
-          <a:bodyPr wrap="square">
-            <a:spAutoFit/>
-          </a:bodyPr>
-          <a:lstStyle/>
-          <a:p>
-            <a:pPr algn="l">
-              <a:defRPr sz="1500" b="0" i="1">
+              <a:t>From Slack to Live Dashboard</a:t>
+            </a:r>
+          </a:p>
+        </p:txBody>
+      </p:sp>
+      <p:sp>
+        <p:nvSpPr>
+          <p:cNvPr id="9" name="TextBox 8"/>
+          <p:cNvSpPr txBox="1"/>
+          <p:nvPr/>
+        </p:nvSpPr>
+        <p:spPr>
+          <a:xfrm>
+            <a:off x="1097280" y="4389120"/>
+            <a:ext cx="9966960" cy="914400"/>
+          </a:xfrm>
+          <a:prstGeom prst="rect">
+            <a:avLst/>
+          </a:prstGeom>
+          <a:noFill/>
+        </p:spPr>
+        <p:txBody>
+          <a:bodyPr wrap="square">
+            <a:spAutoFit/>
+          </a:bodyPr>
+          <a:lstStyle/>
+          <a:p>
+            <a:pPr algn="l">
+              <a:defRPr sz="1400" b="0" i="0">
                 <a:solidFill>
                   <a:srgbClr val="E2E2EA"/>
                 </a:solidFill>
@@ -7180,20 +8076,20 @@
               </a:defRPr>
             </a:pPr>
             <a:r>
-              <a:t>"Outstanding performance and dedication to quality"</a:t>
-            </a:r>
-          </a:p>
-        </p:txBody>
-      </p:sp>
-      <p:sp>
-        <p:nvSpPr>
-          <p:cNvPr id="9" name="TextBox 8"/>
-          <p:cNvSpPr txBox="1"/>
-          <p:nvPr/>
-        </p:nvSpPr>
-        <p:spPr>
-          <a:xfrm>
-            <a:off x="1097280" y="5120640"/>
+              <a:t>Built a fully automated AI system — Slack data curation to auto-deploying live office TVs — using only AI tools and zero coding experience. A perfect example of our democratized building culture.</a:t>
+            </a:r>
+          </a:p>
+        </p:txBody>
+      </p:sp>
+      <p:sp>
+        <p:nvSpPr>
+          <p:cNvPr id="10" name="TextBox 9"/>
+          <p:cNvSpPr txBox="1"/>
+          <p:nvPr/>
+        </p:nvSpPr>
+        <p:spPr>
+          <a:xfrm>
+            <a:off x="1097280" y="5486400"/>
             <a:ext cx="9966960" cy="457200"/>
           </a:xfrm>
           <a:prstGeom prst="rect">
@@ -7208,15 +8104,15 @@
           <a:lstStyle/>
           <a:p>
             <a:pPr algn="l">
-              <a:defRPr sz="1200" b="1" i="0">
-                <a:solidFill>
-                  <a:srgbClr val="9575CD"/>
-                </a:solidFill>
-                <a:latin typeface="Calibri"/>
-              </a:defRPr>
-            </a:pPr>
-            <a:r>
-              <a:t>Excellence · Quality</a:t>
+              <a:defRPr sz="1300" b="0" i="1">
+                <a:solidFill>
+                  <a:srgbClr val="8F95A3"/>
+                </a:solidFill>
+                <a:latin typeface="Calibri"/>
+              </a:defRPr>
+            </a:pPr>
+            <a:r>
+              <a:t>💬 "If she can do it, you can too"</a:t>
             </a:r>
           </a:p>
         </p:txBody>
@@ -7262,7 +8158,7 @@
             <a:avLst/>
           </a:prstGeom>
           <a:solidFill>
-            <a:srgbClr val="26C6DA"/>
+            <a:srgbClr val="F59E0B"/>
           </a:solidFill>
           <a:ln>
             <a:noFill/>
@@ -7315,13 +8211,13 @@
             <a:pPr algn="l">
               <a:defRPr sz="1000" b="1">
                 <a:solidFill>
-                  <a:srgbClr val="26C6DA"/>
-                </a:solidFill>
-                <a:latin typeface="Calibri"/>
-              </a:defRPr>
-            </a:pPr>
-            <a:r>
-              <a:t>🚀  CLAPS</a:t>
+                  <a:srgbClr val="F59E0B"/>
+                </a:solidFill>
+                <a:latin typeface="Calibri"/>
+              </a:defRPr>
+            </a:pPr>
+            <a:r>
+              <a:t>🎂  CELEBRATION</a:t>
             </a:r>
           </a:p>
         </p:txBody>
@@ -7351,13 +8247,13 @@
             <a:pPr algn="l">
               <a:defRPr sz="3200" b="1" i="0">
                 <a:solidFill>
-                  <a:srgbClr val="26C6DA"/>
-                </a:solidFill>
-                <a:latin typeface="Calibri"/>
-              </a:defRPr>
-            </a:pPr>
-            <a:r>
-              <a:t>Team Spirit</a:t>
+                  <a:srgbClr val="F59E0B"/>
+                </a:solidFill>
+                <a:latin typeface="Calibri"/>
+              </a:defRPr>
+            </a:pPr>
+            <a:r>
+              <a:t>Happy Birthday!</a:t>
             </a:r>
           </a:p>
         </p:txBody>
@@ -7371,7 +8267,7 @@
         <p:spPr>
           <a:xfrm>
             <a:off x="1097280" y="2103120"/>
-            <a:ext cx="2743200" cy="548640"/>
+            <a:ext cx="9966960" cy="640080"/>
           </a:xfrm>
           <a:prstGeom prst="rect">
             <a:avLst/>
@@ -7387,13 +8283,13 @@
             <a:pPr algn="l">
               <a:defRPr sz="2800" b="1" i="0">
                 <a:solidFill>
-                  <a:srgbClr val="26C6DA"/>
-                </a:solidFill>
-                <a:latin typeface="Calibri"/>
-              </a:defRPr>
-            </a:pPr>
-            <a:r>
-              <a:t>50</a:t>
+                  <a:srgbClr val="FFFFFF"/>
+                </a:solidFill>
+                <a:latin typeface="Calibri"/>
+              </a:defRPr>
+            </a:pPr>
+            <a:r>
+              <a:t>Kirill Khramkov</a:t>
             </a:r>
           </a:p>
         </p:txBody>
@@ -7406,7 +8302,7 @@
         </p:nvSpPr>
         <p:spPr>
           <a:xfrm>
-            <a:off x="1097280" y="2651760"/>
+            <a:off x="1097280" y="2743200"/>
             <a:ext cx="9966960" cy="365760"/>
           </a:xfrm>
           <a:prstGeom prst="rect">
@@ -7423,49 +8319,49 @@
             <a:pPr algn="l">
               <a:defRPr sz="1400" b="0" i="0">
                 <a:solidFill>
+                  <a:srgbClr val="8F95A3"/>
+                </a:solidFill>
+                <a:latin typeface="Calibri"/>
+              </a:defRPr>
+            </a:pPr>
+            <a:r>
+              <a:t>March 14, 2026</a:t>
+            </a:r>
+          </a:p>
+        </p:txBody>
+      </p:sp>
+      <p:sp>
+        <p:nvSpPr>
+          <p:cNvPr id="7" name="TextBox 6"/>
+          <p:cNvSpPr txBox="1"/>
+          <p:nvPr/>
+        </p:nvSpPr>
+        <p:spPr>
+          <a:xfrm>
+            <a:off x="1097280" y="3291840"/>
+            <a:ext cx="9966960" cy="914400"/>
+          </a:xfrm>
+          <a:prstGeom prst="rect">
+            <a:avLst/>
+          </a:prstGeom>
+          <a:noFill/>
+        </p:spPr>
+        <p:txBody>
+          <a:bodyPr wrap="square">
+            <a:spAutoFit/>
+          </a:bodyPr>
+          <a:lstStyle/>
+          <a:p>
+            <a:pPr algn="l">
+              <a:defRPr sz="1600" b="0" i="0">
+                <a:solidFill>
                   <a:srgbClr val="E2E2EA"/>
                 </a:solidFill>
                 <a:latin typeface="Calibri"/>
               </a:defRPr>
             </a:pPr>
             <a:r>
-              <a:t>from Michael Lotfy</a:t>
-            </a:r>
-          </a:p>
-        </p:txBody>
-      </p:sp>
-      <p:sp>
-        <p:nvSpPr>
-          <p:cNvPr id="7" name="TextBox 6"/>
-          <p:cNvSpPr txBox="1"/>
-          <p:nvPr/>
-        </p:nvSpPr>
-        <p:spPr>
-          <a:xfrm>
-            <a:off x="1097280" y="3108960"/>
-            <a:ext cx="9966960" cy="365760"/>
-          </a:xfrm>
-          <a:prstGeom prst="rect">
-            <a:avLst/>
-          </a:prstGeom>
-          <a:noFill/>
-        </p:spPr>
-        <p:txBody>
-          <a:bodyPr wrap="square">
-            <a:spAutoFit/>
-          </a:bodyPr>
-          <a:lstStyle/>
-          <a:p>
-            <a:pPr algn="l">
-              <a:defRPr sz="1400" b="1" i="0">
-                <a:solidFill>
-                  <a:srgbClr val="FFFFFF"/>
-                </a:solidFill>
-                <a:latin typeface="Calibri"/>
-              </a:defRPr>
-            </a:pPr>
-            <a:r>
-              <a:t>to: Isahakyan</a:t>
+              <a:t>Thanks, everyone — your warm wishes made my day extra special!</a:t>
             </a:r>
           </a:p>
         </p:txBody>
@@ -7478,43 +8374,7 @@
         </p:nvSpPr>
         <p:spPr>
           <a:xfrm>
-            <a:off x="1097280" y="3749039"/>
-            <a:ext cx="9966960" cy="1097280"/>
-          </a:xfrm>
-          <a:prstGeom prst="rect">
-            <a:avLst/>
-          </a:prstGeom>
-          <a:noFill/>
-        </p:spPr>
-        <p:txBody>
-          <a:bodyPr wrap="square">
-            <a:spAutoFit/>
-          </a:bodyPr>
-          <a:lstStyle/>
-          <a:p>
-            <a:pPr algn="l">
-              <a:defRPr sz="1500" b="0" i="1">
-                <a:solidFill>
-                  <a:srgbClr val="E2E2EA"/>
-                </a:solidFill>
-                <a:latin typeface="Calibri"/>
-              </a:defRPr>
-            </a:pPr>
-            <a:r>
-              <a:t>"Incredible teamwork and collaborative excellence"</a:t>
-            </a:r>
-          </a:p>
-        </p:txBody>
-      </p:sp>
-      <p:sp>
-        <p:nvSpPr>
-          <p:cNvPr id="9" name="TextBox 8"/>
-          <p:cNvSpPr txBox="1"/>
-          <p:nvPr/>
-        </p:nvSpPr>
-        <p:spPr>
-          <a:xfrm>
-            <a:off x="1097280" y="5120640"/>
+            <a:off x="1097280" y="4572000"/>
             <a:ext cx="9966960" cy="457200"/>
           </a:xfrm>
           <a:prstGeom prst="rect">
@@ -7529,15 +8389,15 @@
           <a:lstStyle/>
           <a:p>
             <a:pPr algn="l">
-              <a:defRPr sz="1200" b="1" i="0">
-                <a:solidFill>
-                  <a:srgbClr val="26C6DA"/>
-                </a:solidFill>
-                <a:latin typeface="Calibri"/>
-              </a:defRPr>
-            </a:pPr>
-            <a:r>
-              <a:t>Collaboration · Teamwork</a:t>
+              <a:defRPr sz="1400" b="0" i="1">
+                <a:solidFill>
+                  <a:srgbClr val="F59E0B"/>
+                </a:solidFill>
+                <a:latin typeface="Calibri"/>
+              </a:defRPr>
+            </a:pPr>
+            <a:r>
+              <a:t>Engineering • Barcelona</a:t>
             </a:r>
           </a:p>
         </p:txBody>
@@ -7583,7 +8443,7 @@
             <a:avLst/>
           </a:prstGeom>
           <a:solidFill>
-            <a:srgbClr val="66BB6A"/>
+            <a:srgbClr val="EC4899"/>
           </a:solidFill>
           <a:ln>
             <a:noFill/>
@@ -7636,13 +8496,13 @@
             <a:pPr algn="l">
               <a:defRPr sz="1000" b="1">
                 <a:solidFill>
-                  <a:srgbClr val="66BB6A"/>
-                </a:solidFill>
-                <a:latin typeface="Calibri"/>
-              </a:defRPr>
-            </a:pPr>
-            <a:r>
-              <a:t>💪  CLAPS</a:t>
+                  <a:srgbClr val="EC4899"/>
+                </a:solidFill>
+                <a:latin typeface="Calibri"/>
+              </a:defRPr>
+            </a:pPr>
+            <a:r>
+              <a:t>👏  CLAPS</a:t>
             </a:r>
           </a:p>
         </p:txBody>
@@ -7672,13 +8532,13 @@
             <a:pPr algn="l">
               <a:defRPr sz="3200" b="1" i="0">
                 <a:solidFill>
-                  <a:srgbClr val="66BB6A"/>
-                </a:solidFill>
-                <a:latin typeface="Calibri"/>
-              </a:defRPr>
-            </a:pPr>
-            <a:r>
-              <a:t>Engineering Excellence</a:t>
+                  <a:srgbClr val="EC4899"/>
+                </a:solidFill>
+                <a:latin typeface="Calibri"/>
+              </a:defRPr>
+            </a:pPr>
+            <a:r>
+              <a:t>DevOps Champion</a:t>
             </a:r>
           </a:p>
         </p:txBody>
@@ -7708,7 +8568,7 @@
             <a:pPr algn="l">
               <a:defRPr sz="2800" b="1" i="0">
                 <a:solidFill>
-                  <a:srgbClr val="66BB6A"/>
+                  <a:srgbClr val="EC4899"/>
                 </a:solidFill>
                 <a:latin typeface="Calibri"/>
               </a:defRPr>
@@ -7750,7 +8610,7 @@
               </a:defRPr>
             </a:pPr>
             <a:r>
-              <a:t>from Valentino Agazzi Mandozzi</a:t>
+              <a:t>from Mykhailo Kukharskyi</a:t>
             </a:r>
           </a:p>
         </p:txBody>
@@ -7786,7 +8646,7 @@
               </a:defRPr>
             </a:pPr>
             <a:r>
-              <a:t>to: Eren Sakarya</a:t>
+              <a:t>to: Gleb Krahotkin</a:t>
             </a:r>
           </a:p>
         </p:txBody>
@@ -7822,7 +8682,7 @@
               </a:defRPr>
             </a:pPr>
             <a:r>
-              <a:t>"Exceptional technical expertise and problem-solving"</a:t>
+              <a:t>"Outstanding work on Coolify deployment platform"</a:t>
             </a:r>
           </a:p>
         </p:txBody>
@@ -7852,13 +8712,13 @@
             <a:pPr algn="l">
               <a:defRPr sz="1200" b="1" i="0">
                 <a:solidFill>
-                  <a:srgbClr val="66BB6A"/>
-                </a:solidFill>
-                <a:latin typeface="Calibri"/>
-              </a:defRPr>
-            </a:pPr>
-            <a:r>
-              <a:t>Technical Excellence · Innovation</a:t>
+                  <a:srgbClr val="EC4899"/>
+                </a:solidFill>
+                <a:latin typeface="Calibri"/>
+              </a:defRPr>
+            </a:pPr>
+            <a:r>
+              <a:t>Innovation · Excellence</a:t>
             </a:r>
           </a:p>
         </p:txBody>
@@ -7904,7 +8764,7 @@
             <a:avLst/>
           </a:prstGeom>
           <a:solidFill>
-            <a:srgbClr val="FF7043"/>
+            <a:srgbClr val="EF4444"/>
           </a:solidFill>
           <a:ln>
             <a:noFill/>
@@ -7957,13 +8817,13 @@
             <a:pPr algn="l">
               <a:defRPr sz="1000" b="1">
                 <a:solidFill>
-                  <a:srgbClr val="FF7043"/>
-                </a:solidFill>
-                <a:latin typeface="Calibri"/>
-              </a:defRPr>
-            </a:pPr>
-            <a:r>
-              <a:t>🎯  WIN</a:t>
+                  <a:srgbClr val="EF4444"/>
+                </a:solidFill>
+                <a:latin typeface="Calibri"/>
+              </a:defRPr>
+            </a:pPr>
+            <a:r>
+              <a:t>🔥  CLAPS</a:t>
             </a:r>
           </a:p>
         </p:txBody>
@@ -7993,13 +8853,13 @@
             <a:pPr algn="l">
               <a:defRPr sz="3200" b="1" i="0">
                 <a:solidFill>
-                  <a:srgbClr val="FF7043"/>
-                </a:solidFill>
-                <a:latin typeface="Calibri"/>
-              </a:defRPr>
-            </a:pPr>
-            <a:r>
-              <a:t>DevOps Innovation</a:t>
+                  <a:srgbClr val="EF4444"/>
+                </a:solidFill>
+                <a:latin typeface="Calibri"/>
+              </a:defRPr>
+            </a:pPr>
+            <a:r>
+              <a:t>Technical Excellence</a:t>
             </a:r>
           </a:p>
         </p:txBody>
@@ -8013,29 +8873,29 @@
         <p:spPr>
           <a:xfrm>
             <a:off x="1097280" y="2103120"/>
-            <a:ext cx="4572000" cy="822960"/>
-          </a:xfrm>
-          <a:prstGeom prst="rect">
-            <a:avLst/>
-          </a:prstGeom>
-          <a:noFill/>
-        </p:spPr>
-        <p:txBody>
-          <a:bodyPr wrap="square">
-            <a:spAutoFit/>
-          </a:bodyPr>
-          <a:lstStyle/>
-          <a:p>
-            <a:pPr algn="l">
-              <a:defRPr sz="4800" b="1" i="0">
-                <a:solidFill>
-                  <a:srgbClr val="FF7043"/>
-                </a:solidFill>
-                <a:latin typeface="Calibri"/>
-              </a:defRPr>
-            </a:pPr>
-            <a:r>
-              <a:t>1-click</a:t>
+            <a:ext cx="2743200" cy="548640"/>
+          </a:xfrm>
+          <a:prstGeom prst="rect">
+            <a:avLst/>
+          </a:prstGeom>
+          <a:noFill/>
+        </p:spPr>
+        <p:txBody>
+          <a:bodyPr wrap="square">
+            <a:spAutoFit/>
+          </a:bodyPr>
+          <a:lstStyle/>
+          <a:p>
+            <a:pPr algn="l">
+              <a:defRPr sz="2800" b="1" i="0">
+                <a:solidFill>
+                  <a:srgbClr val="EF4444"/>
+                </a:solidFill>
+                <a:latin typeface="Calibri"/>
+              </a:defRPr>
+            </a:pPr>
+            <a:r>
+              <a:t>50</a:t>
             </a:r>
           </a:p>
         </p:txBody>
@@ -8048,30 +8908,30 @@
         </p:nvSpPr>
         <p:spPr>
           <a:xfrm>
-            <a:off x="1097280" y="2834640"/>
-            <a:ext cx="4572000" cy="365760"/>
-          </a:xfrm>
-          <a:prstGeom prst="rect">
-            <a:avLst/>
-          </a:prstGeom>
-          <a:noFill/>
-        </p:spPr>
-        <p:txBody>
-          <a:bodyPr wrap="square">
-            <a:spAutoFit/>
-          </a:bodyPr>
-          <a:lstStyle/>
-          <a:p>
-            <a:pPr algn="l">
-              <a:defRPr sz="1200" b="0" i="0">
-                <a:solidFill>
-                  <a:srgbClr val="8F95A3"/>
-                </a:solidFill>
-                <a:latin typeface="Calibri"/>
-              </a:defRPr>
-            </a:pPr>
-            <a:r>
-              <a:t>deployment</a:t>
+            <a:off x="1097280" y="2651760"/>
+            <a:ext cx="9966960" cy="365760"/>
+          </a:xfrm>
+          <a:prstGeom prst="rect">
+            <a:avLst/>
+          </a:prstGeom>
+          <a:noFill/>
+        </p:spPr>
+        <p:txBody>
+          <a:bodyPr wrap="square">
+            <a:spAutoFit/>
+          </a:bodyPr>
+          <a:lstStyle/>
+          <a:p>
+            <a:pPr algn="l">
+              <a:defRPr sz="1400" b="0" i="0">
+                <a:solidFill>
+                  <a:srgbClr val="E2E2EA"/>
+                </a:solidFill>
+                <a:latin typeface="Calibri"/>
+              </a:defRPr>
+            </a:pPr>
+            <a:r>
+              <a:t>from Viktor Trykolenko</a:t>
             </a:r>
           </a:p>
         </p:txBody>
@@ -8084,7 +8944,7 @@
         </p:nvSpPr>
         <p:spPr>
           <a:xfrm>
-            <a:off x="1097280" y="3291840"/>
+            <a:off x="1097280" y="3108960"/>
             <a:ext cx="9966960" cy="365760"/>
           </a:xfrm>
           <a:prstGeom prst="rect">
@@ -8099,7 +8959,43 @@
           <a:lstStyle/>
           <a:p>
             <a:pPr algn="l">
-              <a:defRPr sz="1400" b="0" i="0">
+              <a:defRPr sz="1400" b="1" i="0">
+                <a:solidFill>
+                  <a:srgbClr val="FFFFFF"/>
+                </a:solidFill>
+                <a:latin typeface="Calibri"/>
+              </a:defRPr>
+            </a:pPr>
+            <a:r>
+              <a:t>to: Iurii Kotov</a:t>
+            </a:r>
+          </a:p>
+        </p:txBody>
+      </p:sp>
+      <p:sp>
+        <p:nvSpPr>
+          <p:cNvPr id="8" name="TextBox 7"/>
+          <p:cNvSpPr txBox="1"/>
+          <p:nvPr/>
+        </p:nvSpPr>
+        <p:spPr>
+          <a:xfrm>
+            <a:off x="1097280" y="3749039"/>
+            <a:ext cx="9966960" cy="1097280"/>
+          </a:xfrm>
+          <a:prstGeom prst="rect">
+            <a:avLst/>
+          </a:prstGeom>
+          <a:noFill/>
+        </p:spPr>
+        <p:txBody>
+          <a:bodyPr wrap="square">
+            <a:spAutoFit/>
+          </a:bodyPr>
+          <a:lstStyle/>
+          <a:p>
+            <a:pPr algn="l">
+              <a:defRPr sz="1500" b="0" i="1">
                 <a:solidFill>
                   <a:srgbClr val="E2E2EA"/>
                 </a:solidFill>
@@ -8107,20 +9003,20 @@
               </a:defRPr>
             </a:pPr>
             <a:r>
-              <a:t>by Gleb Krahotkin</a:t>
-            </a:r>
-          </a:p>
-        </p:txBody>
-      </p:sp>
-      <p:sp>
-        <p:nvSpPr>
-          <p:cNvPr id="8" name="TextBox 7"/>
-          <p:cNvSpPr txBox="1"/>
-          <p:nvPr/>
-        </p:nvSpPr>
-        <p:spPr>
-          <a:xfrm>
-            <a:off x="1097280" y="3840480"/>
+              <a:t>"Exceptional technical leadership and innovation"</a:t>
+            </a:r>
+          </a:p>
+        </p:txBody>
+      </p:sp>
+      <p:sp>
+        <p:nvSpPr>
+          <p:cNvPr id="9" name="TextBox 8"/>
+          <p:cNvSpPr txBox="1"/>
+          <p:nvPr/>
+        </p:nvSpPr>
+        <p:spPr>
+          <a:xfrm>
+            <a:off x="1097280" y="5120640"/>
             <a:ext cx="9966960" cy="457200"/>
           </a:xfrm>
           <a:prstGeom prst="rect">
@@ -8135,87 +9031,15 @@
           <a:lstStyle/>
           <a:p>
             <a:pPr algn="l">
-              <a:defRPr sz="1800" b="1" i="0">
-                <a:solidFill>
-                  <a:srgbClr val="FFFFFF"/>
-                </a:solidFill>
-                <a:latin typeface="Calibri"/>
-              </a:defRPr>
-            </a:pPr>
-            <a:r>
-              <a:t>Coolify Platform Launch</a:t>
-            </a:r>
-          </a:p>
-        </p:txBody>
-      </p:sp>
-      <p:sp>
-        <p:nvSpPr>
-          <p:cNvPr id="9" name="TextBox 8"/>
-          <p:cNvSpPr txBox="1"/>
-          <p:nvPr/>
-        </p:nvSpPr>
-        <p:spPr>
-          <a:xfrm>
-            <a:off x="1097280" y="4389120"/>
-            <a:ext cx="9966960" cy="914400"/>
-          </a:xfrm>
-          <a:prstGeom prst="rect">
-            <a:avLst/>
-          </a:prstGeom>
-          <a:noFill/>
-        </p:spPr>
-        <p:txBody>
-          <a:bodyPr wrap="square">
-            <a:spAutoFit/>
-          </a:bodyPr>
-          <a:lstStyle/>
-          <a:p>
-            <a:pPr algn="l">
-              <a:defRPr sz="1400" b="0" i="0">
-                <a:solidFill>
-                  <a:srgbClr val="E2E2EA"/>
-                </a:solidFill>
-                <a:latin typeface="Calibri"/>
-              </a:defRPr>
-            </a:pPr>
-            <a:r>
-              <a:t>Revolutionary deployment service now available to all teams — deploy applications in just a few clicks with comprehensive security guidelines</a:t>
-            </a:r>
-          </a:p>
-        </p:txBody>
-      </p:sp>
-      <p:sp>
-        <p:nvSpPr>
-          <p:cNvPr id="10" name="TextBox 9"/>
-          <p:cNvSpPr txBox="1"/>
-          <p:nvPr/>
-        </p:nvSpPr>
-        <p:spPr>
-          <a:xfrm>
-            <a:off x="1097280" y="5486400"/>
-            <a:ext cx="9966960" cy="457200"/>
-          </a:xfrm>
-          <a:prstGeom prst="rect">
-            <a:avLst/>
-          </a:prstGeom>
-          <a:noFill/>
-        </p:spPr>
-        <p:txBody>
-          <a:bodyPr wrap="square">
-            <a:spAutoFit/>
-          </a:bodyPr>
-          <a:lstStyle/>
-          <a:p>
-            <a:pPr algn="l">
-              <a:defRPr sz="1300" b="0" i="1">
-                <a:solidFill>
-                  <a:srgbClr val="8F95A3"/>
-                </a:solidFill>
-                <a:latin typeface="Calibri"/>
-              </a:defRPr>
-            </a:pPr>
-            <a:r>
-              <a:t>💬 "Empowering non-engineering teams to build and deploy faster than ever"</a:t>
+              <a:defRPr sz="1200" b="1" i="0">
+                <a:solidFill>
+                  <a:srgbClr val="EF4444"/>
+                </a:solidFill>
+                <a:latin typeface="Calibri"/>
+              </a:defRPr>
+            </a:pPr>
+            <a:r>
+              <a:t>Excellence · Leadership</a:t>
             </a:r>
           </a:p>
         </p:txBody>
@@ -8261,7 +9085,7 @@
             <a:avLst/>
           </a:prstGeom>
           <a:solidFill>
-            <a:srgbClr val="42A5F5"/>
+            <a:srgbClr val="8B5CF6"/>
           </a:solidFill>
           <a:ln>
             <a:noFill/>
@@ -8314,13 +9138,13 @@
             <a:pPr algn="l">
               <a:defRPr sz="1000" b="1">
                 <a:solidFill>
-                  <a:srgbClr val="42A5F5"/>
-                </a:solidFill>
-                <a:latin typeface="Calibri"/>
-              </a:defRPr>
-            </a:pPr>
-            <a:r>
-              <a:t>🤖  WIN</a:t>
+                  <a:srgbClr val="8B5CF6"/>
+                </a:solidFill>
+                <a:latin typeface="Calibri"/>
+              </a:defRPr>
+            </a:pPr>
+            <a:r>
+              <a:t>⭐  CLAPS</a:t>
             </a:r>
           </a:p>
         </p:txBody>
@@ -8350,13 +9174,13 @@
             <a:pPr algn="l">
               <a:defRPr sz="3200" b="1" i="0">
                 <a:solidFill>
-                  <a:srgbClr val="42A5F5"/>
-                </a:solidFill>
-                <a:latin typeface="Calibri"/>
-              </a:defRPr>
-            </a:pPr>
-            <a:r>
-              <a:t>AI Revolution</a:t>
+                  <a:srgbClr val="8B5CF6"/>
+                </a:solidFill>
+                <a:latin typeface="Calibri"/>
+              </a:defRPr>
+            </a:pPr>
+            <a:r>
+              <a:t>Product Excellence</a:t>
             </a:r>
           </a:p>
         </p:txBody>
@@ -8370,29 +9194,29 @@
         <p:spPr>
           <a:xfrm>
             <a:off x="1097280" y="2103120"/>
-            <a:ext cx="4572000" cy="822960"/>
-          </a:xfrm>
-          <a:prstGeom prst="rect">
-            <a:avLst/>
-          </a:prstGeom>
-          <a:noFill/>
-        </p:spPr>
-        <p:txBody>
-          <a:bodyPr wrap="square">
-            <a:spAutoFit/>
-          </a:bodyPr>
-          <a:lstStyle/>
-          <a:p>
-            <a:pPr algn="l">
-              <a:defRPr sz="4800" b="1" i="0">
-                <a:solidFill>
-                  <a:srgbClr val="42A5F5"/>
-                </a:solidFill>
-                <a:latin typeface="Calibri"/>
-              </a:defRPr>
-            </a:pPr>
-            <a:r>
-              <a:t>100%</a:t>
+            <a:ext cx="2743200" cy="548640"/>
+          </a:xfrm>
+          <a:prstGeom prst="rect">
+            <a:avLst/>
+          </a:prstGeom>
+          <a:noFill/>
+        </p:spPr>
+        <p:txBody>
+          <a:bodyPr wrap="square">
+            <a:spAutoFit/>
+          </a:bodyPr>
+          <a:lstStyle/>
+          <a:p>
+            <a:pPr algn="l">
+              <a:defRPr sz="2800" b="1" i="0">
+                <a:solidFill>
+                  <a:srgbClr val="8B5CF6"/>
+                </a:solidFill>
+                <a:latin typeface="Calibri"/>
+              </a:defRPr>
+            </a:pPr>
+            <a:r>
+              <a:t>50</a:t>
             </a:r>
           </a:p>
         </p:txBody>
@@ -8405,30 +9229,30 @@
         </p:nvSpPr>
         <p:spPr>
           <a:xfrm>
-            <a:off x="1097280" y="2834640"/>
-            <a:ext cx="4572000" cy="365760"/>
-          </a:xfrm>
-          <a:prstGeom prst="rect">
-            <a:avLst/>
-          </a:prstGeom>
-          <a:noFill/>
-        </p:spPr>
-        <p:txBody>
-          <a:bodyPr wrap="square">
-            <a:spAutoFit/>
-          </a:bodyPr>
-          <a:lstStyle/>
-          <a:p>
-            <a:pPr algn="l">
-              <a:defRPr sz="1200" b="0" i="0">
-                <a:solidFill>
-                  <a:srgbClr val="8F95A3"/>
-                </a:solidFill>
-                <a:latin typeface="Calibri"/>
-              </a:defRPr>
-            </a:pPr>
-            <a:r>
-              <a:t>AI-powered</a:t>
+            <a:off x="1097280" y="2651760"/>
+            <a:ext cx="9966960" cy="365760"/>
+          </a:xfrm>
+          <a:prstGeom prst="rect">
+            <a:avLst/>
+          </a:prstGeom>
+          <a:noFill/>
+        </p:spPr>
+        <p:txBody>
+          <a:bodyPr wrap="square">
+            <a:spAutoFit/>
+          </a:bodyPr>
+          <a:lstStyle/>
+          <a:p>
+            <a:pPr algn="l">
+              <a:defRPr sz="1400" b="0" i="0">
+                <a:solidFill>
+                  <a:srgbClr val="E2E2EA"/>
+                </a:solidFill>
+                <a:latin typeface="Calibri"/>
+              </a:defRPr>
+            </a:pPr>
+            <a:r>
+              <a:t>from Jasmine Nunez</a:t>
             </a:r>
           </a:p>
         </p:txBody>
@@ -8441,7 +9265,7 @@
         </p:nvSpPr>
         <p:spPr>
           <a:xfrm>
-            <a:off x="1097280" y="3291840"/>
+            <a:off x="1097280" y="3108960"/>
             <a:ext cx="9966960" cy="365760"/>
           </a:xfrm>
           <a:prstGeom prst="rect">
@@ -8456,7 +9280,43 @@
           <a:lstStyle/>
           <a:p>
             <a:pPr algn="l">
-              <a:defRPr sz="1400" b="0" i="0">
+              <a:defRPr sz="1400" b="1" i="0">
+                <a:solidFill>
+                  <a:srgbClr val="FFFFFF"/>
+                </a:solidFill>
+                <a:latin typeface="Calibri"/>
+              </a:defRPr>
+            </a:pPr>
+            <a:r>
+              <a:t>to: Michelle Walter</a:t>
+            </a:r>
+          </a:p>
+        </p:txBody>
+      </p:sp>
+      <p:sp>
+        <p:nvSpPr>
+          <p:cNvPr id="8" name="TextBox 7"/>
+          <p:cNvSpPr txBox="1"/>
+          <p:nvPr/>
+        </p:nvSpPr>
+        <p:spPr>
+          <a:xfrm>
+            <a:off x="1097280" y="3749039"/>
+            <a:ext cx="9966960" cy="1097280"/>
+          </a:xfrm>
+          <a:prstGeom prst="rect">
+            <a:avLst/>
+          </a:prstGeom>
+          <a:noFill/>
+        </p:spPr>
+        <p:txBody>
+          <a:bodyPr wrap="square">
+            <a:spAutoFit/>
+          </a:bodyPr>
+          <a:lstStyle/>
+          <a:p>
+            <a:pPr algn="l">
+              <a:defRPr sz="1500" b="0" i="1">
                 <a:solidFill>
                   <a:srgbClr val="E2E2EA"/>
                 </a:solidFill>
@@ -8464,20 +9324,20 @@
               </a:defRPr>
             </a:pPr>
             <a:r>
-              <a:t>by Liliya Garifullina</a:t>
-            </a:r>
-          </a:p>
-        </p:txBody>
-      </p:sp>
-      <p:sp>
-        <p:nvSpPr>
-          <p:cNvPr id="8" name="TextBox 7"/>
-          <p:cNvSpPr txBox="1"/>
-          <p:nvPr/>
-        </p:nvSpPr>
-        <p:spPr>
-          <a:xfrm>
-            <a:off x="1097280" y="3840480"/>
+              <a:t>"Outstanding product management and delivery"</a:t>
+            </a:r>
+          </a:p>
+        </p:txBody>
+      </p:sp>
+      <p:sp>
+        <p:nvSpPr>
+          <p:cNvPr id="9" name="TextBox 8"/>
+          <p:cNvSpPr txBox="1"/>
+          <p:nvPr/>
+        </p:nvSpPr>
+        <p:spPr>
+          <a:xfrm>
+            <a:off x="1097280" y="5120640"/>
             <a:ext cx="9966960" cy="457200"/>
           </a:xfrm>
           <a:prstGeom prst="rect">
@@ -8492,87 +9352,15 @@
           <a:lstStyle/>
           <a:p>
             <a:pPr algn="l">
-              <a:defRPr sz="1800" b="1" i="0">
-                <a:solidFill>
-                  <a:srgbClr val="FFFFFF"/>
-                </a:solidFill>
-                <a:latin typeface="Calibri"/>
-              </a:defRPr>
-            </a:pPr>
-            <a:r>
-              <a:t>Zero-Code AI Dashboard Success</a:t>
-            </a:r>
-          </a:p>
-        </p:txBody>
-      </p:sp>
-      <p:sp>
-        <p:nvSpPr>
-          <p:cNvPr id="9" name="TextBox 8"/>
-          <p:cNvSpPr txBox="1"/>
-          <p:nvPr/>
-        </p:nvSpPr>
-        <p:spPr>
-          <a:xfrm>
-            <a:off x="1097280" y="4389120"/>
-            <a:ext cx="9966960" cy="914400"/>
-          </a:xfrm>
-          <a:prstGeom prst="rect">
-            <a:avLst/>
-          </a:prstGeom>
-          <a:noFill/>
-        </p:spPr>
-        <p:txBody>
-          <a:bodyPr wrap="square">
-            <a:spAutoFit/>
-          </a:bodyPr>
-          <a:lstStyle/>
-          <a:p>
-            <a:pPr algn="l">
-              <a:defRPr sz="1400" b="0" i="0">
-                <a:solidFill>
-                  <a:srgbClr val="E2E2EA"/>
-                </a:solidFill>
-                <a:latin typeface="Calibri"/>
-              </a:defRPr>
-            </a:pPr>
-            <a:r>
-              <a:t>Built fully automated AI system from Slack data to live office TV dashboard using only AI tools — no coding required</a:t>
-            </a:r>
-          </a:p>
-        </p:txBody>
-      </p:sp>
-      <p:sp>
-        <p:nvSpPr>
-          <p:cNvPr id="10" name="TextBox 9"/>
-          <p:cNvSpPr txBox="1"/>
-          <p:nvPr/>
-        </p:nvSpPr>
-        <p:spPr>
-          <a:xfrm>
-            <a:off x="1097280" y="5486400"/>
-            <a:ext cx="9966960" cy="457200"/>
-          </a:xfrm>
-          <a:prstGeom prst="rect">
-            <a:avLst/>
-          </a:prstGeom>
-          <a:noFill/>
-        </p:spPr>
-        <p:txBody>
-          <a:bodyPr wrap="square">
-            <a:spAutoFit/>
-          </a:bodyPr>
-          <a:lstStyle/>
-          <a:p>
-            <a:pPr algn="l">
-              <a:defRPr sz="1300" b="0" i="1">
-                <a:solidFill>
-                  <a:srgbClr val="8F95A3"/>
-                </a:solidFill>
-                <a:latin typeface="Calibri"/>
-              </a:defRPr>
-            </a:pPr>
-            <a:r>
-              <a:t>💬 "Proof that our AI-first future is already here — if she can do it, you can too!"</a:t>
+              <a:defRPr sz="1200" b="1" i="0">
+                <a:solidFill>
+                  <a:srgbClr val="8B5CF6"/>
+                </a:solidFill>
+                <a:latin typeface="Calibri"/>
+              </a:defRPr>
+            </a:pPr>
+            <a:r>
+              <a:t>Excellence · Results</a:t>
             </a:r>
           </a:p>
         </p:txBody>

--- a/data/archive/pulse_2026-03-14.pptx
+++ b/data/archive/pulse_2026-03-14.pptx
@@ -22,9 +22,6 @@
     <p:sldId id="270" r:id="rId21"/>
     <p:sldId id="271" r:id="rId22"/>
     <p:sldId id="272" r:id="rId23"/>
-    <p:sldId id="273" r:id="rId24"/>
-    <p:sldId id="274" r:id="rId25"/>
-    <p:sldId id="275" r:id="rId26"/>
   </p:sldIdLst>
   <p:sldSz cx="12191695" cy="6858000" type="screen4x3"/>
   <p:notesSz cx="6858000" cy="9144000"/>
@@ -3307,7 +3304,7 @@
             <a:avLst/>
           </a:prstGeom>
           <a:solidFill>
-            <a:srgbClr val="10B981"/>
+            <a:srgbClr val="F59E0B"/>
           </a:solidFill>
           <a:ln>
             <a:noFill/>
@@ -3360,13 +3357,13 @@
             <a:pPr algn="l">
               <a:defRPr sz="1000" b="1">
                 <a:solidFill>
-                  <a:srgbClr val="10B981"/>
-                </a:solidFill>
-                <a:latin typeface="Calibri"/>
-              </a:defRPr>
-            </a:pPr>
-            <a:r>
-              <a:t>🚀  CLAPS</a:t>
+                  <a:srgbClr val="F59E0B"/>
+                </a:solidFill>
+                <a:latin typeface="Calibri"/>
+              </a:defRPr>
+            </a:pPr>
+            <a:r>
+              <a:t>🔥  CLAPS</a:t>
             </a:r>
           </a:p>
         </p:txBody>
@@ -3396,13 +3393,13 @@
             <a:pPr algn="l">
               <a:defRPr sz="3200" b="1" i="0">
                 <a:solidFill>
-                  <a:srgbClr val="10B981"/>
-                </a:solidFill>
-                <a:latin typeface="Calibri"/>
-              </a:defRPr>
-            </a:pPr>
-            <a:r>
-              <a:t>Team Collaboration</a:t>
+                  <a:srgbClr val="F59E0B"/>
+                </a:solidFill>
+                <a:latin typeface="Calibri"/>
+              </a:defRPr>
+            </a:pPr>
+            <a:r>
+              <a:t>Game Development Stars</a:t>
             </a:r>
           </a:p>
         </p:txBody>
@@ -3432,13 +3429,13 @@
             <a:pPr algn="l">
               <a:defRPr sz="2800" b="1" i="0">
                 <a:solidFill>
-                  <a:srgbClr val="10B981"/>
-                </a:solidFill>
-                <a:latin typeface="Calibri"/>
-              </a:defRPr>
-            </a:pPr>
-            <a:r>
-              <a:t>50</a:t>
+                  <a:srgbClr val="F59E0B"/>
+                </a:solidFill>
+                <a:latin typeface="Calibri"/>
+              </a:defRPr>
+            </a:pPr>
+            <a:r>
+              <a:t>25</a:t>
             </a:r>
           </a:p>
         </p:txBody>
@@ -3474,7 +3471,7 @@
               </a:defRPr>
             </a:pPr>
             <a:r>
-              <a:t>from Michael Lotfy</a:t>
+              <a:t>from Sergey Orlov</a:t>
             </a:r>
           </a:p>
         </p:txBody>
@@ -3510,7 +3507,7 @@
               </a:defRPr>
             </a:pPr>
             <a:r>
-              <a:t>to: Isahakyan</a:t>
+              <a:t>to: Roman de las Heras</a:t>
             </a:r>
           </a:p>
         </p:txBody>
@@ -3546,7 +3543,7 @@
               </a:defRPr>
             </a:pPr>
             <a:r>
-              <a:t>"Exceptional teamwork and collaboration"</a:t>
+              <a:t>"Outstanding game development and creative contributions"</a:t>
             </a:r>
           </a:p>
         </p:txBody>
@@ -3576,13 +3573,13 @@
             <a:pPr algn="l">
               <a:defRPr sz="1200" b="1" i="0">
                 <a:solidFill>
-                  <a:srgbClr val="10B981"/>
-                </a:solidFill>
-                <a:latin typeface="Calibri"/>
-              </a:defRPr>
-            </a:pPr>
-            <a:r>
-              <a:t>Teamwork · Excellence</a:t>
+                  <a:srgbClr val="F59E0B"/>
+                </a:solidFill>
+                <a:latin typeface="Calibri"/>
+              </a:defRPr>
+            </a:pPr>
+            <a:r>
+              <a:t>Creativity · Excellence</a:t>
             </a:r>
           </a:p>
         </p:txBody>
@@ -3628,7 +3625,7 @@
             <a:avLst/>
           </a:prstGeom>
           <a:solidFill>
-            <a:srgbClr val="F59E0B"/>
+            <a:srgbClr val="EF4444"/>
           </a:solidFill>
           <a:ln>
             <a:noFill/>
@@ -3681,13 +3678,13 @@
             <a:pPr algn="l">
               <a:defRPr sz="1000" b="1">
                 <a:solidFill>
-                  <a:srgbClr val="F59E0B"/>
-                </a:solidFill>
-                <a:latin typeface="Calibri"/>
-              </a:defRPr>
-            </a:pPr>
-            <a:r>
-              <a:t>⚡  CLAPS</a:t>
+                  <a:srgbClr val="EF4444"/>
+                </a:solidFill>
+                <a:latin typeface="Calibri"/>
+              </a:defRPr>
+            </a:pPr>
+            <a:r>
+              <a:t>🚀  CLAPS</a:t>
             </a:r>
           </a:p>
         </p:txBody>
@@ -3717,13 +3714,13 @@
             <a:pPr algn="l">
               <a:defRPr sz="3200" b="1" i="0">
                 <a:solidFill>
-                  <a:srgbClr val="F59E0B"/>
-                </a:solidFill>
-                <a:latin typeface="Calibri"/>
-              </a:defRPr>
-            </a:pPr>
-            <a:r>
-              <a:t>Engineering Power</a:t>
+                  <a:srgbClr val="EF4444"/>
+                </a:solidFill>
+                <a:latin typeface="Calibri"/>
+              </a:defRPr>
+            </a:pPr>
+            <a:r>
+              <a:t>Development Team Power</a:t>
             </a:r>
           </a:p>
         </p:txBody>
@@ -3753,13 +3750,13 @@
             <a:pPr algn="l">
               <a:defRPr sz="2800" b="1" i="0">
                 <a:solidFill>
-                  <a:srgbClr val="F59E0B"/>
-                </a:solidFill>
-                <a:latin typeface="Calibri"/>
-              </a:defRPr>
-            </a:pPr>
-            <a:r>
-              <a:t>50</a:t>
+                  <a:srgbClr val="EF4444"/>
+                </a:solidFill>
+                <a:latin typeface="Calibri"/>
+              </a:defRPr>
+            </a:pPr>
+            <a:r>
+              <a:t>25</a:t>
             </a:r>
           </a:p>
         </p:txBody>
@@ -3795,7 +3792,7 @@
               </a:defRPr>
             </a:pPr>
             <a:r>
-              <a:t>from Valentino Agazzi Mandozzi</a:t>
+              <a:t>from Iurii Kotov</a:t>
             </a:r>
           </a:p>
         </p:txBody>
@@ -3831,7 +3828,7 @@
               </a:defRPr>
             </a:pPr>
             <a:r>
-              <a:t>to: Eren Sakarya</a:t>
+              <a:t>to: Ana Abuseridze</a:t>
             </a:r>
           </a:p>
         </p:txBody>
@@ -3867,7 +3864,7 @@
               </a:defRPr>
             </a:pPr>
             <a:r>
-              <a:t>"Brilliant engineering solutions and execution"</a:t>
+              <a:t>"Exceptional development skills and team contributions"</a:t>
             </a:r>
           </a:p>
         </p:txBody>
@@ -3897,13 +3894,13 @@
             <a:pPr algn="l">
               <a:defRPr sz="1200" b="1" i="0">
                 <a:solidFill>
-                  <a:srgbClr val="F59E0B"/>
-                </a:solidFill>
-                <a:latin typeface="Calibri"/>
-              </a:defRPr>
-            </a:pPr>
-            <a:r>
-              <a:t>Innovation · Excellence</a:t>
+                  <a:srgbClr val="EF4444"/>
+                </a:solidFill>
+                <a:latin typeface="Calibri"/>
+              </a:defRPr>
+            </a:pPr>
+            <a:r>
+              <a:t>Technical Skills · Teamwork</a:t>
             </a:r>
           </a:p>
         </p:txBody>
@@ -3949,7 +3946,7 @@
             <a:avLst/>
           </a:prstGeom>
           <a:solidFill>
-            <a:srgbClr val="06B6D4"/>
+            <a:srgbClr val="F472B6"/>
           </a:solidFill>
           <a:ln>
             <a:noFill/>
@@ -4002,13 +3999,13 @@
             <a:pPr algn="l">
               <a:defRPr sz="1000" b="1">
                 <a:solidFill>
-                  <a:srgbClr val="06B6D4"/>
-                </a:solidFill>
-                <a:latin typeface="Calibri"/>
-              </a:defRPr>
-            </a:pPr>
-            <a:r>
-              <a:t>🌟  CLAPS</a:t>
+                  <a:srgbClr val="F472B6"/>
+                </a:solidFill>
+                <a:latin typeface="Calibri"/>
+              </a:defRPr>
+            </a:pPr>
+            <a:r>
+              <a:t>🎂  CELEBRATION</a:t>
             </a:r>
           </a:p>
         </p:txBody>
@@ -4038,13 +4035,13 @@
             <a:pPr algn="l">
               <a:defRPr sz="3200" b="1" i="0">
                 <a:solidFill>
-                  <a:srgbClr val="06B6D4"/>
-                </a:solidFill>
-                <a:latin typeface="Calibri"/>
-              </a:defRPr>
-            </a:pPr>
-            <a:r>
-              <a:t>Management Excellence</a:t>
+                  <a:srgbClr val="F472B6"/>
+                </a:solidFill>
+                <a:latin typeface="Calibri"/>
+              </a:defRPr>
+            </a:pPr>
+            <a:r>
+              <a:t>Birthday Celebration</a:t>
             </a:r>
           </a:p>
         </p:txBody>
@@ -4058,7 +4055,7 @@
         <p:spPr>
           <a:xfrm>
             <a:off x="1097280" y="2103120"/>
-            <a:ext cx="2743200" cy="548640"/>
+            <a:ext cx="9966960" cy="640080"/>
           </a:xfrm>
           <a:prstGeom prst="rect">
             <a:avLst/>
@@ -4074,13 +4071,13 @@
             <a:pPr algn="l">
               <a:defRPr sz="2800" b="1" i="0">
                 <a:solidFill>
-                  <a:srgbClr val="06B6D4"/>
-                </a:solidFill>
-                <a:latin typeface="Calibri"/>
-              </a:defRPr>
-            </a:pPr>
-            <a:r>
-              <a:t>25</a:t>
+                  <a:srgbClr val="FFFFFF"/>
+                </a:solidFill>
+                <a:latin typeface="Calibri"/>
+              </a:defRPr>
+            </a:pPr>
+            <a:r>
+              <a:t>Kirill Khramkov</a:t>
             </a:r>
           </a:p>
         </p:txBody>
@@ -4093,7 +4090,7 @@
         </p:nvSpPr>
         <p:spPr>
           <a:xfrm>
-            <a:off x="1097280" y="2651760"/>
+            <a:off x="1097280" y="2743200"/>
             <a:ext cx="9966960" cy="365760"/>
           </a:xfrm>
           <a:prstGeom prst="rect">
@@ -4110,49 +4107,49 @@
             <a:pPr algn="l">
               <a:defRPr sz="1400" b="0" i="0">
                 <a:solidFill>
+                  <a:srgbClr val="8F95A3"/>
+                </a:solidFill>
+                <a:latin typeface="Calibri"/>
+              </a:defRPr>
+            </a:pPr>
+            <a:r>
+              <a:t>March 14, 2026</a:t>
+            </a:r>
+          </a:p>
+        </p:txBody>
+      </p:sp>
+      <p:sp>
+        <p:nvSpPr>
+          <p:cNvPr id="7" name="TextBox 6"/>
+          <p:cNvSpPr txBox="1"/>
+          <p:nvPr/>
+        </p:nvSpPr>
+        <p:spPr>
+          <a:xfrm>
+            <a:off x="1097280" y="3291840"/>
+            <a:ext cx="9966960" cy="914400"/>
+          </a:xfrm>
+          <a:prstGeom prst="rect">
+            <a:avLst/>
+          </a:prstGeom>
+          <a:noFill/>
+        </p:spPr>
+        <p:txBody>
+          <a:bodyPr wrap="square">
+            <a:spAutoFit/>
+          </a:bodyPr>
+          <a:lstStyle/>
+          <a:p>
+            <a:pPr algn="l">
+              <a:defRPr sz="1600" b="0" i="0">
+                <a:solidFill>
                   <a:srgbClr val="E2E2EA"/>
                 </a:solidFill>
                 <a:latin typeface="Calibri"/>
               </a:defRPr>
             </a:pPr>
             <a:r>
-              <a:t>from Sergey Orlov</a:t>
-            </a:r>
-          </a:p>
-        </p:txBody>
-      </p:sp>
-      <p:sp>
-        <p:nvSpPr>
-          <p:cNvPr id="7" name="TextBox 6"/>
-          <p:cNvSpPr txBox="1"/>
-          <p:nvPr/>
-        </p:nvSpPr>
-        <p:spPr>
-          <a:xfrm>
-            <a:off x="1097280" y="3108960"/>
-            <a:ext cx="9966960" cy="365760"/>
-          </a:xfrm>
-          <a:prstGeom prst="rect">
-            <a:avLst/>
-          </a:prstGeom>
-          <a:noFill/>
-        </p:spPr>
-        <p:txBody>
-          <a:bodyPr wrap="square">
-            <a:spAutoFit/>
-          </a:bodyPr>
-          <a:lstStyle/>
-          <a:p>
-            <a:pPr algn="l">
-              <a:defRPr sz="1400" b="1" i="0">
-                <a:solidFill>
-                  <a:srgbClr val="FFFFFF"/>
-                </a:solidFill>
-                <a:latin typeface="Calibri"/>
-              </a:defRPr>
-            </a:pPr>
-            <a:r>
-              <a:t>to: Roman de las Heras</a:t>
+              <a:t>Thanks, everyone - grateful for all the birthday wishes from this amazing team!</a:t>
             </a:r>
           </a:p>
         </p:txBody>
@@ -4165,43 +4162,7 @@
         </p:nvSpPr>
         <p:spPr>
           <a:xfrm>
-            <a:off x="1097280" y="3749039"/>
-            <a:ext cx="9966960" cy="1097280"/>
-          </a:xfrm>
-          <a:prstGeom prst="rect">
-            <a:avLst/>
-          </a:prstGeom>
-          <a:noFill/>
-        </p:spPr>
-        <p:txBody>
-          <a:bodyPr wrap="square">
-            <a:spAutoFit/>
-          </a:bodyPr>
-          <a:lstStyle/>
-          <a:p>
-            <a:pPr algn="l">
-              <a:defRPr sz="1500" b="0" i="1">
-                <a:solidFill>
-                  <a:srgbClr val="E2E2EA"/>
-                </a:solidFill>
-                <a:latin typeface="Calibri"/>
-              </a:defRPr>
-            </a:pPr>
-            <a:r>
-              <a:t>"Outstanding leadership and team management"</a:t>
-            </a:r>
-          </a:p>
-        </p:txBody>
-      </p:sp>
-      <p:sp>
-        <p:nvSpPr>
-          <p:cNvPr id="9" name="TextBox 8"/>
-          <p:cNvSpPr txBox="1"/>
-          <p:nvPr/>
-        </p:nvSpPr>
-        <p:spPr>
-          <a:xfrm>
-            <a:off x="1097280" y="5120640"/>
+            <a:off x="1097280" y="4572000"/>
             <a:ext cx="9966960" cy="457200"/>
           </a:xfrm>
           <a:prstGeom prst="rect">
@@ -4216,15 +4177,15 @@
           <a:lstStyle/>
           <a:p>
             <a:pPr algn="l">
-              <a:defRPr sz="1200" b="1" i="0">
-                <a:solidFill>
-                  <a:srgbClr val="06B6D4"/>
-                </a:solidFill>
-                <a:latin typeface="Calibri"/>
-              </a:defRPr>
-            </a:pPr>
-            <a:r>
-              <a:t>Leadership · Excellence</a:t>
+              <a:defRPr sz="1400" b="0" i="1">
+                <a:solidFill>
+                  <a:srgbClr val="F472B6"/>
+                </a:solidFill>
+                <a:latin typeface="Calibri"/>
+              </a:defRPr>
+            </a:pPr>
+            <a:r>
+              <a:t>Engineering Team</a:t>
             </a:r>
           </a:p>
         </p:txBody>
@@ -4270,7 +4231,7 @@
             <a:avLst/>
           </a:prstGeom>
           <a:solidFill>
-            <a:srgbClr val="EC4899"/>
+            <a:srgbClr val="10B981"/>
           </a:solidFill>
           <a:ln>
             <a:noFill/>
@@ -4323,13 +4284,13 @@
             <a:pPr algn="l">
               <a:defRPr sz="1000" b="1">
                 <a:solidFill>
-                  <a:srgbClr val="EC4899"/>
-                </a:solidFill>
-                <a:latin typeface="Calibri"/>
-              </a:defRPr>
-            </a:pPr>
-            <a:r>
-              <a:t>💎  CLAPS</a:t>
+                  <a:srgbClr val="10B981"/>
+                </a:solidFill>
+                <a:latin typeface="Calibri"/>
+              </a:defRPr>
+            </a:pPr>
+            <a:r>
+              <a:t>💰  MILESTONE</a:t>
             </a:r>
           </a:p>
         </p:txBody>
@@ -4359,13 +4320,13 @@
             <a:pPr algn="l">
               <a:defRPr sz="3200" b="1" i="0">
                 <a:solidFill>
-                  <a:srgbClr val="EC4899"/>
-                </a:solidFill>
-                <a:latin typeface="Calibri"/>
-              </a:defRPr>
-            </a:pPr>
-            <a:r>
-              <a:t>Quality Delivery</a:t>
+                  <a:srgbClr val="10B981"/>
+                </a:solidFill>
+                <a:latin typeface="Calibri"/>
+              </a:defRPr>
+            </a:pPr>
+            <a:r>
+              <a:t>Financial Powerhouse</a:t>
             </a:r>
           </a:p>
         </p:txBody>
@@ -4379,29 +4340,29 @@
         <p:spPr>
           <a:xfrm>
             <a:off x="1097280" y="2103120"/>
-            <a:ext cx="2743200" cy="548640"/>
-          </a:xfrm>
-          <a:prstGeom prst="rect">
-            <a:avLst/>
-          </a:prstGeom>
-          <a:noFill/>
-        </p:spPr>
-        <p:txBody>
-          <a:bodyPr wrap="square">
-            <a:spAutoFit/>
-          </a:bodyPr>
-          <a:lstStyle/>
-          <a:p>
-            <a:pPr algn="l">
-              <a:defRPr sz="2800" b="1" i="0">
-                <a:solidFill>
-                  <a:srgbClr val="EC4899"/>
-                </a:solidFill>
-                <a:latin typeface="Calibri"/>
-              </a:defRPr>
-            </a:pPr>
-            <a:r>
-              <a:t>25</a:t>
+            <a:ext cx="4572000" cy="822960"/>
+          </a:xfrm>
+          <a:prstGeom prst="rect">
+            <a:avLst/>
+          </a:prstGeom>
+          <a:noFill/>
+        </p:spPr>
+        <p:txBody>
+          <a:bodyPr wrap="square">
+            <a:spAutoFit/>
+          </a:bodyPr>
+          <a:lstStyle/>
+          <a:p>
+            <a:pPr algn="l">
+              <a:defRPr sz="5200" b="1" i="0">
+                <a:solidFill>
+                  <a:srgbClr val="10B981"/>
+                </a:solidFill>
+                <a:latin typeface="Calibri"/>
+              </a:defRPr>
+            </a:pPr>
+            <a:r>
+              <a:t>$100M</a:t>
             </a:r>
           </a:p>
         </p:txBody>
@@ -4414,22 +4375,94 @@
         </p:nvSpPr>
         <p:spPr>
           <a:xfrm>
-            <a:off x="1097280" y="2651760"/>
-            <a:ext cx="9966960" cy="365760"/>
-          </a:xfrm>
-          <a:prstGeom prst="rect">
-            <a:avLst/>
-          </a:prstGeom>
-          <a:noFill/>
-        </p:spPr>
-        <p:txBody>
-          <a:bodyPr wrap="square">
-            <a:spAutoFit/>
-          </a:bodyPr>
-          <a:lstStyle/>
-          <a:p>
-            <a:pPr algn="l">
-              <a:defRPr sz="1400" b="0" i="0">
+            <a:off x="1097280" y="2926080"/>
+            <a:ext cx="4572000" cy="365760"/>
+          </a:xfrm>
+          <a:prstGeom prst="rect">
+            <a:avLst/>
+          </a:prstGeom>
+          <a:noFill/>
+        </p:spPr>
+        <p:txBody>
+          <a:bodyPr wrap="square">
+            <a:spAutoFit/>
+          </a:bodyPr>
+          <a:lstStyle/>
+          <a:p>
+            <a:pPr algn="l">
+              <a:defRPr sz="1100" b="0" i="0">
+                <a:solidFill>
+                  <a:srgbClr val="8F95A3"/>
+                </a:solidFill>
+                <a:latin typeface="Calibri"/>
+              </a:defRPr>
+            </a:pPr>
+            <a:r>
+              <a:t>Gross Profit</a:t>
+            </a:r>
+          </a:p>
+        </p:txBody>
+      </p:sp>
+      <p:sp>
+        <p:nvSpPr>
+          <p:cNvPr id="7" name="TextBox 6"/>
+          <p:cNvSpPr txBox="1"/>
+          <p:nvPr/>
+        </p:nvSpPr>
+        <p:spPr>
+          <a:xfrm>
+            <a:off x="1097280" y="3566160"/>
+            <a:ext cx="9966960" cy="457200"/>
+          </a:xfrm>
+          <a:prstGeom prst="rect">
+            <a:avLst/>
+          </a:prstGeom>
+          <a:noFill/>
+        </p:spPr>
+        <p:txBody>
+          <a:bodyPr wrap="square">
+            <a:spAutoFit/>
+          </a:bodyPr>
+          <a:lstStyle/>
+          <a:p>
+            <a:pPr algn="l">
+              <a:defRPr sz="1800" b="1" i="0">
+                <a:solidFill>
+                  <a:srgbClr val="FFFFFF"/>
+                </a:solidFill>
+                <a:latin typeface="Calibri"/>
+              </a:defRPr>
+            </a:pPr>
+            <a:r>
+              <a:t>Appodeal's Incredible Growth Trajectory</a:t>
+            </a:r>
+          </a:p>
+        </p:txBody>
+      </p:sp>
+      <p:sp>
+        <p:nvSpPr>
+          <p:cNvPr id="8" name="TextBox 7"/>
+          <p:cNvSpPr txBox="1"/>
+          <p:nvPr/>
+        </p:nvSpPr>
+        <p:spPr>
+          <a:xfrm>
+            <a:off x="1097280" y="4206240"/>
+            <a:ext cx="9966960" cy="1371600"/>
+          </a:xfrm>
+          <a:prstGeom prst="rect">
+            <a:avLst/>
+          </a:prstGeom>
+          <a:noFill/>
+        </p:spPr>
+        <p:txBody>
+          <a:bodyPr wrap="square">
+            <a:spAutoFit/>
+          </a:bodyPr>
+          <a:lstStyle/>
+          <a:p>
+            <a:pPr algn="l">
+              <a:defRPr sz="1500" b="0" i="0">
                 <a:solidFill>
                   <a:srgbClr val="E2E2EA"/>
                 </a:solidFill>
@@ -4437,115 +4470,7 @@
               </a:defRPr>
             </a:pPr>
             <a:r>
-              <a:t>from Iurii Kotov</a:t>
-            </a:r>
-          </a:p>
-        </p:txBody>
-      </p:sp>
-      <p:sp>
-        <p:nvSpPr>
-          <p:cNvPr id="7" name="TextBox 6"/>
-          <p:cNvSpPr txBox="1"/>
-          <p:nvPr/>
-        </p:nvSpPr>
-        <p:spPr>
-          <a:xfrm>
-            <a:off x="1097280" y="3108960"/>
-            <a:ext cx="9966960" cy="365760"/>
-          </a:xfrm>
-          <a:prstGeom prst="rect">
-            <a:avLst/>
-          </a:prstGeom>
-          <a:noFill/>
-        </p:spPr>
-        <p:txBody>
-          <a:bodyPr wrap="square">
-            <a:spAutoFit/>
-          </a:bodyPr>
-          <a:lstStyle/>
-          <a:p>
-            <a:pPr algn="l">
-              <a:defRPr sz="1400" b="1" i="0">
-                <a:solidFill>
-                  <a:srgbClr val="FFFFFF"/>
-                </a:solidFill>
-                <a:latin typeface="Calibri"/>
-              </a:defRPr>
-            </a:pPr>
-            <a:r>
-              <a:t>to: Ana Abuseridze</a:t>
-            </a:r>
-          </a:p>
-        </p:txBody>
-      </p:sp>
-      <p:sp>
-        <p:nvSpPr>
-          <p:cNvPr id="8" name="TextBox 7"/>
-          <p:cNvSpPr txBox="1"/>
-          <p:nvPr/>
-        </p:nvSpPr>
-        <p:spPr>
-          <a:xfrm>
-            <a:off x="1097280" y="3749039"/>
-            <a:ext cx="9966960" cy="1097280"/>
-          </a:xfrm>
-          <a:prstGeom prst="rect">
-            <a:avLst/>
-          </a:prstGeom>
-          <a:noFill/>
-        </p:spPr>
-        <p:txBody>
-          <a:bodyPr wrap="square">
-            <a:spAutoFit/>
-          </a:bodyPr>
-          <a:lstStyle/>
-          <a:p>
-            <a:pPr algn="l">
-              <a:defRPr sz="1500" b="0" i="1">
-                <a:solidFill>
-                  <a:srgbClr val="E2E2EA"/>
-                </a:solidFill>
-                <a:latin typeface="Calibri"/>
-              </a:defRPr>
-            </a:pPr>
-            <a:r>
-              <a:t>"Exceptional quality and attention to detail"</a:t>
-            </a:r>
-          </a:p>
-        </p:txBody>
-      </p:sp>
-      <p:sp>
-        <p:nvSpPr>
-          <p:cNvPr id="9" name="TextBox 8"/>
-          <p:cNvSpPr txBox="1"/>
-          <p:nvPr/>
-        </p:nvSpPr>
-        <p:spPr>
-          <a:xfrm>
-            <a:off x="1097280" y="5120640"/>
-            <a:ext cx="9966960" cy="457200"/>
-          </a:xfrm>
-          <a:prstGeom prst="rect">
-            <a:avLst/>
-          </a:prstGeom>
-          <a:noFill/>
-        </p:spPr>
-        <p:txBody>
-          <a:bodyPr wrap="square">
-            <a:spAutoFit/>
-          </a:bodyPr>
-          <a:lstStyle/>
-          <a:p>
-            <a:pPr algn="l">
-              <a:defRPr sz="1200" b="1" i="0">
-                <a:solidFill>
-                  <a:srgbClr val="EC4899"/>
-                </a:solidFill>
-                <a:latin typeface="Calibri"/>
-              </a:defRPr>
-            </a:pPr>
-            <a:r>
-              <a:t>Quality · Excellence</a:t>
+              <a:t>We're building something extraordinary - $100M gross profit with $20M EBITDA and 40% year-over-year growth projected. The path to our $50B vision is crystal clear.</a:t>
             </a:r>
           </a:p>
         </p:txBody>
@@ -4591,7 +4516,7 @@
             <a:avLst/>
           </a:prstGeom>
           <a:solidFill>
-            <a:srgbClr val="EF4444"/>
+            <a:srgbClr val="8B5CF6"/>
           </a:solidFill>
           <a:ln>
             <a:noFill/>
@@ -4644,13 +4569,13 @@
             <a:pPr algn="l">
               <a:defRPr sz="1000" b="1">
                 <a:solidFill>
-                  <a:srgbClr val="EF4444"/>
-                </a:solidFill>
-                <a:latin typeface="Calibri"/>
-              </a:defRPr>
-            </a:pPr>
-            <a:r>
-              <a:t>🔥  CLAPS</a:t>
+                  <a:srgbClr val="8B5CF6"/>
+                </a:solidFill>
+                <a:latin typeface="Calibri"/>
+              </a:defRPr>
+            </a:pPr>
+            <a:r>
+              <a:t>🎮  WIN</a:t>
             </a:r>
           </a:p>
         </p:txBody>
@@ -4680,13 +4605,13 @@
             <a:pPr algn="l">
               <a:defRPr sz="3200" b="1" i="0">
                 <a:solidFill>
-                  <a:srgbClr val="EF4444"/>
-                </a:solidFill>
-                <a:latin typeface="Calibri"/>
-              </a:defRPr>
-            </a:pPr>
-            <a:r>
-              <a:t>Technical Mastery</a:t>
+                  <a:srgbClr val="8B5CF6"/>
+                </a:solidFill>
+                <a:latin typeface="Calibri"/>
+              </a:defRPr>
+            </a:pPr>
+            <a:r>
+              <a:t>Gaming Victory</a:t>
             </a:r>
           </a:p>
         </p:txBody>
@@ -4700,29 +4625,29 @@
         <p:spPr>
           <a:xfrm>
             <a:off x="1097280" y="2103120"/>
-            <a:ext cx="2743200" cy="548640"/>
-          </a:xfrm>
-          <a:prstGeom prst="rect">
-            <a:avLst/>
-          </a:prstGeom>
-          <a:noFill/>
-        </p:spPr>
-        <p:txBody>
-          <a:bodyPr wrap="square">
-            <a:spAutoFit/>
-          </a:bodyPr>
-          <a:lstStyle/>
-          <a:p>
-            <a:pPr algn="l">
-              <a:defRPr sz="2800" b="1" i="0">
-                <a:solidFill>
-                  <a:srgbClr val="EF4444"/>
-                </a:solidFill>
-                <a:latin typeface="Calibri"/>
-              </a:defRPr>
-            </a:pPr>
-            <a:r>
-              <a:t>25</a:t>
+            <a:ext cx="4572000" cy="822960"/>
+          </a:xfrm>
+          <a:prstGeom prst="rect">
+            <a:avLst/>
+          </a:prstGeom>
+          <a:noFill/>
+        </p:spPr>
+        <p:txBody>
+          <a:bodyPr wrap="square">
+            <a:spAutoFit/>
+          </a:bodyPr>
+          <a:lstStyle/>
+          <a:p>
+            <a:pPr algn="l">
+              <a:defRPr sz="4800" b="1" i="0">
+                <a:solidFill>
+                  <a:srgbClr val="8B5CF6"/>
+                </a:solidFill>
+                <a:latin typeface="Calibri"/>
+              </a:defRPr>
+            </a:pPr>
+            <a:r>
+              <a:t>Profitable</a:t>
             </a:r>
           </a:p>
         </p:txBody>
@@ -4735,7 +4660,43 @@
         </p:nvSpPr>
         <p:spPr>
           <a:xfrm>
-            <a:off x="1097280" y="2651760"/>
+            <a:off x="1097280" y="2834640"/>
+            <a:ext cx="4572000" cy="365760"/>
+          </a:xfrm>
+          <a:prstGeom prst="rect">
+            <a:avLst/>
+          </a:prstGeom>
+          <a:noFill/>
+        </p:spPr>
+        <p:txBody>
+          <a:bodyPr wrap="square">
+            <a:spAutoFit/>
+          </a:bodyPr>
+          <a:lstStyle/>
+          <a:p>
+            <a:pPr algn="l">
+              <a:defRPr sz="1200" b="0" i="0">
+                <a:solidFill>
+                  <a:srgbClr val="8F95A3"/>
+                </a:solidFill>
+                <a:latin typeface="Calibri"/>
+              </a:defRPr>
+            </a:pPr>
+            <a:r>
+              <a:t>2025 Achievement</a:t>
+            </a:r>
+          </a:p>
+        </p:txBody>
+      </p:sp>
+      <p:sp>
+        <p:nvSpPr>
+          <p:cNvPr id="7" name="TextBox 6"/>
+          <p:cNvSpPr txBox="1"/>
+          <p:nvPr/>
+        </p:nvSpPr>
+        <p:spPr>
+          <a:xfrm>
+            <a:off x="1097280" y="3291840"/>
             <a:ext cx="9966960" cy="365760"/>
           </a:xfrm>
           <a:prstGeom prst="rect">
@@ -4758,35 +4719,35 @@
               </a:defRPr>
             </a:pPr>
             <a:r>
-              <a:t>from Iurii Kotov</a:t>
-            </a:r>
-          </a:p>
-        </p:txBody>
-      </p:sp>
-      <p:sp>
-        <p:nvSpPr>
-          <p:cNvPr id="7" name="TextBox 6"/>
-          <p:cNvSpPr txBox="1"/>
-          <p:nvPr/>
-        </p:nvSpPr>
-        <p:spPr>
-          <a:xfrm>
-            <a:off x="1097280" y="3108960"/>
-            <a:ext cx="9966960" cy="365760"/>
-          </a:xfrm>
-          <a:prstGeom prst="rect">
-            <a:avLst/>
-          </a:prstGeom>
-          <a:noFill/>
-        </p:spPr>
-        <p:txBody>
-          <a:bodyPr wrap="square">
-            <a:spAutoFit/>
-          </a:bodyPr>
-          <a:lstStyle/>
-          <a:p>
-            <a:pPr algn="l">
-              <a:defRPr sz="1400" b="1" i="0">
+              <a:t>by Gaming Division</a:t>
+            </a:r>
+          </a:p>
+        </p:txBody>
+      </p:sp>
+      <p:sp>
+        <p:nvSpPr>
+          <p:cNvPr id="8" name="TextBox 7"/>
+          <p:cNvSpPr txBox="1"/>
+          <p:nvPr/>
+        </p:nvSpPr>
+        <p:spPr>
+          <a:xfrm>
+            <a:off x="1097280" y="3840480"/>
+            <a:ext cx="9966960" cy="457200"/>
+          </a:xfrm>
+          <a:prstGeom prst="rect">
+            <a:avLst/>
+          </a:prstGeom>
+          <a:noFill/>
+        </p:spPr>
+        <p:txBody>
+          <a:bodyPr wrap="square">
+            <a:spAutoFit/>
+          </a:bodyPr>
+          <a:lstStyle/>
+          <a:p>
+            <a:pPr algn="l">
+              <a:defRPr sz="1800" b="1" i="0">
                 <a:solidFill>
                   <a:srgbClr val="FFFFFF"/>
                 </a:solidFill>
@@ -4794,35 +4755,35 @@
               </a:defRPr>
             </a:pPr>
             <a:r>
-              <a:t>to: Dima M.</a:t>
-            </a:r>
-          </a:p>
-        </p:txBody>
-      </p:sp>
-      <p:sp>
-        <p:nvSpPr>
-          <p:cNvPr id="8" name="TextBox 7"/>
-          <p:cNvSpPr txBox="1"/>
-          <p:nvPr/>
-        </p:nvSpPr>
-        <p:spPr>
-          <a:xfrm>
-            <a:off x="1097280" y="3749039"/>
-            <a:ext cx="9966960" cy="1097280"/>
-          </a:xfrm>
-          <a:prstGeom prst="rect">
-            <a:avLst/>
-          </a:prstGeom>
-          <a:noFill/>
-        </p:spPr>
-        <p:txBody>
-          <a:bodyPr wrap="square">
-            <a:spAutoFit/>
-          </a:bodyPr>
-          <a:lstStyle/>
-          <a:p>
-            <a:pPr algn="l">
-              <a:defRPr sz="1500" b="0" i="1">
+              <a:t>Gaming Division Hits Profitability Milestone</a:t>
+            </a:r>
+          </a:p>
+        </p:txBody>
+      </p:sp>
+      <p:sp>
+        <p:nvSpPr>
+          <p:cNvPr id="9" name="TextBox 8"/>
+          <p:cNvSpPr txBox="1"/>
+          <p:nvPr/>
+        </p:nvSpPr>
+        <p:spPr>
+          <a:xfrm>
+            <a:off x="1097280" y="4389120"/>
+            <a:ext cx="9966960" cy="914400"/>
+          </a:xfrm>
+          <a:prstGeom prst="rect">
+            <a:avLst/>
+          </a:prstGeom>
+          <a:noFill/>
+        </p:spPr>
+        <p:txBody>
+          <a:bodyPr wrap="square">
+            <a:spAutoFit/>
+          </a:bodyPr>
+          <a:lstStyle/>
+          <a:p>
+            <a:pPr algn="l">
+              <a:defRPr sz="1400" b="0" i="0">
                 <a:solidFill>
                   <a:srgbClr val="E2E2EA"/>
                 </a:solidFill>
@@ -4830,20 +4791,20 @@
               </a:defRPr>
             </a:pPr>
             <a:r>
-              <a:t>"Outstanding technical expertise and problem-solving"</a:t>
-            </a:r>
-          </a:p>
-        </p:txBody>
-      </p:sp>
-      <p:sp>
-        <p:nvSpPr>
-          <p:cNvPr id="9" name="TextBox 8"/>
-          <p:cNvSpPr txBox="1"/>
-          <p:nvPr/>
-        </p:nvSpPr>
-        <p:spPr>
-          <a:xfrm>
-            <a:off x="1097280" y="5120640"/>
+              <a:t>Our gaming portfolio officially turned profitable in 2025, with standout performances from Infinite Minesweeper (61% retention) and major improvements in Solitaire and Crossword.</a:t>
+            </a:r>
+          </a:p>
+        </p:txBody>
+      </p:sp>
+      <p:sp>
+        <p:nvSpPr>
+          <p:cNvPr id="10" name="TextBox 9"/>
+          <p:cNvSpPr txBox="1"/>
+          <p:nvPr/>
+        </p:nvSpPr>
+        <p:spPr>
+          <a:xfrm>
+            <a:off x="1097280" y="5486400"/>
             <a:ext cx="9966960" cy="457200"/>
           </a:xfrm>
           <a:prstGeom prst="rect">
@@ -4858,15 +4819,15 @@
           <a:lstStyle/>
           <a:p>
             <a:pPr algn="l">
-              <a:defRPr sz="1200" b="1" i="0">
-                <a:solidFill>
-                  <a:srgbClr val="EF4444"/>
-                </a:solidFill>
-                <a:latin typeface="Calibri"/>
-              </a:defRPr>
-            </a:pPr>
-            <a:r>
-              <a:t>Technical Excellence · Innovation</a:t>
+              <a:defRPr sz="1300" b="0" i="1">
+                <a:solidFill>
+                  <a:srgbClr val="8F95A3"/>
+                </a:solidFill>
+                <a:latin typeface="Calibri"/>
+              </a:defRPr>
+            </a:pPr>
+            <a:r>
+              <a:t>💬 "Strategic gaming investments paying off big"</a:t>
             </a:r>
           </a:p>
         </p:txBody>
@@ -4912,7 +4873,7 @@
             <a:avLst/>
           </a:prstGeom>
           <a:solidFill>
-            <a:srgbClr val="8B5CF6"/>
+            <a:srgbClr val="06B6D4"/>
           </a:solidFill>
           <a:ln>
             <a:noFill/>
@@ -4965,13 +4926,13 @@
             <a:pPr algn="l">
               <a:defRPr sz="1000" b="1">
                 <a:solidFill>
-                  <a:srgbClr val="8B5CF6"/>
-                </a:solidFill>
-                <a:latin typeface="Calibri"/>
-              </a:defRPr>
-            </a:pPr>
-            <a:r>
-              <a:t>🤖  OFFICE LIFE</a:t>
+                  <a:srgbClr val="06B6D4"/>
+                </a:solidFill>
+                <a:latin typeface="Calibri"/>
+              </a:defRPr>
+            </a:pPr>
+            <a:r>
+              <a:t>🤖  MILESTONE</a:t>
             </a:r>
           </a:p>
         </p:txBody>
@@ -5001,13 +4962,13 @@
             <a:pPr algn="l">
               <a:defRPr sz="3200" b="1" i="0">
                 <a:solidFill>
-                  <a:srgbClr val="8B5CF6"/>
-                </a:solidFill>
-                <a:latin typeface="Calibri"/>
-              </a:defRPr>
-            </a:pPr>
-            <a:r>
-              <a:t>Engineering Security First</a:t>
+                  <a:srgbClr val="06B6D4"/>
+                </a:solidFill>
+                <a:latin typeface="Calibri"/>
+              </a:defRPr>
+            </a:pPr>
+            <a:r>
+              <a:t>AI-First Future</a:t>
             </a:r>
           </a:p>
         </p:txBody>
@@ -5021,6 +4982,78 @@
         <p:spPr>
           <a:xfrm>
             <a:off x="1097280" y="2103120"/>
+            <a:ext cx="4572000" cy="822960"/>
+          </a:xfrm>
+          <a:prstGeom prst="rect">
+            <a:avLst/>
+          </a:prstGeom>
+          <a:noFill/>
+        </p:spPr>
+        <p:txBody>
+          <a:bodyPr wrap="square">
+            <a:spAutoFit/>
+          </a:bodyPr>
+          <a:lstStyle/>
+          <a:p>
+            <a:pPr algn="l">
+              <a:defRPr sz="5200" b="1" i="0">
+                <a:solidFill>
+                  <a:srgbClr val="06B6D4"/>
+                </a:solidFill>
+                <a:latin typeface="Calibri"/>
+              </a:defRPr>
+            </a:pPr>
+            <a:r>
+              <a:t>5-10</a:t>
+            </a:r>
+          </a:p>
+        </p:txBody>
+      </p:sp>
+      <p:sp>
+        <p:nvSpPr>
+          <p:cNvPr id="6" name="TextBox 5"/>
+          <p:cNvSpPr txBox="1"/>
+          <p:nvPr/>
+        </p:nvSpPr>
+        <p:spPr>
+          <a:xfrm>
+            <a:off x="1097280" y="2926080"/>
+            <a:ext cx="4572000" cy="365760"/>
+          </a:xfrm>
+          <a:prstGeom prst="rect">
+            <a:avLst/>
+          </a:prstGeom>
+          <a:noFill/>
+        </p:spPr>
+        <p:txBody>
+          <a:bodyPr wrap="square">
+            <a:spAutoFit/>
+          </a:bodyPr>
+          <a:lstStyle/>
+          <a:p>
+            <a:pPr algn="l">
+              <a:defRPr sz="1100" b="0" i="0">
+                <a:solidFill>
+                  <a:srgbClr val="8F95A3"/>
+                </a:solidFill>
+                <a:latin typeface="Calibri"/>
+              </a:defRPr>
+            </a:pPr>
+            <a:r>
+              <a:t>AI Agents per Employee</a:t>
+            </a:r>
+          </a:p>
+        </p:txBody>
+      </p:sp>
+      <p:sp>
+        <p:nvSpPr>
+          <p:cNvPr id="7" name="TextBox 6"/>
+          <p:cNvSpPr txBox="1"/>
+          <p:nvPr/>
+        </p:nvSpPr>
+        <p:spPr>
+          <a:xfrm>
+            <a:off x="1097280" y="3566160"/>
             <a:ext cx="9966960" cy="457200"/>
           </a:xfrm>
           <a:prstGeom prst="rect">
@@ -5043,35 +5076,35 @@
               </a:defRPr>
             </a:pPr>
             <a:r>
-              <a:t>Coolify: Power with Responsibility</a:t>
-            </a:r>
-          </a:p>
-        </p:txBody>
-      </p:sp>
-      <p:sp>
-        <p:nvSpPr>
-          <p:cNvPr id="6" name="TextBox 5"/>
-          <p:cNvSpPr txBox="1"/>
-          <p:nvPr/>
-        </p:nvSpPr>
-        <p:spPr>
-          <a:xfrm>
-            <a:off x="1371600" y="2743200"/>
-            <a:ext cx="9692640" cy="1828800"/>
-          </a:xfrm>
-          <a:prstGeom prst="rect">
-            <a:avLst/>
-          </a:prstGeom>
-          <a:noFill/>
-        </p:spPr>
-        <p:txBody>
-          <a:bodyPr wrap="square">
-            <a:spAutoFit/>
-          </a:bodyPr>
-          <a:lstStyle/>
-          <a:p>
-            <a:pPr algn="l">
-              <a:defRPr sz="1500" b="0" i="1">
+              <a:t>Every Employee Managing AI Agents</a:t>
+            </a:r>
+          </a:p>
+        </p:txBody>
+      </p:sp>
+      <p:sp>
+        <p:nvSpPr>
+          <p:cNvPr id="8" name="TextBox 7"/>
+          <p:cNvSpPr txBox="1"/>
+          <p:nvPr/>
+        </p:nvSpPr>
+        <p:spPr>
+          <a:xfrm>
+            <a:off x="1097280" y="4206240"/>
+            <a:ext cx="9966960" cy="1371600"/>
+          </a:xfrm>
+          <a:prstGeom prst="rect">
+            <a:avLst/>
+          </a:prstGeom>
+          <a:noFill/>
+        </p:spPr>
+        <p:txBody>
+          <a:bodyPr wrap="square">
+            <a:spAutoFit/>
+          </a:bodyPr>
+          <a:lstStyle/>
+          <a:p>
+            <a:pPr algn="l">
+              <a:defRPr sz="1500" b="0" i="0">
                 <a:solidFill>
                   <a:srgbClr val="E2E2EA"/>
                 </a:solidFill>
@@ -5079,115 +5112,7 @@
               </a:defRPr>
             </a:pPr>
             <a:r>
-              <a:t>"Unfortunately, AI doesn't always generate secure applications, so Coolify and all services deployed in it are accessible by everyone in the company"</a:t>
-            </a:r>
-          </a:p>
-        </p:txBody>
-      </p:sp>
-      <p:sp>
-        <p:nvSpPr>
-          <p:cNvPr id="7" name="TextBox 6"/>
-          <p:cNvSpPr txBox="1"/>
-          <p:nvPr/>
-        </p:nvSpPr>
-        <p:spPr>
-          <a:xfrm>
-            <a:off x="1097280" y="4754880"/>
-            <a:ext cx="9966960" cy="365760"/>
-          </a:xfrm>
-          <a:prstGeom prst="rect">
-            <a:avLst/>
-          </a:prstGeom>
-          <a:noFill/>
-        </p:spPr>
-        <p:txBody>
-          <a:bodyPr wrap="square">
-            <a:spAutoFit/>
-          </a:bodyPr>
-          <a:lstStyle/>
-          <a:p>
-            <a:pPr algn="l">
-              <a:defRPr sz="1400" b="0" i="0">
-                <a:solidFill>
-                  <a:srgbClr val="8F95A3"/>
-                </a:solidFill>
-                <a:latin typeface="Calibri"/>
-              </a:defRPr>
-            </a:pPr>
-            <a:r>
-              <a:t>— Gleb Krahotkin</a:t>
-            </a:r>
-          </a:p>
-        </p:txBody>
-      </p:sp>
-      <p:sp>
-        <p:nvSpPr>
-          <p:cNvPr id="8" name="TextBox 7"/>
-          <p:cNvSpPr txBox="1"/>
-          <p:nvPr/>
-        </p:nvSpPr>
-        <p:spPr>
-          <a:xfrm>
-            <a:off x="1097280" y="5212080"/>
-            <a:ext cx="9966960" cy="365760"/>
-          </a:xfrm>
-          <a:prstGeom prst="rect">
-            <a:avLst/>
-          </a:prstGeom>
-          <a:noFill/>
-        </p:spPr>
-        <p:txBody>
-          <a:bodyPr wrap="square">
-            <a:spAutoFit/>
-          </a:bodyPr>
-          <a:lstStyle/>
-          <a:p>
-            <a:pPr algn="l">
-              <a:defRPr sz="1400" b="1" i="0">
-                <a:solidFill>
-                  <a:srgbClr val="8B5CF6"/>
-                </a:solidFill>
-                <a:latin typeface="Calibri"/>
-              </a:defRPr>
-            </a:pPr>
-            <a:r>
-              <a:t>🔒 ⚠️ 🛡️</a:t>
-            </a:r>
-          </a:p>
-        </p:txBody>
-      </p:sp>
-      <p:sp>
-        <p:nvSpPr>
-          <p:cNvPr id="9" name="TextBox 8"/>
-          <p:cNvSpPr txBox="1"/>
-          <p:nvPr/>
-        </p:nvSpPr>
-        <p:spPr>
-          <a:xfrm>
-            <a:off x="1097280" y="5760720"/>
-            <a:ext cx="9966960" cy="274320"/>
-          </a:xfrm>
-          <a:prstGeom prst="rect">
-            <a:avLst/>
-          </a:prstGeom>
-          <a:noFill/>
-        </p:spPr>
-        <p:txBody>
-          <a:bodyPr wrap="square">
-            <a:spAutoFit/>
-          </a:bodyPr>
-          <a:lstStyle/>
-          <a:p>
-            <a:pPr algn="l">
-              <a:defRPr sz="1100" b="0" i="0">
-                <a:solidFill>
-                  <a:srgbClr val="5C6270"/>
-                </a:solidFill>
-                <a:latin typeface="Calibri"/>
-              </a:defRPr>
-            </a:pPr>
-            <a:r>
-              <a:t>#general</a:t>
+              <a:t>Within 3-6 months, every Appodeal team member will manage 5-10 AI agents. We're not just using AI - we're becoming an AI-amplified workforce.</a:t>
             </a:r>
           </a:p>
         </p:txBody>
@@ -5233,7 +5158,7 @@
             <a:avLst/>
           </a:prstGeom>
           <a:solidFill>
-            <a:srgbClr val="10B981"/>
+            <a:srgbClr val="EF4444"/>
           </a:solidFill>
           <a:ln>
             <a:noFill/>
@@ -5286,13 +5211,13 @@
             <a:pPr algn="l">
               <a:defRPr sz="1000" b="1">
                 <a:solidFill>
-                  <a:srgbClr val="10B981"/>
-                </a:solidFill>
-                <a:latin typeface="Calibri"/>
-              </a:defRPr>
-            </a:pPr>
-            <a:r>
-              <a:t>💰  MILESTONE</a:t>
+                  <a:srgbClr val="EF4444"/>
+                </a:solidFill>
+                <a:latin typeface="Calibri"/>
+              </a:defRPr>
+            </a:pPr>
+            <a:r>
+              <a:t>🛡️  WIN</a:t>
             </a:r>
           </a:p>
         </p:txBody>
@@ -5322,13 +5247,13 @@
             <a:pPr algn="l">
               <a:defRPr sz="3200" b="1" i="0">
                 <a:solidFill>
-                  <a:srgbClr val="10B981"/>
-                </a:solidFill>
-                <a:latin typeface="Calibri"/>
-              </a:defRPr>
-            </a:pPr>
-            <a:r>
-              <a:t>Revenue Powerhouse</a:t>
+                  <a:srgbClr val="EF4444"/>
+                </a:solidFill>
+                <a:latin typeface="Calibri"/>
+              </a:defRPr>
+            </a:pPr>
+            <a:r>
+              <a:t>Fraud Prevention Victory</a:t>
             </a:r>
           </a:p>
         </p:txBody>
@@ -5356,15 +5281,15 @@
           <a:lstStyle/>
           <a:p>
             <a:pPr algn="l">
-              <a:defRPr sz="5200" b="1" i="0">
-                <a:solidFill>
-                  <a:srgbClr val="10B981"/>
-                </a:solidFill>
-                <a:latin typeface="Calibri"/>
-              </a:defRPr>
-            </a:pPr>
-            <a:r>
-              <a:t>$100M</a:t>
+              <a:defRPr sz="4800" b="1" i="0">
+                <a:solidFill>
+                  <a:srgbClr val="EF4444"/>
+                </a:solidFill>
+                <a:latin typeface="Calibri"/>
+              </a:defRPr>
+            </a:pPr>
+            <a:r>
+              <a:t>82%</a:t>
             </a:r>
           </a:p>
         </p:txBody>
@@ -5377,7 +5302,7 @@
         </p:nvSpPr>
         <p:spPr>
           <a:xfrm>
-            <a:off x="1097280" y="2926080"/>
+            <a:off x="1097280" y="2834640"/>
             <a:ext cx="4572000" cy="365760"/>
           </a:xfrm>
           <a:prstGeom prst="rect">
@@ -5392,7 +5317,7 @@
           <a:lstStyle/>
           <a:p>
             <a:pPr algn="l">
-              <a:defRPr sz="1100" b="0" i="0">
+              <a:defRPr sz="1200" b="0" i="0">
                 <a:solidFill>
                   <a:srgbClr val="8F95A3"/>
                 </a:solidFill>
@@ -5400,7 +5325,7 @@
               </a:defRPr>
             </a:pPr>
             <a:r>
-              <a:t>gross profit achieved</a:t>
+              <a:t>Fraud Reduction</a:t>
             </a:r>
           </a:p>
         </p:txBody>
@@ -5413,7 +5338,43 @@
         </p:nvSpPr>
         <p:spPr>
           <a:xfrm>
-            <a:off x="1097280" y="3566160"/>
+            <a:off x="1097280" y="3291840"/>
+            <a:ext cx="9966960" cy="365760"/>
+          </a:xfrm>
+          <a:prstGeom prst="rect">
+            <a:avLst/>
+          </a:prstGeom>
+          <a:noFill/>
+        </p:spPr>
+        <p:txBody>
+          <a:bodyPr wrap="square">
+            <a:spAutoFit/>
+          </a:bodyPr>
+          <a:lstStyle/>
+          <a:p>
+            <a:pPr algn="l">
+              <a:defRPr sz="1400" b="0" i="0">
+                <a:solidFill>
+                  <a:srgbClr val="E2E2EA"/>
+                </a:solidFill>
+                <a:latin typeface="Calibri"/>
+              </a:defRPr>
+            </a:pPr>
+            <a:r>
+              <a:t>by Security Team</a:t>
+            </a:r>
+          </a:p>
+        </p:txBody>
+      </p:sp>
+      <p:sp>
+        <p:nvSpPr>
+          <p:cNvPr id="8" name="TextBox 7"/>
+          <p:cNvSpPr txBox="1"/>
+          <p:nvPr/>
+        </p:nvSpPr>
+        <p:spPr>
+          <a:xfrm>
+            <a:off x="1097280" y="3840480"/>
             <a:ext cx="9966960" cy="457200"/>
           </a:xfrm>
           <a:prstGeom prst="rect">
@@ -5436,35 +5397,35 @@
               </a:defRPr>
             </a:pPr>
             <a:r>
-              <a:t>$100M Gross Profit Milestone</a:t>
-            </a:r>
-          </a:p>
-        </p:txBody>
-      </p:sp>
-      <p:sp>
-        <p:nvSpPr>
-          <p:cNvPr id="8" name="TextBox 7"/>
-          <p:cNvSpPr txBox="1"/>
-          <p:nvPr/>
-        </p:nvSpPr>
-        <p:spPr>
-          <a:xfrm>
-            <a:off x="1097280" y="4206240"/>
-            <a:ext cx="9966960" cy="1371600"/>
-          </a:xfrm>
-          <a:prstGeom prst="rect">
-            <a:avLst/>
-          </a:prstGeom>
-          <a:noFill/>
-        </p:spPr>
-        <p:txBody>
-          <a:bodyPr wrap="square">
-            <a:spAutoFit/>
-          </a:bodyPr>
-          <a:lstStyle/>
-          <a:p>
-            <a:pPr algn="l">
-              <a:defRPr sz="1500" b="0" i="0">
+              <a:t>Dynamic SDK Signatures Crush Fraud</a:t>
+            </a:r>
+          </a:p>
+        </p:txBody>
+      </p:sp>
+      <p:sp>
+        <p:nvSpPr>
+          <p:cNvPr id="9" name="TextBox 8"/>
+          <p:cNvSpPr txBox="1"/>
+          <p:nvPr/>
+        </p:nvSpPr>
+        <p:spPr>
+          <a:xfrm>
+            <a:off x="1097280" y="4389120"/>
+            <a:ext cx="9966960" cy="914400"/>
+          </a:xfrm>
+          <a:prstGeom prst="rect">
+            <a:avLst/>
+          </a:prstGeom>
+          <a:noFill/>
+        </p:spPr>
+        <p:txBody>
+          <a:bodyPr wrap="square">
+            <a:spAutoFit/>
+          </a:bodyPr>
+          <a:lstStyle/>
+          <a:p>
+            <a:pPr algn="l">
+              <a:defRPr sz="1400" b="0" i="0">
                 <a:solidFill>
                   <a:srgbClr val="E2E2EA"/>
                 </a:solidFill>
@@ -5472,7 +5433,43 @@
               </a:defRPr>
             </a:pPr>
             <a:r>
-              <a:t>We've reached approximately $100M in gross profit with $20M EBITDA and 40% year-over-year growth projected. Our financial engine is firing on all cylinders.</a:t>
+              <a:t>Our innovative dynamic SDK signatures slashed fraud rates from 22% to under 4% - a massive win for platform security and advertiser trust.</a:t>
+            </a:r>
+          </a:p>
+        </p:txBody>
+      </p:sp>
+      <p:sp>
+        <p:nvSpPr>
+          <p:cNvPr id="10" name="TextBox 9"/>
+          <p:cNvSpPr txBox="1"/>
+          <p:nvPr/>
+        </p:nvSpPr>
+        <p:spPr>
+          <a:xfrm>
+            <a:off x="1097280" y="5486400"/>
+            <a:ext cx="9966960" cy="457200"/>
+          </a:xfrm>
+          <a:prstGeom prst="rect">
+            <a:avLst/>
+          </a:prstGeom>
+          <a:noFill/>
+        </p:spPr>
+        <p:txBody>
+          <a:bodyPr wrap="square">
+            <a:spAutoFit/>
+          </a:bodyPr>
+          <a:lstStyle/>
+          <a:p>
+            <a:pPr algn="l">
+              <a:defRPr sz="1300" b="0" i="1">
+                <a:solidFill>
+                  <a:srgbClr val="8F95A3"/>
+                </a:solidFill>
+                <a:latin typeface="Calibri"/>
+              </a:defRPr>
+            </a:pPr>
+            <a:r>
+              <a:t>💬 "World-class security drives business growth"</a:t>
             </a:r>
           </a:p>
         </p:txBody>
@@ -5518,7 +5515,7 @@
             <a:avLst/>
           </a:prstGeom>
           <a:solidFill>
-            <a:srgbClr val="F59E0B"/>
+            <a:srgbClr val="10B981"/>
           </a:solidFill>
           <a:ln>
             <a:noFill/>
@@ -5571,13 +5568,13 @@
             <a:pPr algn="l">
               <a:defRPr sz="1000" b="1">
                 <a:solidFill>
-                  <a:srgbClr val="F59E0B"/>
-                </a:solidFill>
-                <a:latin typeface="Calibri"/>
-              </a:defRPr>
-            </a:pPr>
-            <a:r>
-              <a:t>🎯  MILESTONE</a:t>
+                  <a:srgbClr val="10B981"/>
+                </a:solidFill>
+                <a:latin typeface="Calibri"/>
+              </a:defRPr>
+            </a:pPr>
+            <a:r>
+              <a:t>💵  WIN</a:t>
             </a:r>
           </a:p>
         </p:txBody>
@@ -5607,13 +5604,13 @@
             <a:pPr algn="l">
               <a:defRPr sz="3200" b="1" i="0">
                 <a:solidFill>
-                  <a:srgbClr val="F59E0B"/>
-                </a:solidFill>
-                <a:latin typeface="Calibri"/>
-              </a:defRPr>
-            </a:pPr>
-            <a:r>
-              <a:t>AI-Powered Workforce</a:t>
+                  <a:srgbClr val="10B981"/>
+                </a:solidFill>
+                <a:latin typeface="Calibri"/>
+              </a:defRPr>
+            </a:pPr>
+            <a:r>
+              <a:t>Sales Momentum</a:t>
             </a:r>
           </a:p>
         </p:txBody>
@@ -5641,300 +5638,15 @@
           <a:lstStyle/>
           <a:p>
             <a:pPr algn="l">
-              <a:defRPr sz="5200" b="1" i="0">
-                <a:solidFill>
-                  <a:srgbClr val="F59E0B"/>
-                </a:solidFill>
-                <a:latin typeface="Calibri"/>
-              </a:defRPr>
-            </a:pPr>
-            <a:r>
-              <a:t>1,500</a:t>
-            </a:r>
-          </a:p>
-        </p:txBody>
-      </p:sp>
-      <p:sp>
-        <p:nvSpPr>
-          <p:cNvPr id="6" name="TextBox 5"/>
-          <p:cNvSpPr txBox="1"/>
-          <p:nvPr/>
-        </p:nvSpPr>
-        <p:spPr>
-          <a:xfrm>
-            <a:off x="1097280" y="2926080"/>
-            <a:ext cx="4572000" cy="365760"/>
-          </a:xfrm>
-          <a:prstGeom prst="rect">
-            <a:avLst/>
-          </a:prstGeom>
-          <a:noFill/>
-        </p:spPr>
-        <p:txBody>
-          <a:bodyPr wrap="square">
-            <a:spAutoFit/>
-          </a:bodyPr>
-          <a:lstStyle/>
-          <a:p>
-            <a:pPr algn="l">
-              <a:defRPr sz="1100" b="0" i="0">
-                <a:solidFill>
-                  <a:srgbClr val="8F95A3"/>
-                </a:solidFill>
-                <a:latin typeface="Calibri"/>
-              </a:defRPr>
-            </a:pPr>
-            <a:r>
-              <a:t>employees × 10 AI agents</a:t>
-            </a:r>
-          </a:p>
-        </p:txBody>
-      </p:sp>
-      <p:sp>
-        <p:nvSpPr>
-          <p:cNvPr id="7" name="TextBox 6"/>
-          <p:cNvSpPr txBox="1"/>
-          <p:nvPr/>
-        </p:nvSpPr>
-        <p:spPr>
-          <a:xfrm>
-            <a:off x="1097280" y="3566160"/>
-            <a:ext cx="9966960" cy="457200"/>
-          </a:xfrm>
-          <a:prstGeom prst="rect">
-            <a:avLst/>
-          </a:prstGeom>
-          <a:noFill/>
-        </p:spPr>
-        <p:txBody>
-          <a:bodyPr wrap="square">
-            <a:spAutoFit/>
-          </a:bodyPr>
-          <a:lstStyle/>
-          <a:p>
-            <a:pPr algn="l">
-              <a:defRPr sz="1800" b="1" i="0">
-                <a:solidFill>
-                  <a:srgbClr val="FFFFFF"/>
-                </a:solidFill>
-                <a:latin typeface="Calibri"/>
-              </a:defRPr>
-            </a:pPr>
-            <a:r>
-              <a:t>Every Employee + 5-10 AI Agents</a:t>
-            </a:r>
-          </a:p>
-        </p:txBody>
-      </p:sp>
-      <p:sp>
-        <p:nvSpPr>
-          <p:cNvPr id="8" name="TextBox 7"/>
-          <p:cNvSpPr txBox="1"/>
-          <p:nvPr/>
-        </p:nvSpPr>
-        <p:spPr>
-          <a:xfrm>
-            <a:off x="1097280" y="4206240"/>
-            <a:ext cx="9966960" cy="1371600"/>
-          </a:xfrm>
-          <a:prstGeom prst="rect">
-            <a:avLst/>
-          </a:prstGeom>
-          <a:noFill/>
-        </p:spPr>
-        <p:txBody>
-          <a:bodyPr wrap="square">
-            <a:spAutoFit/>
-          </a:bodyPr>
-          <a:lstStyle/>
-          <a:p>
-            <a:pPr algn="l">
-              <a:defRPr sz="1500" b="0" i="0">
-                <a:solidFill>
-                  <a:srgbClr val="E2E2EA"/>
-                </a:solidFill>
-                <a:latin typeface="Calibri"/>
-              </a:defRPr>
-            </a:pPr>
-            <a:r>
-              <a:t>Within 3-6 months, every Appodeal employee will manage 5-10 AI agents. We're not just using AI — we're becoming an AI-amplified organization where humans and machines work together seamlessly.</a:t>
-            </a:r>
-          </a:p>
-        </p:txBody>
-      </p:sp>
-    </p:spTree>
-  </p:cSld>
-  <p:clrMapOvr>
-    <a:masterClrMapping/>
-  </p:clrMapOvr>
-</p:sld>
-</file>
-
-<file path=ppt/slides/slide18.xml><?xml version="1.0" encoding="utf-8"?>
-<p:sld xmlns:a="http://schemas.openxmlformats.org/drawingml/2006/main" xmlns:p="http://schemas.openxmlformats.org/presentationml/2006/main" xmlns:r="http://schemas.openxmlformats.org/officeDocument/2006/relationships">
-  <p:cSld>
-    <p:bg>
-      <p:bgPr>
-        <a:solidFill>
-          <a:srgbClr val="08080C"/>
-        </a:solidFill>
-        <a:effectLst/>
-      </p:bgPr>
-    </p:bg>
-    <p:spTree>
-      <p:nvGrpSpPr>
-        <p:cNvPr id="1" name=""/>
-        <p:cNvGrpSpPr/>
-        <p:nvPr/>
-      </p:nvGrpSpPr>
-      <p:grpSpPr/>
-      <p:sp>
-        <p:nvSpPr>
-          <p:cNvPr id="2" name="Rectangle 1"/>
-          <p:cNvSpPr/>
-          <p:nvPr/>
-        </p:nvSpPr>
-        <p:spPr>
-          <a:xfrm>
-            <a:off x="0" y="365760"/>
-            <a:ext cx="12191695" cy="54864"/>
-          </a:xfrm>
-          <a:prstGeom prst="rect">
-            <a:avLst/>
-          </a:prstGeom>
-          <a:solidFill>
-            <a:srgbClr val="EC4899"/>
-          </a:solidFill>
-          <a:ln>
-            <a:noFill/>
-          </a:ln>
-        </p:spPr>
-        <p:style>
-          <a:lnRef idx="1">
-            <a:schemeClr val="accent1"/>
-          </a:lnRef>
-          <a:fillRef idx="3">
-            <a:schemeClr val="accent1"/>
-          </a:fillRef>
-          <a:effectRef idx="2">
-            <a:schemeClr val="accent1"/>
-          </a:effectRef>
-          <a:fontRef idx="minor">
-            <a:schemeClr val="lt1"/>
-          </a:fontRef>
-        </p:style>
-        <p:txBody>
-          <a:bodyPr rtlCol="0" anchor="ctr"/>
-          <a:lstStyle/>
-          <a:p>
-            <a:pPr algn="ctr"/>
-          </a:p>
-        </p:txBody>
-      </p:sp>
-      <p:sp>
-        <p:nvSpPr>
-          <p:cNvPr id="3" name="TextBox 2"/>
-          <p:cNvSpPr txBox="1"/>
-          <p:nvPr/>
-        </p:nvSpPr>
-        <p:spPr>
-          <a:xfrm>
-            <a:off x="1097280" y="731520"/>
-            <a:ext cx="3657600" cy="365760"/>
-          </a:xfrm>
-          <a:prstGeom prst="rect">
-            <a:avLst/>
-          </a:prstGeom>
-          <a:noFill/>
-        </p:spPr>
-        <p:txBody>
-          <a:bodyPr wrap="none">
-            <a:spAutoFit/>
-          </a:bodyPr>
-          <a:lstStyle/>
-          <a:p>
-            <a:pPr algn="l">
-              <a:defRPr sz="1000" b="1">
-                <a:solidFill>
-                  <a:srgbClr val="EC4899"/>
-                </a:solidFill>
-                <a:latin typeface="Calibri"/>
-              </a:defRPr>
-            </a:pPr>
-            <a:r>
-              <a:t>🎮  WIN</a:t>
-            </a:r>
-          </a:p>
-        </p:txBody>
-      </p:sp>
-      <p:sp>
-        <p:nvSpPr>
-          <p:cNvPr id="4" name="TextBox 3"/>
-          <p:cNvSpPr txBox="1"/>
-          <p:nvPr/>
-        </p:nvSpPr>
-        <p:spPr>
-          <a:xfrm>
-            <a:off x="1097280" y="1188720"/>
-            <a:ext cx="9966960" cy="731520"/>
-          </a:xfrm>
-          <a:prstGeom prst="rect">
-            <a:avLst/>
-          </a:prstGeom>
-          <a:noFill/>
-        </p:spPr>
-        <p:txBody>
-          <a:bodyPr wrap="square">
-            <a:spAutoFit/>
-          </a:bodyPr>
-          <a:lstStyle/>
-          <a:p>
-            <a:pPr algn="l">
-              <a:defRPr sz="3200" b="1" i="0">
-                <a:solidFill>
-                  <a:srgbClr val="EC4899"/>
-                </a:solidFill>
-                <a:latin typeface="Calibri"/>
-              </a:defRPr>
-            </a:pPr>
-            <a:r>
-              <a:t>Gaming Goes Green</a:t>
-            </a:r>
-          </a:p>
-        </p:txBody>
-      </p:sp>
-      <p:sp>
-        <p:nvSpPr>
-          <p:cNvPr id="5" name="TextBox 4"/>
-          <p:cNvSpPr txBox="1"/>
-          <p:nvPr/>
-        </p:nvSpPr>
-        <p:spPr>
-          <a:xfrm>
-            <a:off x="1097280" y="2103120"/>
-            <a:ext cx="4572000" cy="822960"/>
-          </a:xfrm>
-          <a:prstGeom prst="rect">
-            <a:avLst/>
-          </a:prstGeom>
-          <a:noFill/>
-        </p:spPr>
-        <p:txBody>
-          <a:bodyPr wrap="square">
-            <a:spAutoFit/>
-          </a:bodyPr>
-          <a:lstStyle/>
-          <a:p>
-            <a:pPr algn="l">
               <a:defRPr sz="4800" b="1" i="0">
                 <a:solidFill>
-                  <a:srgbClr val="EC4899"/>
-                </a:solidFill>
-                <a:latin typeface="Calibri"/>
-              </a:defRPr>
-            </a:pPr>
-            <a:r>
-              <a:t>100%</a:t>
+                  <a:srgbClr val="10B981"/>
+                </a:solidFill>
+                <a:latin typeface="Calibri"/>
+              </a:defRPr>
+            </a:pPr>
+            <a:r>
+              <a:t>$390k</a:t>
             </a:r>
           </a:p>
         </p:txBody>
@@ -5970,7 +5682,7 @@
               </a:defRPr>
             </a:pPr>
             <a:r>
-              <a:t>profitable</a:t>
+              <a:t>Weekly Revenue</a:t>
             </a:r>
           </a:p>
         </p:txBody>
@@ -6006,7 +5718,7 @@
               </a:defRPr>
             </a:pPr>
             <a:r>
-              <a:t>by Gaming Division</a:t>
+              <a:t>by Sales Team</a:t>
             </a:r>
           </a:p>
         </p:txBody>
@@ -6042,7 +5754,7 @@
               </a:defRPr>
             </a:pPr>
             <a:r>
-              <a:t>Gaming Division Hits Profitability</a:t>
+              <a:t>8 Deals Closed in Single Week</a:t>
             </a:r>
           </a:p>
         </p:txBody>
@@ -6078,7 +5790,7 @@
               </a:defRPr>
             </a:pPr>
             <a:r>
-              <a:t>After years of investment and optimization, our gaming division finally turned profitable in 2025. A testament to persistence and strategic execution.</a:t>
+              <a:t>Our sales machine is firing on all cylinders - 8 deals closed generating $390k net revenue in just one week. The momentum is incredible.</a:t>
             </a:r>
           </a:p>
         </p:txBody>
@@ -6114,364 +5826,7 @@
               </a:defRPr>
             </a:pPr>
             <a:r>
-              <a:t>💬 "Long-term vision pays off"</a:t>
-            </a:r>
-          </a:p>
-        </p:txBody>
-      </p:sp>
-    </p:spTree>
-  </p:cSld>
-  <p:clrMapOvr>
-    <a:masterClrMapping/>
-  </p:clrMapOvr>
-</p:sld>
-</file>
-
-<file path=ppt/slides/slide19.xml><?xml version="1.0" encoding="utf-8"?>
-<p:sld xmlns:a="http://schemas.openxmlformats.org/drawingml/2006/main" xmlns:p="http://schemas.openxmlformats.org/presentationml/2006/main" xmlns:r="http://schemas.openxmlformats.org/officeDocument/2006/relationships">
-  <p:cSld>
-    <p:bg>
-      <p:bgPr>
-        <a:solidFill>
-          <a:srgbClr val="08080C"/>
-        </a:solidFill>
-        <a:effectLst/>
-      </p:bgPr>
-    </p:bg>
-    <p:spTree>
-      <p:nvGrpSpPr>
-        <p:cNvPr id="1" name=""/>
-        <p:cNvGrpSpPr/>
-        <p:nvPr/>
-      </p:nvGrpSpPr>
-      <p:grpSpPr/>
-      <p:sp>
-        <p:nvSpPr>
-          <p:cNvPr id="2" name="Rectangle 1"/>
-          <p:cNvSpPr/>
-          <p:nvPr/>
-        </p:nvSpPr>
-        <p:spPr>
-          <a:xfrm>
-            <a:off x="0" y="365760"/>
-            <a:ext cx="12191695" cy="54864"/>
-          </a:xfrm>
-          <a:prstGeom prst="rect">
-            <a:avLst/>
-          </a:prstGeom>
-          <a:solidFill>
-            <a:srgbClr val="06B6D4"/>
-          </a:solidFill>
-          <a:ln>
-            <a:noFill/>
-          </a:ln>
-        </p:spPr>
-        <p:style>
-          <a:lnRef idx="1">
-            <a:schemeClr val="accent1"/>
-          </a:lnRef>
-          <a:fillRef idx="3">
-            <a:schemeClr val="accent1"/>
-          </a:fillRef>
-          <a:effectRef idx="2">
-            <a:schemeClr val="accent1"/>
-          </a:effectRef>
-          <a:fontRef idx="minor">
-            <a:schemeClr val="lt1"/>
-          </a:fontRef>
-        </p:style>
-        <p:txBody>
-          <a:bodyPr rtlCol="0" anchor="ctr"/>
-          <a:lstStyle/>
-          <a:p>
-            <a:pPr algn="ctr"/>
-          </a:p>
-        </p:txBody>
-      </p:sp>
-      <p:sp>
-        <p:nvSpPr>
-          <p:cNvPr id="3" name="TextBox 2"/>
-          <p:cNvSpPr txBox="1"/>
-          <p:nvPr/>
-        </p:nvSpPr>
-        <p:spPr>
-          <a:xfrm>
-            <a:off x="1097280" y="731520"/>
-            <a:ext cx="3657600" cy="365760"/>
-          </a:xfrm>
-          <a:prstGeom prst="rect">
-            <a:avLst/>
-          </a:prstGeom>
-          <a:noFill/>
-        </p:spPr>
-        <p:txBody>
-          <a:bodyPr wrap="none">
-            <a:spAutoFit/>
-          </a:bodyPr>
-          <a:lstStyle/>
-          <a:p>
-            <a:pPr algn="l">
-              <a:defRPr sz="1000" b="1">
-                <a:solidFill>
-                  <a:srgbClr val="06B6D4"/>
-                </a:solidFill>
-                <a:latin typeface="Calibri"/>
-              </a:defRPr>
-            </a:pPr>
-            <a:r>
-              <a:t>💎  WIN</a:t>
-            </a:r>
-          </a:p>
-        </p:txBody>
-      </p:sp>
-      <p:sp>
-        <p:nvSpPr>
-          <p:cNvPr id="4" name="TextBox 3"/>
-          <p:cNvSpPr txBox="1"/>
-          <p:nvPr/>
-        </p:nvSpPr>
-        <p:spPr>
-          <a:xfrm>
-            <a:off x="1097280" y="1188720"/>
-            <a:ext cx="9966960" cy="731520"/>
-          </a:xfrm>
-          <a:prstGeom prst="rect">
-            <a:avLst/>
-          </a:prstGeom>
-          <a:noFill/>
-        </p:spPr>
-        <p:txBody>
-          <a:bodyPr wrap="square">
-            <a:spAutoFit/>
-          </a:bodyPr>
-          <a:lstStyle/>
-          <a:p>
-            <a:pPr algn="l">
-              <a:defRPr sz="3200" b="1" i="0">
-                <a:solidFill>
-                  <a:srgbClr val="06B6D4"/>
-                </a:solidFill>
-                <a:latin typeface="Calibri"/>
-              </a:defRPr>
-            </a:pPr>
-            <a:r>
-              <a:t>Retention Champion</a:t>
-            </a:r>
-          </a:p>
-        </p:txBody>
-      </p:sp>
-      <p:sp>
-        <p:nvSpPr>
-          <p:cNvPr id="5" name="TextBox 4"/>
-          <p:cNvSpPr txBox="1"/>
-          <p:nvPr/>
-        </p:nvSpPr>
-        <p:spPr>
-          <a:xfrm>
-            <a:off x="1097280" y="2103120"/>
-            <a:ext cx="4572000" cy="822960"/>
-          </a:xfrm>
-          <a:prstGeom prst="rect">
-            <a:avLst/>
-          </a:prstGeom>
-          <a:noFill/>
-        </p:spPr>
-        <p:txBody>
-          <a:bodyPr wrap="square">
-            <a:spAutoFit/>
-          </a:bodyPr>
-          <a:lstStyle/>
-          <a:p>
-            <a:pPr algn="l">
-              <a:defRPr sz="4800" b="1" i="0">
-                <a:solidFill>
-                  <a:srgbClr val="06B6D4"/>
-                </a:solidFill>
-                <a:latin typeface="Calibri"/>
-              </a:defRPr>
-            </a:pPr>
-            <a:r>
-              <a:t>61%</a:t>
-            </a:r>
-          </a:p>
-        </p:txBody>
-      </p:sp>
-      <p:sp>
-        <p:nvSpPr>
-          <p:cNvPr id="6" name="TextBox 5"/>
-          <p:cNvSpPr txBox="1"/>
-          <p:nvPr/>
-        </p:nvSpPr>
-        <p:spPr>
-          <a:xfrm>
-            <a:off x="1097280" y="2834640"/>
-            <a:ext cx="4572000" cy="365760"/>
-          </a:xfrm>
-          <a:prstGeom prst="rect">
-            <a:avLst/>
-          </a:prstGeom>
-          <a:noFill/>
-        </p:spPr>
-        <p:txBody>
-          <a:bodyPr wrap="square">
-            <a:spAutoFit/>
-          </a:bodyPr>
-          <a:lstStyle/>
-          <a:p>
-            <a:pPr algn="l">
-              <a:defRPr sz="1200" b="0" i="0">
-                <a:solidFill>
-                  <a:srgbClr val="8F95A3"/>
-                </a:solidFill>
-                <a:latin typeface="Calibri"/>
-              </a:defRPr>
-            </a:pPr>
-            <a:r>
-              <a:t>retention</a:t>
-            </a:r>
-          </a:p>
-        </p:txBody>
-      </p:sp>
-      <p:sp>
-        <p:nvSpPr>
-          <p:cNvPr id="7" name="TextBox 6"/>
-          <p:cNvSpPr txBox="1"/>
-          <p:nvPr/>
-        </p:nvSpPr>
-        <p:spPr>
-          <a:xfrm>
-            <a:off x="1097280" y="3291840"/>
-            <a:ext cx="9966960" cy="365760"/>
-          </a:xfrm>
-          <a:prstGeom prst="rect">
-            <a:avLst/>
-          </a:prstGeom>
-          <a:noFill/>
-        </p:spPr>
-        <p:txBody>
-          <a:bodyPr wrap="square">
-            <a:spAutoFit/>
-          </a:bodyPr>
-          <a:lstStyle/>
-          <a:p>
-            <a:pPr algn="l">
-              <a:defRPr sz="1400" b="0" i="0">
-                <a:solidFill>
-                  <a:srgbClr val="E2E2EA"/>
-                </a:solidFill>
-                <a:latin typeface="Calibri"/>
-              </a:defRPr>
-            </a:pPr>
-            <a:r>
-              <a:t>by Infinite Minesweeper Team</a:t>
-            </a:r>
-          </a:p>
-        </p:txBody>
-      </p:sp>
-      <p:sp>
-        <p:nvSpPr>
-          <p:cNvPr id="8" name="TextBox 7"/>
-          <p:cNvSpPr txBox="1"/>
-          <p:nvPr/>
-        </p:nvSpPr>
-        <p:spPr>
-          <a:xfrm>
-            <a:off x="1097280" y="3840480"/>
-            <a:ext cx="9966960" cy="457200"/>
-          </a:xfrm>
-          <a:prstGeom prst="rect">
-            <a:avLst/>
-          </a:prstGeom>
-          <a:noFill/>
-        </p:spPr>
-        <p:txBody>
-          <a:bodyPr wrap="square">
-            <a:spAutoFit/>
-          </a:bodyPr>
-          <a:lstStyle/>
-          <a:p>
-            <a:pPr algn="l">
-              <a:defRPr sz="1800" b="1" i="0">
-                <a:solidFill>
-                  <a:srgbClr val="FFFFFF"/>
-                </a:solidFill>
-                <a:latin typeface="Calibri"/>
-              </a:defRPr>
-            </a:pPr>
-            <a:r>
-              <a:t>Crushing Apple Benchmarks</a:t>
-            </a:r>
-          </a:p>
-        </p:txBody>
-      </p:sp>
-      <p:sp>
-        <p:nvSpPr>
-          <p:cNvPr id="9" name="TextBox 8"/>
-          <p:cNvSpPr txBox="1"/>
-          <p:nvPr/>
-        </p:nvSpPr>
-        <p:spPr>
-          <a:xfrm>
-            <a:off x="1097280" y="4389120"/>
-            <a:ext cx="9966960" cy="914400"/>
-          </a:xfrm>
-          <a:prstGeom prst="rect">
-            <a:avLst/>
-          </a:prstGeom>
-          <a:noFill/>
-        </p:spPr>
-        <p:txBody>
-          <a:bodyPr wrap="square">
-            <a:spAutoFit/>
-          </a:bodyPr>
-          <a:lstStyle/>
-          <a:p>
-            <a:pPr algn="l">
-              <a:defRPr sz="1400" b="0" i="0">
-                <a:solidFill>
-                  <a:srgbClr val="E2E2EA"/>
-                </a:solidFill>
-                <a:latin typeface="Calibri"/>
-              </a:defRPr>
-            </a:pPr>
-            <a:r>
-              <a:t>Infinite Minesweeper achieved 61% retention, significantly outperforming Apple's benchmark ERA of 151-160%. Our gaming products are not just profitable — they're sticky.</a:t>
-            </a:r>
-          </a:p>
-        </p:txBody>
-      </p:sp>
-      <p:sp>
-        <p:nvSpPr>
-          <p:cNvPr id="10" name="TextBox 9"/>
-          <p:cNvSpPr txBox="1"/>
-          <p:nvPr/>
-        </p:nvSpPr>
-        <p:spPr>
-          <a:xfrm>
-            <a:off x="1097280" y="5486400"/>
-            <a:ext cx="9966960" cy="457200"/>
-          </a:xfrm>
-          <a:prstGeom prst="rect">
-            <a:avLst/>
-          </a:prstGeom>
-          <a:noFill/>
-        </p:spPr>
-        <p:txBody>
-          <a:bodyPr wrap="square">
-            <a:spAutoFit/>
-          </a:bodyPr>
-          <a:lstStyle/>
-          <a:p>
-            <a:pPr algn="l">
-              <a:defRPr sz="1300" b="0" i="1">
-                <a:solidFill>
-                  <a:srgbClr val="8F95A3"/>
-                </a:solidFill>
-                <a:latin typeface="Calibri"/>
-              </a:defRPr>
-            </a:pPr>
-            <a:r>
-              <a:t>💬 "Quality games = loyal players"</a:t>
+              <a:t>💬 "Sales excellence driving company growth"</a:t>
             </a:r>
           </a:p>
         </p:txBody>
@@ -6517,7 +5872,7 @@
             <a:avLst/>
           </a:prstGeom>
           <a:solidFill>
-            <a:srgbClr val="FF6B35"/>
+            <a:srgbClr val="00D4AA"/>
           </a:solidFill>
           <a:ln>
             <a:noFill/>
@@ -6570,7 +5925,7 @@
             <a:pPr algn="l">
               <a:defRPr sz="1000" b="1">
                 <a:solidFill>
-                  <a:srgbClr val="FF6B35"/>
+                  <a:srgbClr val="00D4AA"/>
                 </a:solidFill>
                 <a:latin typeface="Calibri"/>
               </a:defRPr>
@@ -6606,13 +5961,13 @@
             <a:pPr algn="l">
               <a:defRPr sz="3200" b="1" i="0">
                 <a:solidFill>
-                  <a:srgbClr val="FF6B35"/>
-                </a:solidFill>
-                <a:latin typeface="Calibri"/>
-              </a:defRPr>
-            </a:pPr>
-            <a:r>
-              <a:t>Innovation Explosion</a:t>
+                  <a:srgbClr val="00D4AA"/>
+                </a:solidFill>
+                <a:latin typeface="Calibri"/>
+              </a:defRPr>
+            </a:pPr>
+            <a:r>
+              <a:t>DevOps Innovation</a:t>
             </a:r>
           </a:p>
         </p:txBody>
@@ -6642,13 +5997,13 @@
             <a:pPr algn="l">
               <a:defRPr sz="4800" b="1" i="0">
                 <a:solidFill>
-                  <a:srgbClr val="FF6B35"/>
-                </a:solidFill>
-                <a:latin typeface="Calibri"/>
-              </a:defRPr>
-            </a:pPr>
-            <a:r>
-              <a:t>100+</a:t>
+                  <a:srgbClr val="00D4AA"/>
+                </a:solidFill>
+                <a:latin typeface="Calibri"/>
+              </a:defRPr>
+            </a:pPr>
+            <a:r>
+              <a:t>Coolify</a:t>
             </a:r>
           </a:p>
         </p:txBody>
@@ -6684,7 +6039,7 @@
               </a:defRPr>
             </a:pPr>
             <a:r>
-              <a:t>AI tools built</a:t>
+              <a:t>Platform Launch</a:t>
             </a:r>
           </a:p>
         </p:txBody>
@@ -6720,7 +6075,7 @@
               </a:defRPr>
             </a:pPr>
             <a:r>
-              <a:t>by Non-engineering teams</a:t>
+              <a:t>by Gleb Krahotkin &amp; DevOps Team</a:t>
             </a:r>
           </a:p>
         </p:txBody>
@@ -6756,7 +6111,7 @@
               </a:defRPr>
             </a:pPr>
             <a:r>
-              <a:t>Everyone's Building the Future</a:t>
+              <a:t>One-Click App Deployment Goes Live</a:t>
             </a:r>
           </a:p>
         </p:txBody>
@@ -6792,7 +6147,7 @@
               </a:defRPr>
             </a:pPr>
             <a:r>
-              <a:t>Our non-engineering teams have created countless useful AI tools, proving we're all builders now. This rapid innovation shows we're learning fast and moving in the right direction.</a:t>
+              <a:t>Our DevOps team just launched Coolify - a revolutionary platform that lets you deploy applications in just a few clicks. No more complex deployment processes!</a:t>
             </a:r>
           </a:p>
         </p:txBody>
@@ -6828,364 +6183,7 @@
               </a:defRPr>
             </a:pPr>
             <a:r>
-              <a:t>💬 "When everyone builds, everyone wins"</a:t>
-            </a:r>
-          </a:p>
-        </p:txBody>
-      </p:sp>
-    </p:spTree>
-  </p:cSld>
-  <p:clrMapOvr>
-    <a:masterClrMapping/>
-  </p:clrMapOvr>
-</p:sld>
-</file>
-
-<file path=ppt/slides/slide20.xml><?xml version="1.0" encoding="utf-8"?>
-<p:sld xmlns:a="http://schemas.openxmlformats.org/drawingml/2006/main" xmlns:p="http://schemas.openxmlformats.org/presentationml/2006/main" xmlns:r="http://schemas.openxmlformats.org/officeDocument/2006/relationships">
-  <p:cSld>
-    <p:bg>
-      <p:bgPr>
-        <a:solidFill>
-          <a:srgbClr val="08080C"/>
-        </a:solidFill>
-        <a:effectLst/>
-      </p:bgPr>
-    </p:bg>
-    <p:spTree>
-      <p:nvGrpSpPr>
-        <p:cNvPr id="1" name=""/>
-        <p:cNvGrpSpPr/>
-        <p:nvPr/>
-      </p:nvGrpSpPr>
-      <p:grpSpPr/>
-      <p:sp>
-        <p:nvSpPr>
-          <p:cNvPr id="2" name="Rectangle 1"/>
-          <p:cNvSpPr/>
-          <p:nvPr/>
-        </p:nvSpPr>
-        <p:spPr>
-          <a:xfrm>
-            <a:off x="0" y="365760"/>
-            <a:ext cx="12191695" cy="54864"/>
-          </a:xfrm>
-          <a:prstGeom prst="rect">
-            <a:avLst/>
-          </a:prstGeom>
-          <a:solidFill>
-            <a:srgbClr val="EF4444"/>
-          </a:solidFill>
-          <a:ln>
-            <a:noFill/>
-          </a:ln>
-        </p:spPr>
-        <p:style>
-          <a:lnRef idx="1">
-            <a:schemeClr val="accent1"/>
-          </a:lnRef>
-          <a:fillRef idx="3">
-            <a:schemeClr val="accent1"/>
-          </a:fillRef>
-          <a:effectRef idx="2">
-            <a:schemeClr val="accent1"/>
-          </a:effectRef>
-          <a:fontRef idx="minor">
-            <a:schemeClr val="lt1"/>
-          </a:fontRef>
-        </p:style>
-        <p:txBody>
-          <a:bodyPr rtlCol="0" anchor="ctr"/>
-          <a:lstStyle/>
-          <a:p>
-            <a:pPr algn="ctr"/>
-          </a:p>
-        </p:txBody>
-      </p:sp>
-      <p:sp>
-        <p:nvSpPr>
-          <p:cNvPr id="3" name="TextBox 2"/>
-          <p:cNvSpPr txBox="1"/>
-          <p:nvPr/>
-        </p:nvSpPr>
-        <p:spPr>
-          <a:xfrm>
-            <a:off x="1097280" y="731520"/>
-            <a:ext cx="3657600" cy="365760"/>
-          </a:xfrm>
-          <a:prstGeom prst="rect">
-            <a:avLst/>
-          </a:prstGeom>
-          <a:noFill/>
-        </p:spPr>
-        <p:txBody>
-          <a:bodyPr wrap="none">
-            <a:spAutoFit/>
-          </a:bodyPr>
-          <a:lstStyle/>
-          <a:p>
-            <a:pPr algn="l">
-              <a:defRPr sz="1000" b="1">
-                <a:solidFill>
-                  <a:srgbClr val="EF4444"/>
-                </a:solidFill>
-                <a:latin typeface="Calibri"/>
-              </a:defRPr>
-            </a:pPr>
-            <a:r>
-              <a:t>🛡️  WIN</a:t>
-            </a:r>
-          </a:p>
-        </p:txBody>
-      </p:sp>
-      <p:sp>
-        <p:nvSpPr>
-          <p:cNvPr id="4" name="TextBox 3"/>
-          <p:cNvSpPr txBox="1"/>
-          <p:nvPr/>
-        </p:nvSpPr>
-        <p:spPr>
-          <a:xfrm>
-            <a:off x="1097280" y="1188720"/>
-            <a:ext cx="9966960" cy="731520"/>
-          </a:xfrm>
-          <a:prstGeom prst="rect">
-            <a:avLst/>
-          </a:prstGeom>
-          <a:noFill/>
-        </p:spPr>
-        <p:txBody>
-          <a:bodyPr wrap="square">
-            <a:spAutoFit/>
-          </a:bodyPr>
-          <a:lstStyle/>
-          <a:p>
-            <a:pPr algn="l">
-              <a:defRPr sz="3200" b="1" i="0">
-                <a:solidFill>
-                  <a:srgbClr val="EF4444"/>
-                </a:solidFill>
-                <a:latin typeface="Calibri"/>
-              </a:defRPr>
-            </a:pPr>
-            <a:r>
-              <a:t>Fraud Defense Victory</a:t>
-            </a:r>
-          </a:p>
-        </p:txBody>
-      </p:sp>
-      <p:sp>
-        <p:nvSpPr>
-          <p:cNvPr id="5" name="TextBox 4"/>
-          <p:cNvSpPr txBox="1"/>
-          <p:nvPr/>
-        </p:nvSpPr>
-        <p:spPr>
-          <a:xfrm>
-            <a:off x="1097280" y="2103120"/>
-            <a:ext cx="4572000" cy="822960"/>
-          </a:xfrm>
-          <a:prstGeom prst="rect">
-            <a:avLst/>
-          </a:prstGeom>
-          <a:noFill/>
-        </p:spPr>
-        <p:txBody>
-          <a:bodyPr wrap="square">
-            <a:spAutoFit/>
-          </a:bodyPr>
-          <a:lstStyle/>
-          <a:p>
-            <a:pPr algn="l">
-              <a:defRPr sz="4800" b="1" i="0">
-                <a:solidFill>
-                  <a:srgbClr val="EF4444"/>
-                </a:solidFill>
-                <a:latin typeface="Calibri"/>
-              </a:defRPr>
-            </a:pPr>
-            <a:r>
-              <a:t>4%</a:t>
-            </a:r>
-          </a:p>
-        </p:txBody>
-      </p:sp>
-      <p:sp>
-        <p:nvSpPr>
-          <p:cNvPr id="6" name="TextBox 5"/>
-          <p:cNvSpPr txBox="1"/>
-          <p:nvPr/>
-        </p:nvSpPr>
-        <p:spPr>
-          <a:xfrm>
-            <a:off x="1097280" y="2834640"/>
-            <a:ext cx="4572000" cy="365760"/>
-          </a:xfrm>
-          <a:prstGeom prst="rect">
-            <a:avLst/>
-          </a:prstGeom>
-          <a:noFill/>
-        </p:spPr>
-        <p:txBody>
-          <a:bodyPr wrap="square">
-            <a:spAutoFit/>
-          </a:bodyPr>
-          <a:lstStyle/>
-          <a:p>
-            <a:pPr algn="l">
-              <a:defRPr sz="1200" b="0" i="0">
-                <a:solidFill>
-                  <a:srgbClr val="8F95A3"/>
-                </a:solidFill>
-                <a:latin typeface="Calibri"/>
-              </a:defRPr>
-            </a:pPr>
-            <a:r>
-              <a:t>fraud rate</a:t>
-            </a:r>
-          </a:p>
-        </p:txBody>
-      </p:sp>
-      <p:sp>
-        <p:nvSpPr>
-          <p:cNvPr id="7" name="TextBox 6"/>
-          <p:cNvSpPr txBox="1"/>
-          <p:nvPr/>
-        </p:nvSpPr>
-        <p:spPr>
-          <a:xfrm>
-            <a:off x="1097280" y="3291840"/>
-            <a:ext cx="9966960" cy="365760"/>
-          </a:xfrm>
-          <a:prstGeom prst="rect">
-            <a:avLst/>
-          </a:prstGeom>
-          <a:noFill/>
-        </p:spPr>
-        <p:txBody>
-          <a:bodyPr wrap="square">
-            <a:spAutoFit/>
-          </a:bodyPr>
-          <a:lstStyle/>
-          <a:p>
-            <a:pPr algn="l">
-              <a:defRPr sz="1400" b="0" i="0">
-                <a:solidFill>
-                  <a:srgbClr val="E2E2EA"/>
-                </a:solidFill>
-                <a:latin typeface="Calibri"/>
-              </a:defRPr>
-            </a:pPr>
-            <a:r>
-              <a:t>by Security Team</a:t>
-            </a:r>
-          </a:p>
-        </p:txBody>
-      </p:sp>
-      <p:sp>
-        <p:nvSpPr>
-          <p:cNvPr id="8" name="TextBox 7"/>
-          <p:cNvSpPr txBox="1"/>
-          <p:nvPr/>
-        </p:nvSpPr>
-        <p:spPr>
-          <a:xfrm>
-            <a:off x="1097280" y="3840480"/>
-            <a:ext cx="9966960" cy="457200"/>
-          </a:xfrm>
-          <a:prstGeom prst="rect">
-            <a:avLst/>
-          </a:prstGeom>
-          <a:noFill/>
-        </p:spPr>
-        <p:txBody>
-          <a:bodyPr wrap="square">
-            <a:spAutoFit/>
-          </a:bodyPr>
-          <a:lstStyle/>
-          <a:p>
-            <a:pPr algn="l">
-              <a:defRPr sz="1800" b="1" i="0">
-                <a:solidFill>
-                  <a:srgbClr val="FFFFFF"/>
-                </a:solidFill>
-                <a:latin typeface="Calibri"/>
-              </a:defRPr>
-            </a:pPr>
-            <a:r>
-              <a:t>Fraud Crushed: 22% → 4%</a:t>
-            </a:r>
-          </a:p>
-        </p:txBody>
-      </p:sp>
-      <p:sp>
-        <p:nvSpPr>
-          <p:cNvPr id="9" name="TextBox 8"/>
-          <p:cNvSpPr txBox="1"/>
-          <p:nvPr/>
-        </p:nvSpPr>
-        <p:spPr>
-          <a:xfrm>
-            <a:off x="1097280" y="4389120"/>
-            <a:ext cx="9966960" cy="914400"/>
-          </a:xfrm>
-          <a:prstGeom prst="rect">
-            <a:avLst/>
-          </a:prstGeom>
-          <a:noFill/>
-        </p:spPr>
-        <p:txBody>
-          <a:bodyPr wrap="square">
-            <a:spAutoFit/>
-          </a:bodyPr>
-          <a:lstStyle/>
-          <a:p>
-            <a:pPr algn="l">
-              <a:defRPr sz="1400" b="0" i="0">
-                <a:solidFill>
-                  <a:srgbClr val="E2E2EA"/>
-                </a:solidFill>
-                <a:latin typeface="Calibri"/>
-              </a:defRPr>
-            </a:pPr>
-            <a:r>
-              <a:t>Dynamic SDK signatures reduced fraud from 22% to under 4%. Our advanced security measures are protecting revenue and maintaining platform integrity.</a:t>
-            </a:r>
-          </a:p>
-        </p:txBody>
-      </p:sp>
-      <p:sp>
-        <p:nvSpPr>
-          <p:cNvPr id="10" name="TextBox 9"/>
-          <p:cNvSpPr txBox="1"/>
-          <p:nvPr/>
-        </p:nvSpPr>
-        <p:spPr>
-          <a:xfrm>
-            <a:off x="1097280" y="5486400"/>
-            <a:ext cx="9966960" cy="457200"/>
-          </a:xfrm>
-          <a:prstGeom prst="rect">
-            <a:avLst/>
-          </a:prstGeom>
-          <a:noFill/>
-        </p:spPr>
-        <p:txBody>
-          <a:bodyPr wrap="square">
-            <a:spAutoFit/>
-          </a:bodyPr>
-          <a:lstStyle/>
-          <a:p>
-            <a:pPr algn="l">
-              <a:defRPr sz="1300" b="0" i="1">
-                <a:solidFill>
-                  <a:srgbClr val="8F95A3"/>
-                </a:solidFill>
-                <a:latin typeface="Calibri"/>
-              </a:defRPr>
-            </a:pPr>
-            <a:r>
-              <a:t>💬 "Smart security = clean revenue"</a:t>
+              <a:t>💬 "Empowering every team to ship faster"</a:t>
             </a:r>
           </a:p>
         </p:txBody>
@@ -7231,7 +6229,7 @@
             <a:avLst/>
           </a:prstGeom>
           <a:solidFill>
-            <a:srgbClr val="22C55E"/>
+            <a:srgbClr val="10B981"/>
           </a:solidFill>
           <a:ln>
             <a:noFill/>
@@ -7284,7 +6282,7 @@
             <a:pPr algn="l">
               <a:defRPr sz="1000" b="1">
                 <a:solidFill>
-                  <a:srgbClr val="22C55E"/>
+                  <a:srgbClr val="10B981"/>
                 </a:solidFill>
                 <a:latin typeface="Calibri"/>
               </a:defRPr>
@@ -7320,13 +6318,13 @@
             <a:pPr algn="l">
               <a:defRPr sz="3200" b="1" i="0">
                 <a:solidFill>
-                  <a:srgbClr val="22C55E"/>
-                </a:solidFill>
-                <a:latin typeface="Calibri"/>
-              </a:defRPr>
-            </a:pPr>
-            <a:r>
-              <a:t>Spring Connections Open</a:t>
+                  <a:srgbClr val="10B981"/>
+                </a:solidFill>
+                <a:latin typeface="Calibri"/>
+              </a:defRPr>
+            </a:pPr>
+            <a:r>
+              <a:t>Connect Groups Spring Season</a:t>
             </a:r>
           </a:p>
         </p:txBody>
@@ -7362,7 +6360,7 @@
               </a:defRPr>
             </a:pPr>
             <a:r>
-              <a:t>Connect Groups Spring Season</a:t>
+              <a:t>Connect Groups Spring 2026</a:t>
             </a:r>
           </a:p>
         </p:txBody>
@@ -7392,13 +6390,13 @@
             <a:pPr algn="l">
               <a:defRPr sz="1400" b="1" i="0">
                 <a:solidFill>
-                  <a:srgbClr val="22C55E"/>
-                </a:solidFill>
-                <a:latin typeface="Calibri"/>
-              </a:defRPr>
-            </a:pPr>
-            <a:r>
-              <a:t>March–May 2026</a:t>
+                  <a:srgbClr val="10B981"/>
+                </a:solidFill>
+                <a:latin typeface="Calibri"/>
+              </a:defRPr>
+            </a:pPr>
+            <a:r>
+              <a:t>March - May 2026</a:t>
             </a:r>
           </a:p>
         </p:txBody>
@@ -7434,7 +6432,7 @@
               </a:defRPr>
             </a:pPr>
             <a:r>
-              <a:t>Employee-led communities on Circle where we connect around shared interests, learning, and ideas — from sports and books to leadership, games, and meaningful conversations. Season officially launched!</a:t>
+              <a:t>Employee-led communities are officially entering Spring Season! From sports and books to leadership conversations - join your tribe and connect around shared interests on Circle.</a:t>
             </a:r>
           </a:p>
         </p:txBody>
@@ -7575,7 +6573,7 @@
               </a:defRPr>
             </a:pPr>
             <a:r>
-              <a:t>⚡  MILESTONE</a:t>
+              <a:t>🤖  OFFICE LIFE</a:t>
             </a:r>
           </a:p>
         </p:txBody>
@@ -7611,7 +6609,7 @@
               </a:defRPr>
             </a:pPr>
             <a:r>
-              <a:t>DevOps Magic Unleashed</a:t>
+              <a:t>Zero-Code AI Revolution</a:t>
             </a:r>
           </a:p>
         </p:txBody>
@@ -7625,21 +6623,129 @@
         <p:spPr>
           <a:xfrm>
             <a:off x="1097280" y="2103120"/>
-            <a:ext cx="4572000" cy="822960"/>
-          </a:xfrm>
-          <a:prstGeom prst="rect">
-            <a:avLst/>
-          </a:prstGeom>
-          <a:noFill/>
-        </p:spPr>
-        <p:txBody>
-          <a:bodyPr wrap="square">
-            <a:spAutoFit/>
-          </a:bodyPr>
-          <a:lstStyle/>
-          <a:p>
-            <a:pPr algn="l">
-              <a:defRPr sz="5200" b="1" i="0">
+            <a:ext cx="9966960" cy="457200"/>
+          </a:xfrm>
+          <a:prstGeom prst="rect">
+            <a:avLst/>
+          </a:prstGeom>
+          <a:noFill/>
+        </p:spPr>
+        <p:txBody>
+          <a:bodyPr wrap="square">
+            <a:spAutoFit/>
+          </a:bodyPr>
+          <a:lstStyle/>
+          <a:p>
+            <a:pPr algn="l">
+              <a:defRPr sz="1800" b="1" i="0">
+                <a:solidFill>
+                  <a:srgbClr val="FFFFFF"/>
+                </a:solidFill>
+                <a:latin typeface="Calibri"/>
+              </a:defRPr>
+            </a:pPr>
+            <a:r>
+              <a:t>From Idea to Production with Pure AI Magic</a:t>
+            </a:r>
+          </a:p>
+        </p:txBody>
+      </p:sp>
+      <p:sp>
+        <p:nvSpPr>
+          <p:cNvPr id="6" name="TextBox 5"/>
+          <p:cNvSpPr txBox="1"/>
+          <p:nvPr/>
+        </p:nvSpPr>
+        <p:spPr>
+          <a:xfrm>
+            <a:off x="1371600" y="2743200"/>
+            <a:ext cx="9692640" cy="1828800"/>
+          </a:xfrm>
+          <a:prstGeom prst="rect">
+            <a:avLst/>
+          </a:prstGeom>
+          <a:noFill/>
+        </p:spPr>
+        <p:txBody>
+          <a:bodyPr wrap="square">
+            <a:spAutoFit/>
+          </a:bodyPr>
+          <a:lstStyle/>
+          <a:p>
+            <a:pPr algn="l">
+              <a:defRPr sz="1500" b="0" i="1">
+                <a:solidFill>
+                  <a:srgbClr val="E2E2EA"/>
+                </a:solidFill>
+                <a:latin typeface="Calibri"/>
+              </a:defRPr>
+            </a:pPr>
+            <a:r>
+              <a:t>"I built a fully automated AI-powered system — from idea to production — using only AI tools and zero coding experience. If I can do it, you can too!"</a:t>
+            </a:r>
+          </a:p>
+        </p:txBody>
+      </p:sp>
+      <p:sp>
+        <p:nvSpPr>
+          <p:cNvPr id="7" name="TextBox 6"/>
+          <p:cNvSpPr txBox="1"/>
+          <p:nvPr/>
+        </p:nvSpPr>
+        <p:spPr>
+          <a:xfrm>
+            <a:off x="1097280" y="4754880"/>
+            <a:ext cx="9966960" cy="365760"/>
+          </a:xfrm>
+          <a:prstGeom prst="rect">
+            <a:avLst/>
+          </a:prstGeom>
+          <a:noFill/>
+        </p:spPr>
+        <p:txBody>
+          <a:bodyPr wrap="square">
+            <a:spAutoFit/>
+          </a:bodyPr>
+          <a:lstStyle/>
+          <a:p>
+            <a:pPr algn="l">
+              <a:defRPr sz="1400" b="0" i="0">
+                <a:solidFill>
+                  <a:srgbClr val="8F95A3"/>
+                </a:solidFill>
+                <a:latin typeface="Calibri"/>
+              </a:defRPr>
+            </a:pPr>
+            <a:r>
+              <a:t>— Liliya Garifullina</a:t>
+            </a:r>
+          </a:p>
+        </p:txBody>
+      </p:sp>
+      <p:sp>
+        <p:nvSpPr>
+          <p:cNvPr id="8" name="TextBox 7"/>
+          <p:cNvSpPr txBox="1"/>
+          <p:nvPr/>
+        </p:nvSpPr>
+        <p:spPr>
+          <a:xfrm>
+            <a:off x="1097280" y="5212080"/>
+            <a:ext cx="9966960" cy="365760"/>
+          </a:xfrm>
+          <a:prstGeom prst="rect">
+            <a:avLst/>
+          </a:prstGeom>
+          <a:noFill/>
+        </p:spPr>
+        <p:txBody>
+          <a:bodyPr wrap="square">
+            <a:spAutoFit/>
+          </a:bodyPr>
+          <a:lstStyle/>
+          <a:p>
+            <a:pPr algn="l">
+              <a:defRPr sz="1400" b="1" i="0">
                 <a:solidFill>
                   <a:srgbClr val="8B5CF6"/>
                 </a:solidFill>
@@ -7647,21 +6753,21 @@
               </a:defRPr>
             </a:pPr>
             <a:r>
-              <a:t>100+</a:t>
-            </a:r>
-          </a:p>
-        </p:txBody>
-      </p:sp>
-      <p:sp>
-        <p:nvSpPr>
-          <p:cNvPr id="6" name="TextBox 5"/>
-          <p:cNvSpPr txBox="1"/>
-          <p:nvPr/>
-        </p:nvSpPr>
-        <p:spPr>
-          <a:xfrm>
-            <a:off x="1097280" y="2926080"/>
-            <a:ext cx="4572000" cy="365760"/>
+              <a:t>67</a:t>
+            </a:r>
+          </a:p>
+        </p:txBody>
+      </p:sp>
+      <p:sp>
+        <p:nvSpPr>
+          <p:cNvPr id="9" name="TextBox 8"/>
+          <p:cNvSpPr txBox="1"/>
+          <p:nvPr/>
+        </p:nvSpPr>
+        <p:spPr>
+          <a:xfrm>
+            <a:off x="1097280" y="5760720"/>
+            <a:ext cx="9966960" cy="274320"/>
           </a:xfrm>
           <a:prstGeom prst="rect">
             <a:avLst/>
@@ -7677,85 +6783,13 @@
             <a:pPr algn="l">
               <a:defRPr sz="1100" b="0" i="0">
                 <a:solidFill>
-                  <a:srgbClr val="8F95A3"/>
-                </a:solidFill>
-                <a:latin typeface="Calibri"/>
-              </a:defRPr>
-            </a:pPr>
-            <a:r>
-              <a:t>reactions &amp; celebrates</a:t>
-            </a:r>
-          </a:p>
-        </p:txBody>
-      </p:sp>
-      <p:sp>
-        <p:nvSpPr>
-          <p:cNvPr id="7" name="TextBox 6"/>
-          <p:cNvSpPr txBox="1"/>
-          <p:nvPr/>
-        </p:nvSpPr>
-        <p:spPr>
-          <a:xfrm>
-            <a:off x="1097280" y="3566160"/>
-            <a:ext cx="9966960" cy="457200"/>
-          </a:xfrm>
-          <a:prstGeom prst="rect">
-            <a:avLst/>
-          </a:prstGeom>
-          <a:noFill/>
-        </p:spPr>
-        <p:txBody>
-          <a:bodyPr wrap="square">
-            <a:spAutoFit/>
-          </a:bodyPr>
-          <a:lstStyle/>
-          <a:p>
-            <a:pPr algn="l">
-              <a:defRPr sz="1800" b="1" i="0">
-                <a:solidFill>
-                  <a:srgbClr val="FFFFFF"/>
-                </a:solidFill>
-                <a:latin typeface="Calibri"/>
-              </a:defRPr>
-            </a:pPr>
-            <a:r>
-              <a:t>One-Click Deployment Revolution</a:t>
-            </a:r>
-          </a:p>
-        </p:txBody>
-      </p:sp>
-      <p:sp>
-        <p:nvSpPr>
-          <p:cNvPr id="8" name="TextBox 7"/>
-          <p:cNvSpPr txBox="1"/>
-          <p:nvPr/>
-        </p:nvSpPr>
-        <p:spPr>
-          <a:xfrm>
-            <a:off x="1097280" y="4206240"/>
-            <a:ext cx="9966960" cy="1371600"/>
-          </a:xfrm>
-          <a:prstGeom prst="rect">
-            <a:avLst/>
-          </a:prstGeom>
-          <a:noFill/>
-        </p:spPr>
-        <p:txBody>
-          <a:bodyPr wrap="square">
-            <a:spAutoFit/>
-          </a:bodyPr>
-          <a:lstStyle/>
-          <a:p>
-            <a:pPr algn="l">
-              <a:defRPr sz="1500" b="0" i="0">
-                <a:solidFill>
-                  <a:srgbClr val="E2E2EA"/>
-                </a:solidFill>
-                <a:latin typeface="Calibri"/>
-              </a:defRPr>
-            </a:pPr>
-            <a:r>
-              <a:t>Gleb and the DevOps team launched Coolify — deploy applications in just a few clicks. The community response has been explosive with massive engagement across all channels.</a:t>
+                  <a:srgbClr val="5C6270"/>
+                </a:solidFill>
+                <a:latin typeface="Calibri"/>
+              </a:defRPr>
+            </a:pPr>
+            <a:r>
+              <a:t>#general</a:t>
             </a:r>
           </a:p>
         </p:txBody>
@@ -7801,7 +6835,7 @@
             <a:avLst/>
           </a:prstGeom>
           <a:solidFill>
-            <a:srgbClr val="06B6D4"/>
+            <a:srgbClr val="F59E0B"/>
           </a:solidFill>
           <a:ln>
             <a:noFill/>
@@ -7854,13 +6888,13 @@
             <a:pPr algn="l">
               <a:defRPr sz="1000" b="1">
                 <a:solidFill>
-                  <a:srgbClr val="06B6D4"/>
-                </a:solidFill>
-                <a:latin typeface="Calibri"/>
-              </a:defRPr>
-            </a:pPr>
-            <a:r>
-              <a:t>🤖  WIN</a:t>
+                  <a:srgbClr val="F59E0B"/>
+                </a:solidFill>
+                <a:latin typeface="Calibri"/>
+              </a:defRPr>
+            </a:pPr>
+            <a:r>
+              <a:t>📈  WIN</a:t>
             </a:r>
           </a:p>
         </p:txBody>
@@ -7890,13 +6924,13 @@
             <a:pPr algn="l">
               <a:defRPr sz="3200" b="1" i="0">
                 <a:solidFill>
-                  <a:srgbClr val="06B6D4"/>
-                </a:solidFill>
-                <a:latin typeface="Calibri"/>
-              </a:defRPr>
-            </a:pPr>
-            <a:r>
-              <a:t>Zero-Code AI Mastery</a:t>
+                  <a:srgbClr val="F59E0B"/>
+                </a:solidFill>
+                <a:latin typeface="Calibri"/>
+              </a:defRPr>
+            </a:pPr>
+            <a:r>
+              <a:t>Engineering Excellence</a:t>
             </a:r>
           </a:p>
         </p:txBody>
@@ -7926,13 +6960,13 @@
             <a:pPr algn="l">
               <a:defRPr sz="4800" b="1" i="0">
                 <a:solidFill>
-                  <a:srgbClr val="06B6D4"/>
-                </a:solidFill>
-                <a:latin typeface="Calibri"/>
-              </a:defRPr>
-            </a:pPr>
-            <a:r>
-              <a:t>100%</a:t>
+                  <a:srgbClr val="F59E0B"/>
+                </a:solidFill>
+                <a:latin typeface="Calibri"/>
+              </a:defRPr>
+            </a:pPr>
+            <a:r>
+              <a:t>Great Progress</a:t>
             </a:r>
           </a:p>
         </p:txBody>
@@ -7968,7 +7002,7 @@
               </a:defRPr>
             </a:pPr>
             <a:r>
-              <a:t>AI-powered</a:t>
+              <a:t>Building Products</a:t>
             </a:r>
           </a:p>
         </p:txBody>
@@ -8004,7 +7038,7 @@
               </a:defRPr>
             </a:pPr>
             <a:r>
-              <a:t>by Liliya Garifullina</a:t>
+              <a:t>by Leadership Team</a:t>
             </a:r>
           </a:p>
         </p:txBody>
@@ -8040,7 +7074,7 @@
               </a:defRPr>
             </a:pPr>
             <a:r>
-              <a:t>From Slack to Live Dashboard</a:t>
+              <a:t>Non-Engineering Teams Creating Amazing Tools</a:t>
             </a:r>
           </a:p>
         </p:txBody>
@@ -8076,7 +7110,7 @@
               </a:defRPr>
             </a:pPr>
             <a:r>
-              <a:t>Built a fully automated AI system — Slack data curation to auto-deploying live office TVs — using only AI tools and zero coding experience. A perfect example of our democratized building culture.</a:t>
+              <a:t>We're seeing incredible momentum as non-engineering teams rapidly build useful tools. This shows we're learning fast and moving in the right direction.</a:t>
             </a:r>
           </a:p>
         </p:txBody>
@@ -8112,7 +7146,7 @@
               </a:defRPr>
             </a:pPr>
             <a:r>
-              <a:t>💬 "If she can do it, you can too"</a:t>
+              <a:t>💬 "Innovation mindset spreads across all teams"</a:t>
             </a:r>
           </a:p>
         </p:txBody>
@@ -8158,7 +7192,7 @@
             <a:avLst/>
           </a:prstGeom>
           <a:solidFill>
-            <a:srgbClr val="F59E0B"/>
+            <a:srgbClr val="EF4444"/>
           </a:solidFill>
           <a:ln>
             <a:noFill/>
@@ -8211,13 +7245,13 @@
             <a:pPr algn="l">
               <a:defRPr sz="1000" b="1">
                 <a:solidFill>
-                  <a:srgbClr val="F59E0B"/>
-                </a:solidFill>
-                <a:latin typeface="Calibri"/>
-              </a:defRPr>
-            </a:pPr>
-            <a:r>
-              <a:t>🎂  CELEBRATION</a:t>
+                  <a:srgbClr val="EF4444"/>
+                </a:solidFill>
+                <a:latin typeface="Calibri"/>
+              </a:defRPr>
+            </a:pPr>
+            <a:r>
+              <a:t>👏  CLAPS</a:t>
             </a:r>
           </a:p>
         </p:txBody>
@@ -8247,13 +7281,13 @@
             <a:pPr algn="l">
               <a:defRPr sz="3200" b="1" i="0">
                 <a:solidFill>
-                  <a:srgbClr val="F59E0B"/>
-                </a:solidFill>
-                <a:latin typeface="Calibri"/>
-              </a:defRPr>
-            </a:pPr>
-            <a:r>
-              <a:t>Happy Birthday!</a:t>
+                  <a:srgbClr val="EF4444"/>
+                </a:solidFill>
+                <a:latin typeface="Calibri"/>
+              </a:defRPr>
+            </a:pPr>
+            <a:r>
+              <a:t>DevOps Hero Recognition</a:t>
             </a:r>
           </a:p>
         </p:txBody>
@@ -8267,7 +7301,7 @@
         <p:spPr>
           <a:xfrm>
             <a:off x="1097280" y="2103120"/>
-            <a:ext cx="9966960" cy="640080"/>
+            <a:ext cx="2743200" cy="548640"/>
           </a:xfrm>
           <a:prstGeom prst="rect">
             <a:avLst/>
@@ -8283,77 +7317,113 @@
             <a:pPr algn="l">
               <a:defRPr sz="2800" b="1" i="0">
                 <a:solidFill>
+                  <a:srgbClr val="EF4444"/>
+                </a:solidFill>
+                <a:latin typeface="Calibri"/>
+              </a:defRPr>
+            </a:pPr>
+            <a:r>
+              <a:t>50</a:t>
+            </a:r>
+          </a:p>
+        </p:txBody>
+      </p:sp>
+      <p:sp>
+        <p:nvSpPr>
+          <p:cNvPr id="6" name="TextBox 5"/>
+          <p:cNvSpPr txBox="1"/>
+          <p:nvPr/>
+        </p:nvSpPr>
+        <p:spPr>
+          <a:xfrm>
+            <a:off x="1097280" y="2651760"/>
+            <a:ext cx="9966960" cy="365760"/>
+          </a:xfrm>
+          <a:prstGeom prst="rect">
+            <a:avLst/>
+          </a:prstGeom>
+          <a:noFill/>
+        </p:spPr>
+        <p:txBody>
+          <a:bodyPr wrap="square">
+            <a:spAutoFit/>
+          </a:bodyPr>
+          <a:lstStyle/>
+          <a:p>
+            <a:pPr algn="l">
+              <a:defRPr sz="1400" b="0" i="0">
+                <a:solidFill>
+                  <a:srgbClr val="E2E2EA"/>
+                </a:solidFill>
+                <a:latin typeface="Calibri"/>
+              </a:defRPr>
+            </a:pPr>
+            <a:r>
+              <a:t>from Mykhailo Kukharskyi</a:t>
+            </a:r>
+          </a:p>
+        </p:txBody>
+      </p:sp>
+      <p:sp>
+        <p:nvSpPr>
+          <p:cNvPr id="7" name="TextBox 6"/>
+          <p:cNvSpPr txBox="1"/>
+          <p:nvPr/>
+        </p:nvSpPr>
+        <p:spPr>
+          <a:xfrm>
+            <a:off x="1097280" y="3108960"/>
+            <a:ext cx="9966960" cy="365760"/>
+          </a:xfrm>
+          <a:prstGeom prst="rect">
+            <a:avLst/>
+          </a:prstGeom>
+          <a:noFill/>
+        </p:spPr>
+        <p:txBody>
+          <a:bodyPr wrap="square">
+            <a:spAutoFit/>
+          </a:bodyPr>
+          <a:lstStyle/>
+          <a:p>
+            <a:pPr algn="l">
+              <a:defRPr sz="1400" b="1" i="0">
+                <a:solidFill>
                   <a:srgbClr val="FFFFFF"/>
                 </a:solidFill>
                 <a:latin typeface="Calibri"/>
               </a:defRPr>
             </a:pPr>
             <a:r>
-              <a:t>Kirill Khramkov</a:t>
-            </a:r>
-          </a:p>
-        </p:txBody>
-      </p:sp>
-      <p:sp>
-        <p:nvSpPr>
-          <p:cNvPr id="6" name="TextBox 5"/>
-          <p:cNvSpPr txBox="1"/>
-          <p:nvPr/>
-        </p:nvSpPr>
-        <p:spPr>
-          <a:xfrm>
-            <a:off x="1097280" y="2743200"/>
-            <a:ext cx="9966960" cy="365760"/>
-          </a:xfrm>
-          <a:prstGeom prst="rect">
-            <a:avLst/>
-          </a:prstGeom>
-          <a:noFill/>
-        </p:spPr>
-        <p:txBody>
-          <a:bodyPr wrap="square">
-            <a:spAutoFit/>
-          </a:bodyPr>
-          <a:lstStyle/>
-          <a:p>
-            <a:pPr algn="l">
-              <a:defRPr sz="1400" b="0" i="0">
-                <a:solidFill>
-                  <a:srgbClr val="8F95A3"/>
-                </a:solidFill>
-                <a:latin typeface="Calibri"/>
-              </a:defRPr>
-            </a:pPr>
-            <a:r>
-              <a:t>March 14, 2026</a:t>
-            </a:r>
-          </a:p>
-        </p:txBody>
-      </p:sp>
-      <p:sp>
-        <p:nvSpPr>
-          <p:cNvPr id="7" name="TextBox 6"/>
-          <p:cNvSpPr txBox="1"/>
-          <p:nvPr/>
-        </p:nvSpPr>
-        <p:spPr>
-          <a:xfrm>
-            <a:off x="1097280" y="3291840"/>
-            <a:ext cx="9966960" cy="914400"/>
-          </a:xfrm>
-          <a:prstGeom prst="rect">
-            <a:avLst/>
-          </a:prstGeom>
-          <a:noFill/>
-        </p:spPr>
-        <p:txBody>
-          <a:bodyPr wrap="square">
-            <a:spAutoFit/>
-          </a:bodyPr>
-          <a:lstStyle/>
-          <a:p>
-            <a:pPr algn="l">
-              <a:defRPr sz="1600" b="0" i="0">
+              <a:t>to: Gleb Krahotkin</a:t>
+            </a:r>
+          </a:p>
+        </p:txBody>
+      </p:sp>
+      <p:sp>
+        <p:nvSpPr>
+          <p:cNvPr id="8" name="TextBox 7"/>
+          <p:cNvSpPr txBox="1"/>
+          <p:nvPr/>
+        </p:nvSpPr>
+        <p:spPr>
+          <a:xfrm>
+            <a:off x="1097280" y="3749039"/>
+            <a:ext cx="9966960" cy="1097280"/>
+          </a:xfrm>
+          <a:prstGeom prst="rect">
+            <a:avLst/>
+          </a:prstGeom>
+          <a:noFill/>
+        </p:spPr>
+        <p:txBody>
+          <a:bodyPr wrap="square">
+            <a:spAutoFit/>
+          </a:bodyPr>
+          <a:lstStyle/>
+          <a:p>
+            <a:pPr algn="l">
+              <a:defRPr sz="1500" b="0" i="1">
                 <a:solidFill>
                   <a:srgbClr val="E2E2EA"/>
                 </a:solidFill>
@@ -8361,20 +7431,20 @@
               </a:defRPr>
             </a:pPr>
             <a:r>
-              <a:t>Thanks, everyone — your warm wishes made my day extra special!</a:t>
-            </a:r>
-          </a:p>
-        </p:txBody>
-      </p:sp>
-      <p:sp>
-        <p:nvSpPr>
-          <p:cNvPr id="8" name="TextBox 7"/>
-          <p:cNvSpPr txBox="1"/>
-          <p:nvPr/>
-        </p:nvSpPr>
-        <p:spPr>
-          <a:xfrm>
-            <a:off x="1097280" y="4572000"/>
+              <a:t>"Launching Coolify platform and enabling one-click deployments for everyone"</a:t>
+            </a:r>
+          </a:p>
+        </p:txBody>
+      </p:sp>
+      <p:sp>
+        <p:nvSpPr>
+          <p:cNvPr id="9" name="TextBox 8"/>
+          <p:cNvSpPr txBox="1"/>
+          <p:nvPr/>
+        </p:nvSpPr>
+        <p:spPr>
+          <a:xfrm>
+            <a:off x="1097280" y="5120640"/>
             <a:ext cx="9966960" cy="457200"/>
           </a:xfrm>
           <a:prstGeom prst="rect">
@@ -8389,15 +7459,15 @@
           <a:lstStyle/>
           <a:p>
             <a:pPr algn="l">
-              <a:defRPr sz="1400" b="0" i="1">
-                <a:solidFill>
-                  <a:srgbClr val="F59E0B"/>
-                </a:solidFill>
-                <a:latin typeface="Calibri"/>
-              </a:defRPr>
-            </a:pPr>
-            <a:r>
-              <a:t>Engineering • Barcelona</a:t>
+              <a:defRPr sz="1200" b="1" i="0">
+                <a:solidFill>
+                  <a:srgbClr val="EF4444"/>
+                </a:solidFill>
+                <a:latin typeface="Calibri"/>
+              </a:defRPr>
+            </a:pPr>
+            <a:r>
+              <a:t>Innovation · Excellence</a:t>
             </a:r>
           </a:p>
         </p:txBody>
@@ -8443,7 +7513,7 @@
             <a:avLst/>
           </a:prstGeom>
           <a:solidFill>
-            <a:srgbClr val="EC4899"/>
+            <a:srgbClr val="06B6D4"/>
           </a:solidFill>
           <a:ln>
             <a:noFill/>
@@ -8496,13 +7566,13 @@
             <a:pPr algn="l">
               <a:defRPr sz="1000" b="1">
                 <a:solidFill>
-                  <a:srgbClr val="EC4899"/>
-                </a:solidFill>
-                <a:latin typeface="Calibri"/>
-              </a:defRPr>
-            </a:pPr>
-            <a:r>
-              <a:t>👏  CLAPS</a:t>
+                  <a:srgbClr val="06B6D4"/>
+                </a:solidFill>
+                <a:latin typeface="Calibri"/>
+              </a:defRPr>
+            </a:pPr>
+            <a:r>
+              <a:t>🙌  CLAPS</a:t>
             </a:r>
           </a:p>
         </p:txBody>
@@ -8532,13 +7602,13 @@
             <a:pPr algn="l">
               <a:defRPr sz="3200" b="1" i="0">
                 <a:solidFill>
-                  <a:srgbClr val="EC4899"/>
-                </a:solidFill>
-                <a:latin typeface="Calibri"/>
-              </a:defRPr>
-            </a:pPr>
-            <a:r>
-              <a:t>DevOps Champion</a:t>
+                  <a:srgbClr val="06B6D4"/>
+                </a:solidFill>
+                <a:latin typeface="Calibri"/>
+              </a:defRPr>
+            </a:pPr>
+            <a:r>
+              <a:t>Mobile Excellence</a:t>
             </a:r>
           </a:p>
         </p:txBody>
@@ -8568,7 +7638,7 @@
             <a:pPr algn="l">
               <a:defRPr sz="2800" b="1" i="0">
                 <a:solidFill>
-                  <a:srgbClr val="EC4899"/>
+                  <a:srgbClr val="06B6D4"/>
                 </a:solidFill>
                 <a:latin typeface="Calibri"/>
               </a:defRPr>
@@ -8610,7 +7680,7 @@
               </a:defRPr>
             </a:pPr>
             <a:r>
-              <a:t>from Mykhailo Kukharskyi</a:t>
+              <a:t>from Viktor Trykolenko</a:t>
             </a:r>
           </a:p>
         </p:txBody>
@@ -8646,7 +7716,7 @@
               </a:defRPr>
             </a:pPr>
             <a:r>
-              <a:t>to: Gleb Krahotkin</a:t>
+              <a:t>to: Iurii Kotov</a:t>
             </a:r>
           </a:p>
         </p:txBody>
@@ -8682,7 +7752,7 @@
               </a:defRPr>
             </a:pPr>
             <a:r>
-              <a:t>"Outstanding work on Coolify deployment platform"</a:t>
+              <a:t>"Outstanding mobile development contributions"</a:t>
             </a:r>
           </a:p>
         </p:txBody>
@@ -8712,13 +7782,13 @@
             <a:pPr algn="l">
               <a:defRPr sz="1200" b="1" i="0">
                 <a:solidFill>
-                  <a:srgbClr val="EC4899"/>
-                </a:solidFill>
-                <a:latin typeface="Calibri"/>
-              </a:defRPr>
-            </a:pPr>
-            <a:r>
-              <a:t>Innovation · Excellence</a:t>
+                  <a:srgbClr val="06B6D4"/>
+                </a:solidFill>
+                <a:latin typeface="Calibri"/>
+              </a:defRPr>
+            </a:pPr>
+            <a:r>
+              <a:t>Technical Excellence</a:t>
             </a:r>
           </a:p>
         </p:txBody>
@@ -8764,7 +7834,7 @@
             <a:avLst/>
           </a:prstGeom>
           <a:solidFill>
-            <a:srgbClr val="EF4444"/>
+            <a:srgbClr val="10B981"/>
           </a:solidFill>
           <a:ln>
             <a:noFill/>
@@ -8817,13 +7887,13 @@
             <a:pPr algn="l">
               <a:defRPr sz="1000" b="1">
                 <a:solidFill>
-                  <a:srgbClr val="EF4444"/>
-                </a:solidFill>
-                <a:latin typeface="Calibri"/>
-              </a:defRPr>
-            </a:pPr>
-            <a:r>
-              <a:t>🔥  CLAPS</a:t>
+                  <a:srgbClr val="10B981"/>
+                </a:solidFill>
+                <a:latin typeface="Calibri"/>
+              </a:defRPr>
+            </a:pPr>
+            <a:r>
+              <a:t>💪  CLAPS</a:t>
             </a:r>
           </a:p>
         </p:txBody>
@@ -8853,13 +7923,13 @@
             <a:pPr algn="l">
               <a:defRPr sz="3200" b="1" i="0">
                 <a:solidFill>
-                  <a:srgbClr val="EF4444"/>
-                </a:solidFill>
-                <a:latin typeface="Calibri"/>
-              </a:defRPr>
-            </a:pPr>
-            <a:r>
-              <a:t>Technical Excellence</a:t>
+                  <a:srgbClr val="10B981"/>
+                </a:solidFill>
+                <a:latin typeface="Calibri"/>
+              </a:defRPr>
+            </a:pPr>
+            <a:r>
+              <a:t>Team Leadership</a:t>
             </a:r>
           </a:p>
         </p:txBody>
@@ -8889,7 +7959,7 @@
             <a:pPr algn="l">
               <a:defRPr sz="2800" b="1" i="0">
                 <a:solidFill>
-                  <a:srgbClr val="EF4444"/>
+                  <a:srgbClr val="10B981"/>
                 </a:solidFill>
                 <a:latin typeface="Calibri"/>
               </a:defRPr>
@@ -8931,7 +8001,7 @@
               </a:defRPr>
             </a:pPr>
             <a:r>
-              <a:t>from Viktor Trykolenko</a:t>
+              <a:t>from Jasmine Nunez</a:t>
             </a:r>
           </a:p>
         </p:txBody>
@@ -8967,7 +8037,7 @@
               </a:defRPr>
             </a:pPr>
             <a:r>
-              <a:t>to: Iurii Kotov</a:t>
+              <a:t>to: Michelle Walter</a:t>
             </a:r>
           </a:p>
         </p:txBody>
@@ -9003,7 +8073,7 @@
               </a:defRPr>
             </a:pPr>
             <a:r>
-              <a:t>"Exceptional technical leadership and innovation"</a:t>
+              <a:t>"Exceptional leadership and team support"</a:t>
             </a:r>
           </a:p>
         </p:txBody>
@@ -9033,13 +8103,13 @@
             <a:pPr algn="l">
               <a:defRPr sz="1200" b="1" i="0">
                 <a:solidFill>
-                  <a:srgbClr val="EF4444"/>
-                </a:solidFill>
-                <a:latin typeface="Calibri"/>
-              </a:defRPr>
-            </a:pPr>
-            <a:r>
-              <a:t>Excellence · Leadership</a:t>
+                  <a:srgbClr val="10B981"/>
+                </a:solidFill>
+                <a:latin typeface="Calibri"/>
+              </a:defRPr>
+            </a:pPr>
+            <a:r>
+              <a:t>Leadership · Collaboration</a:t>
             </a:r>
           </a:p>
         </p:txBody>
@@ -9144,7 +8214,7 @@
               </a:defRPr>
             </a:pPr>
             <a:r>
-              <a:t>⭐  CLAPS</a:t>
+              <a:t>🌟  CLAPS</a:t>
             </a:r>
           </a:p>
         </p:txBody>
@@ -9180,7 +8250,7 @@
               </a:defRPr>
             </a:pPr>
             <a:r>
-              <a:t>Product Excellence</a:t>
+              <a:t>Innovation Recognition</a:t>
             </a:r>
           </a:p>
         </p:txBody>
@@ -9252,7 +8322,7 @@
               </a:defRPr>
             </a:pPr>
             <a:r>
-              <a:t>from Jasmine Nunez</a:t>
+              <a:t>from Michael Lotfy</a:t>
             </a:r>
           </a:p>
         </p:txBody>
@@ -9288,7 +8358,7 @@
               </a:defRPr>
             </a:pPr>
             <a:r>
-              <a:t>to: Michelle Walter</a:t>
+              <a:t>to: Issa Isahakyan</a:t>
             </a:r>
           </a:p>
         </p:txBody>
@@ -9324,7 +8394,7 @@
               </a:defRPr>
             </a:pPr>
             <a:r>
-              <a:t>"Outstanding product management and delivery"</a:t>
+              <a:t>"Driving innovation and technical excellence"</a:t>
             </a:r>
           </a:p>
         </p:txBody>
@@ -9360,7 +8430,7 @@
               </a:defRPr>
             </a:pPr>
             <a:r>
-              <a:t>Excellence · Results</a:t>
+              <a:t>Innovation · Excellence</a:t>
             </a:r>
           </a:p>
         </p:txBody>

--- a/data/archive/pulse_2026-03-14.pptx
+++ b/data/archive/pulse_2026-03-14.pptx
@@ -22,6 +22,7 @@
     <p:sldId id="270" r:id="rId21"/>
     <p:sldId id="271" r:id="rId22"/>
     <p:sldId id="272" r:id="rId23"/>
+    <p:sldId id="273" r:id="rId24"/>
   </p:sldIdLst>
   <p:sldSz cx="12191695" cy="6858000" type="screen4x3"/>
   <p:notesSz cx="6858000" cy="9144000"/>
@@ -3304,7 +3305,7 @@
             <a:avLst/>
           </a:prstGeom>
           <a:solidFill>
-            <a:srgbClr val="F59E0B"/>
+            <a:srgbClr val="2ECC71"/>
           </a:solidFill>
           <a:ln>
             <a:noFill/>
@@ -3357,13 +3358,13 @@
             <a:pPr algn="l">
               <a:defRPr sz="1000" b="1">
                 <a:solidFill>
-                  <a:srgbClr val="F59E0B"/>
-                </a:solidFill>
-                <a:latin typeface="Calibri"/>
-              </a:defRPr>
-            </a:pPr>
-            <a:r>
-              <a:t>🔥  CLAPS</a:t>
+                  <a:srgbClr val="2ECC71"/>
+                </a:solidFill>
+                <a:latin typeface="Calibri"/>
+              </a:defRPr>
+            </a:pPr>
+            <a:r>
+              <a:t>🎯  CLAPS</a:t>
             </a:r>
           </a:p>
         </p:txBody>
@@ -3393,13 +3394,13 @@
             <a:pPr algn="l">
               <a:defRPr sz="3200" b="1" i="0">
                 <a:solidFill>
-                  <a:srgbClr val="F59E0B"/>
-                </a:solidFill>
-                <a:latin typeface="Calibri"/>
-              </a:defRPr>
-            </a:pPr>
-            <a:r>
-              <a:t>Game Development Stars</a:t>
+                  <a:srgbClr val="2ECC71"/>
+                </a:solidFill>
+                <a:latin typeface="Calibri"/>
+              </a:defRPr>
+            </a:pPr>
+            <a:r>
+              <a:t>Quality Engineering</a:t>
             </a:r>
           </a:p>
         </p:txBody>
@@ -3429,7 +3430,7 @@
             <a:pPr algn="l">
               <a:defRPr sz="2800" b="1" i="0">
                 <a:solidFill>
-                  <a:srgbClr val="F59E0B"/>
+                  <a:srgbClr val="2ECC71"/>
                 </a:solidFill>
                 <a:latin typeface="Calibri"/>
               </a:defRPr>
@@ -3471,7 +3472,7 @@
               </a:defRPr>
             </a:pPr>
             <a:r>
-              <a:t>from Sergey Orlov</a:t>
+              <a:t>from Iurii Kotov</a:t>
             </a:r>
           </a:p>
         </p:txBody>
@@ -3507,7 +3508,7 @@
               </a:defRPr>
             </a:pPr>
             <a:r>
-              <a:t>to: Roman de las Heras</a:t>
+              <a:t>to: Ana Abuseridze</a:t>
             </a:r>
           </a:p>
         </p:txBody>
@@ -3543,7 +3544,7 @@
               </a:defRPr>
             </a:pPr>
             <a:r>
-              <a:t>"Outstanding game development and creative contributions"</a:t>
+              <a:t>"Excellent engineering quality and attention to detail"</a:t>
             </a:r>
           </a:p>
         </p:txBody>
@@ -3573,13 +3574,13 @@
             <a:pPr algn="l">
               <a:defRPr sz="1200" b="1" i="0">
                 <a:solidFill>
-                  <a:srgbClr val="F59E0B"/>
-                </a:solidFill>
-                <a:latin typeface="Calibri"/>
-              </a:defRPr>
-            </a:pPr>
-            <a:r>
-              <a:t>Creativity · Excellence</a:t>
+                  <a:srgbClr val="2ECC71"/>
+                </a:solidFill>
+                <a:latin typeface="Calibri"/>
+              </a:defRPr>
+            </a:pPr>
+            <a:r>
+              <a:t>Excellence · Precision</a:t>
             </a:r>
           </a:p>
         </p:txBody>
@@ -3625,7 +3626,7 @@
             <a:avLst/>
           </a:prstGeom>
           <a:solidFill>
-            <a:srgbClr val="EF4444"/>
+            <a:srgbClr val="E67E22"/>
           </a:solidFill>
           <a:ln>
             <a:noFill/>
@@ -3678,7 +3679,7 @@
             <a:pPr algn="l">
               <a:defRPr sz="1000" b="1">
                 <a:solidFill>
-                  <a:srgbClr val="EF4444"/>
+                  <a:srgbClr val="E67E22"/>
                 </a:solidFill>
                 <a:latin typeface="Calibri"/>
               </a:defRPr>
@@ -3714,13 +3715,13 @@
             <a:pPr algn="l">
               <a:defRPr sz="3200" b="1" i="0">
                 <a:solidFill>
-                  <a:srgbClr val="EF4444"/>
-                </a:solidFill>
-                <a:latin typeface="Calibri"/>
-              </a:defRPr>
-            </a:pPr>
-            <a:r>
-              <a:t>Development Team Power</a:t>
+                  <a:srgbClr val="E67E22"/>
+                </a:solidFill>
+                <a:latin typeface="Calibri"/>
+              </a:defRPr>
+            </a:pPr>
+            <a:r>
+              <a:t>Development Speed</a:t>
             </a:r>
           </a:p>
         </p:txBody>
@@ -3750,7 +3751,7 @@
             <a:pPr algn="l">
               <a:defRPr sz="2800" b="1" i="0">
                 <a:solidFill>
-                  <a:srgbClr val="EF4444"/>
+                  <a:srgbClr val="E67E22"/>
                 </a:solidFill>
                 <a:latin typeface="Calibri"/>
               </a:defRPr>
@@ -3828,7 +3829,7 @@
               </a:defRPr>
             </a:pPr>
             <a:r>
-              <a:t>to: Ana Abuseridze</a:t>
+              <a:t>to: Dima M.</a:t>
             </a:r>
           </a:p>
         </p:txBody>
@@ -3864,7 +3865,7 @@
               </a:defRPr>
             </a:pPr>
             <a:r>
-              <a:t>"Exceptional development skills and team contributions"</a:t>
+              <a:t>"Incredible development speed and efficiency"</a:t>
             </a:r>
           </a:p>
         </p:txBody>
@@ -3894,13 +3895,13 @@
             <a:pPr algn="l">
               <a:defRPr sz="1200" b="1" i="0">
                 <a:solidFill>
-                  <a:srgbClr val="EF4444"/>
-                </a:solidFill>
-                <a:latin typeface="Calibri"/>
-              </a:defRPr>
-            </a:pPr>
-            <a:r>
-              <a:t>Technical Skills · Teamwork</a:t>
+                  <a:srgbClr val="E67E22"/>
+                </a:solidFill>
+                <a:latin typeface="Calibri"/>
+              </a:defRPr>
+            </a:pPr>
+            <a:r>
+              <a:t>Speed · Efficiency</a:t>
             </a:r>
           </a:p>
         </p:txBody>
@@ -3946,7 +3947,7 @@
             <a:avLst/>
           </a:prstGeom>
           <a:solidFill>
-            <a:srgbClr val="F472B6"/>
+            <a:srgbClr val="34495E"/>
           </a:solidFill>
           <a:ln>
             <a:noFill/>
@@ -3999,13 +4000,13 @@
             <a:pPr algn="l">
               <a:defRPr sz="1000" b="1">
                 <a:solidFill>
-                  <a:srgbClr val="F472B6"/>
-                </a:solidFill>
-                <a:latin typeface="Calibri"/>
-              </a:defRPr>
-            </a:pPr>
-            <a:r>
-              <a:t>🎂  CELEBRATION</a:t>
+                  <a:srgbClr val="34495E"/>
+                </a:solidFill>
+                <a:latin typeface="Calibri"/>
+              </a:defRPr>
+            </a:pPr>
+            <a:r>
+              <a:t>🔧  CLAPS</a:t>
             </a:r>
           </a:p>
         </p:txBody>
@@ -4035,13 +4036,13 @@
             <a:pPr algn="l">
               <a:defRPr sz="3200" b="1" i="0">
                 <a:solidFill>
-                  <a:srgbClr val="F472B6"/>
-                </a:solidFill>
-                <a:latin typeface="Calibri"/>
-              </a:defRPr>
-            </a:pPr>
-            <a:r>
-              <a:t>Birthday Celebration</a:t>
+                  <a:srgbClr val="34495E"/>
+                </a:solidFill>
+                <a:latin typeface="Calibri"/>
+              </a:defRPr>
+            </a:pPr>
+            <a:r>
+              <a:t>Technical Excellence</a:t>
             </a:r>
           </a:p>
         </p:txBody>
@@ -4055,7 +4056,7 @@
         <p:spPr>
           <a:xfrm>
             <a:off x="1097280" y="2103120"/>
-            <a:ext cx="9966960" cy="640080"/>
+            <a:ext cx="2743200" cy="548640"/>
           </a:xfrm>
           <a:prstGeom prst="rect">
             <a:avLst/>
@@ -4071,77 +4072,113 @@
             <a:pPr algn="l">
               <a:defRPr sz="2800" b="1" i="0">
                 <a:solidFill>
+                  <a:srgbClr val="34495E"/>
+                </a:solidFill>
+                <a:latin typeface="Calibri"/>
+              </a:defRPr>
+            </a:pPr>
+            <a:r>
+              <a:t>25</a:t>
+            </a:r>
+          </a:p>
+        </p:txBody>
+      </p:sp>
+      <p:sp>
+        <p:nvSpPr>
+          <p:cNvPr id="6" name="TextBox 5"/>
+          <p:cNvSpPr txBox="1"/>
+          <p:nvPr/>
+        </p:nvSpPr>
+        <p:spPr>
+          <a:xfrm>
+            <a:off x="1097280" y="2651760"/>
+            <a:ext cx="9966960" cy="365760"/>
+          </a:xfrm>
+          <a:prstGeom prst="rect">
+            <a:avLst/>
+          </a:prstGeom>
+          <a:noFill/>
+        </p:spPr>
+        <p:txBody>
+          <a:bodyPr wrap="square">
+            <a:spAutoFit/>
+          </a:bodyPr>
+          <a:lstStyle/>
+          <a:p>
+            <a:pPr algn="l">
+              <a:defRPr sz="1400" b="0" i="0">
+                <a:solidFill>
+                  <a:srgbClr val="E2E2EA"/>
+                </a:solidFill>
+                <a:latin typeface="Calibri"/>
+              </a:defRPr>
+            </a:pPr>
+            <a:r>
+              <a:t>from Sergey Orlov</a:t>
+            </a:r>
+          </a:p>
+        </p:txBody>
+      </p:sp>
+      <p:sp>
+        <p:nvSpPr>
+          <p:cNvPr id="7" name="TextBox 6"/>
+          <p:cNvSpPr txBox="1"/>
+          <p:nvPr/>
+        </p:nvSpPr>
+        <p:spPr>
+          <a:xfrm>
+            <a:off x="1097280" y="3108960"/>
+            <a:ext cx="9966960" cy="365760"/>
+          </a:xfrm>
+          <a:prstGeom prst="rect">
+            <a:avLst/>
+          </a:prstGeom>
+          <a:noFill/>
+        </p:spPr>
+        <p:txBody>
+          <a:bodyPr wrap="square">
+            <a:spAutoFit/>
+          </a:bodyPr>
+          <a:lstStyle/>
+          <a:p>
+            <a:pPr algn="l">
+              <a:defRPr sz="1400" b="1" i="0">
+                <a:solidFill>
                   <a:srgbClr val="FFFFFF"/>
                 </a:solidFill>
                 <a:latin typeface="Calibri"/>
               </a:defRPr>
             </a:pPr>
             <a:r>
-              <a:t>Kirill Khramkov</a:t>
-            </a:r>
-          </a:p>
-        </p:txBody>
-      </p:sp>
-      <p:sp>
-        <p:nvSpPr>
-          <p:cNvPr id="6" name="TextBox 5"/>
-          <p:cNvSpPr txBox="1"/>
-          <p:nvPr/>
-        </p:nvSpPr>
-        <p:spPr>
-          <a:xfrm>
-            <a:off x="1097280" y="2743200"/>
-            <a:ext cx="9966960" cy="365760"/>
-          </a:xfrm>
-          <a:prstGeom prst="rect">
-            <a:avLst/>
-          </a:prstGeom>
-          <a:noFill/>
-        </p:spPr>
-        <p:txBody>
-          <a:bodyPr wrap="square">
-            <a:spAutoFit/>
-          </a:bodyPr>
-          <a:lstStyle/>
-          <a:p>
-            <a:pPr algn="l">
-              <a:defRPr sz="1400" b="0" i="0">
-                <a:solidFill>
-                  <a:srgbClr val="8F95A3"/>
-                </a:solidFill>
-                <a:latin typeface="Calibri"/>
-              </a:defRPr>
-            </a:pPr>
-            <a:r>
-              <a:t>March 14, 2026</a:t>
-            </a:r>
-          </a:p>
-        </p:txBody>
-      </p:sp>
-      <p:sp>
-        <p:nvSpPr>
-          <p:cNvPr id="7" name="TextBox 6"/>
-          <p:cNvSpPr txBox="1"/>
-          <p:nvPr/>
-        </p:nvSpPr>
-        <p:spPr>
-          <a:xfrm>
-            <a:off x="1097280" y="3291840"/>
-            <a:ext cx="9966960" cy="914400"/>
-          </a:xfrm>
-          <a:prstGeom prst="rect">
-            <a:avLst/>
-          </a:prstGeom>
-          <a:noFill/>
-        </p:spPr>
-        <p:txBody>
-          <a:bodyPr wrap="square">
-            <a:spAutoFit/>
-          </a:bodyPr>
-          <a:lstStyle/>
-          <a:p>
-            <a:pPr algn="l">
-              <a:defRPr sz="1600" b="0" i="0">
+              <a:t>to: Roman de las Heras</a:t>
+            </a:r>
+          </a:p>
+        </p:txBody>
+      </p:sp>
+      <p:sp>
+        <p:nvSpPr>
+          <p:cNvPr id="8" name="TextBox 7"/>
+          <p:cNvSpPr txBox="1"/>
+          <p:nvPr/>
+        </p:nvSpPr>
+        <p:spPr>
+          <a:xfrm>
+            <a:off x="1097280" y="3749039"/>
+            <a:ext cx="9966960" cy="1097280"/>
+          </a:xfrm>
+          <a:prstGeom prst="rect">
+            <a:avLst/>
+          </a:prstGeom>
+          <a:noFill/>
+        </p:spPr>
+        <p:txBody>
+          <a:bodyPr wrap="square">
+            <a:spAutoFit/>
+          </a:bodyPr>
+          <a:lstStyle/>
+          <a:p>
+            <a:pPr algn="l">
+              <a:defRPr sz="1500" b="0" i="1">
                 <a:solidFill>
                   <a:srgbClr val="E2E2EA"/>
                 </a:solidFill>
@@ -4149,20 +4186,20 @@
               </a:defRPr>
             </a:pPr>
             <a:r>
-              <a:t>Thanks, everyone - grateful for all the birthday wishes from this amazing team!</a:t>
-            </a:r>
-          </a:p>
-        </p:txBody>
-      </p:sp>
-      <p:sp>
-        <p:nvSpPr>
-          <p:cNvPr id="8" name="TextBox 7"/>
-          <p:cNvSpPr txBox="1"/>
-          <p:nvPr/>
-        </p:nvSpPr>
-        <p:spPr>
-          <a:xfrm>
-            <a:off x="1097280" y="4572000"/>
+              <a:t>"Outstanding technical contributions and problem-solving"</a:t>
+            </a:r>
+          </a:p>
+        </p:txBody>
+      </p:sp>
+      <p:sp>
+        <p:nvSpPr>
+          <p:cNvPr id="9" name="TextBox 8"/>
+          <p:cNvSpPr txBox="1"/>
+          <p:nvPr/>
+        </p:nvSpPr>
+        <p:spPr>
+          <a:xfrm>
+            <a:off x="1097280" y="5120640"/>
             <a:ext cx="9966960" cy="457200"/>
           </a:xfrm>
           <a:prstGeom prst="rect">
@@ -4177,15 +4214,15 @@
           <a:lstStyle/>
           <a:p>
             <a:pPr algn="l">
-              <a:defRPr sz="1400" b="0" i="1">
-                <a:solidFill>
-                  <a:srgbClr val="F472B6"/>
-                </a:solidFill>
-                <a:latin typeface="Calibri"/>
-              </a:defRPr>
-            </a:pPr>
-            <a:r>
-              <a:t>Engineering Team</a:t>
+              <a:defRPr sz="1200" b="1" i="0">
+                <a:solidFill>
+                  <a:srgbClr val="34495E"/>
+                </a:solidFill>
+                <a:latin typeface="Calibri"/>
+              </a:defRPr>
+            </a:pPr>
+            <a:r>
+              <a:t>Technical Excellence · Innovation</a:t>
             </a:r>
           </a:p>
         </p:txBody>
@@ -4231,7 +4268,7 @@
             <a:avLst/>
           </a:prstGeom>
           <a:solidFill>
-            <a:srgbClr val="10B981"/>
+            <a:srgbClr val="9B59B6"/>
           </a:solidFill>
           <a:ln>
             <a:noFill/>
@@ -4284,13 +4321,13 @@
             <a:pPr algn="l">
               <a:defRPr sz="1000" b="1">
                 <a:solidFill>
-                  <a:srgbClr val="10B981"/>
-                </a:solidFill>
-                <a:latin typeface="Calibri"/>
-              </a:defRPr>
-            </a:pPr>
-            <a:r>
-              <a:t>💰  MILESTONE</a:t>
+                  <a:srgbClr val="9B59B6"/>
+                </a:solidFill>
+                <a:latin typeface="Calibri"/>
+              </a:defRPr>
+            </a:pPr>
+            <a:r>
+              <a:t>🎨  CLAPS</a:t>
             </a:r>
           </a:p>
         </p:txBody>
@@ -4320,13 +4357,13 @@
             <a:pPr algn="l">
               <a:defRPr sz="3200" b="1" i="0">
                 <a:solidFill>
-                  <a:srgbClr val="10B981"/>
-                </a:solidFill>
-                <a:latin typeface="Calibri"/>
-              </a:defRPr>
-            </a:pPr>
-            <a:r>
-              <a:t>Financial Powerhouse</a:t>
+                  <a:srgbClr val="9B59B6"/>
+                </a:solidFill>
+                <a:latin typeface="Calibri"/>
+              </a:defRPr>
+            </a:pPr>
+            <a:r>
+              <a:t>Creative Solutions</a:t>
             </a:r>
           </a:p>
         </p:txBody>
@@ -4340,29 +4377,29 @@
         <p:spPr>
           <a:xfrm>
             <a:off x="1097280" y="2103120"/>
-            <a:ext cx="4572000" cy="822960"/>
-          </a:xfrm>
-          <a:prstGeom prst="rect">
-            <a:avLst/>
-          </a:prstGeom>
-          <a:noFill/>
-        </p:spPr>
-        <p:txBody>
-          <a:bodyPr wrap="square">
-            <a:spAutoFit/>
-          </a:bodyPr>
-          <a:lstStyle/>
-          <a:p>
-            <a:pPr algn="l">
-              <a:defRPr sz="5200" b="1" i="0">
-                <a:solidFill>
-                  <a:srgbClr val="10B981"/>
-                </a:solidFill>
-                <a:latin typeface="Calibri"/>
-              </a:defRPr>
-            </a:pPr>
-            <a:r>
-              <a:t>$100M</a:t>
+            <a:ext cx="2743200" cy="548640"/>
+          </a:xfrm>
+          <a:prstGeom prst="rect">
+            <a:avLst/>
+          </a:prstGeom>
+          <a:noFill/>
+        </p:spPr>
+        <p:txBody>
+          <a:bodyPr wrap="square">
+            <a:spAutoFit/>
+          </a:bodyPr>
+          <a:lstStyle/>
+          <a:p>
+            <a:pPr algn="l">
+              <a:defRPr sz="2800" b="1" i="0">
+                <a:solidFill>
+                  <a:srgbClr val="9B59B6"/>
+                </a:solidFill>
+                <a:latin typeface="Calibri"/>
+              </a:defRPr>
+            </a:pPr>
+            <a:r>
+              <a:t>20</a:t>
             </a:r>
           </a:p>
         </p:txBody>
@@ -4375,30 +4412,30 @@
         </p:nvSpPr>
         <p:spPr>
           <a:xfrm>
-            <a:off x="1097280" y="2926080"/>
-            <a:ext cx="4572000" cy="365760"/>
-          </a:xfrm>
-          <a:prstGeom prst="rect">
-            <a:avLst/>
-          </a:prstGeom>
-          <a:noFill/>
-        </p:spPr>
-        <p:txBody>
-          <a:bodyPr wrap="square">
-            <a:spAutoFit/>
-          </a:bodyPr>
-          <a:lstStyle/>
-          <a:p>
-            <a:pPr algn="l">
-              <a:defRPr sz="1100" b="0" i="0">
-                <a:solidFill>
-                  <a:srgbClr val="8F95A3"/>
-                </a:solidFill>
-                <a:latin typeface="Calibri"/>
-              </a:defRPr>
-            </a:pPr>
-            <a:r>
-              <a:t>Gross Profit</a:t>
+            <a:off x="1097280" y="2651760"/>
+            <a:ext cx="9966960" cy="365760"/>
+          </a:xfrm>
+          <a:prstGeom prst="rect">
+            <a:avLst/>
+          </a:prstGeom>
+          <a:noFill/>
+        </p:spPr>
+        <p:txBody>
+          <a:bodyPr wrap="square">
+            <a:spAutoFit/>
+          </a:bodyPr>
+          <a:lstStyle/>
+          <a:p>
+            <a:pPr algn="l">
+              <a:defRPr sz="1400" b="0" i="0">
+                <a:solidFill>
+                  <a:srgbClr val="E2E2EA"/>
+                </a:solidFill>
+                <a:latin typeface="Calibri"/>
+              </a:defRPr>
+            </a:pPr>
+            <a:r>
+              <a:t>from Dima M.</a:t>
             </a:r>
           </a:p>
         </p:txBody>
@@ -4411,7 +4448,79 @@
         </p:nvSpPr>
         <p:spPr>
           <a:xfrm>
-            <a:off x="1097280" y="3566160"/>
+            <a:off x="1097280" y="3108960"/>
+            <a:ext cx="9966960" cy="365760"/>
+          </a:xfrm>
+          <a:prstGeom prst="rect">
+            <a:avLst/>
+          </a:prstGeom>
+          <a:noFill/>
+        </p:spPr>
+        <p:txBody>
+          <a:bodyPr wrap="square">
+            <a:spAutoFit/>
+          </a:bodyPr>
+          <a:lstStyle/>
+          <a:p>
+            <a:pPr algn="l">
+              <a:defRPr sz="1400" b="1" i="0">
+                <a:solidFill>
+                  <a:srgbClr val="FFFFFF"/>
+                </a:solidFill>
+                <a:latin typeface="Calibri"/>
+              </a:defRPr>
+            </a:pPr>
+            <a:r>
+              <a:t>to: Gleb Krahotkin</a:t>
+            </a:r>
+          </a:p>
+        </p:txBody>
+      </p:sp>
+      <p:sp>
+        <p:nvSpPr>
+          <p:cNvPr id="8" name="TextBox 7"/>
+          <p:cNvSpPr txBox="1"/>
+          <p:nvPr/>
+        </p:nvSpPr>
+        <p:spPr>
+          <a:xfrm>
+            <a:off x="1097280" y="3749039"/>
+            <a:ext cx="9966960" cy="1097280"/>
+          </a:xfrm>
+          <a:prstGeom prst="rect">
+            <a:avLst/>
+          </a:prstGeom>
+          <a:noFill/>
+        </p:spPr>
+        <p:txBody>
+          <a:bodyPr wrap="square">
+            <a:spAutoFit/>
+          </a:bodyPr>
+          <a:lstStyle/>
+          <a:p>
+            <a:pPr algn="l">
+              <a:defRPr sz="1500" b="0" i="1">
+                <a:solidFill>
+                  <a:srgbClr val="E2E2EA"/>
+                </a:solidFill>
+                <a:latin typeface="Calibri"/>
+              </a:defRPr>
+            </a:pPr>
+            <a:r>
+              <a:t>"Creative problem-solving and innovative approaches"</a:t>
+            </a:r>
+          </a:p>
+        </p:txBody>
+      </p:sp>
+      <p:sp>
+        <p:nvSpPr>
+          <p:cNvPr id="9" name="TextBox 8"/>
+          <p:cNvSpPr txBox="1"/>
+          <p:nvPr/>
+        </p:nvSpPr>
+        <p:spPr>
+          <a:xfrm>
+            <a:off x="1097280" y="5120640"/>
             <a:ext cx="9966960" cy="457200"/>
           </a:xfrm>
           <a:prstGeom prst="rect">
@@ -4426,51 +4535,15 @@
           <a:lstStyle/>
           <a:p>
             <a:pPr algn="l">
-              <a:defRPr sz="1800" b="1" i="0">
-                <a:solidFill>
-                  <a:srgbClr val="FFFFFF"/>
-                </a:solidFill>
-                <a:latin typeface="Calibri"/>
-              </a:defRPr>
-            </a:pPr>
-            <a:r>
-              <a:t>Appodeal's Incredible Growth Trajectory</a:t>
-            </a:r>
-          </a:p>
-        </p:txBody>
-      </p:sp>
-      <p:sp>
-        <p:nvSpPr>
-          <p:cNvPr id="8" name="TextBox 7"/>
-          <p:cNvSpPr txBox="1"/>
-          <p:nvPr/>
-        </p:nvSpPr>
-        <p:spPr>
-          <a:xfrm>
-            <a:off x="1097280" y="4206240"/>
-            <a:ext cx="9966960" cy="1371600"/>
-          </a:xfrm>
-          <a:prstGeom prst="rect">
-            <a:avLst/>
-          </a:prstGeom>
-          <a:noFill/>
-        </p:spPr>
-        <p:txBody>
-          <a:bodyPr wrap="square">
-            <a:spAutoFit/>
-          </a:bodyPr>
-          <a:lstStyle/>
-          <a:p>
-            <a:pPr algn="l">
-              <a:defRPr sz="1500" b="0" i="0">
-                <a:solidFill>
-                  <a:srgbClr val="E2E2EA"/>
-                </a:solidFill>
-                <a:latin typeface="Calibri"/>
-              </a:defRPr>
-            </a:pPr>
-            <a:r>
-              <a:t>We're building something extraordinary - $100M gross profit with $20M EBITDA and 40% year-over-year growth projected. The path to our $50B vision is crystal clear.</a:t>
+              <a:defRPr sz="1200" b="1" i="0">
+                <a:solidFill>
+                  <a:srgbClr val="9B59B6"/>
+                </a:solidFill>
+                <a:latin typeface="Calibri"/>
+              </a:defRPr>
+            </a:pPr>
+            <a:r>
+              <a:t>Creativity · Innovation</a:t>
             </a:r>
           </a:p>
         </p:txBody>
@@ -4516,7 +4589,7 @@
             <a:avLst/>
           </a:prstGeom>
           <a:solidFill>
-            <a:srgbClr val="8B5CF6"/>
+            <a:srgbClr val="FF6B9D"/>
           </a:solidFill>
           <a:ln>
             <a:noFill/>
@@ -4569,13 +4642,13 @@
             <a:pPr algn="l">
               <a:defRPr sz="1000" b="1">
                 <a:solidFill>
-                  <a:srgbClr val="8B5CF6"/>
-                </a:solidFill>
-                <a:latin typeface="Calibri"/>
-              </a:defRPr>
-            </a:pPr>
-            <a:r>
-              <a:t>🎮  WIN</a:t>
+                  <a:srgbClr val="FF6B9D"/>
+                </a:solidFill>
+                <a:latin typeface="Calibri"/>
+              </a:defRPr>
+            </a:pPr>
+            <a:r>
+              <a:t>🎂  CELEBRATION</a:t>
             </a:r>
           </a:p>
         </p:txBody>
@@ -4605,13 +4678,13 @@
             <a:pPr algn="l">
               <a:defRPr sz="3200" b="1" i="0">
                 <a:solidFill>
-                  <a:srgbClr val="8B5CF6"/>
-                </a:solidFill>
-                <a:latin typeface="Calibri"/>
-              </a:defRPr>
-            </a:pPr>
-            <a:r>
-              <a:t>Gaming Victory</a:t>
+                  <a:srgbClr val="FF6B9D"/>
+                </a:solidFill>
+                <a:latin typeface="Calibri"/>
+              </a:defRPr>
+            </a:pPr>
+            <a:r>
+              <a:t>Birthday Celebration</a:t>
             </a:r>
           </a:p>
         </p:txBody>
@@ -4625,29 +4698,29 @@
         <p:spPr>
           <a:xfrm>
             <a:off x="1097280" y="2103120"/>
-            <a:ext cx="4572000" cy="822960"/>
-          </a:xfrm>
-          <a:prstGeom prst="rect">
-            <a:avLst/>
-          </a:prstGeom>
-          <a:noFill/>
-        </p:spPr>
-        <p:txBody>
-          <a:bodyPr wrap="square">
-            <a:spAutoFit/>
-          </a:bodyPr>
-          <a:lstStyle/>
-          <a:p>
-            <a:pPr algn="l">
-              <a:defRPr sz="4800" b="1" i="0">
-                <a:solidFill>
-                  <a:srgbClr val="8B5CF6"/>
-                </a:solidFill>
-                <a:latin typeface="Calibri"/>
-              </a:defRPr>
-            </a:pPr>
-            <a:r>
-              <a:t>Profitable</a:t>
+            <a:ext cx="9966960" cy="640080"/>
+          </a:xfrm>
+          <a:prstGeom prst="rect">
+            <a:avLst/>
+          </a:prstGeom>
+          <a:noFill/>
+        </p:spPr>
+        <p:txBody>
+          <a:bodyPr wrap="square">
+            <a:spAutoFit/>
+          </a:bodyPr>
+          <a:lstStyle/>
+          <a:p>
+            <a:pPr algn="l">
+              <a:defRPr sz="2800" b="1" i="0">
+                <a:solidFill>
+                  <a:srgbClr val="FFFFFF"/>
+                </a:solidFill>
+                <a:latin typeface="Calibri"/>
+              </a:defRPr>
+            </a:pPr>
+            <a:r>
+              <a:t>Kirill Khramkov</a:t>
             </a:r>
           </a:p>
         </p:txBody>
@@ -4660,22 +4733,22 @@
         </p:nvSpPr>
         <p:spPr>
           <a:xfrm>
-            <a:off x="1097280" y="2834640"/>
-            <a:ext cx="4572000" cy="365760"/>
-          </a:xfrm>
-          <a:prstGeom prst="rect">
-            <a:avLst/>
-          </a:prstGeom>
-          <a:noFill/>
-        </p:spPr>
-        <p:txBody>
-          <a:bodyPr wrap="square">
-            <a:spAutoFit/>
-          </a:bodyPr>
-          <a:lstStyle/>
-          <a:p>
-            <a:pPr algn="l">
-              <a:defRPr sz="1200" b="0" i="0">
+            <a:off x="1097280" y="2743200"/>
+            <a:ext cx="9966960" cy="365760"/>
+          </a:xfrm>
+          <a:prstGeom prst="rect">
+            <a:avLst/>
+          </a:prstGeom>
+          <a:noFill/>
+        </p:spPr>
+        <p:txBody>
+          <a:bodyPr wrap="square">
+            <a:spAutoFit/>
+          </a:bodyPr>
+          <a:lstStyle/>
+          <a:p>
+            <a:pPr algn="l">
+              <a:defRPr sz="1400" b="0" i="0">
                 <a:solidFill>
                   <a:srgbClr val="8F95A3"/>
                 </a:solidFill>
@@ -4683,7 +4756,7 @@
               </a:defRPr>
             </a:pPr>
             <a:r>
-              <a:t>2025 Achievement</a:t>
+              <a:t>March 13, 2026</a:t>
             </a:r>
           </a:p>
         </p:txBody>
@@ -4697,21 +4770,21 @@
         <p:spPr>
           <a:xfrm>
             <a:off x="1097280" y="3291840"/>
-            <a:ext cx="9966960" cy="365760"/>
-          </a:xfrm>
-          <a:prstGeom prst="rect">
-            <a:avLst/>
-          </a:prstGeom>
-          <a:noFill/>
-        </p:spPr>
-        <p:txBody>
-          <a:bodyPr wrap="square">
-            <a:spAutoFit/>
-          </a:bodyPr>
-          <a:lstStyle/>
-          <a:p>
-            <a:pPr algn="l">
-              <a:defRPr sz="1400" b="0" i="0">
+            <a:ext cx="9966960" cy="914400"/>
+          </a:xfrm>
+          <a:prstGeom prst="rect">
+            <a:avLst/>
+          </a:prstGeom>
+          <a:noFill/>
+        </p:spPr>
+        <p:txBody>
+          <a:bodyPr wrap="square">
+            <a:spAutoFit/>
+          </a:bodyPr>
+          <a:lstStyle/>
+          <a:p>
+            <a:pPr algn="l">
+              <a:defRPr sz="1600" b="0" i="0">
                 <a:solidFill>
                   <a:srgbClr val="E2E2EA"/>
                 </a:solidFill>
@@ -4719,7 +4792,7 @@
               </a:defRPr>
             </a:pPr>
             <a:r>
-              <a:t>by Gaming Division</a:t>
+              <a:t>Thanks, everyone! Grateful for all the warm birthday wishes from the team.</a:t>
             </a:r>
           </a:p>
         </p:txBody>
@@ -4732,7 +4805,7 @@
         </p:nvSpPr>
         <p:spPr>
           <a:xfrm>
-            <a:off x="1097280" y="3840480"/>
+            <a:off x="1097280" y="4572000"/>
             <a:ext cx="9966960" cy="457200"/>
           </a:xfrm>
           <a:prstGeom prst="rect">
@@ -4747,87 +4820,15 @@
           <a:lstStyle/>
           <a:p>
             <a:pPr algn="l">
-              <a:defRPr sz="1800" b="1" i="0">
-                <a:solidFill>
-                  <a:srgbClr val="FFFFFF"/>
-                </a:solidFill>
-                <a:latin typeface="Calibri"/>
-              </a:defRPr>
-            </a:pPr>
-            <a:r>
-              <a:t>Gaming Division Hits Profitability Milestone</a:t>
-            </a:r>
-          </a:p>
-        </p:txBody>
-      </p:sp>
-      <p:sp>
-        <p:nvSpPr>
-          <p:cNvPr id="9" name="TextBox 8"/>
-          <p:cNvSpPr txBox="1"/>
-          <p:nvPr/>
-        </p:nvSpPr>
-        <p:spPr>
-          <a:xfrm>
-            <a:off x="1097280" y="4389120"/>
-            <a:ext cx="9966960" cy="914400"/>
-          </a:xfrm>
-          <a:prstGeom prst="rect">
-            <a:avLst/>
-          </a:prstGeom>
-          <a:noFill/>
-        </p:spPr>
-        <p:txBody>
-          <a:bodyPr wrap="square">
-            <a:spAutoFit/>
-          </a:bodyPr>
-          <a:lstStyle/>
-          <a:p>
-            <a:pPr algn="l">
-              <a:defRPr sz="1400" b="0" i="0">
-                <a:solidFill>
-                  <a:srgbClr val="E2E2EA"/>
-                </a:solidFill>
-                <a:latin typeface="Calibri"/>
-              </a:defRPr>
-            </a:pPr>
-            <a:r>
-              <a:t>Our gaming portfolio officially turned profitable in 2025, with standout performances from Infinite Minesweeper (61% retention) and major improvements in Solitaire and Crossword.</a:t>
-            </a:r>
-          </a:p>
-        </p:txBody>
-      </p:sp>
-      <p:sp>
-        <p:nvSpPr>
-          <p:cNvPr id="10" name="TextBox 9"/>
-          <p:cNvSpPr txBox="1"/>
-          <p:nvPr/>
-        </p:nvSpPr>
-        <p:spPr>
-          <a:xfrm>
-            <a:off x="1097280" y="5486400"/>
-            <a:ext cx="9966960" cy="457200"/>
-          </a:xfrm>
-          <a:prstGeom prst="rect">
-            <a:avLst/>
-          </a:prstGeom>
-          <a:noFill/>
-        </p:spPr>
-        <p:txBody>
-          <a:bodyPr wrap="square">
-            <a:spAutoFit/>
-          </a:bodyPr>
-          <a:lstStyle/>
-          <a:p>
-            <a:pPr algn="l">
-              <a:defRPr sz="1300" b="0" i="1">
-                <a:solidFill>
-                  <a:srgbClr val="8F95A3"/>
-                </a:solidFill>
-                <a:latin typeface="Calibri"/>
-              </a:defRPr>
-            </a:pPr>
-            <a:r>
-              <a:t>💬 "Strategic gaming investments paying off big"</a:t>
+              <a:defRPr sz="1400" b="0" i="1">
+                <a:solidFill>
+                  <a:srgbClr val="FF6B9D"/>
+                </a:solidFill>
+                <a:latin typeface="Calibri"/>
+              </a:defRPr>
+            </a:pPr>
+            <a:r>
+              <a:t>Celebrated by colleagues with heartfelt messages</a:t>
             </a:r>
           </a:p>
         </p:txBody>
@@ -4873,7 +4874,7 @@
             <a:avLst/>
           </a:prstGeom>
           <a:solidFill>
-            <a:srgbClr val="06B6D4"/>
+            <a:srgbClr val="27AE60"/>
           </a:solidFill>
           <a:ln>
             <a:noFill/>
@@ -4926,13 +4927,13 @@
             <a:pPr algn="l">
               <a:defRPr sz="1000" b="1">
                 <a:solidFill>
-                  <a:srgbClr val="06B6D4"/>
-                </a:solidFill>
-                <a:latin typeface="Calibri"/>
-              </a:defRPr>
-            </a:pPr>
-            <a:r>
-              <a:t>🤖  MILESTONE</a:t>
+                  <a:srgbClr val="27AE60"/>
+                </a:solidFill>
+                <a:latin typeface="Calibri"/>
+              </a:defRPr>
+            </a:pPr>
+            <a:r>
+              <a:t>💰  MILESTONE</a:t>
             </a:r>
           </a:p>
         </p:txBody>
@@ -4962,13 +4963,13 @@
             <a:pPr algn="l">
               <a:defRPr sz="3200" b="1" i="0">
                 <a:solidFill>
-                  <a:srgbClr val="06B6D4"/>
-                </a:solidFill>
-                <a:latin typeface="Calibri"/>
-              </a:defRPr>
-            </a:pPr>
-            <a:r>
-              <a:t>AI-First Future</a:t>
+                  <a:srgbClr val="27AE60"/>
+                </a:solidFill>
+                <a:latin typeface="Calibri"/>
+              </a:defRPr>
+            </a:pPr>
+            <a:r>
+              <a:t>Revenue Milestone</a:t>
             </a:r>
           </a:p>
         </p:txBody>
@@ -4998,13 +4999,13 @@
             <a:pPr algn="l">
               <a:defRPr sz="5200" b="1" i="0">
                 <a:solidFill>
-                  <a:srgbClr val="06B6D4"/>
-                </a:solidFill>
-                <a:latin typeface="Calibri"/>
-              </a:defRPr>
-            </a:pPr>
-            <a:r>
-              <a:t>5-10</a:t>
+                  <a:srgbClr val="27AE60"/>
+                </a:solidFill>
+                <a:latin typeface="Calibri"/>
+              </a:defRPr>
+            </a:pPr>
+            <a:r>
+              <a:t>$100M</a:t>
             </a:r>
           </a:p>
         </p:txBody>
@@ -5040,7 +5041,7 @@
               </a:defRPr>
             </a:pPr>
             <a:r>
-              <a:t>AI Agents per Employee</a:t>
+              <a:t>gross profit target</a:t>
             </a:r>
           </a:p>
         </p:txBody>
@@ -5076,7 +5077,7 @@
               </a:defRPr>
             </a:pPr>
             <a:r>
-              <a:t>Every Employee Managing AI Agents</a:t>
+              <a:t>Strong Financial Performance</a:t>
             </a:r>
           </a:p>
         </p:txBody>
@@ -5112,7 +5113,7 @@
               </a:defRPr>
             </a:pPr>
             <a:r>
-              <a:t>Within 3-6 months, every Appodeal team member will manage 5-10 AI agents. We're not just using AI - we're becoming an AI-amplified workforce.</a:t>
+              <a:t>Company continues on track with ~$100M gross profit and $20M EBITDA, maintaining 40% year-over-year growth</a:t>
             </a:r>
           </a:p>
         </p:txBody>
@@ -5158,7 +5159,7 @@
             <a:avLst/>
           </a:prstGeom>
           <a:solidFill>
-            <a:srgbClr val="EF4444"/>
+            <a:srgbClr val="9B59B6"/>
           </a:solidFill>
           <a:ln>
             <a:noFill/>
@@ -5211,13 +5212,13 @@
             <a:pPr algn="l">
               <a:defRPr sz="1000" b="1">
                 <a:solidFill>
-                  <a:srgbClr val="EF4444"/>
-                </a:solidFill>
-                <a:latin typeface="Calibri"/>
-              </a:defRPr>
-            </a:pPr>
-            <a:r>
-              <a:t>🛡️  WIN</a:t>
+                  <a:srgbClr val="9B59B6"/>
+                </a:solidFill>
+                <a:latin typeface="Calibri"/>
+              </a:defRPr>
+            </a:pPr>
+            <a:r>
+              <a:t>🎮  WIN</a:t>
             </a:r>
           </a:p>
         </p:txBody>
@@ -5247,13 +5248,13 @@
             <a:pPr algn="l">
               <a:defRPr sz="3200" b="1" i="0">
                 <a:solidFill>
-                  <a:srgbClr val="EF4444"/>
-                </a:solidFill>
-                <a:latin typeface="Calibri"/>
-              </a:defRPr>
-            </a:pPr>
-            <a:r>
-              <a:t>Fraud Prevention Victory</a:t>
+                  <a:srgbClr val="9B59B6"/>
+                </a:solidFill>
+                <a:latin typeface="Calibri"/>
+              </a:defRPr>
+            </a:pPr>
+            <a:r>
+              <a:t>Gaming Success</a:t>
             </a:r>
           </a:p>
         </p:txBody>
@@ -5283,13 +5284,13 @@
             <a:pPr algn="l">
               <a:defRPr sz="4800" b="1" i="0">
                 <a:solidFill>
-                  <a:srgbClr val="EF4444"/>
-                </a:solidFill>
-                <a:latin typeface="Calibri"/>
-              </a:defRPr>
-            </a:pPr>
-            <a:r>
-              <a:t>82%</a:t>
+                  <a:srgbClr val="9B59B6"/>
+                </a:solidFill>
+                <a:latin typeface="Calibri"/>
+              </a:defRPr>
+            </a:pPr>
+            <a:r>
+              <a:t>61%</a:t>
             </a:r>
           </a:p>
         </p:txBody>
@@ -5325,7 +5326,7 @@
               </a:defRPr>
             </a:pPr>
             <a:r>
-              <a:t>Fraud Reduction</a:t>
+              <a:t>retention rate</a:t>
             </a:r>
           </a:p>
         </p:txBody>
@@ -5361,7 +5362,7 @@
               </a:defRPr>
             </a:pPr>
             <a:r>
-              <a:t>by Security Team</a:t>
+              <a:t>by Gaming Division</a:t>
             </a:r>
           </a:p>
         </p:txBody>
@@ -5397,7 +5398,7 @@
               </a:defRPr>
             </a:pPr>
             <a:r>
-              <a:t>Dynamic SDK Signatures Crush Fraud</a:t>
+              <a:t>Infinite Minesweeper Breakthrough</a:t>
             </a:r>
           </a:p>
         </p:txBody>
@@ -5433,7 +5434,7 @@
               </a:defRPr>
             </a:pPr>
             <a:r>
-              <a:t>Our innovative dynamic SDK signatures slashed fraud rates from 22% to under 4% - a massive win for platform security and advertiser trust.</a:t>
+              <a:t>Our Infinite Minesweeper achieved 61% retention, hitting Apple's ERA benchmark of 151-160%</a:t>
             </a:r>
           </a:p>
         </p:txBody>
@@ -5469,7 +5470,7 @@
               </a:defRPr>
             </a:pPr>
             <a:r>
-              <a:t>💬 "World-class security drives business growth"</a:t>
+              <a:t>💬 "Gaming division turned profitable in 2025"</a:t>
             </a:r>
           </a:p>
         </p:txBody>
@@ -5515,7 +5516,7 @@
             <a:avLst/>
           </a:prstGeom>
           <a:solidFill>
-            <a:srgbClr val="10B981"/>
+            <a:srgbClr val="3498DB"/>
           </a:solidFill>
           <a:ln>
             <a:noFill/>
@@ -5568,13 +5569,13 @@
             <a:pPr algn="l">
               <a:defRPr sz="1000" b="1">
                 <a:solidFill>
-                  <a:srgbClr val="10B981"/>
-                </a:solidFill>
-                <a:latin typeface="Calibri"/>
-              </a:defRPr>
-            </a:pPr>
-            <a:r>
-              <a:t>💵  WIN</a:t>
+                  <a:srgbClr val="3498DB"/>
+                </a:solidFill>
+                <a:latin typeface="Calibri"/>
+              </a:defRPr>
+            </a:pPr>
+            <a:r>
+              <a:t>🤖  MILESTONE</a:t>
             </a:r>
           </a:p>
         </p:txBody>
@@ -5604,13 +5605,13 @@
             <a:pPr algn="l">
               <a:defRPr sz="3200" b="1" i="0">
                 <a:solidFill>
-                  <a:srgbClr val="10B981"/>
-                </a:solidFill>
-                <a:latin typeface="Calibri"/>
-              </a:defRPr>
-            </a:pPr>
-            <a:r>
-              <a:t>Sales Momentum</a:t>
+                  <a:srgbClr val="3498DB"/>
+                </a:solidFill>
+                <a:latin typeface="Calibri"/>
+              </a:defRPr>
+            </a:pPr>
+            <a:r>
+              <a:t>AI Integration</a:t>
             </a:r>
           </a:p>
         </p:txBody>
@@ -5638,15 +5639,300 @@
           <a:lstStyle/>
           <a:p>
             <a:pPr algn="l">
+              <a:defRPr sz="5200" b="1" i="0">
+                <a:solidFill>
+                  <a:srgbClr val="3498DB"/>
+                </a:solidFill>
+                <a:latin typeface="Calibri"/>
+              </a:defRPr>
+            </a:pPr>
+            <a:r>
+              <a:t>5-10</a:t>
+            </a:r>
+          </a:p>
+        </p:txBody>
+      </p:sp>
+      <p:sp>
+        <p:nvSpPr>
+          <p:cNvPr id="6" name="TextBox 5"/>
+          <p:cNvSpPr txBox="1"/>
+          <p:nvPr/>
+        </p:nvSpPr>
+        <p:spPr>
+          <a:xfrm>
+            <a:off x="1097280" y="2926080"/>
+            <a:ext cx="4572000" cy="365760"/>
+          </a:xfrm>
+          <a:prstGeom prst="rect">
+            <a:avLst/>
+          </a:prstGeom>
+          <a:noFill/>
+        </p:spPr>
+        <p:txBody>
+          <a:bodyPr wrap="square">
+            <a:spAutoFit/>
+          </a:bodyPr>
+          <a:lstStyle/>
+          <a:p>
+            <a:pPr algn="l">
+              <a:defRPr sz="1100" b="0" i="0">
+                <a:solidFill>
+                  <a:srgbClr val="8F95A3"/>
+                </a:solidFill>
+                <a:latin typeface="Calibri"/>
+              </a:defRPr>
+            </a:pPr>
+            <a:r>
+              <a:t>AI agents per employee</a:t>
+            </a:r>
+          </a:p>
+        </p:txBody>
+      </p:sp>
+      <p:sp>
+        <p:nvSpPr>
+          <p:cNvPr id="7" name="TextBox 6"/>
+          <p:cNvSpPr txBox="1"/>
+          <p:nvPr/>
+        </p:nvSpPr>
+        <p:spPr>
+          <a:xfrm>
+            <a:off x="1097280" y="3566160"/>
+            <a:ext cx="9966960" cy="457200"/>
+          </a:xfrm>
+          <a:prstGeom prst="rect">
+            <a:avLst/>
+          </a:prstGeom>
+          <a:noFill/>
+        </p:spPr>
+        <p:txBody>
+          <a:bodyPr wrap="square">
+            <a:spAutoFit/>
+          </a:bodyPr>
+          <a:lstStyle/>
+          <a:p>
+            <a:pPr algn="l">
+              <a:defRPr sz="1800" b="1" i="0">
+                <a:solidFill>
+                  <a:srgbClr val="FFFFFF"/>
+                </a:solidFill>
+                <a:latin typeface="Calibri"/>
+              </a:defRPr>
+            </a:pPr>
+            <a:r>
+              <a:t>AI-First Workforce Vision</a:t>
+            </a:r>
+          </a:p>
+        </p:txBody>
+      </p:sp>
+      <p:sp>
+        <p:nvSpPr>
+          <p:cNvPr id="8" name="TextBox 7"/>
+          <p:cNvSpPr txBox="1"/>
+          <p:nvPr/>
+        </p:nvSpPr>
+        <p:spPr>
+          <a:xfrm>
+            <a:off x="1097280" y="4206240"/>
+            <a:ext cx="9966960" cy="1371600"/>
+          </a:xfrm>
+          <a:prstGeom prst="rect">
+            <a:avLst/>
+          </a:prstGeom>
+          <a:noFill/>
+        </p:spPr>
+        <p:txBody>
+          <a:bodyPr wrap="square">
+            <a:spAutoFit/>
+          </a:bodyPr>
+          <a:lstStyle/>
+          <a:p>
+            <a:pPr algn="l">
+              <a:defRPr sz="1500" b="0" i="0">
+                <a:solidFill>
+                  <a:srgbClr val="E2E2EA"/>
+                </a:solidFill>
+                <a:latin typeface="Calibri"/>
+              </a:defRPr>
+            </a:pPr>
+            <a:r>
+              <a:t>Strategic initiative: every employee will manage 5-10 AI agents within 3-6 months, revolutionizing how we work</a:t>
+            </a:r>
+          </a:p>
+        </p:txBody>
+      </p:sp>
+    </p:spTree>
+  </p:cSld>
+  <p:clrMapOvr>
+    <a:masterClrMapping/>
+  </p:clrMapOvr>
+</p:sld>
+</file>
+
+<file path=ppt/slides/slide18.xml><?xml version="1.0" encoding="utf-8"?>
+<p:sld xmlns:a="http://schemas.openxmlformats.org/drawingml/2006/main" xmlns:p="http://schemas.openxmlformats.org/presentationml/2006/main" xmlns:r="http://schemas.openxmlformats.org/officeDocument/2006/relationships">
+  <p:cSld>
+    <p:bg>
+      <p:bgPr>
+        <a:solidFill>
+          <a:srgbClr val="08080C"/>
+        </a:solidFill>
+        <a:effectLst/>
+      </p:bgPr>
+    </p:bg>
+    <p:spTree>
+      <p:nvGrpSpPr>
+        <p:cNvPr id="1" name=""/>
+        <p:cNvGrpSpPr/>
+        <p:nvPr/>
+      </p:nvGrpSpPr>
+      <p:grpSpPr/>
+      <p:sp>
+        <p:nvSpPr>
+          <p:cNvPr id="2" name="Rectangle 1"/>
+          <p:cNvSpPr/>
+          <p:nvPr/>
+        </p:nvSpPr>
+        <p:spPr>
+          <a:xfrm>
+            <a:off x="0" y="365760"/>
+            <a:ext cx="12191695" cy="54864"/>
+          </a:xfrm>
+          <a:prstGeom prst="rect">
+            <a:avLst/>
+          </a:prstGeom>
+          <a:solidFill>
+            <a:srgbClr val="E74C3C"/>
+          </a:solidFill>
+          <a:ln>
+            <a:noFill/>
+          </a:ln>
+        </p:spPr>
+        <p:style>
+          <a:lnRef idx="1">
+            <a:schemeClr val="accent1"/>
+          </a:lnRef>
+          <a:fillRef idx="3">
+            <a:schemeClr val="accent1"/>
+          </a:fillRef>
+          <a:effectRef idx="2">
+            <a:schemeClr val="accent1"/>
+          </a:effectRef>
+          <a:fontRef idx="minor">
+            <a:schemeClr val="lt1"/>
+          </a:fontRef>
+        </p:style>
+        <p:txBody>
+          <a:bodyPr rtlCol="0" anchor="ctr"/>
+          <a:lstStyle/>
+          <a:p>
+            <a:pPr algn="ctr"/>
+          </a:p>
+        </p:txBody>
+      </p:sp>
+      <p:sp>
+        <p:nvSpPr>
+          <p:cNvPr id="3" name="TextBox 2"/>
+          <p:cNvSpPr txBox="1"/>
+          <p:nvPr/>
+        </p:nvSpPr>
+        <p:spPr>
+          <a:xfrm>
+            <a:off x="1097280" y="731520"/>
+            <a:ext cx="3657600" cy="365760"/>
+          </a:xfrm>
+          <a:prstGeom prst="rect">
+            <a:avLst/>
+          </a:prstGeom>
+          <a:noFill/>
+        </p:spPr>
+        <p:txBody>
+          <a:bodyPr wrap="none">
+            <a:spAutoFit/>
+          </a:bodyPr>
+          <a:lstStyle/>
+          <a:p>
+            <a:pPr algn="l">
+              <a:defRPr sz="1000" b="1">
+                <a:solidFill>
+                  <a:srgbClr val="E74C3C"/>
+                </a:solidFill>
+                <a:latin typeface="Calibri"/>
+              </a:defRPr>
+            </a:pPr>
+            <a:r>
+              <a:t>🛡️  WIN</a:t>
+            </a:r>
+          </a:p>
+        </p:txBody>
+      </p:sp>
+      <p:sp>
+        <p:nvSpPr>
+          <p:cNvPr id="4" name="TextBox 3"/>
+          <p:cNvSpPr txBox="1"/>
+          <p:nvPr/>
+        </p:nvSpPr>
+        <p:spPr>
+          <a:xfrm>
+            <a:off x="1097280" y="1188720"/>
+            <a:ext cx="9966960" cy="731520"/>
+          </a:xfrm>
+          <a:prstGeom prst="rect">
+            <a:avLst/>
+          </a:prstGeom>
+          <a:noFill/>
+        </p:spPr>
+        <p:txBody>
+          <a:bodyPr wrap="square">
+            <a:spAutoFit/>
+          </a:bodyPr>
+          <a:lstStyle/>
+          <a:p>
+            <a:pPr algn="l">
+              <a:defRPr sz="3200" b="1" i="0">
+                <a:solidFill>
+                  <a:srgbClr val="E74C3C"/>
+                </a:solidFill>
+                <a:latin typeface="Calibri"/>
+              </a:defRPr>
+            </a:pPr>
+            <a:r>
+              <a:t>Fraud Prevention</a:t>
+            </a:r>
+          </a:p>
+        </p:txBody>
+      </p:sp>
+      <p:sp>
+        <p:nvSpPr>
+          <p:cNvPr id="5" name="TextBox 4"/>
+          <p:cNvSpPr txBox="1"/>
+          <p:nvPr/>
+        </p:nvSpPr>
+        <p:spPr>
+          <a:xfrm>
+            <a:off x="1097280" y="2103120"/>
+            <a:ext cx="4572000" cy="822960"/>
+          </a:xfrm>
+          <a:prstGeom prst="rect">
+            <a:avLst/>
+          </a:prstGeom>
+          <a:noFill/>
+        </p:spPr>
+        <p:txBody>
+          <a:bodyPr wrap="square">
+            <a:spAutoFit/>
+          </a:bodyPr>
+          <a:lstStyle/>
+          <a:p>
+            <a:pPr algn="l">
               <a:defRPr sz="4800" b="1" i="0">
                 <a:solidFill>
-                  <a:srgbClr val="10B981"/>
-                </a:solidFill>
-                <a:latin typeface="Calibri"/>
-              </a:defRPr>
-            </a:pPr>
-            <a:r>
-              <a:t>$390k</a:t>
+                  <a:srgbClr val="E74C3C"/>
+                </a:solidFill>
+                <a:latin typeface="Calibri"/>
+              </a:defRPr>
+            </a:pPr>
+            <a:r>
+              <a:t>4%</a:t>
             </a:r>
           </a:p>
         </p:txBody>
@@ -5682,7 +5968,7 @@
               </a:defRPr>
             </a:pPr>
             <a:r>
-              <a:t>Weekly Revenue</a:t>
+              <a:t>fraud rate</a:t>
             </a:r>
           </a:p>
         </p:txBody>
@@ -5718,7 +6004,7 @@
               </a:defRPr>
             </a:pPr>
             <a:r>
-              <a:t>by Sales Team</a:t>
+              <a:t>by Security Team</a:t>
             </a:r>
           </a:p>
         </p:txBody>
@@ -5754,7 +6040,7 @@
               </a:defRPr>
             </a:pPr>
             <a:r>
-              <a:t>8 Deals Closed in Single Week</a:t>
+              <a:t>Fraud Detection Breakthrough</a:t>
             </a:r>
           </a:p>
         </p:txBody>
@@ -5790,7 +6076,7 @@
               </a:defRPr>
             </a:pPr>
             <a:r>
-              <a:t>Our sales machine is firing on all cylinders - 8 deals closed generating $390k net revenue in just one week. The momentum is incredible.</a:t>
+              <a:t>Dynamic SDK signatures reduced fraud from 22% to under 4%</a:t>
             </a:r>
           </a:p>
         </p:txBody>
@@ -5826,7 +6112,7 @@
               </a:defRPr>
             </a:pPr>
             <a:r>
-              <a:t>💬 "Sales excellence driving company growth"</a:t>
+              <a:t>💬 "Massive improvement in platform security and trust"</a:t>
             </a:r>
           </a:p>
         </p:txBody>
@@ -5872,7 +6158,7 @@
             <a:avLst/>
           </a:prstGeom>
           <a:solidFill>
-            <a:srgbClr val="00D4AA"/>
+            <a:srgbClr val="2ECC71"/>
           </a:solidFill>
           <a:ln>
             <a:noFill/>
@@ -5925,13 +6211,13 @@
             <a:pPr algn="l">
               <a:defRPr sz="1000" b="1">
                 <a:solidFill>
-                  <a:srgbClr val="00D4AA"/>
-                </a:solidFill>
-                <a:latin typeface="Calibri"/>
-              </a:defRPr>
-            </a:pPr>
-            <a:r>
-              <a:t>🚀  WIN</a:t>
+                  <a:srgbClr val="2ECC71"/>
+                </a:solidFill>
+                <a:latin typeface="Calibri"/>
+              </a:defRPr>
+            </a:pPr>
+            <a:r>
+              <a:t>🌱  EVENT</a:t>
             </a:r>
           </a:p>
         </p:txBody>
@@ -5961,13 +6247,13 @@
             <a:pPr algn="l">
               <a:defRPr sz="3200" b="1" i="0">
                 <a:solidFill>
-                  <a:srgbClr val="00D4AA"/>
-                </a:solidFill>
-                <a:latin typeface="Calibri"/>
-              </a:defRPr>
-            </a:pPr>
-            <a:r>
-              <a:t>DevOps Innovation</a:t>
+                  <a:srgbClr val="2ECC71"/>
+                </a:solidFill>
+                <a:latin typeface="Calibri"/>
+              </a:defRPr>
+            </a:pPr>
+            <a:r>
+              <a:t>Connect Groups Spring Launch</a:t>
             </a:r>
           </a:p>
         </p:txBody>
@@ -5981,29 +6267,29 @@
         <p:spPr>
           <a:xfrm>
             <a:off x="1097280" y="2103120"/>
-            <a:ext cx="4572000" cy="822960"/>
-          </a:xfrm>
-          <a:prstGeom prst="rect">
-            <a:avLst/>
-          </a:prstGeom>
-          <a:noFill/>
-        </p:spPr>
-        <p:txBody>
-          <a:bodyPr wrap="square">
-            <a:spAutoFit/>
-          </a:bodyPr>
-          <a:lstStyle/>
-          <a:p>
-            <a:pPr algn="l">
-              <a:defRPr sz="4800" b="1" i="0">
-                <a:solidFill>
-                  <a:srgbClr val="00D4AA"/>
-                </a:solidFill>
-                <a:latin typeface="Calibri"/>
-              </a:defRPr>
-            </a:pPr>
-            <a:r>
-              <a:t>Coolify</a:t>
+            <a:ext cx="9966960" cy="548640"/>
+          </a:xfrm>
+          <a:prstGeom prst="rect">
+            <a:avLst/>
+          </a:prstGeom>
+          <a:noFill/>
+        </p:spPr>
+        <p:txBody>
+          <a:bodyPr wrap="square">
+            <a:spAutoFit/>
+          </a:bodyPr>
+          <a:lstStyle/>
+          <a:p>
+            <a:pPr algn="l">
+              <a:defRPr sz="2200" b="1" i="0">
+                <a:solidFill>
+                  <a:srgbClr val="FFFFFF"/>
+                </a:solidFill>
+                <a:latin typeface="Calibri"/>
+              </a:defRPr>
+            </a:pPr>
+            <a:r>
+              <a:t>Connect Groups Spring Season</a:t>
             </a:r>
           </a:p>
         </p:txBody>
@@ -6016,22 +6302,94 @@
         </p:nvSpPr>
         <p:spPr>
           <a:xfrm>
-            <a:off x="1097280" y="2834640"/>
-            <a:ext cx="4572000" cy="365760"/>
-          </a:xfrm>
-          <a:prstGeom prst="rect">
-            <a:avLst/>
-          </a:prstGeom>
-          <a:noFill/>
-        </p:spPr>
-        <p:txBody>
-          <a:bodyPr wrap="square">
-            <a:spAutoFit/>
-          </a:bodyPr>
-          <a:lstStyle/>
-          <a:p>
-            <a:pPr algn="l">
-              <a:defRPr sz="1200" b="0" i="0">
+            <a:off x="1097280" y="2743200"/>
+            <a:ext cx="9966960" cy="365760"/>
+          </a:xfrm>
+          <a:prstGeom prst="rect">
+            <a:avLst/>
+          </a:prstGeom>
+          <a:noFill/>
+        </p:spPr>
+        <p:txBody>
+          <a:bodyPr wrap="square">
+            <a:spAutoFit/>
+          </a:bodyPr>
+          <a:lstStyle/>
+          <a:p>
+            <a:pPr algn="l">
+              <a:defRPr sz="1400" b="1" i="0">
+                <a:solidFill>
+                  <a:srgbClr val="2ECC71"/>
+                </a:solidFill>
+                <a:latin typeface="Calibri"/>
+              </a:defRPr>
+            </a:pPr>
+            <a:r>
+              <a:t>March–May 2026</a:t>
+            </a:r>
+          </a:p>
+        </p:txBody>
+      </p:sp>
+      <p:sp>
+        <p:nvSpPr>
+          <p:cNvPr id="7" name="TextBox 6"/>
+          <p:cNvSpPr txBox="1"/>
+          <p:nvPr/>
+        </p:nvSpPr>
+        <p:spPr>
+          <a:xfrm>
+            <a:off x="1097280" y="3291840"/>
+            <a:ext cx="9966960" cy="1371600"/>
+          </a:xfrm>
+          <a:prstGeom prst="rect">
+            <a:avLst/>
+          </a:prstGeom>
+          <a:noFill/>
+        </p:spPr>
+        <p:txBody>
+          <a:bodyPr wrap="square">
+            <a:spAutoFit/>
+          </a:bodyPr>
+          <a:lstStyle/>
+          <a:p>
+            <a:pPr algn="l">
+              <a:defRPr sz="1500" b="0" i="0">
+                <a:solidFill>
+                  <a:srgbClr val="E2E2EA"/>
+                </a:solidFill>
+                <a:latin typeface="Calibri"/>
+              </a:defRPr>
+            </a:pPr>
+            <a:r>
+              <a:t>Employee-led communities on Circle connecting around shared interests, learning, and ideas — from sports and books to leadership and meaningful conversations</a:t>
+            </a:r>
+          </a:p>
+        </p:txBody>
+      </p:sp>
+      <p:sp>
+        <p:nvSpPr>
+          <p:cNvPr id="8" name="TextBox 7"/>
+          <p:cNvSpPr txBox="1"/>
+          <p:nvPr/>
+        </p:nvSpPr>
+        <p:spPr>
+          <a:xfrm>
+            <a:off x="1097280" y="5029200"/>
+            <a:ext cx="9966960" cy="365760"/>
+          </a:xfrm>
+          <a:prstGeom prst="rect">
+            <a:avLst/>
+          </a:prstGeom>
+          <a:noFill/>
+        </p:spPr>
+        <p:txBody>
+          <a:bodyPr wrap="square">
+            <a:spAutoFit/>
+          </a:bodyPr>
+          <a:lstStyle/>
+          <a:p>
+            <a:pPr algn="l">
+              <a:defRPr sz="1300" b="0" i="0">
                 <a:solidFill>
                   <a:srgbClr val="8F95A3"/>
                 </a:solidFill>
@@ -6039,151 +6397,7 @@
               </a:defRPr>
             </a:pPr>
             <a:r>
-              <a:t>Platform Launch</a:t>
-            </a:r>
-          </a:p>
-        </p:txBody>
-      </p:sp>
-      <p:sp>
-        <p:nvSpPr>
-          <p:cNvPr id="7" name="TextBox 6"/>
-          <p:cNvSpPr txBox="1"/>
-          <p:nvPr/>
-        </p:nvSpPr>
-        <p:spPr>
-          <a:xfrm>
-            <a:off x="1097280" y="3291840"/>
-            <a:ext cx="9966960" cy="365760"/>
-          </a:xfrm>
-          <a:prstGeom prst="rect">
-            <a:avLst/>
-          </a:prstGeom>
-          <a:noFill/>
-        </p:spPr>
-        <p:txBody>
-          <a:bodyPr wrap="square">
-            <a:spAutoFit/>
-          </a:bodyPr>
-          <a:lstStyle/>
-          <a:p>
-            <a:pPr algn="l">
-              <a:defRPr sz="1400" b="0" i="0">
-                <a:solidFill>
-                  <a:srgbClr val="E2E2EA"/>
-                </a:solidFill>
-                <a:latin typeface="Calibri"/>
-              </a:defRPr>
-            </a:pPr>
-            <a:r>
-              <a:t>by Gleb Krahotkin &amp; DevOps Team</a:t>
-            </a:r>
-          </a:p>
-        </p:txBody>
-      </p:sp>
-      <p:sp>
-        <p:nvSpPr>
-          <p:cNvPr id="8" name="TextBox 7"/>
-          <p:cNvSpPr txBox="1"/>
-          <p:nvPr/>
-        </p:nvSpPr>
-        <p:spPr>
-          <a:xfrm>
-            <a:off x="1097280" y="3840480"/>
-            <a:ext cx="9966960" cy="457200"/>
-          </a:xfrm>
-          <a:prstGeom prst="rect">
-            <a:avLst/>
-          </a:prstGeom>
-          <a:noFill/>
-        </p:spPr>
-        <p:txBody>
-          <a:bodyPr wrap="square">
-            <a:spAutoFit/>
-          </a:bodyPr>
-          <a:lstStyle/>
-          <a:p>
-            <a:pPr algn="l">
-              <a:defRPr sz="1800" b="1" i="0">
-                <a:solidFill>
-                  <a:srgbClr val="FFFFFF"/>
-                </a:solidFill>
-                <a:latin typeface="Calibri"/>
-              </a:defRPr>
-            </a:pPr>
-            <a:r>
-              <a:t>One-Click App Deployment Goes Live</a:t>
-            </a:r>
-          </a:p>
-        </p:txBody>
-      </p:sp>
-      <p:sp>
-        <p:nvSpPr>
-          <p:cNvPr id="9" name="TextBox 8"/>
-          <p:cNvSpPr txBox="1"/>
-          <p:nvPr/>
-        </p:nvSpPr>
-        <p:spPr>
-          <a:xfrm>
-            <a:off x="1097280" y="4389120"/>
-            <a:ext cx="9966960" cy="914400"/>
-          </a:xfrm>
-          <a:prstGeom prst="rect">
-            <a:avLst/>
-          </a:prstGeom>
-          <a:noFill/>
-        </p:spPr>
-        <p:txBody>
-          <a:bodyPr wrap="square">
-            <a:spAutoFit/>
-          </a:bodyPr>
-          <a:lstStyle/>
-          <a:p>
-            <a:pPr algn="l">
-              <a:defRPr sz="1400" b="0" i="0">
-                <a:solidFill>
-                  <a:srgbClr val="E2E2EA"/>
-                </a:solidFill>
-                <a:latin typeface="Calibri"/>
-              </a:defRPr>
-            </a:pPr>
-            <a:r>
-              <a:t>Our DevOps team just launched Coolify - a revolutionary platform that lets you deploy applications in just a few clicks. No more complex deployment processes!</a:t>
-            </a:r>
-          </a:p>
-        </p:txBody>
-      </p:sp>
-      <p:sp>
-        <p:nvSpPr>
-          <p:cNvPr id="10" name="TextBox 9"/>
-          <p:cNvSpPr txBox="1"/>
-          <p:nvPr/>
-        </p:nvSpPr>
-        <p:spPr>
-          <a:xfrm>
-            <a:off x="1097280" y="5486400"/>
-            <a:ext cx="9966960" cy="457200"/>
-          </a:xfrm>
-          <a:prstGeom prst="rect">
-            <a:avLst/>
-          </a:prstGeom>
-          <a:noFill/>
-        </p:spPr>
-        <p:txBody>
-          <a:bodyPr wrap="square">
-            <a:spAutoFit/>
-          </a:bodyPr>
-          <a:lstStyle/>
-          <a:p>
-            <a:pPr algn="l">
-              <a:defRPr sz="1300" b="0" i="1">
-                <a:solidFill>
-                  <a:srgbClr val="8F95A3"/>
-                </a:solidFill>
-                <a:latin typeface="Calibri"/>
-              </a:defRPr>
-            </a:pPr>
-            <a:r>
-              <a:t>💬 "Empowering every team to ship faster"</a:t>
+              <a:t>Organized by Katarzyna Raniszewska</a:t>
             </a:r>
           </a:p>
         </p:txBody>
@@ -6229,7 +6443,7 @@
             <a:avLst/>
           </a:prstGeom>
           <a:solidFill>
-            <a:srgbClr val="10B981"/>
+            <a:srgbClr val="3498DB"/>
           </a:solidFill>
           <a:ln>
             <a:noFill/>
@@ -6282,13 +6496,13 @@
             <a:pPr algn="l">
               <a:defRPr sz="1000" b="1">
                 <a:solidFill>
-                  <a:srgbClr val="10B981"/>
-                </a:solidFill>
-                <a:latin typeface="Calibri"/>
-              </a:defRPr>
-            </a:pPr>
-            <a:r>
-              <a:t>🌱  EVENT</a:t>
+                  <a:srgbClr val="3498DB"/>
+                </a:solidFill>
+                <a:latin typeface="Calibri"/>
+              </a:defRPr>
+            </a:pPr>
+            <a:r>
+              <a:t>🚀  MILESTONE</a:t>
             </a:r>
           </a:p>
         </p:txBody>
@@ -6318,13 +6532,13 @@
             <a:pPr algn="l">
               <a:defRPr sz="3200" b="1" i="0">
                 <a:solidFill>
-                  <a:srgbClr val="10B981"/>
-                </a:solidFill>
-                <a:latin typeface="Calibri"/>
-              </a:defRPr>
-            </a:pPr>
-            <a:r>
-              <a:t>Connect Groups Spring Season</a:t>
+                  <a:srgbClr val="3498DB"/>
+                </a:solidFill>
+                <a:latin typeface="Calibri"/>
+              </a:defRPr>
+            </a:pPr>
+            <a:r>
+              <a:t>Coolify Launch</a:t>
             </a:r>
           </a:p>
         </p:txBody>
@@ -6338,21 +6552,93 @@
         <p:spPr>
           <a:xfrm>
             <a:off x="1097280" y="2103120"/>
-            <a:ext cx="9966960" cy="548640"/>
-          </a:xfrm>
-          <a:prstGeom prst="rect">
-            <a:avLst/>
-          </a:prstGeom>
-          <a:noFill/>
-        </p:spPr>
-        <p:txBody>
-          <a:bodyPr wrap="square">
-            <a:spAutoFit/>
-          </a:bodyPr>
-          <a:lstStyle/>
-          <a:p>
-            <a:pPr algn="l">
-              <a:defRPr sz="2200" b="1" i="0">
+            <a:ext cx="4572000" cy="822960"/>
+          </a:xfrm>
+          <a:prstGeom prst="rect">
+            <a:avLst/>
+          </a:prstGeom>
+          <a:noFill/>
+        </p:spPr>
+        <p:txBody>
+          <a:bodyPr wrap="square">
+            <a:spAutoFit/>
+          </a:bodyPr>
+          <a:lstStyle/>
+          <a:p>
+            <a:pPr algn="l">
+              <a:defRPr sz="5200" b="1" i="0">
+                <a:solidFill>
+                  <a:srgbClr val="3498DB"/>
+                </a:solidFill>
+                <a:latin typeface="Calibri"/>
+              </a:defRPr>
+            </a:pPr>
+            <a:r>
+              <a:t>27</a:t>
+            </a:r>
+          </a:p>
+        </p:txBody>
+      </p:sp>
+      <p:sp>
+        <p:nvSpPr>
+          <p:cNvPr id="6" name="TextBox 5"/>
+          <p:cNvSpPr txBox="1"/>
+          <p:nvPr/>
+        </p:nvSpPr>
+        <p:spPr>
+          <a:xfrm>
+            <a:off x="1097280" y="2926080"/>
+            <a:ext cx="4572000" cy="365760"/>
+          </a:xfrm>
+          <a:prstGeom prst="rect">
+            <a:avLst/>
+          </a:prstGeom>
+          <a:noFill/>
+        </p:spPr>
+        <p:txBody>
+          <a:bodyPr wrap="square">
+            <a:spAutoFit/>
+          </a:bodyPr>
+          <a:lstStyle/>
+          <a:p>
+            <a:pPr algn="l">
+              <a:defRPr sz="1100" b="0" i="0">
+                <a:solidFill>
+                  <a:srgbClr val="8F95A3"/>
+                </a:solidFill>
+                <a:latin typeface="Calibri"/>
+              </a:defRPr>
+            </a:pPr>
+            <a:r>
+              <a:t>🎉 community reactions</a:t>
+            </a:r>
+          </a:p>
+        </p:txBody>
+      </p:sp>
+      <p:sp>
+        <p:nvSpPr>
+          <p:cNvPr id="7" name="TextBox 6"/>
+          <p:cNvSpPr txBox="1"/>
+          <p:nvPr/>
+        </p:nvSpPr>
+        <p:spPr>
+          <a:xfrm>
+            <a:off x="1097280" y="3566160"/>
+            <a:ext cx="9966960" cy="457200"/>
+          </a:xfrm>
+          <a:prstGeom prst="rect">
+            <a:avLst/>
+          </a:prstGeom>
+          <a:noFill/>
+        </p:spPr>
+        <p:txBody>
+          <a:bodyPr wrap="square">
+            <a:spAutoFit/>
+          </a:bodyPr>
+          <a:lstStyle/>
+          <a:p>
+            <a:pPr algn="l">
+              <a:defRPr sz="1800" b="1" i="0">
                 <a:solidFill>
                   <a:srgbClr val="FFFFFF"/>
                 </a:solidFill>
@@ -6360,56 +6646,20 @@
               </a:defRPr>
             </a:pPr>
             <a:r>
-              <a:t>Connect Groups Spring 2026</a:t>
-            </a:r>
-          </a:p>
-        </p:txBody>
-      </p:sp>
-      <p:sp>
-        <p:nvSpPr>
-          <p:cNvPr id="6" name="TextBox 5"/>
-          <p:cNvSpPr txBox="1"/>
-          <p:nvPr/>
-        </p:nvSpPr>
-        <p:spPr>
-          <a:xfrm>
-            <a:off x="1097280" y="2743200"/>
-            <a:ext cx="9966960" cy="365760"/>
-          </a:xfrm>
-          <a:prstGeom prst="rect">
-            <a:avLst/>
-          </a:prstGeom>
-          <a:noFill/>
-        </p:spPr>
-        <p:txBody>
-          <a:bodyPr wrap="square">
-            <a:spAutoFit/>
-          </a:bodyPr>
-          <a:lstStyle/>
-          <a:p>
-            <a:pPr algn="l">
-              <a:defRPr sz="1400" b="1" i="0">
-                <a:solidFill>
-                  <a:srgbClr val="10B981"/>
-                </a:solidFill>
-                <a:latin typeface="Calibri"/>
-              </a:defRPr>
-            </a:pPr>
-            <a:r>
-              <a:t>March - May 2026</a:t>
-            </a:r>
-          </a:p>
-        </p:txBody>
-      </p:sp>
-      <p:sp>
-        <p:nvSpPr>
-          <p:cNvPr id="7" name="TextBox 6"/>
-          <p:cNvSpPr txBox="1"/>
-          <p:nvPr/>
-        </p:nvSpPr>
-        <p:spPr>
-          <a:xfrm>
-            <a:off x="1097280" y="3291840"/>
+              <a:t>DevOps Breakthrough: One-Click App Deployment</a:t>
+            </a:r>
+          </a:p>
+        </p:txBody>
+      </p:sp>
+      <p:sp>
+        <p:nvSpPr>
+          <p:cNvPr id="8" name="TextBox 7"/>
+          <p:cNvSpPr txBox="1"/>
+          <p:nvPr/>
+        </p:nvSpPr>
+        <p:spPr>
+          <a:xfrm>
+            <a:off x="1097280" y="4206240"/>
             <a:ext cx="9966960" cy="1371600"/>
           </a:xfrm>
           <a:prstGeom prst="rect">
@@ -6432,43 +6682,7 @@
               </a:defRPr>
             </a:pPr>
             <a:r>
-              <a:t>Employee-led communities are officially entering Spring Season! From sports and books to leadership conversations - join your tribe and connect around shared interests on Circle.</a:t>
-            </a:r>
-          </a:p>
-        </p:txBody>
-      </p:sp>
-      <p:sp>
-        <p:nvSpPr>
-          <p:cNvPr id="8" name="TextBox 7"/>
-          <p:cNvSpPr txBox="1"/>
-          <p:nvPr/>
-        </p:nvSpPr>
-        <p:spPr>
-          <a:xfrm>
-            <a:off x="1097280" y="5029200"/>
-            <a:ext cx="9966960" cy="365760"/>
-          </a:xfrm>
-          <a:prstGeom prst="rect">
-            <a:avLst/>
-          </a:prstGeom>
-          <a:noFill/>
-        </p:spPr>
-        <p:txBody>
-          <a:bodyPr wrap="square">
-            <a:spAutoFit/>
-          </a:bodyPr>
-          <a:lstStyle/>
-          <a:p>
-            <a:pPr algn="l">
-              <a:defRPr sz="1300" b="0" i="0">
-                <a:solidFill>
-                  <a:srgbClr val="8F95A3"/>
-                </a:solidFill>
-                <a:latin typeface="Calibri"/>
-              </a:defRPr>
-            </a:pPr>
-            <a:r>
-              <a:t>Organized by Katarzyna Raniszewska</a:t>
+              <a:t>Our DevOps team just launched Coolify — a service that lets you deploy applications in just a few clicks. Perfect for rapid prototyping and quick iterations.</a:t>
             </a:r>
           </a:p>
         </p:txBody>
@@ -6514,7 +6728,7 @@
             <a:avLst/>
           </a:prstGeom>
           <a:solidFill>
-            <a:srgbClr val="8B5CF6"/>
+            <a:srgbClr val="E67E22"/>
           </a:solidFill>
           <a:ln>
             <a:noFill/>
@@ -6567,13 +6781,13 @@
             <a:pPr algn="l">
               <a:defRPr sz="1000" b="1">
                 <a:solidFill>
-                  <a:srgbClr val="8B5CF6"/>
-                </a:solidFill>
-                <a:latin typeface="Calibri"/>
-              </a:defRPr>
-            </a:pPr>
-            <a:r>
-              <a:t>🤖  OFFICE LIFE</a:t>
+                  <a:srgbClr val="E67E22"/>
+                </a:solidFill>
+                <a:latin typeface="Calibri"/>
+              </a:defRPr>
+            </a:pPr>
+            <a:r>
+              <a:t>⚡  WIN</a:t>
             </a:r>
           </a:p>
         </p:txBody>
@@ -6603,13 +6817,13 @@
             <a:pPr algn="l">
               <a:defRPr sz="3200" b="1" i="0">
                 <a:solidFill>
-                  <a:srgbClr val="8B5CF6"/>
-                </a:solidFill>
-                <a:latin typeface="Calibri"/>
-              </a:defRPr>
-            </a:pPr>
-            <a:r>
-              <a:t>Zero-Code AI Revolution</a:t>
+                  <a:srgbClr val="E67E22"/>
+                </a:solidFill>
+                <a:latin typeface="Calibri"/>
+              </a:defRPr>
+            </a:pPr>
+            <a:r>
+              <a:t>Innovation Momentum</a:t>
             </a:r>
           </a:p>
         </p:txBody>
@@ -6623,6 +6837,114 @@
         <p:spPr>
           <a:xfrm>
             <a:off x="1097280" y="2103120"/>
+            <a:ext cx="4572000" cy="822960"/>
+          </a:xfrm>
+          <a:prstGeom prst="rect">
+            <a:avLst/>
+          </a:prstGeom>
+          <a:noFill/>
+        </p:spPr>
+        <p:txBody>
+          <a:bodyPr wrap="square">
+            <a:spAutoFit/>
+          </a:bodyPr>
+          <a:lstStyle/>
+          <a:p>
+            <a:pPr algn="l">
+              <a:defRPr sz="4800" b="1" i="0">
+                <a:solidFill>
+                  <a:srgbClr val="E67E22"/>
+                </a:solidFill>
+                <a:latin typeface="Calibri"/>
+              </a:defRPr>
+            </a:pPr>
+            <a:r>
+              <a:t>Fast</a:t>
+            </a:r>
+          </a:p>
+        </p:txBody>
+      </p:sp>
+      <p:sp>
+        <p:nvSpPr>
+          <p:cNvPr id="6" name="TextBox 5"/>
+          <p:cNvSpPr txBox="1"/>
+          <p:nvPr/>
+        </p:nvSpPr>
+        <p:spPr>
+          <a:xfrm>
+            <a:off x="1097280" y="2834640"/>
+            <a:ext cx="4572000" cy="365760"/>
+          </a:xfrm>
+          <a:prstGeom prst="rect">
+            <a:avLst/>
+          </a:prstGeom>
+          <a:noFill/>
+        </p:spPr>
+        <p:txBody>
+          <a:bodyPr wrap="square">
+            <a:spAutoFit/>
+          </a:bodyPr>
+          <a:lstStyle/>
+          <a:p>
+            <a:pPr algn="l">
+              <a:defRPr sz="1200" b="0" i="0">
+                <a:solidFill>
+                  <a:srgbClr val="8F95A3"/>
+                </a:solidFill>
+                <a:latin typeface="Calibri"/>
+              </a:defRPr>
+            </a:pPr>
+            <a:r>
+              <a:t>tool creation</a:t>
+            </a:r>
+          </a:p>
+        </p:txBody>
+      </p:sp>
+      <p:sp>
+        <p:nvSpPr>
+          <p:cNvPr id="7" name="TextBox 6"/>
+          <p:cNvSpPr txBox="1"/>
+          <p:nvPr/>
+        </p:nvSpPr>
+        <p:spPr>
+          <a:xfrm>
+            <a:off x="1097280" y="3291840"/>
+            <a:ext cx="9966960" cy="365760"/>
+          </a:xfrm>
+          <a:prstGeom prst="rect">
+            <a:avLst/>
+          </a:prstGeom>
+          <a:noFill/>
+        </p:spPr>
+        <p:txBody>
+          <a:bodyPr wrap="square">
+            <a:spAutoFit/>
+          </a:bodyPr>
+          <a:lstStyle/>
+          <a:p>
+            <a:pPr algn="l">
+              <a:defRPr sz="1400" b="0" i="0">
+                <a:solidFill>
+                  <a:srgbClr val="E2E2EA"/>
+                </a:solidFill>
+                <a:latin typeface="Calibri"/>
+              </a:defRPr>
+            </a:pPr>
+            <a:r>
+              <a:t>by Non-engineering teams</a:t>
+            </a:r>
+          </a:p>
+        </p:txBody>
+      </p:sp>
+      <p:sp>
+        <p:nvSpPr>
+          <p:cNvPr id="8" name="TextBox 7"/>
+          <p:cNvSpPr txBox="1"/>
+          <p:nvPr/>
+        </p:nvSpPr>
+        <p:spPr>
+          <a:xfrm>
+            <a:off x="1097280" y="3840480"/>
             <a:ext cx="9966960" cy="457200"/>
           </a:xfrm>
           <a:prstGeom prst="rect">
@@ -6645,35 +6967,35 @@
               </a:defRPr>
             </a:pPr>
             <a:r>
-              <a:t>From Idea to Production with Pure AI Magic</a:t>
-            </a:r>
-          </a:p>
-        </p:txBody>
-      </p:sp>
-      <p:sp>
-        <p:nvSpPr>
-          <p:cNvPr id="6" name="TextBox 5"/>
-          <p:cNvSpPr txBox="1"/>
-          <p:nvPr/>
-        </p:nvSpPr>
-        <p:spPr>
-          <a:xfrm>
-            <a:off x="1371600" y="2743200"/>
-            <a:ext cx="9692640" cy="1828800"/>
-          </a:xfrm>
-          <a:prstGeom prst="rect">
-            <a:avLst/>
-          </a:prstGeom>
-          <a:noFill/>
-        </p:spPr>
-        <p:txBody>
-          <a:bodyPr wrap="square">
-            <a:spAutoFit/>
-          </a:bodyPr>
-          <a:lstStyle/>
-          <a:p>
-            <a:pPr algn="l">
-              <a:defRPr sz="1500" b="0" i="1">
+              <a:t>Building Culture: From Ideas to Tools</a:t>
+            </a:r>
+          </a:p>
+        </p:txBody>
+      </p:sp>
+      <p:sp>
+        <p:nvSpPr>
+          <p:cNvPr id="9" name="TextBox 8"/>
+          <p:cNvSpPr txBox="1"/>
+          <p:nvPr/>
+        </p:nvSpPr>
+        <p:spPr>
+          <a:xfrm>
+            <a:off x="1097280" y="4389120"/>
+            <a:ext cx="9966960" cy="914400"/>
+          </a:xfrm>
+          <a:prstGeom prst="rect">
+            <a:avLst/>
+          </a:prstGeom>
+          <a:noFill/>
+        </p:spPr>
+        <p:txBody>
+          <a:bodyPr wrap="square">
+            <a:spAutoFit/>
+          </a:bodyPr>
+          <a:lstStyle/>
+          <a:p>
+            <a:pPr algn="l">
+              <a:defRPr sz="1400" b="0" i="0">
                 <a:solidFill>
                   <a:srgbClr val="E2E2EA"/>
                 </a:solidFill>
@@ -6681,35 +7003,35 @@
               </a:defRPr>
             </a:pPr>
             <a:r>
-              <a:t>"I built a fully automated AI-powered system — from idea to production — using only AI tools and zero coding experience. If I can do it, you can too!"</a:t>
-            </a:r>
-          </a:p>
-        </p:txBody>
-      </p:sp>
-      <p:sp>
-        <p:nvSpPr>
-          <p:cNvPr id="7" name="TextBox 6"/>
-          <p:cNvSpPr txBox="1"/>
-          <p:nvPr/>
-        </p:nvSpPr>
-        <p:spPr>
-          <a:xfrm>
-            <a:off x="1097280" y="4754880"/>
-            <a:ext cx="9966960" cy="365760"/>
-          </a:xfrm>
-          <a:prstGeom prst="rect">
-            <a:avLst/>
-          </a:prstGeom>
-          <a:noFill/>
-        </p:spPr>
-        <p:txBody>
-          <a:bodyPr wrap="square">
-            <a:spAutoFit/>
-          </a:bodyPr>
-          <a:lstStyle/>
-          <a:p>
-            <a:pPr algn="l">
-              <a:defRPr sz="1400" b="0" i="0">
+              <a:t>Non-engineering teams are creating useful tools at impressive speed, showing we're learning fast and moving in the right direction</a:t>
+            </a:r>
+          </a:p>
+        </p:txBody>
+      </p:sp>
+      <p:sp>
+        <p:nvSpPr>
+          <p:cNvPr id="10" name="TextBox 9"/>
+          <p:cNvSpPr txBox="1"/>
+          <p:nvPr/>
+        </p:nvSpPr>
+        <p:spPr>
+          <a:xfrm>
+            <a:off x="1097280" y="5486400"/>
+            <a:ext cx="9966960" cy="457200"/>
+          </a:xfrm>
+          <a:prstGeom prst="rect">
+            <a:avLst/>
+          </a:prstGeom>
+          <a:noFill/>
+        </p:spPr>
+        <p:txBody>
+          <a:bodyPr wrap="square">
+            <a:spAutoFit/>
+          </a:bodyPr>
+          <a:lstStyle/>
+          <a:p>
+            <a:pPr algn="l">
+              <a:defRPr sz="1300" b="0" i="1">
                 <a:solidFill>
                   <a:srgbClr val="8F95A3"/>
                 </a:solidFill>
@@ -6717,79 +7039,7 @@
               </a:defRPr>
             </a:pPr>
             <a:r>
-              <a:t>— Liliya Garifullina</a:t>
-            </a:r>
-          </a:p>
-        </p:txBody>
-      </p:sp>
-      <p:sp>
-        <p:nvSpPr>
-          <p:cNvPr id="8" name="TextBox 7"/>
-          <p:cNvSpPr txBox="1"/>
-          <p:nvPr/>
-        </p:nvSpPr>
-        <p:spPr>
-          <a:xfrm>
-            <a:off x="1097280" y="5212080"/>
-            <a:ext cx="9966960" cy="365760"/>
-          </a:xfrm>
-          <a:prstGeom prst="rect">
-            <a:avLst/>
-          </a:prstGeom>
-          <a:noFill/>
-        </p:spPr>
-        <p:txBody>
-          <a:bodyPr wrap="square">
-            <a:spAutoFit/>
-          </a:bodyPr>
-          <a:lstStyle/>
-          <a:p>
-            <a:pPr algn="l">
-              <a:defRPr sz="1400" b="1" i="0">
-                <a:solidFill>
-                  <a:srgbClr val="8B5CF6"/>
-                </a:solidFill>
-                <a:latin typeface="Calibri"/>
-              </a:defRPr>
-            </a:pPr>
-            <a:r>
-              <a:t>67</a:t>
-            </a:r>
-          </a:p>
-        </p:txBody>
-      </p:sp>
-      <p:sp>
-        <p:nvSpPr>
-          <p:cNvPr id="9" name="TextBox 8"/>
-          <p:cNvSpPr txBox="1"/>
-          <p:nvPr/>
-        </p:nvSpPr>
-        <p:spPr>
-          <a:xfrm>
-            <a:off x="1097280" y="5760720"/>
-            <a:ext cx="9966960" cy="274320"/>
-          </a:xfrm>
-          <a:prstGeom prst="rect">
-            <a:avLst/>
-          </a:prstGeom>
-          <a:noFill/>
-        </p:spPr>
-        <p:txBody>
-          <a:bodyPr wrap="square">
-            <a:spAutoFit/>
-          </a:bodyPr>
-          <a:lstStyle/>
-          <a:p>
-            <a:pPr algn="l">
-              <a:defRPr sz="1100" b="0" i="0">
-                <a:solidFill>
-                  <a:srgbClr val="5C6270"/>
-                </a:solidFill>
-                <a:latin typeface="Calibri"/>
-              </a:defRPr>
-            </a:pPr>
-            <a:r>
-              <a:t>#general</a:t>
+              <a:t>💬 "Strong sign of innovation culture across all departments"</a:t>
             </a:r>
           </a:p>
         </p:txBody>
@@ -6835,7 +7085,7 @@
             <a:avLst/>
           </a:prstGeom>
           <a:solidFill>
-            <a:srgbClr val="F59E0B"/>
+            <a:srgbClr val="9B59B6"/>
           </a:solidFill>
           <a:ln>
             <a:noFill/>
@@ -6888,13 +7138,13 @@
             <a:pPr algn="l">
               <a:defRPr sz="1000" b="1">
                 <a:solidFill>
-                  <a:srgbClr val="F59E0B"/>
-                </a:solidFill>
-                <a:latin typeface="Calibri"/>
-              </a:defRPr>
-            </a:pPr>
-            <a:r>
-              <a:t>📈  WIN</a:t>
+                  <a:srgbClr val="9B59B6"/>
+                </a:solidFill>
+                <a:latin typeface="Calibri"/>
+              </a:defRPr>
+            </a:pPr>
+            <a:r>
+              <a:t>👏  CLAPS</a:t>
             </a:r>
           </a:p>
         </p:txBody>
@@ -6924,13 +7174,13 @@
             <a:pPr algn="l">
               <a:defRPr sz="3200" b="1" i="0">
                 <a:solidFill>
-                  <a:srgbClr val="F59E0B"/>
-                </a:solidFill>
-                <a:latin typeface="Calibri"/>
-              </a:defRPr>
-            </a:pPr>
-            <a:r>
-              <a:t>Engineering Excellence</a:t>
+                  <a:srgbClr val="9B59B6"/>
+                </a:solidFill>
+                <a:latin typeface="Calibri"/>
+              </a:defRPr>
+            </a:pPr>
+            <a:r>
+              <a:t>DevOps Hero</a:t>
             </a:r>
           </a:p>
         </p:txBody>
@@ -6944,29 +7194,29 @@
         <p:spPr>
           <a:xfrm>
             <a:off x="1097280" y="2103120"/>
-            <a:ext cx="4572000" cy="822960"/>
-          </a:xfrm>
-          <a:prstGeom prst="rect">
-            <a:avLst/>
-          </a:prstGeom>
-          <a:noFill/>
-        </p:spPr>
-        <p:txBody>
-          <a:bodyPr wrap="square">
-            <a:spAutoFit/>
-          </a:bodyPr>
-          <a:lstStyle/>
-          <a:p>
-            <a:pPr algn="l">
-              <a:defRPr sz="4800" b="1" i="0">
-                <a:solidFill>
-                  <a:srgbClr val="F59E0B"/>
-                </a:solidFill>
-                <a:latin typeface="Calibri"/>
-              </a:defRPr>
-            </a:pPr>
-            <a:r>
-              <a:t>Great Progress</a:t>
+            <a:ext cx="2743200" cy="548640"/>
+          </a:xfrm>
+          <a:prstGeom prst="rect">
+            <a:avLst/>
+          </a:prstGeom>
+          <a:noFill/>
+        </p:spPr>
+        <p:txBody>
+          <a:bodyPr wrap="square">
+            <a:spAutoFit/>
+          </a:bodyPr>
+          <a:lstStyle/>
+          <a:p>
+            <a:pPr algn="l">
+              <a:defRPr sz="2800" b="1" i="0">
+                <a:solidFill>
+                  <a:srgbClr val="9B59B6"/>
+                </a:solidFill>
+                <a:latin typeface="Calibri"/>
+              </a:defRPr>
+            </a:pPr>
+            <a:r>
+              <a:t>50</a:t>
             </a:r>
           </a:p>
         </p:txBody>
@@ -6979,30 +7229,30 @@
         </p:nvSpPr>
         <p:spPr>
           <a:xfrm>
-            <a:off x="1097280" y="2834640"/>
-            <a:ext cx="4572000" cy="365760"/>
-          </a:xfrm>
-          <a:prstGeom prst="rect">
-            <a:avLst/>
-          </a:prstGeom>
-          <a:noFill/>
-        </p:spPr>
-        <p:txBody>
-          <a:bodyPr wrap="square">
-            <a:spAutoFit/>
-          </a:bodyPr>
-          <a:lstStyle/>
-          <a:p>
-            <a:pPr algn="l">
-              <a:defRPr sz="1200" b="0" i="0">
-                <a:solidFill>
-                  <a:srgbClr val="8F95A3"/>
-                </a:solidFill>
-                <a:latin typeface="Calibri"/>
-              </a:defRPr>
-            </a:pPr>
-            <a:r>
-              <a:t>Building Products</a:t>
+            <a:off x="1097280" y="2651760"/>
+            <a:ext cx="9966960" cy="365760"/>
+          </a:xfrm>
+          <a:prstGeom prst="rect">
+            <a:avLst/>
+          </a:prstGeom>
+          <a:noFill/>
+        </p:spPr>
+        <p:txBody>
+          <a:bodyPr wrap="square">
+            <a:spAutoFit/>
+          </a:bodyPr>
+          <a:lstStyle/>
+          <a:p>
+            <a:pPr algn="l">
+              <a:defRPr sz="1400" b="0" i="0">
+                <a:solidFill>
+                  <a:srgbClr val="E2E2EA"/>
+                </a:solidFill>
+                <a:latin typeface="Calibri"/>
+              </a:defRPr>
+            </a:pPr>
+            <a:r>
+              <a:t>from Mykhailo Kukharskyi</a:t>
             </a:r>
           </a:p>
         </p:txBody>
@@ -7015,7 +7265,7 @@
         </p:nvSpPr>
         <p:spPr>
           <a:xfrm>
-            <a:off x="1097280" y="3291840"/>
+            <a:off x="1097280" y="3108960"/>
             <a:ext cx="9966960" cy="365760"/>
           </a:xfrm>
           <a:prstGeom prst="rect">
@@ -7030,7 +7280,43 @@
           <a:lstStyle/>
           <a:p>
             <a:pPr algn="l">
-              <a:defRPr sz="1400" b="0" i="0">
+              <a:defRPr sz="1400" b="1" i="0">
+                <a:solidFill>
+                  <a:srgbClr val="FFFFFF"/>
+                </a:solidFill>
+                <a:latin typeface="Calibri"/>
+              </a:defRPr>
+            </a:pPr>
+            <a:r>
+              <a:t>to: Gleb Krahotkin</a:t>
+            </a:r>
+          </a:p>
+        </p:txBody>
+      </p:sp>
+      <p:sp>
+        <p:nvSpPr>
+          <p:cNvPr id="8" name="TextBox 7"/>
+          <p:cNvSpPr txBox="1"/>
+          <p:nvPr/>
+        </p:nvSpPr>
+        <p:spPr>
+          <a:xfrm>
+            <a:off x="1097280" y="3749039"/>
+            <a:ext cx="9966960" cy="1097280"/>
+          </a:xfrm>
+          <a:prstGeom prst="rect">
+            <a:avLst/>
+          </a:prstGeom>
+          <a:noFill/>
+        </p:spPr>
+        <p:txBody>
+          <a:bodyPr wrap="square">
+            <a:spAutoFit/>
+          </a:bodyPr>
+          <a:lstStyle/>
+          <a:p>
+            <a:pPr algn="l">
+              <a:defRPr sz="1500" b="0" i="1">
                 <a:solidFill>
                   <a:srgbClr val="E2E2EA"/>
                 </a:solidFill>
@@ -7038,20 +7324,20 @@
               </a:defRPr>
             </a:pPr>
             <a:r>
-              <a:t>by Leadership Team</a:t>
-            </a:r>
-          </a:p>
-        </p:txBody>
-      </p:sp>
-      <p:sp>
-        <p:nvSpPr>
-          <p:cNvPr id="8" name="TextBox 7"/>
-          <p:cNvSpPr txBox="1"/>
-          <p:nvPr/>
-        </p:nvSpPr>
-        <p:spPr>
-          <a:xfrm>
-            <a:off x="1097280" y="3840480"/>
+              <a:t>"Amazing work on Coolify deployment system"</a:t>
+            </a:r>
+          </a:p>
+        </p:txBody>
+      </p:sp>
+      <p:sp>
+        <p:nvSpPr>
+          <p:cNvPr id="9" name="TextBox 8"/>
+          <p:cNvSpPr txBox="1"/>
+          <p:nvPr/>
+        </p:nvSpPr>
+        <p:spPr>
+          <a:xfrm>
+            <a:off x="1097280" y="5120640"/>
             <a:ext cx="9966960" cy="457200"/>
           </a:xfrm>
           <a:prstGeom prst="rect">
@@ -7066,87 +7352,15 @@
           <a:lstStyle/>
           <a:p>
             <a:pPr algn="l">
-              <a:defRPr sz="1800" b="1" i="0">
-                <a:solidFill>
-                  <a:srgbClr val="FFFFFF"/>
-                </a:solidFill>
-                <a:latin typeface="Calibri"/>
-              </a:defRPr>
-            </a:pPr>
-            <a:r>
-              <a:t>Non-Engineering Teams Creating Amazing Tools</a:t>
-            </a:r>
-          </a:p>
-        </p:txBody>
-      </p:sp>
-      <p:sp>
-        <p:nvSpPr>
-          <p:cNvPr id="9" name="TextBox 8"/>
-          <p:cNvSpPr txBox="1"/>
-          <p:nvPr/>
-        </p:nvSpPr>
-        <p:spPr>
-          <a:xfrm>
-            <a:off x="1097280" y="4389120"/>
-            <a:ext cx="9966960" cy="914400"/>
-          </a:xfrm>
-          <a:prstGeom prst="rect">
-            <a:avLst/>
-          </a:prstGeom>
-          <a:noFill/>
-        </p:spPr>
-        <p:txBody>
-          <a:bodyPr wrap="square">
-            <a:spAutoFit/>
-          </a:bodyPr>
-          <a:lstStyle/>
-          <a:p>
-            <a:pPr algn="l">
-              <a:defRPr sz="1400" b="0" i="0">
-                <a:solidFill>
-                  <a:srgbClr val="E2E2EA"/>
-                </a:solidFill>
-                <a:latin typeface="Calibri"/>
-              </a:defRPr>
-            </a:pPr>
-            <a:r>
-              <a:t>We're seeing incredible momentum as non-engineering teams rapidly build useful tools. This shows we're learning fast and moving in the right direction.</a:t>
-            </a:r>
-          </a:p>
-        </p:txBody>
-      </p:sp>
-      <p:sp>
-        <p:nvSpPr>
-          <p:cNvPr id="10" name="TextBox 9"/>
-          <p:cNvSpPr txBox="1"/>
-          <p:nvPr/>
-        </p:nvSpPr>
-        <p:spPr>
-          <a:xfrm>
-            <a:off x="1097280" y="5486400"/>
-            <a:ext cx="9966960" cy="457200"/>
-          </a:xfrm>
-          <a:prstGeom prst="rect">
-            <a:avLst/>
-          </a:prstGeom>
-          <a:noFill/>
-        </p:spPr>
-        <p:txBody>
-          <a:bodyPr wrap="square">
-            <a:spAutoFit/>
-          </a:bodyPr>
-          <a:lstStyle/>
-          <a:p>
-            <a:pPr algn="l">
-              <a:defRPr sz="1300" b="0" i="1">
-                <a:solidFill>
-                  <a:srgbClr val="8F95A3"/>
-                </a:solidFill>
-                <a:latin typeface="Calibri"/>
-              </a:defRPr>
-            </a:pPr>
-            <a:r>
-              <a:t>💬 "Innovation mindset spreads across all teams"</a:t>
+              <a:defRPr sz="1200" b="1" i="0">
+                <a:solidFill>
+                  <a:srgbClr val="9B59B6"/>
+                </a:solidFill>
+                <a:latin typeface="Calibri"/>
+              </a:defRPr>
+            </a:pPr>
+            <a:r>
+              <a:t>Innovation · Excellence</a:t>
             </a:r>
           </a:p>
         </p:txBody>
@@ -7192,7 +7406,7 @@
             <a:avLst/>
           </a:prstGeom>
           <a:solidFill>
-            <a:srgbClr val="EF4444"/>
+            <a:srgbClr val="E74C3C"/>
           </a:solidFill>
           <a:ln>
             <a:noFill/>
@@ -7245,13 +7459,13 @@
             <a:pPr algn="l">
               <a:defRPr sz="1000" b="1">
                 <a:solidFill>
-                  <a:srgbClr val="EF4444"/>
-                </a:solidFill>
-                <a:latin typeface="Calibri"/>
-              </a:defRPr>
-            </a:pPr>
-            <a:r>
-              <a:t>👏  CLAPS</a:t>
+                  <a:srgbClr val="E74C3C"/>
+                </a:solidFill>
+                <a:latin typeface="Calibri"/>
+              </a:defRPr>
+            </a:pPr>
+            <a:r>
+              <a:t>🔥  CLAPS</a:t>
             </a:r>
           </a:p>
         </p:txBody>
@@ -7281,13 +7495,13 @@
             <a:pPr algn="l">
               <a:defRPr sz="3200" b="1" i="0">
                 <a:solidFill>
-                  <a:srgbClr val="EF4444"/>
-                </a:solidFill>
-                <a:latin typeface="Calibri"/>
-              </a:defRPr>
-            </a:pPr>
-            <a:r>
-              <a:t>DevOps Hero Recognition</a:t>
+                  <a:srgbClr val="E74C3C"/>
+                </a:solidFill>
+                <a:latin typeface="Calibri"/>
+              </a:defRPr>
+            </a:pPr>
+            <a:r>
+              <a:t>UI Excellence</a:t>
             </a:r>
           </a:p>
         </p:txBody>
@@ -7317,7 +7531,7 @@
             <a:pPr algn="l">
               <a:defRPr sz="2800" b="1" i="0">
                 <a:solidFill>
-                  <a:srgbClr val="EF4444"/>
+                  <a:srgbClr val="E74C3C"/>
                 </a:solidFill>
                 <a:latin typeface="Calibri"/>
               </a:defRPr>
@@ -7359,7 +7573,7 @@
               </a:defRPr>
             </a:pPr>
             <a:r>
-              <a:t>from Mykhailo Kukharskyi</a:t>
+              <a:t>from Viktor Trykolenko</a:t>
             </a:r>
           </a:p>
         </p:txBody>
@@ -7395,7 +7609,7 @@
               </a:defRPr>
             </a:pPr>
             <a:r>
-              <a:t>to: Gleb Krahotkin</a:t>
+              <a:t>to: Iurii Kotov</a:t>
             </a:r>
           </a:p>
         </p:txBody>
@@ -7431,7 +7645,7 @@
               </a:defRPr>
             </a:pPr>
             <a:r>
-              <a:t>"Launching Coolify platform and enabling one-click deployments for everyone"</a:t>
+              <a:t>"Outstanding UI development work"</a:t>
             </a:r>
           </a:p>
         </p:txBody>
@@ -7461,13 +7675,13 @@
             <a:pPr algn="l">
               <a:defRPr sz="1200" b="1" i="0">
                 <a:solidFill>
-                  <a:srgbClr val="EF4444"/>
-                </a:solidFill>
-                <a:latin typeface="Calibri"/>
-              </a:defRPr>
-            </a:pPr>
-            <a:r>
-              <a:t>Innovation · Excellence</a:t>
+                  <a:srgbClr val="E74C3C"/>
+                </a:solidFill>
+                <a:latin typeface="Calibri"/>
+              </a:defRPr>
+            </a:pPr>
+            <a:r>
+              <a:t>Craftsmanship · Quality</a:t>
             </a:r>
           </a:p>
         </p:txBody>
@@ -7513,7 +7727,7 @@
             <a:avLst/>
           </a:prstGeom>
           <a:solidFill>
-            <a:srgbClr val="06B6D4"/>
+            <a:srgbClr val="F39C12"/>
           </a:solidFill>
           <a:ln>
             <a:noFill/>
@@ -7566,13 +7780,13 @@
             <a:pPr algn="l">
               <a:defRPr sz="1000" b="1">
                 <a:solidFill>
-                  <a:srgbClr val="06B6D4"/>
-                </a:solidFill>
-                <a:latin typeface="Calibri"/>
-              </a:defRPr>
-            </a:pPr>
-            <a:r>
-              <a:t>🙌  CLAPS</a:t>
+                  <a:srgbClr val="F39C12"/>
+                </a:solidFill>
+                <a:latin typeface="Calibri"/>
+              </a:defRPr>
+            </a:pPr>
+            <a:r>
+              <a:t>🌟  CLAPS</a:t>
             </a:r>
           </a:p>
         </p:txBody>
@@ -7602,13 +7816,13 @@
             <a:pPr algn="l">
               <a:defRPr sz="3200" b="1" i="0">
                 <a:solidFill>
-                  <a:srgbClr val="06B6D4"/>
-                </a:solidFill>
-                <a:latin typeface="Calibri"/>
-              </a:defRPr>
-            </a:pPr>
-            <a:r>
-              <a:t>Mobile Excellence</a:t>
+                  <a:srgbClr val="F39C12"/>
+                </a:solidFill>
+                <a:latin typeface="Calibri"/>
+              </a:defRPr>
+            </a:pPr>
+            <a:r>
+              <a:t>Marketing Excellence</a:t>
             </a:r>
           </a:p>
         </p:txBody>
@@ -7638,7 +7852,7 @@
             <a:pPr algn="l">
               <a:defRPr sz="2800" b="1" i="0">
                 <a:solidFill>
-                  <a:srgbClr val="06B6D4"/>
+                  <a:srgbClr val="F39C12"/>
                 </a:solidFill>
                 <a:latin typeface="Calibri"/>
               </a:defRPr>
@@ -7680,7 +7894,7 @@
               </a:defRPr>
             </a:pPr>
             <a:r>
-              <a:t>from Viktor Trykolenko</a:t>
+              <a:t>from Jasmine Nunez</a:t>
             </a:r>
           </a:p>
         </p:txBody>
@@ -7716,7 +7930,7 @@
               </a:defRPr>
             </a:pPr>
             <a:r>
-              <a:t>to: Iurii Kotov</a:t>
+              <a:t>to: Michelle Walter</a:t>
             </a:r>
           </a:p>
         </p:txBody>
@@ -7752,7 +7966,7 @@
               </a:defRPr>
             </a:pPr>
             <a:r>
-              <a:t>"Outstanding mobile development contributions"</a:t>
+              <a:t>"Exceptional marketing campaign performance"</a:t>
             </a:r>
           </a:p>
         </p:txBody>
@@ -7782,13 +7996,13 @@
             <a:pPr algn="l">
               <a:defRPr sz="1200" b="1" i="0">
                 <a:solidFill>
-                  <a:srgbClr val="06B6D4"/>
-                </a:solidFill>
-                <a:latin typeface="Calibri"/>
-              </a:defRPr>
-            </a:pPr>
-            <a:r>
-              <a:t>Technical Excellence</a:t>
+                  <a:srgbClr val="F39C12"/>
+                </a:solidFill>
+                <a:latin typeface="Calibri"/>
+              </a:defRPr>
+            </a:pPr>
+            <a:r>
+              <a:t>Excellence · Impact</a:t>
             </a:r>
           </a:p>
         </p:txBody>
@@ -7834,7 +8048,7 @@
             <a:avLst/>
           </a:prstGeom>
           <a:solidFill>
-            <a:srgbClr val="10B981"/>
+            <a:srgbClr val="1ABC9C"/>
           </a:solidFill>
           <a:ln>
             <a:noFill/>
@@ -7887,13 +8101,13 @@
             <a:pPr algn="l">
               <a:defRPr sz="1000" b="1">
                 <a:solidFill>
-                  <a:srgbClr val="10B981"/>
-                </a:solidFill>
-                <a:latin typeface="Calibri"/>
-              </a:defRPr>
-            </a:pPr>
-            <a:r>
-              <a:t>💪  CLAPS</a:t>
+                  <a:srgbClr val="1ABC9C"/>
+                </a:solidFill>
+                <a:latin typeface="Calibri"/>
+              </a:defRPr>
+            </a:pPr>
+            <a:r>
+              <a:t>⭐  CLAPS</a:t>
             </a:r>
           </a:p>
         </p:txBody>
@@ -7923,13 +8137,13 @@
             <a:pPr algn="l">
               <a:defRPr sz="3200" b="1" i="0">
                 <a:solidFill>
-                  <a:srgbClr val="10B981"/>
-                </a:solidFill>
-                <a:latin typeface="Calibri"/>
-              </a:defRPr>
-            </a:pPr>
-            <a:r>
-              <a:t>Team Leadership</a:t>
+                  <a:srgbClr val="1ABC9C"/>
+                </a:solidFill>
+                <a:latin typeface="Calibri"/>
+              </a:defRPr>
+            </a:pPr>
+            <a:r>
+              <a:t>Team Collaboration</a:t>
             </a:r>
           </a:p>
         </p:txBody>
@@ -7959,7 +8173,7 @@
             <a:pPr algn="l">
               <a:defRPr sz="2800" b="1" i="0">
                 <a:solidFill>
-                  <a:srgbClr val="10B981"/>
+                  <a:srgbClr val="1ABC9C"/>
                 </a:solidFill>
                 <a:latin typeface="Calibri"/>
               </a:defRPr>
@@ -8001,7 +8215,7 @@
               </a:defRPr>
             </a:pPr>
             <a:r>
-              <a:t>from Jasmine Nunez</a:t>
+              <a:t>from Valentino Agazzi Mandozzi</a:t>
             </a:r>
           </a:p>
         </p:txBody>
@@ -8037,7 +8251,7 @@
               </a:defRPr>
             </a:pPr>
             <a:r>
-              <a:t>to: Michelle Walter</a:t>
+              <a:t>to: Eren Sakarya</a:t>
             </a:r>
           </a:p>
         </p:txBody>
@@ -8073,7 +8287,7 @@
               </a:defRPr>
             </a:pPr>
             <a:r>
-              <a:t>"Exceptional leadership and team support"</a:t>
+              <a:t>"Excellent teamwork and collaboration"</a:t>
             </a:r>
           </a:p>
         </p:txBody>
@@ -8103,13 +8317,13 @@
             <a:pPr algn="l">
               <a:defRPr sz="1200" b="1" i="0">
                 <a:solidFill>
-                  <a:srgbClr val="10B981"/>
-                </a:solidFill>
-                <a:latin typeface="Calibri"/>
-              </a:defRPr>
-            </a:pPr>
-            <a:r>
-              <a:t>Leadership · Collaboration</a:t>
+                  <a:srgbClr val="1ABC9C"/>
+                </a:solidFill>
+                <a:latin typeface="Calibri"/>
+              </a:defRPr>
+            </a:pPr>
+            <a:r>
+              <a:t>Teamwork · Support</a:t>
             </a:r>
           </a:p>
         </p:txBody>
@@ -8155,7 +8369,7 @@
             <a:avLst/>
           </a:prstGeom>
           <a:solidFill>
-            <a:srgbClr val="8B5CF6"/>
+            <a:srgbClr val="8E44AD"/>
           </a:solidFill>
           <a:ln>
             <a:noFill/>
@@ -8208,13 +8422,13 @@
             <a:pPr algn="l">
               <a:defRPr sz="1000" b="1">
                 <a:solidFill>
-                  <a:srgbClr val="8B5CF6"/>
-                </a:solidFill>
-                <a:latin typeface="Calibri"/>
-              </a:defRPr>
-            </a:pPr>
-            <a:r>
-              <a:t>🌟  CLAPS</a:t>
+                  <a:srgbClr val="8E44AD"/>
+                </a:solidFill>
+                <a:latin typeface="Calibri"/>
+              </a:defRPr>
+            </a:pPr>
+            <a:r>
+              <a:t>💪  CLAPS</a:t>
             </a:r>
           </a:p>
         </p:txBody>
@@ -8244,13 +8458,13 @@
             <a:pPr algn="l">
               <a:defRPr sz="3200" b="1" i="0">
                 <a:solidFill>
-                  <a:srgbClr val="8B5CF6"/>
-                </a:solidFill>
-                <a:latin typeface="Calibri"/>
-              </a:defRPr>
-            </a:pPr>
-            <a:r>
-              <a:t>Innovation Recognition</a:t>
+                  <a:srgbClr val="8E44AD"/>
+                </a:solidFill>
+                <a:latin typeface="Calibri"/>
+              </a:defRPr>
+            </a:pPr>
+            <a:r>
+              <a:t>Product Leadership</a:t>
             </a:r>
           </a:p>
         </p:txBody>
@@ -8280,7 +8494,7 @@
             <a:pPr algn="l">
               <a:defRPr sz="2800" b="1" i="0">
                 <a:solidFill>
-                  <a:srgbClr val="8B5CF6"/>
+                  <a:srgbClr val="8E44AD"/>
                 </a:solidFill>
                 <a:latin typeface="Calibri"/>
               </a:defRPr>
@@ -8394,7 +8608,7 @@
               </a:defRPr>
             </a:pPr>
             <a:r>
-              <a:t>"Driving innovation and technical excellence"</a:t>
+              <a:t>"Outstanding product management and leadership"</a:t>
             </a:r>
           </a:p>
         </p:txBody>
@@ -8424,13 +8638,13 @@
             <a:pPr algn="l">
               <a:defRPr sz="1200" b="1" i="0">
                 <a:solidFill>
-                  <a:srgbClr val="8B5CF6"/>
-                </a:solidFill>
-                <a:latin typeface="Calibri"/>
-              </a:defRPr>
-            </a:pPr>
-            <a:r>
-              <a:t>Innovation · Excellence</a:t>
+                  <a:srgbClr val="8E44AD"/>
+                </a:solidFill>
+                <a:latin typeface="Calibri"/>
+              </a:defRPr>
+            </a:pPr>
+            <a:r>
+              <a:t>Leadership · Vision</a:t>
             </a:r>
           </a:p>
         </p:txBody>

--- a/data/archive/pulse_2026-03-14.pptx
+++ b/data/archive/pulse_2026-03-14.pptx
@@ -23,6 +23,8 @@
     <p:sldId id="271" r:id="rId22"/>
     <p:sldId id="272" r:id="rId23"/>
     <p:sldId id="273" r:id="rId24"/>
+    <p:sldId id="274" r:id="rId25"/>
+    <p:sldId id="275" r:id="rId26"/>
   </p:sldIdLst>
   <p:sldSz cx="12191695" cy="6858000" type="screen4x3"/>
   <p:notesSz cx="6858000" cy="9144000"/>
@@ -3305,7 +3307,7 @@
             <a:avLst/>
           </a:prstGeom>
           <a:solidFill>
-            <a:srgbClr val="2ECC71"/>
+            <a:srgbClr val="F97316"/>
           </a:solidFill>
           <a:ln>
             <a:noFill/>
@@ -3358,13 +3360,13 @@
             <a:pPr algn="l">
               <a:defRPr sz="1000" b="1">
                 <a:solidFill>
-                  <a:srgbClr val="2ECC71"/>
-                </a:solidFill>
-                <a:latin typeface="Calibri"/>
-              </a:defRPr>
-            </a:pPr>
-            <a:r>
-              <a:t>🎯  CLAPS</a:t>
+                  <a:srgbClr val="F97316"/>
+                </a:solidFill>
+                <a:latin typeface="Calibri"/>
+              </a:defRPr>
+            </a:pPr>
+            <a:r>
+              <a:t>👏  CLAPS</a:t>
             </a:r>
           </a:p>
         </p:txBody>
@@ -3394,13 +3396,13 @@
             <a:pPr algn="l">
               <a:defRPr sz="3200" b="1" i="0">
                 <a:solidFill>
-                  <a:srgbClr val="2ECC71"/>
-                </a:solidFill>
-                <a:latin typeface="Calibri"/>
-              </a:defRPr>
-            </a:pPr>
-            <a:r>
-              <a:t>Quality Engineering</a:t>
+                  <a:srgbClr val="F97316"/>
+                </a:solidFill>
+                <a:latin typeface="Calibri"/>
+              </a:defRPr>
+            </a:pPr>
+            <a:r>
+              <a:t>Engineering Excellence</a:t>
             </a:r>
           </a:p>
         </p:txBody>
@@ -3430,13 +3432,13 @@
             <a:pPr algn="l">
               <a:defRPr sz="2800" b="1" i="0">
                 <a:solidFill>
-                  <a:srgbClr val="2ECC71"/>
-                </a:solidFill>
-                <a:latin typeface="Calibri"/>
-              </a:defRPr>
-            </a:pPr>
-            <a:r>
-              <a:t>25</a:t>
+                  <a:srgbClr val="F97316"/>
+                </a:solidFill>
+                <a:latin typeface="Calibri"/>
+              </a:defRPr>
+            </a:pPr>
+            <a:r>
+              <a:t>50</a:t>
             </a:r>
           </a:p>
         </p:txBody>
@@ -3472,7 +3474,7 @@
               </a:defRPr>
             </a:pPr>
             <a:r>
-              <a:t>from Iurii Kotov</a:t>
+              <a:t>from Michael Lotfy</a:t>
             </a:r>
           </a:p>
         </p:txBody>
@@ -3508,7 +3510,7 @@
               </a:defRPr>
             </a:pPr>
             <a:r>
-              <a:t>to: Ana Abuseridze</a:t>
+              <a:t>to: Issa Isahakyan</a:t>
             </a:r>
           </a:p>
         </p:txBody>
@@ -3544,7 +3546,7 @@
               </a:defRPr>
             </a:pPr>
             <a:r>
-              <a:t>"Excellent engineering quality and attention to detail"</a:t>
+              <a:t>"Exceptional technical contributions and innovation"</a:t>
             </a:r>
           </a:p>
         </p:txBody>
@@ -3574,13 +3576,13 @@
             <a:pPr algn="l">
               <a:defRPr sz="1200" b="1" i="0">
                 <a:solidFill>
-                  <a:srgbClr val="2ECC71"/>
-                </a:solidFill>
-                <a:latin typeface="Calibri"/>
-              </a:defRPr>
-            </a:pPr>
-            <a:r>
-              <a:t>Excellence · Precision</a:t>
+                  <a:srgbClr val="F97316"/>
+                </a:solidFill>
+                <a:latin typeface="Calibri"/>
+              </a:defRPr>
+            </a:pPr>
+            <a:r>
+              <a:t>Technical Excellence · Innovation</a:t>
             </a:r>
           </a:p>
         </p:txBody>
@@ -3626,7 +3628,7 @@
             <a:avLst/>
           </a:prstGeom>
           <a:solidFill>
-            <a:srgbClr val="E67E22"/>
+            <a:srgbClr val="8B5CF6"/>
           </a:solidFill>
           <a:ln>
             <a:noFill/>
@@ -3679,13 +3681,13 @@
             <a:pPr algn="l">
               <a:defRPr sz="1000" b="1">
                 <a:solidFill>
-                  <a:srgbClr val="E67E22"/>
-                </a:solidFill>
-                <a:latin typeface="Calibri"/>
-              </a:defRPr>
-            </a:pPr>
-            <a:r>
-              <a:t>🚀  CLAPS</a:t>
+                  <a:srgbClr val="8B5CF6"/>
+                </a:solidFill>
+                <a:latin typeface="Calibri"/>
+              </a:defRPr>
+            </a:pPr>
+            <a:r>
+              <a:t>👏  CLAPS</a:t>
             </a:r>
           </a:p>
         </p:txBody>
@@ -3715,13 +3717,13 @@
             <a:pPr algn="l">
               <a:defRPr sz="3200" b="1" i="0">
                 <a:solidFill>
-                  <a:srgbClr val="E67E22"/>
-                </a:solidFill>
-                <a:latin typeface="Calibri"/>
-              </a:defRPr>
-            </a:pPr>
-            <a:r>
-              <a:t>Development Speed</a:t>
+                  <a:srgbClr val="8B5CF6"/>
+                </a:solidFill>
+                <a:latin typeface="Calibri"/>
+              </a:defRPr>
+            </a:pPr>
+            <a:r>
+              <a:t>Development Impact</a:t>
             </a:r>
           </a:p>
         </p:txBody>
@@ -3751,13 +3753,13 @@
             <a:pPr algn="l">
               <a:defRPr sz="2800" b="1" i="0">
                 <a:solidFill>
-                  <a:srgbClr val="E67E22"/>
-                </a:solidFill>
-                <a:latin typeface="Calibri"/>
-              </a:defRPr>
-            </a:pPr>
-            <a:r>
-              <a:t>25</a:t>
+                  <a:srgbClr val="8B5CF6"/>
+                </a:solidFill>
+                <a:latin typeface="Calibri"/>
+              </a:defRPr>
+            </a:pPr>
+            <a:r>
+              <a:t>50</a:t>
             </a:r>
           </a:p>
         </p:txBody>
@@ -3793,7 +3795,7 @@
               </a:defRPr>
             </a:pPr>
             <a:r>
-              <a:t>from Iurii Kotov</a:t>
+              <a:t>from Valentino Agazzi Mandozzi</a:t>
             </a:r>
           </a:p>
         </p:txBody>
@@ -3829,7 +3831,7 @@
               </a:defRPr>
             </a:pPr>
             <a:r>
-              <a:t>to: Dima M.</a:t>
+              <a:t>to: Eren Sakarya</a:t>
             </a:r>
           </a:p>
         </p:txBody>
@@ -3865,7 +3867,7 @@
               </a:defRPr>
             </a:pPr>
             <a:r>
-              <a:t>"Incredible development speed and efficiency"</a:t>
+              <a:t>"Outstanding development work and code quality"</a:t>
             </a:r>
           </a:p>
         </p:txBody>
@@ -3895,13 +3897,13 @@
             <a:pPr algn="l">
               <a:defRPr sz="1200" b="1" i="0">
                 <a:solidFill>
-                  <a:srgbClr val="E67E22"/>
-                </a:solidFill>
-                <a:latin typeface="Calibri"/>
-              </a:defRPr>
-            </a:pPr>
-            <a:r>
-              <a:t>Speed · Efficiency</a:t>
+                  <a:srgbClr val="8B5CF6"/>
+                </a:solidFill>
+                <a:latin typeface="Calibri"/>
+              </a:defRPr>
+            </a:pPr>
+            <a:r>
+              <a:t>Quality · Impact</a:t>
             </a:r>
           </a:p>
         </p:txBody>
@@ -3947,7 +3949,7 @@
             <a:avLst/>
           </a:prstGeom>
           <a:solidFill>
-            <a:srgbClr val="34495E"/>
+            <a:srgbClr val="06B6D4"/>
           </a:solidFill>
           <a:ln>
             <a:noFill/>
@@ -4000,13 +4002,13 @@
             <a:pPr algn="l">
               <a:defRPr sz="1000" b="1">
                 <a:solidFill>
-                  <a:srgbClr val="34495E"/>
-                </a:solidFill>
-                <a:latin typeface="Calibri"/>
-              </a:defRPr>
-            </a:pPr>
-            <a:r>
-              <a:t>🔧  CLAPS</a:t>
+                  <a:srgbClr val="06B6D4"/>
+                </a:solidFill>
+                <a:latin typeface="Calibri"/>
+              </a:defRPr>
+            </a:pPr>
+            <a:r>
+              <a:t>👏  CLAPS</a:t>
             </a:r>
           </a:p>
         </p:txBody>
@@ -4036,13 +4038,13 @@
             <a:pPr algn="l">
               <a:defRPr sz="3200" b="1" i="0">
                 <a:solidFill>
-                  <a:srgbClr val="34495E"/>
-                </a:solidFill>
-                <a:latin typeface="Calibri"/>
-              </a:defRPr>
-            </a:pPr>
-            <a:r>
-              <a:t>Technical Excellence</a:t>
+                  <a:srgbClr val="06B6D4"/>
+                </a:solidFill>
+                <a:latin typeface="Calibri"/>
+              </a:defRPr>
+            </a:pPr>
+            <a:r>
+              <a:t>Team Support</a:t>
             </a:r>
           </a:p>
         </p:txBody>
@@ -4072,13 +4074,13 @@
             <a:pPr algn="l">
               <a:defRPr sz="2800" b="1" i="0">
                 <a:solidFill>
-                  <a:srgbClr val="34495E"/>
-                </a:solidFill>
-                <a:latin typeface="Calibri"/>
-              </a:defRPr>
-            </a:pPr>
-            <a:r>
-              <a:t>25</a:t>
+                  <a:srgbClr val="06B6D4"/>
+                </a:solidFill>
+                <a:latin typeface="Calibri"/>
+              </a:defRPr>
+            </a:pPr>
+            <a:r>
+              <a:t>50</a:t>
             </a:r>
           </a:p>
         </p:txBody>
@@ -4114,7 +4116,7 @@
               </a:defRPr>
             </a:pPr>
             <a:r>
-              <a:t>from Sergey Orlov</a:t>
+              <a:t>from Alexandr Babich</a:t>
             </a:r>
           </a:p>
         </p:txBody>
@@ -4150,7 +4152,7 @@
               </a:defRPr>
             </a:pPr>
             <a:r>
-              <a:t>to: Roman de las Heras</a:t>
+              <a:t>to: Sasha</a:t>
             </a:r>
           </a:p>
         </p:txBody>
@@ -4186,7 +4188,7 @@
               </a:defRPr>
             </a:pPr>
             <a:r>
-              <a:t>"Outstanding technical contributions and problem-solving"</a:t>
+              <a:t>"Exceptional support and collaboration across teams"</a:t>
             </a:r>
           </a:p>
         </p:txBody>
@@ -4216,13 +4218,13 @@
             <a:pPr algn="l">
               <a:defRPr sz="1200" b="1" i="0">
                 <a:solidFill>
-                  <a:srgbClr val="34495E"/>
-                </a:solidFill>
-                <a:latin typeface="Calibri"/>
-              </a:defRPr>
-            </a:pPr>
-            <a:r>
-              <a:t>Technical Excellence · Innovation</a:t>
+                  <a:srgbClr val="06B6D4"/>
+                </a:solidFill>
+                <a:latin typeface="Calibri"/>
+              </a:defRPr>
+            </a:pPr>
+            <a:r>
+              <a:t>Support · Teamwork</a:t>
             </a:r>
           </a:p>
         </p:txBody>
@@ -4268,7 +4270,7 @@
             <a:avLst/>
           </a:prstGeom>
           <a:solidFill>
-            <a:srgbClr val="9B59B6"/>
+            <a:srgbClr val="EC4899"/>
           </a:solidFill>
           <a:ln>
             <a:noFill/>
@@ -4321,13 +4323,13 @@
             <a:pPr algn="l">
               <a:defRPr sz="1000" b="1">
                 <a:solidFill>
-                  <a:srgbClr val="9B59B6"/>
-                </a:solidFill>
-                <a:latin typeface="Calibri"/>
-              </a:defRPr>
-            </a:pPr>
-            <a:r>
-              <a:t>🎨  CLAPS</a:t>
+                  <a:srgbClr val="EC4899"/>
+                </a:solidFill>
+                <a:latin typeface="Calibri"/>
+              </a:defRPr>
+            </a:pPr>
+            <a:r>
+              <a:t>👏  CLAPS</a:t>
             </a:r>
           </a:p>
         </p:txBody>
@@ -4357,13 +4359,13 @@
             <a:pPr algn="l">
               <a:defRPr sz="3200" b="1" i="0">
                 <a:solidFill>
-                  <a:srgbClr val="9B59B6"/>
-                </a:solidFill>
-                <a:latin typeface="Calibri"/>
-              </a:defRPr>
-            </a:pPr>
-            <a:r>
-              <a:t>Creative Solutions</a:t>
+                  <a:srgbClr val="EC4899"/>
+                </a:solidFill>
+                <a:latin typeface="Calibri"/>
+              </a:defRPr>
+            </a:pPr>
+            <a:r>
+              <a:t>Cross-Team Excellence</a:t>
             </a:r>
           </a:p>
         </p:txBody>
@@ -4393,13 +4395,13 @@
             <a:pPr algn="l">
               <a:defRPr sz="2800" b="1" i="0">
                 <a:solidFill>
-                  <a:srgbClr val="9B59B6"/>
-                </a:solidFill>
-                <a:latin typeface="Calibri"/>
-              </a:defRPr>
-            </a:pPr>
-            <a:r>
-              <a:t>20</a:t>
+                  <a:srgbClr val="EC4899"/>
+                </a:solidFill>
+                <a:latin typeface="Calibri"/>
+              </a:defRPr>
+            </a:pPr>
+            <a:r>
+              <a:t>25</a:t>
             </a:r>
           </a:p>
         </p:txBody>
@@ -4435,7 +4437,7 @@
               </a:defRPr>
             </a:pPr>
             <a:r>
-              <a:t>from Dima M.</a:t>
+              <a:t>from Sergey Orlov</a:t>
             </a:r>
           </a:p>
         </p:txBody>
@@ -4471,7 +4473,7 @@
               </a:defRPr>
             </a:pPr>
             <a:r>
-              <a:t>to: Gleb Krahotkin</a:t>
+              <a:t>to: Roman de las Heras</a:t>
             </a:r>
           </a:p>
         </p:txBody>
@@ -4507,7 +4509,7 @@
               </a:defRPr>
             </a:pPr>
             <a:r>
-              <a:t>"Creative problem-solving and innovative approaches"</a:t>
+              <a:t>"Outstanding cross-functional collaboration and results"</a:t>
             </a:r>
           </a:p>
         </p:txBody>
@@ -4537,13 +4539,13 @@
             <a:pPr algn="l">
               <a:defRPr sz="1200" b="1" i="0">
                 <a:solidFill>
-                  <a:srgbClr val="9B59B6"/>
-                </a:solidFill>
-                <a:latin typeface="Calibri"/>
-              </a:defRPr>
-            </a:pPr>
-            <a:r>
-              <a:t>Creativity · Innovation</a:t>
+                  <a:srgbClr val="EC4899"/>
+                </a:solidFill>
+                <a:latin typeface="Calibri"/>
+              </a:defRPr>
+            </a:pPr>
+            <a:r>
+              <a:t>Collaboration · Results</a:t>
             </a:r>
           </a:p>
         </p:txBody>
@@ -4589,7 +4591,7 @@
             <a:avLst/>
           </a:prstGeom>
           <a:solidFill>
-            <a:srgbClr val="FF6B9D"/>
+            <a:srgbClr val="84CC16"/>
           </a:solidFill>
           <a:ln>
             <a:noFill/>
@@ -4642,13 +4644,13 @@
             <a:pPr algn="l">
               <a:defRPr sz="1000" b="1">
                 <a:solidFill>
-                  <a:srgbClr val="FF6B9D"/>
-                </a:solidFill>
-                <a:latin typeface="Calibri"/>
-              </a:defRPr>
-            </a:pPr>
-            <a:r>
-              <a:t>🎂  CELEBRATION</a:t>
+                  <a:srgbClr val="84CC16"/>
+                </a:solidFill>
+                <a:latin typeface="Calibri"/>
+              </a:defRPr>
+            </a:pPr>
+            <a:r>
+              <a:t>👏  CLAPS</a:t>
             </a:r>
           </a:p>
         </p:txBody>
@@ -4678,13 +4680,13 @@
             <a:pPr algn="l">
               <a:defRPr sz="3200" b="1" i="0">
                 <a:solidFill>
-                  <a:srgbClr val="FF6B9D"/>
-                </a:solidFill>
-                <a:latin typeface="Calibri"/>
-              </a:defRPr>
-            </a:pPr>
-            <a:r>
-              <a:t>Birthday Celebration</a:t>
+                  <a:srgbClr val="84CC16"/>
+                </a:solidFill>
+                <a:latin typeface="Calibri"/>
+              </a:defRPr>
+            </a:pPr>
+            <a:r>
+              <a:t>Quality Engineering</a:t>
             </a:r>
           </a:p>
         </p:txBody>
@@ -4698,7 +4700,7 @@
         <p:spPr>
           <a:xfrm>
             <a:off x="1097280" y="2103120"/>
-            <a:ext cx="9966960" cy="640080"/>
+            <a:ext cx="2743200" cy="548640"/>
           </a:xfrm>
           <a:prstGeom prst="rect">
             <a:avLst/>
@@ -4714,77 +4716,113 @@
             <a:pPr algn="l">
               <a:defRPr sz="2800" b="1" i="0">
                 <a:solidFill>
+                  <a:srgbClr val="84CC16"/>
+                </a:solidFill>
+                <a:latin typeface="Calibri"/>
+              </a:defRPr>
+            </a:pPr>
+            <a:r>
+              <a:t>25</a:t>
+            </a:r>
+          </a:p>
+        </p:txBody>
+      </p:sp>
+      <p:sp>
+        <p:nvSpPr>
+          <p:cNvPr id="6" name="TextBox 5"/>
+          <p:cNvSpPr txBox="1"/>
+          <p:nvPr/>
+        </p:nvSpPr>
+        <p:spPr>
+          <a:xfrm>
+            <a:off x="1097280" y="2651760"/>
+            <a:ext cx="9966960" cy="365760"/>
+          </a:xfrm>
+          <a:prstGeom prst="rect">
+            <a:avLst/>
+          </a:prstGeom>
+          <a:noFill/>
+        </p:spPr>
+        <p:txBody>
+          <a:bodyPr wrap="square">
+            <a:spAutoFit/>
+          </a:bodyPr>
+          <a:lstStyle/>
+          <a:p>
+            <a:pPr algn="l">
+              <a:defRPr sz="1400" b="0" i="0">
+                <a:solidFill>
+                  <a:srgbClr val="E2E2EA"/>
+                </a:solidFill>
+                <a:latin typeface="Calibri"/>
+              </a:defRPr>
+            </a:pPr>
+            <a:r>
+              <a:t>from Iurii Kotov</a:t>
+            </a:r>
+          </a:p>
+        </p:txBody>
+      </p:sp>
+      <p:sp>
+        <p:nvSpPr>
+          <p:cNvPr id="7" name="TextBox 6"/>
+          <p:cNvSpPr txBox="1"/>
+          <p:nvPr/>
+        </p:nvSpPr>
+        <p:spPr>
+          <a:xfrm>
+            <a:off x="1097280" y="3108960"/>
+            <a:ext cx="9966960" cy="365760"/>
+          </a:xfrm>
+          <a:prstGeom prst="rect">
+            <a:avLst/>
+          </a:prstGeom>
+          <a:noFill/>
+        </p:spPr>
+        <p:txBody>
+          <a:bodyPr wrap="square">
+            <a:spAutoFit/>
+          </a:bodyPr>
+          <a:lstStyle/>
+          <a:p>
+            <a:pPr algn="l">
+              <a:defRPr sz="1400" b="1" i="0">
+                <a:solidFill>
                   <a:srgbClr val="FFFFFF"/>
                 </a:solidFill>
                 <a:latin typeface="Calibri"/>
               </a:defRPr>
             </a:pPr>
             <a:r>
-              <a:t>Kirill Khramkov</a:t>
-            </a:r>
-          </a:p>
-        </p:txBody>
-      </p:sp>
-      <p:sp>
-        <p:nvSpPr>
-          <p:cNvPr id="6" name="TextBox 5"/>
-          <p:cNvSpPr txBox="1"/>
-          <p:nvPr/>
-        </p:nvSpPr>
-        <p:spPr>
-          <a:xfrm>
-            <a:off x="1097280" y="2743200"/>
-            <a:ext cx="9966960" cy="365760"/>
-          </a:xfrm>
-          <a:prstGeom prst="rect">
-            <a:avLst/>
-          </a:prstGeom>
-          <a:noFill/>
-        </p:spPr>
-        <p:txBody>
-          <a:bodyPr wrap="square">
-            <a:spAutoFit/>
-          </a:bodyPr>
-          <a:lstStyle/>
-          <a:p>
-            <a:pPr algn="l">
-              <a:defRPr sz="1400" b="0" i="0">
-                <a:solidFill>
-                  <a:srgbClr val="8F95A3"/>
-                </a:solidFill>
-                <a:latin typeface="Calibri"/>
-              </a:defRPr>
-            </a:pPr>
-            <a:r>
-              <a:t>March 13, 2026</a:t>
-            </a:r>
-          </a:p>
-        </p:txBody>
-      </p:sp>
-      <p:sp>
-        <p:nvSpPr>
-          <p:cNvPr id="7" name="TextBox 6"/>
-          <p:cNvSpPr txBox="1"/>
-          <p:nvPr/>
-        </p:nvSpPr>
-        <p:spPr>
-          <a:xfrm>
-            <a:off x="1097280" y="3291840"/>
-            <a:ext cx="9966960" cy="914400"/>
-          </a:xfrm>
-          <a:prstGeom prst="rect">
-            <a:avLst/>
-          </a:prstGeom>
-          <a:noFill/>
-        </p:spPr>
-        <p:txBody>
-          <a:bodyPr wrap="square">
-            <a:spAutoFit/>
-          </a:bodyPr>
-          <a:lstStyle/>
-          <a:p>
-            <a:pPr algn="l">
-              <a:defRPr sz="1600" b="0" i="0">
+              <a:t>to: Ana Abuseridze</a:t>
+            </a:r>
+          </a:p>
+        </p:txBody>
+      </p:sp>
+      <p:sp>
+        <p:nvSpPr>
+          <p:cNvPr id="8" name="TextBox 7"/>
+          <p:cNvSpPr txBox="1"/>
+          <p:nvPr/>
+        </p:nvSpPr>
+        <p:spPr>
+          <a:xfrm>
+            <a:off x="1097280" y="3749039"/>
+            <a:ext cx="9966960" cy="1097280"/>
+          </a:xfrm>
+          <a:prstGeom prst="rect">
+            <a:avLst/>
+          </a:prstGeom>
+          <a:noFill/>
+        </p:spPr>
+        <p:txBody>
+          <a:bodyPr wrap="square">
+            <a:spAutoFit/>
+          </a:bodyPr>
+          <a:lstStyle/>
+          <a:p>
+            <a:pPr algn="l">
+              <a:defRPr sz="1500" b="0" i="1">
                 <a:solidFill>
                   <a:srgbClr val="E2E2EA"/>
                 </a:solidFill>
@@ -4792,20 +4830,20 @@
               </a:defRPr>
             </a:pPr>
             <a:r>
-              <a:t>Thanks, everyone! Grateful for all the warm birthday wishes from the team.</a:t>
-            </a:r>
-          </a:p>
-        </p:txBody>
-      </p:sp>
-      <p:sp>
-        <p:nvSpPr>
-          <p:cNvPr id="8" name="TextBox 7"/>
-          <p:cNvSpPr txBox="1"/>
-          <p:nvPr/>
-        </p:nvSpPr>
-        <p:spPr>
-          <a:xfrm>
-            <a:off x="1097280" y="4572000"/>
+              <a:t>"Exceptional attention to quality and technical excellence"</a:t>
+            </a:r>
+          </a:p>
+        </p:txBody>
+      </p:sp>
+      <p:sp>
+        <p:nvSpPr>
+          <p:cNvPr id="9" name="TextBox 8"/>
+          <p:cNvSpPr txBox="1"/>
+          <p:nvPr/>
+        </p:nvSpPr>
+        <p:spPr>
+          <a:xfrm>
+            <a:off x="1097280" y="5120640"/>
             <a:ext cx="9966960" cy="457200"/>
           </a:xfrm>
           <a:prstGeom prst="rect">
@@ -4820,15 +4858,15 @@
           <a:lstStyle/>
           <a:p>
             <a:pPr algn="l">
-              <a:defRPr sz="1400" b="0" i="1">
-                <a:solidFill>
-                  <a:srgbClr val="FF6B9D"/>
-                </a:solidFill>
-                <a:latin typeface="Calibri"/>
-              </a:defRPr>
-            </a:pPr>
-            <a:r>
-              <a:t>Celebrated by colleagues with heartfelt messages</a:t>
+              <a:defRPr sz="1200" b="1" i="0">
+                <a:solidFill>
+                  <a:srgbClr val="84CC16"/>
+                </a:solidFill>
+                <a:latin typeface="Calibri"/>
+              </a:defRPr>
+            </a:pPr>
+            <a:r>
+              <a:t>Quality · Excellence</a:t>
             </a:r>
           </a:p>
         </p:txBody>
@@ -4874,7 +4912,7 @@
             <a:avLst/>
           </a:prstGeom>
           <a:solidFill>
-            <a:srgbClr val="27AE60"/>
+            <a:srgbClr val="F59E0B"/>
           </a:solidFill>
           <a:ln>
             <a:noFill/>
@@ -4927,13 +4965,13 @@
             <a:pPr algn="l">
               <a:defRPr sz="1000" b="1">
                 <a:solidFill>
-                  <a:srgbClr val="27AE60"/>
-                </a:solidFill>
-                <a:latin typeface="Calibri"/>
-              </a:defRPr>
-            </a:pPr>
-            <a:r>
-              <a:t>💰  MILESTONE</a:t>
+                  <a:srgbClr val="F59E0B"/>
+                </a:solidFill>
+                <a:latin typeface="Calibri"/>
+              </a:defRPr>
+            </a:pPr>
+            <a:r>
+              <a:t>👏  CLAPS</a:t>
             </a:r>
           </a:p>
         </p:txBody>
@@ -4963,13 +5001,13 @@
             <a:pPr algn="l">
               <a:defRPr sz="3200" b="1" i="0">
                 <a:solidFill>
-                  <a:srgbClr val="27AE60"/>
-                </a:solidFill>
-                <a:latin typeface="Calibri"/>
-              </a:defRPr>
-            </a:pPr>
-            <a:r>
-              <a:t>Revenue Milestone</a:t>
+                  <a:srgbClr val="F59E0B"/>
+                </a:solidFill>
+                <a:latin typeface="Calibri"/>
+              </a:defRPr>
+            </a:pPr>
+            <a:r>
+              <a:t>Development Excellence</a:t>
             </a:r>
           </a:p>
         </p:txBody>
@@ -4983,29 +5021,29 @@
         <p:spPr>
           <a:xfrm>
             <a:off x="1097280" y="2103120"/>
-            <a:ext cx="4572000" cy="822960"/>
-          </a:xfrm>
-          <a:prstGeom prst="rect">
-            <a:avLst/>
-          </a:prstGeom>
-          <a:noFill/>
-        </p:spPr>
-        <p:txBody>
-          <a:bodyPr wrap="square">
-            <a:spAutoFit/>
-          </a:bodyPr>
-          <a:lstStyle/>
-          <a:p>
-            <a:pPr algn="l">
-              <a:defRPr sz="5200" b="1" i="0">
-                <a:solidFill>
-                  <a:srgbClr val="27AE60"/>
-                </a:solidFill>
-                <a:latin typeface="Calibri"/>
-              </a:defRPr>
-            </a:pPr>
-            <a:r>
-              <a:t>$100M</a:t>
+            <a:ext cx="2743200" cy="548640"/>
+          </a:xfrm>
+          <a:prstGeom prst="rect">
+            <a:avLst/>
+          </a:prstGeom>
+          <a:noFill/>
+        </p:spPr>
+        <p:txBody>
+          <a:bodyPr wrap="square">
+            <a:spAutoFit/>
+          </a:bodyPr>
+          <a:lstStyle/>
+          <a:p>
+            <a:pPr algn="l">
+              <a:defRPr sz="2800" b="1" i="0">
+                <a:solidFill>
+                  <a:srgbClr val="F59E0B"/>
+                </a:solidFill>
+                <a:latin typeface="Calibri"/>
+              </a:defRPr>
+            </a:pPr>
+            <a:r>
+              <a:t>25</a:t>
             </a:r>
           </a:p>
         </p:txBody>
@@ -5018,30 +5056,30 @@
         </p:nvSpPr>
         <p:spPr>
           <a:xfrm>
-            <a:off x="1097280" y="2926080"/>
-            <a:ext cx="4572000" cy="365760"/>
-          </a:xfrm>
-          <a:prstGeom prst="rect">
-            <a:avLst/>
-          </a:prstGeom>
-          <a:noFill/>
-        </p:spPr>
-        <p:txBody>
-          <a:bodyPr wrap="square">
-            <a:spAutoFit/>
-          </a:bodyPr>
-          <a:lstStyle/>
-          <a:p>
-            <a:pPr algn="l">
-              <a:defRPr sz="1100" b="0" i="0">
-                <a:solidFill>
-                  <a:srgbClr val="8F95A3"/>
-                </a:solidFill>
-                <a:latin typeface="Calibri"/>
-              </a:defRPr>
-            </a:pPr>
-            <a:r>
-              <a:t>gross profit target</a:t>
+            <a:off x="1097280" y="2651760"/>
+            <a:ext cx="9966960" cy="365760"/>
+          </a:xfrm>
+          <a:prstGeom prst="rect">
+            <a:avLst/>
+          </a:prstGeom>
+          <a:noFill/>
+        </p:spPr>
+        <p:txBody>
+          <a:bodyPr wrap="square">
+            <a:spAutoFit/>
+          </a:bodyPr>
+          <a:lstStyle/>
+          <a:p>
+            <a:pPr algn="l">
+              <a:defRPr sz="1400" b="0" i="0">
+                <a:solidFill>
+                  <a:srgbClr val="E2E2EA"/>
+                </a:solidFill>
+                <a:latin typeface="Calibri"/>
+              </a:defRPr>
+            </a:pPr>
+            <a:r>
+              <a:t>from Iurii Kotov</a:t>
             </a:r>
           </a:p>
         </p:txBody>
@@ -5054,7 +5092,79 @@
         </p:nvSpPr>
         <p:spPr>
           <a:xfrm>
-            <a:off x="1097280" y="3566160"/>
+            <a:off x="1097280" y="3108960"/>
+            <a:ext cx="9966960" cy="365760"/>
+          </a:xfrm>
+          <a:prstGeom prst="rect">
+            <a:avLst/>
+          </a:prstGeom>
+          <a:noFill/>
+        </p:spPr>
+        <p:txBody>
+          <a:bodyPr wrap="square">
+            <a:spAutoFit/>
+          </a:bodyPr>
+          <a:lstStyle/>
+          <a:p>
+            <a:pPr algn="l">
+              <a:defRPr sz="1400" b="1" i="0">
+                <a:solidFill>
+                  <a:srgbClr val="FFFFFF"/>
+                </a:solidFill>
+                <a:latin typeface="Calibri"/>
+              </a:defRPr>
+            </a:pPr>
+            <a:r>
+              <a:t>to: Dima M.</a:t>
+            </a:r>
+          </a:p>
+        </p:txBody>
+      </p:sp>
+      <p:sp>
+        <p:nvSpPr>
+          <p:cNvPr id="8" name="TextBox 7"/>
+          <p:cNvSpPr txBox="1"/>
+          <p:nvPr/>
+        </p:nvSpPr>
+        <p:spPr>
+          <a:xfrm>
+            <a:off x="1097280" y="3749039"/>
+            <a:ext cx="9966960" cy="1097280"/>
+          </a:xfrm>
+          <a:prstGeom prst="rect">
+            <a:avLst/>
+          </a:prstGeom>
+          <a:noFill/>
+        </p:spPr>
+        <p:txBody>
+          <a:bodyPr wrap="square">
+            <a:spAutoFit/>
+          </a:bodyPr>
+          <a:lstStyle/>
+          <a:p>
+            <a:pPr algn="l">
+              <a:defRPr sz="1500" b="0" i="1">
+                <a:solidFill>
+                  <a:srgbClr val="E2E2EA"/>
+                </a:solidFill>
+                <a:latin typeface="Calibri"/>
+              </a:defRPr>
+            </a:pPr>
+            <a:r>
+              <a:t>"Outstanding development skills and problem-solving"</a:t>
+            </a:r>
+          </a:p>
+        </p:txBody>
+      </p:sp>
+      <p:sp>
+        <p:nvSpPr>
+          <p:cNvPr id="9" name="TextBox 8"/>
+          <p:cNvSpPr txBox="1"/>
+          <p:nvPr/>
+        </p:nvSpPr>
+        <p:spPr>
+          <a:xfrm>
+            <a:off x="1097280" y="5120640"/>
             <a:ext cx="9966960" cy="457200"/>
           </a:xfrm>
           <a:prstGeom prst="rect">
@@ -5069,51 +5179,15 @@
           <a:lstStyle/>
           <a:p>
             <a:pPr algn="l">
-              <a:defRPr sz="1800" b="1" i="0">
-                <a:solidFill>
-                  <a:srgbClr val="FFFFFF"/>
-                </a:solidFill>
-                <a:latin typeface="Calibri"/>
-              </a:defRPr>
-            </a:pPr>
-            <a:r>
-              <a:t>Strong Financial Performance</a:t>
-            </a:r>
-          </a:p>
-        </p:txBody>
-      </p:sp>
-      <p:sp>
-        <p:nvSpPr>
-          <p:cNvPr id="8" name="TextBox 7"/>
-          <p:cNvSpPr txBox="1"/>
-          <p:nvPr/>
-        </p:nvSpPr>
-        <p:spPr>
-          <a:xfrm>
-            <a:off x="1097280" y="4206240"/>
-            <a:ext cx="9966960" cy="1371600"/>
-          </a:xfrm>
-          <a:prstGeom prst="rect">
-            <a:avLst/>
-          </a:prstGeom>
-          <a:noFill/>
-        </p:spPr>
-        <p:txBody>
-          <a:bodyPr wrap="square">
-            <a:spAutoFit/>
-          </a:bodyPr>
-          <a:lstStyle/>
-          <a:p>
-            <a:pPr algn="l">
-              <a:defRPr sz="1500" b="0" i="0">
-                <a:solidFill>
-                  <a:srgbClr val="E2E2EA"/>
-                </a:solidFill>
-                <a:latin typeface="Calibri"/>
-              </a:defRPr>
-            </a:pPr>
-            <a:r>
-              <a:t>Company continues on track with ~$100M gross profit and $20M EBITDA, maintaining 40% year-over-year growth</a:t>
+              <a:defRPr sz="1200" b="1" i="0">
+                <a:solidFill>
+                  <a:srgbClr val="F59E0B"/>
+                </a:solidFill>
+                <a:latin typeface="Calibri"/>
+              </a:defRPr>
+            </a:pPr>
+            <a:r>
+              <a:t>Problem Solving · Excellence</a:t>
             </a:r>
           </a:p>
         </p:txBody>
@@ -5159,7 +5233,7 @@
             <a:avLst/>
           </a:prstGeom>
           <a:solidFill>
-            <a:srgbClr val="9B59B6"/>
+            <a:srgbClr val="22C55E"/>
           </a:solidFill>
           <a:ln>
             <a:noFill/>
@@ -5212,13 +5286,13 @@
             <a:pPr algn="l">
               <a:defRPr sz="1000" b="1">
                 <a:solidFill>
-                  <a:srgbClr val="9B59B6"/>
-                </a:solidFill>
-                <a:latin typeface="Calibri"/>
-              </a:defRPr>
-            </a:pPr>
-            <a:r>
-              <a:t>🎮  WIN</a:t>
+                  <a:srgbClr val="22C55E"/>
+                </a:solidFill>
+                <a:latin typeface="Calibri"/>
+              </a:defRPr>
+            </a:pPr>
+            <a:r>
+              <a:t>💰  MILESTONE</a:t>
             </a:r>
           </a:p>
         </p:txBody>
@@ -5248,13 +5322,13 @@
             <a:pPr algn="l">
               <a:defRPr sz="3200" b="1" i="0">
                 <a:solidFill>
-                  <a:srgbClr val="9B59B6"/>
-                </a:solidFill>
-                <a:latin typeface="Calibri"/>
-              </a:defRPr>
-            </a:pPr>
-            <a:r>
-              <a:t>Gaming Success</a:t>
+                  <a:srgbClr val="22C55E"/>
+                </a:solidFill>
+                <a:latin typeface="Calibri"/>
+              </a:defRPr>
+            </a:pPr>
+            <a:r>
+              <a:t>Financial Milestone</a:t>
             </a:r>
           </a:p>
         </p:txBody>
@@ -5282,15 +5356,15 @@
           <a:lstStyle/>
           <a:p>
             <a:pPr algn="l">
-              <a:defRPr sz="4800" b="1" i="0">
-                <a:solidFill>
-                  <a:srgbClr val="9B59B6"/>
-                </a:solidFill>
-                <a:latin typeface="Calibri"/>
-              </a:defRPr>
-            </a:pPr>
-            <a:r>
-              <a:t>61%</a:t>
+              <a:defRPr sz="5200" b="1" i="0">
+                <a:solidFill>
+                  <a:srgbClr val="22C55E"/>
+                </a:solidFill>
+                <a:latin typeface="Calibri"/>
+              </a:defRPr>
+            </a:pPr>
+            <a:r>
+              <a:t>40%</a:t>
             </a:r>
           </a:p>
         </p:txBody>
@@ -5303,7 +5377,7 @@
         </p:nvSpPr>
         <p:spPr>
           <a:xfrm>
-            <a:off x="1097280" y="2834640"/>
+            <a:off x="1097280" y="2926080"/>
             <a:ext cx="4572000" cy="365760"/>
           </a:xfrm>
           <a:prstGeom prst="rect">
@@ -5318,7 +5392,7 @@
           <a:lstStyle/>
           <a:p>
             <a:pPr algn="l">
-              <a:defRPr sz="1200" b="0" i="0">
+              <a:defRPr sz="1100" b="0" i="0">
                 <a:solidFill>
                   <a:srgbClr val="8F95A3"/>
                 </a:solidFill>
@@ -5326,7 +5400,7 @@
               </a:defRPr>
             </a:pPr>
             <a:r>
-              <a:t>retention rate</a:t>
+              <a:t>YoY Growth</a:t>
             </a:r>
           </a:p>
         </p:txBody>
@@ -5339,22 +5413,58 @@
         </p:nvSpPr>
         <p:spPr>
           <a:xfrm>
-            <a:off x="1097280" y="3291840"/>
-            <a:ext cx="9966960" cy="365760"/>
-          </a:xfrm>
-          <a:prstGeom prst="rect">
-            <a:avLst/>
-          </a:prstGeom>
-          <a:noFill/>
-        </p:spPr>
-        <p:txBody>
-          <a:bodyPr wrap="square">
-            <a:spAutoFit/>
-          </a:bodyPr>
-          <a:lstStyle/>
-          <a:p>
-            <a:pPr algn="l">
-              <a:defRPr sz="1400" b="0" i="0">
+            <a:off x="1097280" y="3566160"/>
+            <a:ext cx="9966960" cy="457200"/>
+          </a:xfrm>
+          <a:prstGeom prst="rect">
+            <a:avLst/>
+          </a:prstGeom>
+          <a:noFill/>
+        </p:spPr>
+        <p:txBody>
+          <a:bodyPr wrap="square">
+            <a:spAutoFit/>
+          </a:bodyPr>
+          <a:lstStyle/>
+          <a:p>
+            <a:pPr algn="l">
+              <a:defRPr sz="1800" b="1" i="0">
+                <a:solidFill>
+                  <a:srgbClr val="FFFFFF"/>
+                </a:solidFill>
+                <a:latin typeface="Calibri"/>
+              </a:defRPr>
+            </a:pPr>
+            <a:r>
+              <a:t>Strong Growth Trajectory</a:t>
+            </a:r>
+          </a:p>
+        </p:txBody>
+      </p:sp>
+      <p:sp>
+        <p:nvSpPr>
+          <p:cNvPr id="8" name="TextBox 7"/>
+          <p:cNvSpPr txBox="1"/>
+          <p:nvPr/>
+        </p:nvSpPr>
+        <p:spPr>
+          <a:xfrm>
+            <a:off x="1097280" y="4206240"/>
+            <a:ext cx="9966960" cy="1371600"/>
+          </a:xfrm>
+          <a:prstGeom prst="rect">
+            <a:avLst/>
+          </a:prstGeom>
+          <a:noFill/>
+        </p:spPr>
+        <p:txBody>
+          <a:bodyPr wrap="square">
+            <a:spAutoFit/>
+          </a:bodyPr>
+          <a:lstStyle/>
+          <a:p>
+            <a:pPr algn="l">
+              <a:defRPr sz="1500" b="0" i="0">
                 <a:solidFill>
                   <a:srgbClr val="E2E2EA"/>
                 </a:solidFill>
@@ -5362,115 +5472,7 @@
               </a:defRPr>
             </a:pPr>
             <a:r>
-              <a:t>by Gaming Division</a:t>
-            </a:r>
-          </a:p>
-        </p:txBody>
-      </p:sp>
-      <p:sp>
-        <p:nvSpPr>
-          <p:cNvPr id="8" name="TextBox 7"/>
-          <p:cNvSpPr txBox="1"/>
-          <p:nvPr/>
-        </p:nvSpPr>
-        <p:spPr>
-          <a:xfrm>
-            <a:off x="1097280" y="3840480"/>
-            <a:ext cx="9966960" cy="457200"/>
-          </a:xfrm>
-          <a:prstGeom prst="rect">
-            <a:avLst/>
-          </a:prstGeom>
-          <a:noFill/>
-        </p:spPr>
-        <p:txBody>
-          <a:bodyPr wrap="square">
-            <a:spAutoFit/>
-          </a:bodyPr>
-          <a:lstStyle/>
-          <a:p>
-            <a:pPr algn="l">
-              <a:defRPr sz="1800" b="1" i="0">
-                <a:solidFill>
-                  <a:srgbClr val="FFFFFF"/>
-                </a:solidFill>
-                <a:latin typeface="Calibri"/>
-              </a:defRPr>
-            </a:pPr>
-            <a:r>
-              <a:t>Infinite Minesweeper Breakthrough</a:t>
-            </a:r>
-          </a:p>
-        </p:txBody>
-      </p:sp>
-      <p:sp>
-        <p:nvSpPr>
-          <p:cNvPr id="9" name="TextBox 8"/>
-          <p:cNvSpPr txBox="1"/>
-          <p:nvPr/>
-        </p:nvSpPr>
-        <p:spPr>
-          <a:xfrm>
-            <a:off x="1097280" y="4389120"/>
-            <a:ext cx="9966960" cy="914400"/>
-          </a:xfrm>
-          <a:prstGeom prst="rect">
-            <a:avLst/>
-          </a:prstGeom>
-          <a:noFill/>
-        </p:spPr>
-        <p:txBody>
-          <a:bodyPr wrap="square">
-            <a:spAutoFit/>
-          </a:bodyPr>
-          <a:lstStyle/>
-          <a:p>
-            <a:pPr algn="l">
-              <a:defRPr sz="1400" b="0" i="0">
-                <a:solidFill>
-                  <a:srgbClr val="E2E2EA"/>
-                </a:solidFill>
-                <a:latin typeface="Calibri"/>
-              </a:defRPr>
-            </a:pPr>
-            <a:r>
-              <a:t>Our Infinite Minesweeper achieved 61% retention, hitting Apple's ERA benchmark of 151-160%</a:t>
-            </a:r>
-          </a:p>
-        </p:txBody>
-      </p:sp>
-      <p:sp>
-        <p:nvSpPr>
-          <p:cNvPr id="10" name="TextBox 9"/>
-          <p:cNvSpPr txBox="1"/>
-          <p:nvPr/>
-        </p:nvSpPr>
-        <p:spPr>
-          <a:xfrm>
-            <a:off x="1097280" y="5486400"/>
-            <a:ext cx="9966960" cy="457200"/>
-          </a:xfrm>
-          <a:prstGeom prst="rect">
-            <a:avLst/>
-          </a:prstGeom>
-          <a:noFill/>
-        </p:spPr>
-        <p:txBody>
-          <a:bodyPr wrap="square">
-            <a:spAutoFit/>
-          </a:bodyPr>
-          <a:lstStyle/>
-          <a:p>
-            <a:pPr algn="l">
-              <a:defRPr sz="1300" b="0" i="1">
-                <a:solidFill>
-                  <a:srgbClr val="8F95A3"/>
-                </a:solidFill>
-                <a:latin typeface="Calibri"/>
-              </a:defRPr>
-            </a:pPr>
-            <a:r>
-              <a:t>💬 "Gaming division turned profitable in 2025"</a:t>
+              <a:t>Company achieved ~$100M gross profit with $20M EBITDA, maintaining 40% year-over-year growth projection.</a:t>
             </a:r>
           </a:p>
         </p:txBody>
@@ -5516,7 +5518,7 @@
             <a:avLst/>
           </a:prstGeom>
           <a:solidFill>
-            <a:srgbClr val="3498DB"/>
+            <a:srgbClr val="8B5CF6"/>
           </a:solidFill>
           <a:ln>
             <a:noFill/>
@@ -5569,13 +5571,13 @@
             <a:pPr algn="l">
               <a:defRPr sz="1000" b="1">
                 <a:solidFill>
-                  <a:srgbClr val="3498DB"/>
-                </a:solidFill>
-                <a:latin typeface="Calibri"/>
-              </a:defRPr>
-            </a:pPr>
-            <a:r>
-              <a:t>🤖  MILESTONE</a:t>
+                  <a:srgbClr val="8B5CF6"/>
+                </a:solidFill>
+                <a:latin typeface="Calibri"/>
+              </a:defRPr>
+            </a:pPr>
+            <a:r>
+              <a:t>🎮  WIN</a:t>
             </a:r>
           </a:p>
         </p:txBody>
@@ -5605,13 +5607,13 @@
             <a:pPr algn="l">
               <a:defRPr sz="3200" b="1" i="0">
                 <a:solidFill>
-                  <a:srgbClr val="3498DB"/>
-                </a:solidFill>
-                <a:latin typeface="Calibri"/>
-              </a:defRPr>
-            </a:pPr>
-            <a:r>
-              <a:t>AI Integration</a:t>
+                  <a:srgbClr val="8B5CF6"/>
+                </a:solidFill>
+                <a:latin typeface="Calibri"/>
+              </a:defRPr>
+            </a:pPr>
+            <a:r>
+              <a:t>Gaming Success</a:t>
             </a:r>
           </a:p>
         </p:txBody>
@@ -5639,15 +5641,15 @@
           <a:lstStyle/>
           <a:p>
             <a:pPr algn="l">
-              <a:defRPr sz="5200" b="1" i="0">
-                <a:solidFill>
-                  <a:srgbClr val="3498DB"/>
-                </a:solidFill>
-                <a:latin typeface="Calibri"/>
-              </a:defRPr>
-            </a:pPr>
-            <a:r>
-              <a:t>5-10</a:t>
+              <a:defRPr sz="4800" b="1" i="0">
+                <a:solidFill>
+                  <a:srgbClr val="8B5CF6"/>
+                </a:solidFill>
+                <a:latin typeface="Calibri"/>
+              </a:defRPr>
+            </a:pPr>
+            <a:r>
+              <a:t>61%</a:t>
             </a:r>
           </a:p>
         </p:txBody>
@@ -5660,7 +5662,7 @@
         </p:nvSpPr>
         <p:spPr>
           <a:xfrm>
-            <a:off x="1097280" y="2926080"/>
+            <a:off x="1097280" y="2834640"/>
             <a:ext cx="4572000" cy="365760"/>
           </a:xfrm>
           <a:prstGeom prst="rect">
@@ -5675,7 +5677,7 @@
           <a:lstStyle/>
           <a:p>
             <a:pPr algn="l">
-              <a:defRPr sz="1100" b="0" i="0">
+              <a:defRPr sz="1200" b="0" i="0">
                 <a:solidFill>
                   <a:srgbClr val="8F95A3"/>
                 </a:solidFill>
@@ -5683,7 +5685,7 @@
               </a:defRPr>
             </a:pPr>
             <a:r>
-              <a:t>AI agents per employee</a:t>
+              <a:t>Retention</a:t>
             </a:r>
           </a:p>
         </p:txBody>
@@ -5696,7 +5698,43 @@
         </p:nvSpPr>
         <p:spPr>
           <a:xfrm>
-            <a:off x="1097280" y="3566160"/>
+            <a:off x="1097280" y="3291840"/>
+            <a:ext cx="9966960" cy="365760"/>
+          </a:xfrm>
+          <a:prstGeom prst="rect">
+            <a:avLst/>
+          </a:prstGeom>
+          <a:noFill/>
+        </p:spPr>
+        <p:txBody>
+          <a:bodyPr wrap="square">
+            <a:spAutoFit/>
+          </a:bodyPr>
+          <a:lstStyle/>
+          <a:p>
+            <a:pPr algn="l">
+              <a:defRPr sz="1400" b="0" i="0">
+                <a:solidFill>
+                  <a:srgbClr val="E2E2EA"/>
+                </a:solidFill>
+                <a:latin typeface="Calibri"/>
+              </a:defRPr>
+            </a:pPr>
+            <a:r>
+              <a:t>by Gaming Division</a:t>
+            </a:r>
+          </a:p>
+        </p:txBody>
+      </p:sp>
+      <p:sp>
+        <p:nvSpPr>
+          <p:cNvPr id="8" name="TextBox 7"/>
+          <p:cNvSpPr txBox="1"/>
+          <p:nvPr/>
+        </p:nvSpPr>
+        <p:spPr>
+          <a:xfrm>
+            <a:off x="1097280" y="3840480"/>
             <a:ext cx="9966960" cy="457200"/>
           </a:xfrm>
           <a:prstGeom prst="rect">
@@ -5719,35 +5757,35 @@
               </a:defRPr>
             </a:pPr>
             <a:r>
-              <a:t>AI-First Workforce Vision</a:t>
-            </a:r>
-          </a:p>
-        </p:txBody>
-      </p:sp>
-      <p:sp>
-        <p:nvSpPr>
-          <p:cNvPr id="8" name="TextBox 7"/>
-          <p:cNvSpPr txBox="1"/>
-          <p:nvPr/>
-        </p:nvSpPr>
-        <p:spPr>
-          <a:xfrm>
-            <a:off x="1097280" y="4206240"/>
-            <a:ext cx="9966960" cy="1371600"/>
-          </a:xfrm>
-          <a:prstGeom prst="rect">
-            <a:avLst/>
-          </a:prstGeom>
-          <a:noFill/>
-        </p:spPr>
-        <p:txBody>
-          <a:bodyPr wrap="square">
-            <a:spAutoFit/>
-          </a:bodyPr>
-          <a:lstStyle/>
-          <a:p>
-            <a:pPr algn="l">
-              <a:defRPr sz="1500" b="0" i="0">
+              <a:t>Infinite Minesweeper Achievement</a:t>
+            </a:r>
+          </a:p>
+        </p:txBody>
+      </p:sp>
+      <p:sp>
+        <p:nvSpPr>
+          <p:cNvPr id="9" name="TextBox 8"/>
+          <p:cNvSpPr txBox="1"/>
+          <p:nvPr/>
+        </p:nvSpPr>
+        <p:spPr>
+          <a:xfrm>
+            <a:off x="1097280" y="4389120"/>
+            <a:ext cx="9966960" cy="914400"/>
+          </a:xfrm>
+          <a:prstGeom prst="rect">
+            <a:avLst/>
+          </a:prstGeom>
+          <a:noFill/>
+        </p:spPr>
+        <p:txBody>
+          <a:bodyPr wrap="square">
+            <a:spAutoFit/>
+          </a:bodyPr>
+          <a:lstStyle/>
+          <a:p>
+            <a:pPr algn="l">
+              <a:defRPr sz="1400" b="0" i="0">
                 <a:solidFill>
                   <a:srgbClr val="E2E2EA"/>
                 </a:solidFill>
@@ -5755,7 +5793,43 @@
               </a:defRPr>
             </a:pPr>
             <a:r>
-              <a:t>Strategic initiative: every employee will manage 5-10 AI agents within 3-6 months, revolutionizing how we work</a:t>
+              <a:t>Infinite Minesweeper reached 61% retention rate, significantly outperforming Apple's benchmark ERA of 151-160%.</a:t>
+            </a:r>
+          </a:p>
+        </p:txBody>
+      </p:sp>
+      <p:sp>
+        <p:nvSpPr>
+          <p:cNvPr id="10" name="TextBox 9"/>
+          <p:cNvSpPr txBox="1"/>
+          <p:nvPr/>
+        </p:nvSpPr>
+        <p:spPr>
+          <a:xfrm>
+            <a:off x="1097280" y="5486400"/>
+            <a:ext cx="9966960" cy="457200"/>
+          </a:xfrm>
+          <a:prstGeom prst="rect">
+            <a:avLst/>
+          </a:prstGeom>
+          <a:noFill/>
+        </p:spPr>
+        <p:txBody>
+          <a:bodyPr wrap="square">
+            <a:spAutoFit/>
+          </a:bodyPr>
+          <a:lstStyle/>
+          <a:p>
+            <a:pPr algn="l">
+              <a:defRPr sz="1300" b="0" i="1">
+                <a:solidFill>
+                  <a:srgbClr val="8F95A3"/>
+                </a:solidFill>
+                <a:latin typeface="Calibri"/>
+              </a:defRPr>
+            </a:pPr>
+            <a:r>
+              <a:t>💬 "Gaming division turned profitable in 2025"</a:t>
             </a:r>
           </a:p>
         </p:txBody>
@@ -5801,7 +5875,7 @@
             <a:avLst/>
           </a:prstGeom>
           <a:solidFill>
-            <a:srgbClr val="E74C3C"/>
+            <a:srgbClr val="EF4444"/>
           </a:solidFill>
           <a:ln>
             <a:noFill/>
@@ -5854,13 +5928,13 @@
             <a:pPr algn="l">
               <a:defRPr sz="1000" b="1">
                 <a:solidFill>
-                  <a:srgbClr val="E74C3C"/>
-                </a:solidFill>
-                <a:latin typeface="Calibri"/>
-              </a:defRPr>
-            </a:pPr>
-            <a:r>
-              <a:t>🛡️  WIN</a:t>
+                  <a:srgbClr val="EF4444"/>
+                </a:solidFill>
+                <a:latin typeface="Calibri"/>
+              </a:defRPr>
+            </a:pPr>
+            <a:r>
+              <a:t>🔒  WIN</a:t>
             </a:r>
           </a:p>
         </p:txBody>
@@ -5890,13 +5964,13 @@
             <a:pPr algn="l">
               <a:defRPr sz="3200" b="1" i="0">
                 <a:solidFill>
-                  <a:srgbClr val="E74C3C"/>
-                </a:solidFill>
-                <a:latin typeface="Calibri"/>
-              </a:defRPr>
-            </a:pPr>
-            <a:r>
-              <a:t>Fraud Prevention</a:t>
+                  <a:srgbClr val="EF4444"/>
+                </a:solidFill>
+                <a:latin typeface="Calibri"/>
+              </a:defRPr>
+            </a:pPr>
+            <a:r>
+              <a:t>Security Excellence</a:t>
             </a:r>
           </a:p>
         </p:txBody>
@@ -5926,7 +6000,7 @@
             <a:pPr algn="l">
               <a:defRPr sz="4800" b="1" i="0">
                 <a:solidFill>
-                  <a:srgbClr val="E74C3C"/>
+                  <a:srgbClr val="EF4444"/>
                 </a:solidFill>
                 <a:latin typeface="Calibri"/>
               </a:defRPr>
@@ -5968,7 +6042,7 @@
               </a:defRPr>
             </a:pPr>
             <a:r>
-              <a:t>fraud rate</a:t>
+              <a:t>Fraud Rate</a:t>
             </a:r>
           </a:p>
         </p:txBody>
@@ -6040,7 +6114,7 @@
               </a:defRPr>
             </a:pPr>
             <a:r>
-              <a:t>Fraud Detection Breakthrough</a:t>
+              <a:t>Massive Fraud Reduction</a:t>
             </a:r>
           </a:p>
         </p:txBody>
@@ -6076,7 +6150,7 @@
               </a:defRPr>
             </a:pPr>
             <a:r>
-              <a:t>Dynamic SDK signatures reduced fraud from 22% to under 4%</a:t>
+              <a:t>Fraud reduced from 22% to under 4% with dynamic SDK signatures implementation.</a:t>
             </a:r>
           </a:p>
         </p:txBody>
@@ -6112,7 +6186,292 @@
               </a:defRPr>
             </a:pPr>
             <a:r>
-              <a:t>💬 "Massive improvement in platform security and trust"</a:t>
+              <a:t>💬 "18 percentage point improvement in fraud prevention"</a:t>
+            </a:r>
+          </a:p>
+        </p:txBody>
+      </p:sp>
+    </p:spTree>
+  </p:cSld>
+  <p:clrMapOvr>
+    <a:masterClrMapping/>
+  </p:clrMapOvr>
+</p:sld>
+</file>
+
+<file path=ppt/slides/slide19.xml><?xml version="1.0" encoding="utf-8"?>
+<p:sld xmlns:a="http://schemas.openxmlformats.org/drawingml/2006/main" xmlns:p="http://schemas.openxmlformats.org/presentationml/2006/main" xmlns:r="http://schemas.openxmlformats.org/officeDocument/2006/relationships">
+  <p:cSld>
+    <p:bg>
+      <p:bgPr>
+        <a:solidFill>
+          <a:srgbClr val="08080C"/>
+        </a:solidFill>
+        <a:effectLst/>
+      </p:bgPr>
+    </p:bg>
+    <p:spTree>
+      <p:nvGrpSpPr>
+        <p:cNvPr id="1" name=""/>
+        <p:cNvGrpSpPr/>
+        <p:nvPr/>
+      </p:nvGrpSpPr>
+      <p:grpSpPr/>
+      <p:sp>
+        <p:nvSpPr>
+          <p:cNvPr id="2" name="Rectangle 1"/>
+          <p:cNvSpPr/>
+          <p:nvPr/>
+        </p:nvSpPr>
+        <p:spPr>
+          <a:xfrm>
+            <a:off x="0" y="365760"/>
+            <a:ext cx="12191695" cy="54864"/>
+          </a:xfrm>
+          <a:prstGeom prst="rect">
+            <a:avLst/>
+          </a:prstGeom>
+          <a:solidFill>
+            <a:srgbClr val="3B82F6"/>
+          </a:solidFill>
+          <a:ln>
+            <a:noFill/>
+          </a:ln>
+        </p:spPr>
+        <p:style>
+          <a:lnRef idx="1">
+            <a:schemeClr val="accent1"/>
+          </a:lnRef>
+          <a:fillRef idx="3">
+            <a:schemeClr val="accent1"/>
+          </a:fillRef>
+          <a:effectRef idx="2">
+            <a:schemeClr val="accent1"/>
+          </a:effectRef>
+          <a:fontRef idx="minor">
+            <a:schemeClr val="lt1"/>
+          </a:fontRef>
+        </p:style>
+        <p:txBody>
+          <a:bodyPr rtlCol="0" anchor="ctr"/>
+          <a:lstStyle/>
+          <a:p>
+            <a:pPr algn="ctr"/>
+          </a:p>
+        </p:txBody>
+      </p:sp>
+      <p:sp>
+        <p:nvSpPr>
+          <p:cNvPr id="3" name="TextBox 2"/>
+          <p:cNvSpPr txBox="1"/>
+          <p:nvPr/>
+        </p:nvSpPr>
+        <p:spPr>
+          <a:xfrm>
+            <a:off x="1097280" y="731520"/>
+            <a:ext cx="3657600" cy="365760"/>
+          </a:xfrm>
+          <a:prstGeom prst="rect">
+            <a:avLst/>
+          </a:prstGeom>
+          <a:noFill/>
+        </p:spPr>
+        <p:txBody>
+          <a:bodyPr wrap="none">
+            <a:spAutoFit/>
+          </a:bodyPr>
+          <a:lstStyle/>
+          <a:p>
+            <a:pPr algn="l">
+              <a:defRPr sz="1000" b="1">
+                <a:solidFill>
+                  <a:srgbClr val="3B82F6"/>
+                </a:solidFill>
+                <a:latin typeface="Calibri"/>
+              </a:defRPr>
+            </a:pPr>
+            <a:r>
+              <a:t>🤖  MILESTONE</a:t>
+            </a:r>
+          </a:p>
+        </p:txBody>
+      </p:sp>
+      <p:sp>
+        <p:nvSpPr>
+          <p:cNvPr id="4" name="TextBox 3"/>
+          <p:cNvSpPr txBox="1"/>
+          <p:nvPr/>
+        </p:nvSpPr>
+        <p:spPr>
+          <a:xfrm>
+            <a:off x="1097280" y="1188720"/>
+            <a:ext cx="9966960" cy="731520"/>
+          </a:xfrm>
+          <a:prstGeom prst="rect">
+            <a:avLst/>
+          </a:prstGeom>
+          <a:noFill/>
+        </p:spPr>
+        <p:txBody>
+          <a:bodyPr wrap="square">
+            <a:spAutoFit/>
+          </a:bodyPr>
+          <a:lstStyle/>
+          <a:p>
+            <a:pPr algn="l">
+              <a:defRPr sz="3200" b="1" i="0">
+                <a:solidFill>
+                  <a:srgbClr val="3B82F6"/>
+                </a:solidFill>
+                <a:latin typeface="Calibri"/>
+              </a:defRPr>
+            </a:pPr>
+            <a:r>
+              <a:t>AI Revolution</a:t>
+            </a:r>
+          </a:p>
+        </p:txBody>
+      </p:sp>
+      <p:sp>
+        <p:nvSpPr>
+          <p:cNvPr id="5" name="TextBox 4"/>
+          <p:cNvSpPr txBox="1"/>
+          <p:nvPr/>
+        </p:nvSpPr>
+        <p:spPr>
+          <a:xfrm>
+            <a:off x="1097280" y="2103120"/>
+            <a:ext cx="4572000" cy="822960"/>
+          </a:xfrm>
+          <a:prstGeom prst="rect">
+            <a:avLst/>
+          </a:prstGeom>
+          <a:noFill/>
+        </p:spPr>
+        <p:txBody>
+          <a:bodyPr wrap="square">
+            <a:spAutoFit/>
+          </a:bodyPr>
+          <a:lstStyle/>
+          <a:p>
+            <a:pPr algn="l">
+              <a:defRPr sz="5200" b="1" i="0">
+                <a:solidFill>
+                  <a:srgbClr val="3B82F6"/>
+                </a:solidFill>
+                <a:latin typeface="Calibri"/>
+              </a:defRPr>
+            </a:pPr>
+            <a:r>
+              <a:t>10x</a:t>
+            </a:r>
+          </a:p>
+        </p:txBody>
+      </p:sp>
+      <p:sp>
+        <p:nvSpPr>
+          <p:cNvPr id="6" name="TextBox 5"/>
+          <p:cNvSpPr txBox="1"/>
+          <p:nvPr/>
+        </p:nvSpPr>
+        <p:spPr>
+          <a:xfrm>
+            <a:off x="1097280" y="2926080"/>
+            <a:ext cx="4572000" cy="365760"/>
+          </a:xfrm>
+          <a:prstGeom prst="rect">
+            <a:avLst/>
+          </a:prstGeom>
+          <a:noFill/>
+        </p:spPr>
+        <p:txBody>
+          <a:bodyPr wrap="square">
+            <a:spAutoFit/>
+          </a:bodyPr>
+          <a:lstStyle/>
+          <a:p>
+            <a:pPr algn="l">
+              <a:defRPr sz="1100" b="0" i="0">
+                <a:solidFill>
+                  <a:srgbClr val="8F95A3"/>
+                </a:solidFill>
+                <a:latin typeface="Calibri"/>
+              </a:defRPr>
+            </a:pPr>
+            <a:r>
+              <a:t>Productivity Multiplier</a:t>
+            </a:r>
+          </a:p>
+        </p:txBody>
+      </p:sp>
+      <p:sp>
+        <p:nvSpPr>
+          <p:cNvPr id="7" name="TextBox 6"/>
+          <p:cNvSpPr txBox="1"/>
+          <p:nvPr/>
+        </p:nvSpPr>
+        <p:spPr>
+          <a:xfrm>
+            <a:off x="1097280" y="3566160"/>
+            <a:ext cx="9966960" cy="457200"/>
+          </a:xfrm>
+          <a:prstGeom prst="rect">
+            <a:avLst/>
+          </a:prstGeom>
+          <a:noFill/>
+        </p:spPr>
+        <p:txBody>
+          <a:bodyPr wrap="square">
+            <a:spAutoFit/>
+          </a:bodyPr>
+          <a:lstStyle/>
+          <a:p>
+            <a:pPr algn="l">
+              <a:defRPr sz="1800" b="1" i="0">
+                <a:solidFill>
+                  <a:srgbClr val="FFFFFF"/>
+                </a:solidFill>
+                <a:latin typeface="Calibri"/>
+              </a:defRPr>
+            </a:pPr>
+            <a:r>
+              <a:t>AI Agent Future</a:t>
+            </a:r>
+          </a:p>
+        </p:txBody>
+      </p:sp>
+      <p:sp>
+        <p:nvSpPr>
+          <p:cNvPr id="8" name="TextBox 7"/>
+          <p:cNvSpPr txBox="1"/>
+          <p:nvPr/>
+        </p:nvSpPr>
+        <p:spPr>
+          <a:xfrm>
+            <a:off x="1097280" y="4206240"/>
+            <a:ext cx="9966960" cy="1371600"/>
+          </a:xfrm>
+          <a:prstGeom prst="rect">
+            <a:avLst/>
+          </a:prstGeom>
+          <a:noFill/>
+        </p:spPr>
+        <p:txBody>
+          <a:bodyPr wrap="square">
+            <a:spAutoFit/>
+          </a:bodyPr>
+          <a:lstStyle/>
+          <a:p>
+            <a:pPr algn="l">
+              <a:defRPr sz="1500" b="0" i="0">
+                <a:solidFill>
+                  <a:srgbClr val="E2E2EA"/>
+                </a:solidFill>
+                <a:latin typeface="Calibri"/>
+              </a:defRPr>
+            </a:pPr>
+            <a:r>
+              <a:t>Every employee will manage 5-10 AI agents within the next 3-6 months, transforming how we work and scale.</a:t>
             </a:r>
           </a:p>
         </p:txBody>
@@ -6158,7 +6517,7 @@
             <a:avLst/>
           </a:prstGeom>
           <a:solidFill>
-            <a:srgbClr val="2ECC71"/>
+            <a:srgbClr val="FF6B6B"/>
           </a:solidFill>
           <a:ln>
             <a:noFill/>
@@ -6211,13 +6570,13 @@
             <a:pPr algn="l">
               <a:defRPr sz="1000" b="1">
                 <a:solidFill>
-                  <a:srgbClr val="2ECC71"/>
-                </a:solidFill>
-                <a:latin typeface="Calibri"/>
-              </a:defRPr>
-            </a:pPr>
-            <a:r>
-              <a:t>🌱  EVENT</a:t>
+                  <a:srgbClr val="FF6B6B"/>
+                </a:solidFill>
+                <a:latin typeface="Calibri"/>
+              </a:defRPr>
+            </a:pPr>
+            <a:r>
+              <a:t>🎉  CELEBRATION</a:t>
             </a:r>
           </a:p>
         </p:txBody>
@@ -6247,13 +6606,13 @@
             <a:pPr algn="l">
               <a:defRPr sz="3200" b="1" i="0">
                 <a:solidFill>
-                  <a:srgbClr val="2ECC71"/>
-                </a:solidFill>
-                <a:latin typeface="Calibri"/>
-              </a:defRPr>
-            </a:pPr>
-            <a:r>
-              <a:t>Connect Groups Spring Launch</a:t>
+                  <a:srgbClr val="FF6B6B"/>
+                </a:solidFill>
+                <a:latin typeface="Calibri"/>
+              </a:defRPr>
+            </a:pPr>
+            <a:r>
+              <a:t>Birthday Celebration</a:t>
             </a:r>
           </a:p>
         </p:txBody>
@@ -6267,21 +6626,21 @@
         <p:spPr>
           <a:xfrm>
             <a:off x="1097280" y="2103120"/>
-            <a:ext cx="9966960" cy="548640"/>
-          </a:xfrm>
-          <a:prstGeom prst="rect">
-            <a:avLst/>
-          </a:prstGeom>
-          <a:noFill/>
-        </p:spPr>
-        <p:txBody>
-          <a:bodyPr wrap="square">
-            <a:spAutoFit/>
-          </a:bodyPr>
-          <a:lstStyle/>
-          <a:p>
-            <a:pPr algn="l">
-              <a:defRPr sz="2200" b="1" i="0">
+            <a:ext cx="9966960" cy="640080"/>
+          </a:xfrm>
+          <a:prstGeom prst="rect">
+            <a:avLst/>
+          </a:prstGeom>
+          <a:noFill/>
+        </p:spPr>
+        <p:txBody>
+          <a:bodyPr wrap="square">
+            <a:spAutoFit/>
+          </a:bodyPr>
+          <a:lstStyle/>
+          <a:p>
+            <a:pPr algn="l">
+              <a:defRPr sz="2800" b="1" i="0">
                 <a:solidFill>
                   <a:srgbClr val="FFFFFF"/>
                 </a:solidFill>
@@ -6289,7 +6648,7 @@
               </a:defRPr>
             </a:pPr>
             <a:r>
-              <a:t>Connect Groups Spring Season</a:t>
+              <a:t>Artem Orlov</a:t>
             </a:r>
           </a:p>
         </p:txBody>
@@ -6317,15 +6676,15 @@
           <a:lstStyle/>
           <a:p>
             <a:pPr algn="l">
-              <a:defRPr sz="1400" b="1" i="0">
-                <a:solidFill>
-                  <a:srgbClr val="2ECC71"/>
-                </a:solidFill>
-                <a:latin typeface="Calibri"/>
-              </a:defRPr>
-            </a:pPr>
-            <a:r>
-              <a:t>March–May 2026</a:t>
+              <a:defRPr sz="1400" b="0" i="0">
+                <a:solidFill>
+                  <a:srgbClr val="8F95A3"/>
+                </a:solidFill>
+                <a:latin typeface="Calibri"/>
+              </a:defRPr>
+            </a:pPr>
+            <a:r>
+              <a:t>Happy Birthday!</a:t>
             </a:r>
           </a:p>
         </p:txBody>
@@ -6339,21 +6698,21 @@
         <p:spPr>
           <a:xfrm>
             <a:off x="1097280" y="3291840"/>
-            <a:ext cx="9966960" cy="1371600"/>
-          </a:xfrm>
-          <a:prstGeom prst="rect">
-            <a:avLst/>
-          </a:prstGeom>
-          <a:noFill/>
-        </p:spPr>
-        <p:txBody>
-          <a:bodyPr wrap="square">
-            <a:spAutoFit/>
-          </a:bodyPr>
-          <a:lstStyle/>
-          <a:p>
-            <a:pPr algn="l">
-              <a:defRPr sz="1500" b="0" i="0">
+            <a:ext cx="9966960" cy="914400"/>
+          </a:xfrm>
+          <a:prstGeom prst="rect">
+            <a:avLst/>
+          </a:prstGeom>
+          <a:noFill/>
+        </p:spPr>
+        <p:txBody>
+          <a:bodyPr wrap="square">
+            <a:spAutoFit/>
+          </a:bodyPr>
+          <a:lstStyle/>
+          <a:p>
+            <a:pPr algn="l">
+              <a:defRPr sz="1600" b="0" i="0">
                 <a:solidFill>
                   <a:srgbClr val="E2E2EA"/>
                 </a:solidFill>
@@ -6361,7 +6720,7 @@
               </a:defRPr>
             </a:pPr>
             <a:r>
-              <a:t>Employee-led communities on Circle connecting around shared interests, learning, and ideas — from sports and books to leadership and meaningful conversations</a:t>
+              <a:t>Thanks, everyone for all the warm wishes and kind words!</a:t>
             </a:r>
           </a:p>
         </p:txBody>
@@ -6374,7 +6733,256 @@
         </p:nvSpPr>
         <p:spPr>
           <a:xfrm>
-            <a:off x="1097280" y="5029200"/>
+            <a:off x="1097280" y="4572000"/>
+            <a:ext cx="9966960" cy="457200"/>
+          </a:xfrm>
+          <a:prstGeom prst="rect">
+            <a:avLst/>
+          </a:prstGeom>
+          <a:noFill/>
+        </p:spPr>
+        <p:txBody>
+          <a:bodyPr wrap="square">
+            <a:spAutoFit/>
+          </a:bodyPr>
+          <a:lstStyle/>
+          <a:p>
+            <a:pPr algn="l">
+              <a:defRPr sz="1400" b="0" i="1">
+                <a:solidFill>
+                  <a:srgbClr val="FF6B6B"/>
+                </a:solidFill>
+                <a:latin typeface="Calibri"/>
+              </a:defRPr>
+            </a:pPr>
+            <a:r>
+              <a:t>Engineering Team</a:t>
+            </a:r>
+          </a:p>
+        </p:txBody>
+      </p:sp>
+    </p:spTree>
+  </p:cSld>
+  <p:clrMapOvr>
+    <a:masterClrMapping/>
+  </p:clrMapOvr>
+</p:sld>
+</file>
+
+<file path=ppt/slides/slide20.xml><?xml version="1.0" encoding="utf-8"?>
+<p:sld xmlns:a="http://schemas.openxmlformats.org/drawingml/2006/main" xmlns:p="http://schemas.openxmlformats.org/presentationml/2006/main" xmlns:r="http://schemas.openxmlformats.org/officeDocument/2006/relationships">
+  <p:cSld>
+    <p:bg>
+      <p:bgPr>
+        <a:solidFill>
+          <a:srgbClr val="08080C"/>
+        </a:solidFill>
+        <a:effectLst/>
+      </p:bgPr>
+    </p:bg>
+    <p:spTree>
+      <p:nvGrpSpPr>
+        <p:cNvPr id="1" name=""/>
+        <p:cNvGrpSpPr/>
+        <p:nvPr/>
+      </p:nvGrpSpPr>
+      <p:grpSpPr/>
+      <p:sp>
+        <p:nvSpPr>
+          <p:cNvPr id="2" name="Rectangle 1"/>
+          <p:cNvSpPr/>
+          <p:nvPr/>
+        </p:nvSpPr>
+        <p:spPr>
+          <a:xfrm>
+            <a:off x="0" y="365760"/>
+            <a:ext cx="12191695" cy="54864"/>
+          </a:xfrm>
+          <a:prstGeom prst="rect">
+            <a:avLst/>
+          </a:prstGeom>
+          <a:solidFill>
+            <a:srgbClr val="059669"/>
+          </a:solidFill>
+          <a:ln>
+            <a:noFill/>
+          </a:ln>
+        </p:spPr>
+        <p:style>
+          <a:lnRef idx="1">
+            <a:schemeClr val="accent1"/>
+          </a:lnRef>
+          <a:fillRef idx="3">
+            <a:schemeClr val="accent1"/>
+          </a:fillRef>
+          <a:effectRef idx="2">
+            <a:schemeClr val="accent1"/>
+          </a:effectRef>
+          <a:fontRef idx="minor">
+            <a:schemeClr val="lt1"/>
+          </a:fontRef>
+        </p:style>
+        <p:txBody>
+          <a:bodyPr rtlCol="0" anchor="ctr"/>
+          <a:lstStyle/>
+          <a:p>
+            <a:pPr algn="ctr"/>
+          </a:p>
+        </p:txBody>
+      </p:sp>
+      <p:sp>
+        <p:nvSpPr>
+          <p:cNvPr id="3" name="TextBox 2"/>
+          <p:cNvSpPr txBox="1"/>
+          <p:nvPr/>
+        </p:nvSpPr>
+        <p:spPr>
+          <a:xfrm>
+            <a:off x="1097280" y="731520"/>
+            <a:ext cx="3657600" cy="365760"/>
+          </a:xfrm>
+          <a:prstGeom prst="rect">
+            <a:avLst/>
+          </a:prstGeom>
+          <a:noFill/>
+        </p:spPr>
+        <p:txBody>
+          <a:bodyPr wrap="none">
+            <a:spAutoFit/>
+          </a:bodyPr>
+          <a:lstStyle/>
+          <a:p>
+            <a:pPr algn="l">
+              <a:defRPr sz="1000" b="1">
+                <a:solidFill>
+                  <a:srgbClr val="059669"/>
+                </a:solidFill>
+                <a:latin typeface="Calibri"/>
+              </a:defRPr>
+            </a:pPr>
+            <a:r>
+              <a:t>💼  WIN</a:t>
+            </a:r>
+          </a:p>
+        </p:txBody>
+      </p:sp>
+      <p:sp>
+        <p:nvSpPr>
+          <p:cNvPr id="4" name="TextBox 3"/>
+          <p:cNvSpPr txBox="1"/>
+          <p:nvPr/>
+        </p:nvSpPr>
+        <p:spPr>
+          <a:xfrm>
+            <a:off x="1097280" y="1188720"/>
+            <a:ext cx="9966960" cy="731520"/>
+          </a:xfrm>
+          <a:prstGeom prst="rect">
+            <a:avLst/>
+          </a:prstGeom>
+          <a:noFill/>
+        </p:spPr>
+        <p:txBody>
+          <a:bodyPr wrap="square">
+            <a:spAutoFit/>
+          </a:bodyPr>
+          <a:lstStyle/>
+          <a:p>
+            <a:pPr algn="l">
+              <a:defRPr sz="3200" b="1" i="0">
+                <a:solidFill>
+                  <a:srgbClr val="059669"/>
+                </a:solidFill>
+                <a:latin typeface="Calibri"/>
+              </a:defRPr>
+            </a:pPr>
+            <a:r>
+              <a:t>Sales Achievement</a:t>
+            </a:r>
+          </a:p>
+        </p:txBody>
+      </p:sp>
+      <p:sp>
+        <p:nvSpPr>
+          <p:cNvPr id="5" name="TextBox 4"/>
+          <p:cNvSpPr txBox="1"/>
+          <p:nvPr/>
+        </p:nvSpPr>
+        <p:spPr>
+          <a:xfrm>
+            <a:off x="1097280" y="2103120"/>
+            <a:ext cx="4572000" cy="822960"/>
+          </a:xfrm>
+          <a:prstGeom prst="rect">
+            <a:avLst/>
+          </a:prstGeom>
+          <a:noFill/>
+        </p:spPr>
+        <p:txBody>
+          <a:bodyPr wrap="square">
+            <a:spAutoFit/>
+          </a:bodyPr>
+          <a:lstStyle/>
+          <a:p>
+            <a:pPr algn="l">
+              <a:defRPr sz="4800" b="1" i="0">
+                <a:solidFill>
+                  <a:srgbClr val="059669"/>
+                </a:solidFill>
+                <a:latin typeface="Calibri"/>
+              </a:defRPr>
+            </a:pPr>
+            <a:r>
+              <a:t>$390k</a:t>
+            </a:r>
+          </a:p>
+        </p:txBody>
+      </p:sp>
+      <p:sp>
+        <p:nvSpPr>
+          <p:cNvPr id="6" name="TextBox 5"/>
+          <p:cNvSpPr txBox="1"/>
+          <p:nvPr/>
+        </p:nvSpPr>
+        <p:spPr>
+          <a:xfrm>
+            <a:off x="1097280" y="2834640"/>
+            <a:ext cx="4572000" cy="365760"/>
+          </a:xfrm>
+          <a:prstGeom prst="rect">
+            <a:avLst/>
+          </a:prstGeom>
+          <a:noFill/>
+        </p:spPr>
+        <p:txBody>
+          <a:bodyPr wrap="square">
+            <a:spAutoFit/>
+          </a:bodyPr>
+          <a:lstStyle/>
+          <a:p>
+            <a:pPr algn="l">
+              <a:defRPr sz="1200" b="0" i="0">
+                <a:solidFill>
+                  <a:srgbClr val="8F95A3"/>
+                </a:solidFill>
+                <a:latin typeface="Calibri"/>
+              </a:defRPr>
+            </a:pPr>
+            <a:r>
+              <a:t>Net Revenue</a:t>
+            </a:r>
+          </a:p>
+        </p:txBody>
+      </p:sp>
+      <p:sp>
+        <p:nvSpPr>
+          <p:cNvPr id="7" name="TextBox 6"/>
+          <p:cNvSpPr txBox="1"/>
+          <p:nvPr/>
+        </p:nvSpPr>
+        <p:spPr>
+          <a:xfrm>
+            <a:off x="1097280" y="3291840"/>
             <a:ext cx="9966960" cy="365760"/>
           </a:xfrm>
           <a:prstGeom prst="rect">
@@ -6389,7 +6997,115 @@
           <a:lstStyle/>
           <a:p>
             <a:pPr algn="l">
-              <a:defRPr sz="1300" b="0" i="0">
+              <a:defRPr sz="1400" b="0" i="0">
+                <a:solidFill>
+                  <a:srgbClr val="E2E2EA"/>
+                </a:solidFill>
+                <a:latin typeface="Calibri"/>
+              </a:defRPr>
+            </a:pPr>
+            <a:r>
+              <a:t>by Sales Team</a:t>
+            </a:r>
+          </a:p>
+        </p:txBody>
+      </p:sp>
+      <p:sp>
+        <p:nvSpPr>
+          <p:cNvPr id="8" name="TextBox 7"/>
+          <p:cNvSpPr txBox="1"/>
+          <p:nvPr/>
+        </p:nvSpPr>
+        <p:spPr>
+          <a:xfrm>
+            <a:off x="1097280" y="3840480"/>
+            <a:ext cx="9966960" cy="457200"/>
+          </a:xfrm>
+          <a:prstGeom prst="rect">
+            <a:avLst/>
+          </a:prstGeom>
+          <a:noFill/>
+        </p:spPr>
+        <p:txBody>
+          <a:bodyPr wrap="square">
+            <a:spAutoFit/>
+          </a:bodyPr>
+          <a:lstStyle/>
+          <a:p>
+            <a:pPr algn="l">
+              <a:defRPr sz="1800" b="1" i="0">
+                <a:solidFill>
+                  <a:srgbClr val="FFFFFF"/>
+                </a:solidFill>
+                <a:latin typeface="Calibri"/>
+              </a:defRPr>
+            </a:pPr>
+            <a:r>
+              <a:t>Weekly Sales Record</a:t>
+            </a:r>
+          </a:p>
+        </p:txBody>
+      </p:sp>
+      <p:sp>
+        <p:nvSpPr>
+          <p:cNvPr id="9" name="TextBox 8"/>
+          <p:cNvSpPr txBox="1"/>
+          <p:nvPr/>
+        </p:nvSpPr>
+        <p:spPr>
+          <a:xfrm>
+            <a:off x="1097280" y="4389120"/>
+            <a:ext cx="9966960" cy="914400"/>
+          </a:xfrm>
+          <a:prstGeom prst="rect">
+            <a:avLst/>
+          </a:prstGeom>
+          <a:noFill/>
+        </p:spPr>
+        <p:txBody>
+          <a:bodyPr wrap="square">
+            <a:spAutoFit/>
+          </a:bodyPr>
+          <a:lstStyle/>
+          <a:p>
+            <a:pPr algn="l">
+              <a:defRPr sz="1400" b="0" i="0">
+                <a:solidFill>
+                  <a:srgbClr val="E2E2EA"/>
+                </a:solidFill>
+                <a:latin typeface="Calibri"/>
+              </a:defRPr>
+            </a:pPr>
+            <a:r>
+              <a:t>Sales team closed 8 deals generating $390k net revenue in a single week.</a:t>
+            </a:r>
+          </a:p>
+        </p:txBody>
+      </p:sp>
+      <p:sp>
+        <p:nvSpPr>
+          <p:cNvPr id="10" name="TextBox 9"/>
+          <p:cNvSpPr txBox="1"/>
+          <p:nvPr/>
+        </p:nvSpPr>
+        <p:spPr>
+          <a:xfrm>
+            <a:off x="1097280" y="5486400"/>
+            <a:ext cx="9966960" cy="457200"/>
+          </a:xfrm>
+          <a:prstGeom prst="rect">
+            <a:avLst/>
+          </a:prstGeom>
+          <a:noFill/>
+        </p:spPr>
+        <p:txBody>
+          <a:bodyPr wrap="square">
+            <a:spAutoFit/>
+          </a:bodyPr>
+          <a:lstStyle/>
+          <a:p>
+            <a:pPr algn="l">
+              <a:defRPr sz="1300" b="0" i="1">
                 <a:solidFill>
                   <a:srgbClr val="8F95A3"/>
                 </a:solidFill>
@@ -6397,7 +7113,7 @@
               </a:defRPr>
             </a:pPr>
             <a:r>
-              <a:t>Organized by Katarzyna Raniszewska</a:t>
+              <a:t>💬 "Strong momentum in Q1 2026"</a:t>
             </a:r>
           </a:p>
         </p:txBody>
@@ -6443,7 +7159,7 @@
             <a:avLst/>
           </a:prstGeom>
           <a:solidFill>
-            <a:srgbClr val="3498DB"/>
+            <a:srgbClr val="4ECDC4"/>
           </a:solidFill>
           <a:ln>
             <a:noFill/>
@@ -6496,13 +7212,13 @@
             <a:pPr algn="l">
               <a:defRPr sz="1000" b="1">
                 <a:solidFill>
-                  <a:srgbClr val="3498DB"/>
-                </a:solidFill>
-                <a:latin typeface="Calibri"/>
-              </a:defRPr>
-            </a:pPr>
-            <a:r>
-              <a:t>🚀  MILESTONE</a:t>
+                  <a:srgbClr val="4ECDC4"/>
+                </a:solidFill>
+                <a:latin typeface="Calibri"/>
+              </a:defRPr>
+            </a:pPr>
+            <a:r>
+              <a:t>🎂  CELEBRATION</a:t>
             </a:r>
           </a:p>
         </p:txBody>
@@ -6532,13 +7248,13 @@
             <a:pPr algn="l">
               <a:defRPr sz="3200" b="1" i="0">
                 <a:solidFill>
-                  <a:srgbClr val="3498DB"/>
-                </a:solidFill>
-                <a:latin typeface="Calibri"/>
-              </a:defRPr>
-            </a:pPr>
-            <a:r>
-              <a:t>Coolify Launch</a:t>
+                  <a:srgbClr val="4ECDC4"/>
+                </a:solidFill>
+                <a:latin typeface="Calibri"/>
+              </a:defRPr>
+            </a:pPr>
+            <a:r>
+              <a:t>Birthday Celebration</a:t>
             </a:r>
           </a:p>
         </p:txBody>
@@ -6552,29 +7268,29 @@
         <p:spPr>
           <a:xfrm>
             <a:off x="1097280" y="2103120"/>
-            <a:ext cx="4572000" cy="822960"/>
-          </a:xfrm>
-          <a:prstGeom prst="rect">
-            <a:avLst/>
-          </a:prstGeom>
-          <a:noFill/>
-        </p:spPr>
-        <p:txBody>
-          <a:bodyPr wrap="square">
-            <a:spAutoFit/>
-          </a:bodyPr>
-          <a:lstStyle/>
-          <a:p>
-            <a:pPr algn="l">
-              <a:defRPr sz="5200" b="1" i="0">
-                <a:solidFill>
-                  <a:srgbClr val="3498DB"/>
-                </a:solidFill>
-                <a:latin typeface="Calibri"/>
-              </a:defRPr>
-            </a:pPr>
-            <a:r>
-              <a:t>27</a:t>
+            <a:ext cx="9966960" cy="640080"/>
+          </a:xfrm>
+          <a:prstGeom prst="rect">
+            <a:avLst/>
+          </a:prstGeom>
+          <a:noFill/>
+        </p:spPr>
+        <p:txBody>
+          <a:bodyPr wrap="square">
+            <a:spAutoFit/>
+          </a:bodyPr>
+          <a:lstStyle/>
+          <a:p>
+            <a:pPr algn="l">
+              <a:defRPr sz="2800" b="1" i="0">
+                <a:solidFill>
+                  <a:srgbClr val="FFFFFF"/>
+                </a:solidFill>
+                <a:latin typeface="Calibri"/>
+              </a:defRPr>
+            </a:pPr>
+            <a:r>
+              <a:t>Kirill Khramkov</a:t>
             </a:r>
           </a:p>
         </p:txBody>
@@ -6587,22 +7303,22 @@
         </p:nvSpPr>
         <p:spPr>
           <a:xfrm>
-            <a:off x="1097280" y="2926080"/>
-            <a:ext cx="4572000" cy="365760"/>
-          </a:xfrm>
-          <a:prstGeom prst="rect">
-            <a:avLst/>
-          </a:prstGeom>
-          <a:noFill/>
-        </p:spPr>
-        <p:txBody>
-          <a:bodyPr wrap="square">
-            <a:spAutoFit/>
-          </a:bodyPr>
-          <a:lstStyle/>
-          <a:p>
-            <a:pPr algn="l">
-              <a:defRPr sz="1100" b="0" i="0">
+            <a:off x="1097280" y="2743200"/>
+            <a:ext cx="9966960" cy="365760"/>
+          </a:xfrm>
+          <a:prstGeom prst="rect">
+            <a:avLst/>
+          </a:prstGeom>
+          <a:noFill/>
+        </p:spPr>
+        <p:txBody>
+          <a:bodyPr wrap="square">
+            <a:spAutoFit/>
+          </a:bodyPr>
+          <a:lstStyle/>
+          <a:p>
+            <a:pPr algn="l">
+              <a:defRPr sz="1400" b="0" i="0">
                 <a:solidFill>
                   <a:srgbClr val="8F95A3"/>
                 </a:solidFill>
@@ -6610,7 +7326,7 @@
               </a:defRPr>
             </a:pPr>
             <a:r>
-              <a:t>🎉 community reactions</a:t>
+              <a:t>Happy Birthday!</a:t>
             </a:r>
           </a:p>
         </p:txBody>
@@ -6623,7 +7339,43 @@
         </p:nvSpPr>
         <p:spPr>
           <a:xfrm>
-            <a:off x="1097280" y="3566160"/>
+            <a:off x="1097280" y="3291840"/>
+            <a:ext cx="9966960" cy="914400"/>
+          </a:xfrm>
+          <a:prstGeom prst="rect">
+            <a:avLst/>
+          </a:prstGeom>
+          <a:noFill/>
+        </p:spPr>
+        <p:txBody>
+          <a:bodyPr wrap="square">
+            <a:spAutoFit/>
+          </a:bodyPr>
+          <a:lstStyle/>
+          <a:p>
+            <a:pPr algn="l">
+              <a:defRPr sz="1600" b="0" i="0">
+                <a:solidFill>
+                  <a:srgbClr val="E2E2EA"/>
+                </a:solidFill>
+                <a:latin typeface="Calibri"/>
+              </a:defRPr>
+            </a:pPr>
+            <a:r>
+              <a:t>Thanks, everyone</a:t>
+            </a:r>
+          </a:p>
+        </p:txBody>
+      </p:sp>
+      <p:sp>
+        <p:nvSpPr>
+          <p:cNvPr id="8" name="TextBox 7"/>
+          <p:cNvSpPr txBox="1"/>
+          <p:nvPr/>
+        </p:nvSpPr>
+        <p:spPr>
+          <a:xfrm>
+            <a:off x="1097280" y="4572000"/>
             <a:ext cx="9966960" cy="457200"/>
           </a:xfrm>
           <a:prstGeom prst="rect">
@@ -6638,51 +7390,15 @@
           <a:lstStyle/>
           <a:p>
             <a:pPr algn="l">
-              <a:defRPr sz="1800" b="1" i="0">
-                <a:solidFill>
-                  <a:srgbClr val="FFFFFF"/>
-                </a:solidFill>
-                <a:latin typeface="Calibri"/>
-              </a:defRPr>
-            </a:pPr>
-            <a:r>
-              <a:t>DevOps Breakthrough: One-Click App Deployment</a:t>
-            </a:r>
-          </a:p>
-        </p:txBody>
-      </p:sp>
-      <p:sp>
-        <p:nvSpPr>
-          <p:cNvPr id="8" name="TextBox 7"/>
-          <p:cNvSpPr txBox="1"/>
-          <p:nvPr/>
-        </p:nvSpPr>
-        <p:spPr>
-          <a:xfrm>
-            <a:off x="1097280" y="4206240"/>
-            <a:ext cx="9966960" cy="1371600"/>
-          </a:xfrm>
-          <a:prstGeom prst="rect">
-            <a:avLst/>
-          </a:prstGeom>
-          <a:noFill/>
-        </p:spPr>
-        <p:txBody>
-          <a:bodyPr wrap="square">
-            <a:spAutoFit/>
-          </a:bodyPr>
-          <a:lstStyle/>
-          <a:p>
-            <a:pPr algn="l">
-              <a:defRPr sz="1500" b="0" i="0">
-                <a:solidFill>
-                  <a:srgbClr val="E2E2EA"/>
-                </a:solidFill>
-                <a:latin typeface="Calibri"/>
-              </a:defRPr>
-            </a:pPr>
-            <a:r>
-              <a:t>Our DevOps team just launched Coolify — a service that lets you deploy applications in just a few clicks. Perfect for rapid prototyping and quick iterations.</a:t>
+              <a:defRPr sz="1400" b="0" i="1">
+                <a:solidFill>
+                  <a:srgbClr val="4ECDC4"/>
+                </a:solidFill>
+                <a:latin typeface="Calibri"/>
+              </a:defRPr>
+            </a:pPr>
+            <a:r>
+              <a:t>Development Team</a:t>
             </a:r>
           </a:p>
         </p:txBody>
@@ -6728,7 +7444,7 @@
             <a:avLst/>
           </a:prstGeom>
           <a:solidFill>
-            <a:srgbClr val="E67E22"/>
+            <a:srgbClr val="22C55E"/>
           </a:solidFill>
           <a:ln>
             <a:noFill/>
@@ -6781,13 +7497,13 @@
             <a:pPr algn="l">
               <a:defRPr sz="1000" b="1">
                 <a:solidFill>
-                  <a:srgbClr val="E67E22"/>
-                </a:solidFill>
-                <a:latin typeface="Calibri"/>
-              </a:defRPr>
-            </a:pPr>
-            <a:r>
-              <a:t>⚡  WIN</a:t>
+                  <a:srgbClr val="22C55E"/>
+                </a:solidFill>
+                <a:latin typeface="Calibri"/>
+              </a:defRPr>
+            </a:pPr>
+            <a:r>
+              <a:t>🌱  EVENT</a:t>
             </a:r>
           </a:p>
         </p:txBody>
@@ -6817,13 +7533,13 @@
             <a:pPr algn="l">
               <a:defRPr sz="3200" b="1" i="0">
                 <a:solidFill>
-                  <a:srgbClr val="E67E22"/>
-                </a:solidFill>
-                <a:latin typeface="Calibri"/>
-              </a:defRPr>
-            </a:pPr>
-            <a:r>
-              <a:t>Innovation Momentum</a:t>
+                  <a:srgbClr val="22C55E"/>
+                </a:solidFill>
+                <a:latin typeface="Calibri"/>
+              </a:defRPr>
+            </a:pPr>
+            <a:r>
+              <a:t>Spring Season Launch</a:t>
             </a:r>
           </a:p>
         </p:txBody>
@@ -6837,29 +7553,29 @@
         <p:spPr>
           <a:xfrm>
             <a:off x="1097280" y="2103120"/>
-            <a:ext cx="4572000" cy="822960"/>
-          </a:xfrm>
-          <a:prstGeom prst="rect">
-            <a:avLst/>
-          </a:prstGeom>
-          <a:noFill/>
-        </p:spPr>
-        <p:txBody>
-          <a:bodyPr wrap="square">
-            <a:spAutoFit/>
-          </a:bodyPr>
-          <a:lstStyle/>
-          <a:p>
-            <a:pPr algn="l">
-              <a:defRPr sz="4800" b="1" i="0">
-                <a:solidFill>
-                  <a:srgbClr val="E67E22"/>
-                </a:solidFill>
-                <a:latin typeface="Calibri"/>
-              </a:defRPr>
-            </a:pPr>
-            <a:r>
-              <a:t>Fast</a:t>
+            <a:ext cx="9966960" cy="548640"/>
+          </a:xfrm>
+          <a:prstGeom prst="rect">
+            <a:avLst/>
+          </a:prstGeom>
+          <a:noFill/>
+        </p:spPr>
+        <p:txBody>
+          <a:bodyPr wrap="square">
+            <a:spAutoFit/>
+          </a:bodyPr>
+          <a:lstStyle/>
+          <a:p>
+            <a:pPr algn="l">
+              <a:defRPr sz="2200" b="1" i="0">
+                <a:solidFill>
+                  <a:srgbClr val="FFFFFF"/>
+                </a:solidFill>
+                <a:latin typeface="Calibri"/>
+              </a:defRPr>
+            </a:pPr>
+            <a:r>
+              <a:t>Connect Groups Spring Season</a:t>
             </a:r>
           </a:p>
         </p:txBody>
@@ -6872,22 +7588,94 @@
         </p:nvSpPr>
         <p:spPr>
           <a:xfrm>
-            <a:off x="1097280" y="2834640"/>
-            <a:ext cx="4572000" cy="365760"/>
-          </a:xfrm>
-          <a:prstGeom prst="rect">
-            <a:avLst/>
-          </a:prstGeom>
-          <a:noFill/>
-        </p:spPr>
-        <p:txBody>
-          <a:bodyPr wrap="square">
-            <a:spAutoFit/>
-          </a:bodyPr>
-          <a:lstStyle/>
-          <a:p>
-            <a:pPr algn="l">
-              <a:defRPr sz="1200" b="0" i="0">
+            <a:off x="1097280" y="2743200"/>
+            <a:ext cx="9966960" cy="365760"/>
+          </a:xfrm>
+          <a:prstGeom prst="rect">
+            <a:avLst/>
+          </a:prstGeom>
+          <a:noFill/>
+        </p:spPr>
+        <p:txBody>
+          <a:bodyPr wrap="square">
+            <a:spAutoFit/>
+          </a:bodyPr>
+          <a:lstStyle/>
+          <a:p>
+            <a:pPr algn="l">
+              <a:defRPr sz="1400" b="1" i="0">
+                <a:solidFill>
+                  <a:srgbClr val="22C55E"/>
+                </a:solidFill>
+                <a:latin typeface="Calibri"/>
+              </a:defRPr>
+            </a:pPr>
+            <a:r>
+              <a:t>March–May 2026</a:t>
+            </a:r>
+          </a:p>
+        </p:txBody>
+      </p:sp>
+      <p:sp>
+        <p:nvSpPr>
+          <p:cNvPr id="7" name="TextBox 6"/>
+          <p:cNvSpPr txBox="1"/>
+          <p:nvPr/>
+        </p:nvSpPr>
+        <p:spPr>
+          <a:xfrm>
+            <a:off x="1097280" y="3291840"/>
+            <a:ext cx="9966960" cy="1371600"/>
+          </a:xfrm>
+          <a:prstGeom prst="rect">
+            <a:avLst/>
+          </a:prstGeom>
+          <a:noFill/>
+        </p:spPr>
+        <p:txBody>
+          <a:bodyPr wrap="square">
+            <a:spAutoFit/>
+          </a:bodyPr>
+          <a:lstStyle/>
+          <a:p>
+            <a:pPr algn="l">
+              <a:defRPr sz="1500" b="0" i="0">
+                <a:solidFill>
+                  <a:srgbClr val="E2E2EA"/>
+                </a:solidFill>
+                <a:latin typeface="Calibri"/>
+              </a:defRPr>
+            </a:pPr>
+            <a:r>
+              <a:t>Employee-led communities on Circle are now open for the Spring Season! Join groups around shared interests, learning, sports, books, leadership, games, and meaningful conversations.</a:t>
+            </a:r>
+          </a:p>
+        </p:txBody>
+      </p:sp>
+      <p:sp>
+        <p:nvSpPr>
+          <p:cNvPr id="8" name="TextBox 7"/>
+          <p:cNvSpPr txBox="1"/>
+          <p:nvPr/>
+        </p:nvSpPr>
+        <p:spPr>
+          <a:xfrm>
+            <a:off x="1097280" y="5029200"/>
+            <a:ext cx="9966960" cy="365760"/>
+          </a:xfrm>
+          <a:prstGeom prst="rect">
+            <a:avLst/>
+          </a:prstGeom>
+          <a:noFill/>
+        </p:spPr>
+        <p:txBody>
+          <a:bodyPr wrap="square">
+            <a:spAutoFit/>
+          </a:bodyPr>
+          <a:lstStyle/>
+          <a:p>
+            <a:pPr algn="l">
+              <a:defRPr sz="1300" b="0" i="0">
                 <a:solidFill>
                   <a:srgbClr val="8F95A3"/>
                 </a:solidFill>
@@ -6895,151 +7683,7 @@
               </a:defRPr>
             </a:pPr>
             <a:r>
-              <a:t>tool creation</a:t>
-            </a:r>
-          </a:p>
-        </p:txBody>
-      </p:sp>
-      <p:sp>
-        <p:nvSpPr>
-          <p:cNvPr id="7" name="TextBox 6"/>
-          <p:cNvSpPr txBox="1"/>
-          <p:nvPr/>
-        </p:nvSpPr>
-        <p:spPr>
-          <a:xfrm>
-            <a:off x="1097280" y="3291840"/>
-            <a:ext cx="9966960" cy="365760"/>
-          </a:xfrm>
-          <a:prstGeom prst="rect">
-            <a:avLst/>
-          </a:prstGeom>
-          <a:noFill/>
-        </p:spPr>
-        <p:txBody>
-          <a:bodyPr wrap="square">
-            <a:spAutoFit/>
-          </a:bodyPr>
-          <a:lstStyle/>
-          <a:p>
-            <a:pPr algn="l">
-              <a:defRPr sz="1400" b="0" i="0">
-                <a:solidFill>
-                  <a:srgbClr val="E2E2EA"/>
-                </a:solidFill>
-                <a:latin typeface="Calibri"/>
-              </a:defRPr>
-            </a:pPr>
-            <a:r>
-              <a:t>by Non-engineering teams</a:t>
-            </a:r>
-          </a:p>
-        </p:txBody>
-      </p:sp>
-      <p:sp>
-        <p:nvSpPr>
-          <p:cNvPr id="8" name="TextBox 7"/>
-          <p:cNvSpPr txBox="1"/>
-          <p:nvPr/>
-        </p:nvSpPr>
-        <p:spPr>
-          <a:xfrm>
-            <a:off x="1097280" y="3840480"/>
-            <a:ext cx="9966960" cy="457200"/>
-          </a:xfrm>
-          <a:prstGeom prst="rect">
-            <a:avLst/>
-          </a:prstGeom>
-          <a:noFill/>
-        </p:spPr>
-        <p:txBody>
-          <a:bodyPr wrap="square">
-            <a:spAutoFit/>
-          </a:bodyPr>
-          <a:lstStyle/>
-          <a:p>
-            <a:pPr algn="l">
-              <a:defRPr sz="1800" b="1" i="0">
-                <a:solidFill>
-                  <a:srgbClr val="FFFFFF"/>
-                </a:solidFill>
-                <a:latin typeface="Calibri"/>
-              </a:defRPr>
-            </a:pPr>
-            <a:r>
-              <a:t>Building Culture: From Ideas to Tools</a:t>
-            </a:r>
-          </a:p>
-        </p:txBody>
-      </p:sp>
-      <p:sp>
-        <p:nvSpPr>
-          <p:cNvPr id="9" name="TextBox 8"/>
-          <p:cNvSpPr txBox="1"/>
-          <p:nvPr/>
-        </p:nvSpPr>
-        <p:spPr>
-          <a:xfrm>
-            <a:off x="1097280" y="4389120"/>
-            <a:ext cx="9966960" cy="914400"/>
-          </a:xfrm>
-          <a:prstGeom prst="rect">
-            <a:avLst/>
-          </a:prstGeom>
-          <a:noFill/>
-        </p:spPr>
-        <p:txBody>
-          <a:bodyPr wrap="square">
-            <a:spAutoFit/>
-          </a:bodyPr>
-          <a:lstStyle/>
-          <a:p>
-            <a:pPr algn="l">
-              <a:defRPr sz="1400" b="0" i="0">
-                <a:solidFill>
-                  <a:srgbClr val="E2E2EA"/>
-                </a:solidFill>
-                <a:latin typeface="Calibri"/>
-              </a:defRPr>
-            </a:pPr>
-            <a:r>
-              <a:t>Non-engineering teams are creating useful tools at impressive speed, showing we're learning fast and moving in the right direction</a:t>
-            </a:r>
-          </a:p>
-        </p:txBody>
-      </p:sp>
-      <p:sp>
-        <p:nvSpPr>
-          <p:cNvPr id="10" name="TextBox 9"/>
-          <p:cNvSpPr txBox="1"/>
-          <p:nvPr/>
-        </p:nvSpPr>
-        <p:spPr>
-          <a:xfrm>
-            <a:off x="1097280" y="5486400"/>
-            <a:ext cx="9966960" cy="457200"/>
-          </a:xfrm>
-          <a:prstGeom prst="rect">
-            <a:avLst/>
-          </a:prstGeom>
-          <a:noFill/>
-        </p:spPr>
-        <p:txBody>
-          <a:bodyPr wrap="square">
-            <a:spAutoFit/>
-          </a:bodyPr>
-          <a:lstStyle/>
-          <a:p>
-            <a:pPr algn="l">
-              <a:defRPr sz="1300" b="0" i="1">
-                <a:solidFill>
-                  <a:srgbClr val="8F95A3"/>
-                </a:solidFill>
-                <a:latin typeface="Calibri"/>
-              </a:defRPr>
-            </a:pPr>
-            <a:r>
-              <a:t>💬 "Strong sign of innovation culture across all departments"</a:t>
+              <a:t>Organized by Katarzyna Raniszewska</a:t>
             </a:r>
           </a:p>
         </p:txBody>
@@ -7085,7 +7729,7 @@
             <a:avLst/>
           </a:prstGeom>
           <a:solidFill>
-            <a:srgbClr val="9B59B6"/>
+            <a:srgbClr val="3B82F6"/>
           </a:solidFill>
           <a:ln>
             <a:noFill/>
@@ -7138,13 +7782,13 @@
             <a:pPr algn="l">
               <a:defRPr sz="1000" b="1">
                 <a:solidFill>
-                  <a:srgbClr val="9B59B6"/>
-                </a:solidFill>
-                <a:latin typeface="Calibri"/>
-              </a:defRPr>
-            </a:pPr>
-            <a:r>
-              <a:t>👏  CLAPS</a:t>
+                  <a:srgbClr val="3B82F6"/>
+                </a:solidFill>
+                <a:latin typeface="Calibri"/>
+              </a:defRPr>
+            </a:pPr>
+            <a:r>
+              <a:t>🚀  WIN</a:t>
             </a:r>
           </a:p>
         </p:txBody>
@@ -7174,13 +7818,13 @@
             <a:pPr algn="l">
               <a:defRPr sz="3200" b="1" i="0">
                 <a:solidFill>
-                  <a:srgbClr val="9B59B6"/>
-                </a:solidFill>
-                <a:latin typeface="Calibri"/>
-              </a:defRPr>
-            </a:pPr>
-            <a:r>
-              <a:t>DevOps Hero</a:t>
+                  <a:srgbClr val="3B82F6"/>
+                </a:solidFill>
+                <a:latin typeface="Calibri"/>
+              </a:defRPr>
+            </a:pPr>
+            <a:r>
+              <a:t>Infrastructure Innovation</a:t>
             </a:r>
           </a:p>
         </p:txBody>
@@ -7194,29 +7838,29 @@
         <p:spPr>
           <a:xfrm>
             <a:off x="1097280" y="2103120"/>
-            <a:ext cx="2743200" cy="548640"/>
-          </a:xfrm>
-          <a:prstGeom prst="rect">
-            <a:avLst/>
-          </a:prstGeom>
-          <a:noFill/>
-        </p:spPr>
-        <p:txBody>
-          <a:bodyPr wrap="square">
-            <a:spAutoFit/>
-          </a:bodyPr>
-          <a:lstStyle/>
-          <a:p>
-            <a:pPr algn="l">
-              <a:defRPr sz="2800" b="1" i="0">
-                <a:solidFill>
-                  <a:srgbClr val="9B59B6"/>
-                </a:solidFill>
-                <a:latin typeface="Calibri"/>
-              </a:defRPr>
-            </a:pPr>
-            <a:r>
-              <a:t>50</a:t>
+            <a:ext cx="4572000" cy="822960"/>
+          </a:xfrm>
+          <a:prstGeom prst="rect">
+            <a:avLst/>
+          </a:prstGeom>
+          <a:noFill/>
+        </p:spPr>
+        <p:txBody>
+          <a:bodyPr wrap="square">
+            <a:spAutoFit/>
+          </a:bodyPr>
+          <a:lstStyle/>
+          <a:p>
+            <a:pPr algn="l">
+              <a:defRPr sz="4800" b="1" i="0">
+                <a:solidFill>
+                  <a:srgbClr val="3B82F6"/>
+                </a:solidFill>
+                <a:latin typeface="Calibri"/>
+              </a:defRPr>
+            </a:pPr>
+            <a:r>
+              <a:t>1-Click</a:t>
             </a:r>
           </a:p>
         </p:txBody>
@@ -7229,7 +7873,43 @@
         </p:nvSpPr>
         <p:spPr>
           <a:xfrm>
-            <a:off x="1097280" y="2651760"/>
+            <a:off x="1097280" y="2834640"/>
+            <a:ext cx="4572000" cy="365760"/>
+          </a:xfrm>
+          <a:prstGeom prst="rect">
+            <a:avLst/>
+          </a:prstGeom>
+          <a:noFill/>
+        </p:spPr>
+        <p:txBody>
+          <a:bodyPr wrap="square">
+            <a:spAutoFit/>
+          </a:bodyPr>
+          <a:lstStyle/>
+          <a:p>
+            <a:pPr algn="l">
+              <a:defRPr sz="1200" b="0" i="0">
+                <a:solidFill>
+                  <a:srgbClr val="8F95A3"/>
+                </a:solidFill>
+                <a:latin typeface="Calibri"/>
+              </a:defRPr>
+            </a:pPr>
+            <a:r>
+              <a:t>Deployment</a:t>
+            </a:r>
+          </a:p>
+        </p:txBody>
+      </p:sp>
+      <p:sp>
+        <p:nvSpPr>
+          <p:cNvPr id="7" name="TextBox 6"/>
+          <p:cNvSpPr txBox="1"/>
+          <p:nvPr/>
+        </p:nvSpPr>
+        <p:spPr>
+          <a:xfrm>
+            <a:off x="1097280" y="3291840"/>
             <a:ext cx="9966960" cy="365760"/>
           </a:xfrm>
           <a:prstGeom prst="rect">
@@ -7252,35 +7932,35 @@
               </a:defRPr>
             </a:pPr>
             <a:r>
-              <a:t>from Mykhailo Kukharskyi</a:t>
-            </a:r>
-          </a:p>
-        </p:txBody>
-      </p:sp>
-      <p:sp>
-        <p:nvSpPr>
-          <p:cNvPr id="7" name="TextBox 6"/>
-          <p:cNvSpPr txBox="1"/>
-          <p:nvPr/>
-        </p:nvSpPr>
-        <p:spPr>
-          <a:xfrm>
-            <a:off x="1097280" y="3108960"/>
-            <a:ext cx="9966960" cy="365760"/>
-          </a:xfrm>
-          <a:prstGeom prst="rect">
-            <a:avLst/>
-          </a:prstGeom>
-          <a:noFill/>
-        </p:spPr>
-        <p:txBody>
-          <a:bodyPr wrap="square">
-            <a:spAutoFit/>
-          </a:bodyPr>
-          <a:lstStyle/>
-          <a:p>
-            <a:pPr algn="l">
-              <a:defRPr sz="1400" b="1" i="0">
+              <a:t>by DevOps Team</a:t>
+            </a:r>
+          </a:p>
+        </p:txBody>
+      </p:sp>
+      <p:sp>
+        <p:nvSpPr>
+          <p:cNvPr id="8" name="TextBox 7"/>
+          <p:cNvSpPr txBox="1"/>
+          <p:nvPr/>
+        </p:nvSpPr>
+        <p:spPr>
+          <a:xfrm>
+            <a:off x="1097280" y="3840480"/>
+            <a:ext cx="9966960" cy="457200"/>
+          </a:xfrm>
+          <a:prstGeom prst="rect">
+            <a:avLst/>
+          </a:prstGeom>
+          <a:noFill/>
+        </p:spPr>
+        <p:txBody>
+          <a:bodyPr wrap="square">
+            <a:spAutoFit/>
+          </a:bodyPr>
+          <a:lstStyle/>
+          <a:p>
+            <a:pPr algn="l">
+              <a:defRPr sz="1800" b="1" i="0">
                 <a:solidFill>
                   <a:srgbClr val="FFFFFF"/>
                 </a:solidFill>
@@ -7288,35 +7968,35 @@
               </a:defRPr>
             </a:pPr>
             <a:r>
-              <a:t>to: Gleb Krahotkin</a:t>
-            </a:r>
-          </a:p>
-        </p:txBody>
-      </p:sp>
-      <p:sp>
-        <p:nvSpPr>
-          <p:cNvPr id="8" name="TextBox 7"/>
-          <p:cNvSpPr txBox="1"/>
-          <p:nvPr/>
-        </p:nvSpPr>
-        <p:spPr>
-          <a:xfrm>
-            <a:off x="1097280" y="3749039"/>
-            <a:ext cx="9966960" cy="1097280"/>
-          </a:xfrm>
-          <a:prstGeom prst="rect">
-            <a:avLst/>
-          </a:prstGeom>
-          <a:noFill/>
-        </p:spPr>
-        <p:txBody>
-          <a:bodyPr wrap="square">
-            <a:spAutoFit/>
-          </a:bodyPr>
-          <a:lstStyle/>
-          <a:p>
-            <a:pPr algn="l">
-              <a:defRPr sz="1500" b="0" i="1">
+              <a:t>Coolify Platform Launch</a:t>
+            </a:r>
+          </a:p>
+        </p:txBody>
+      </p:sp>
+      <p:sp>
+        <p:nvSpPr>
+          <p:cNvPr id="9" name="TextBox 8"/>
+          <p:cNvSpPr txBox="1"/>
+          <p:nvPr/>
+        </p:nvSpPr>
+        <p:spPr>
+          <a:xfrm>
+            <a:off x="1097280" y="4389120"/>
+            <a:ext cx="9966960" cy="914400"/>
+          </a:xfrm>
+          <a:prstGeom prst="rect">
+            <a:avLst/>
+          </a:prstGeom>
+          <a:noFill/>
+        </p:spPr>
+        <p:txBody>
+          <a:bodyPr wrap="square">
+            <a:spAutoFit/>
+          </a:bodyPr>
+          <a:lstStyle/>
+          <a:p>
+            <a:pPr algn="l">
+              <a:defRPr sz="1400" b="0" i="0">
                 <a:solidFill>
                   <a:srgbClr val="E2E2EA"/>
                 </a:solidFill>
@@ -7324,20 +8004,20 @@
               </a:defRPr>
             </a:pPr>
             <a:r>
-              <a:t>"Amazing work on Coolify deployment system"</a:t>
-            </a:r>
-          </a:p>
-        </p:txBody>
-      </p:sp>
-      <p:sp>
-        <p:nvSpPr>
-          <p:cNvPr id="9" name="TextBox 8"/>
-          <p:cNvSpPr txBox="1"/>
-          <p:nvPr/>
-        </p:nvSpPr>
-        <p:spPr>
-          <a:xfrm>
-            <a:off x="1097280" y="5120640"/>
+              <a:t>Our DevOps team has launched Coolify - a powerful service that allows you to deploy applications in just a few clicks. Complete with security guidelines and documentation.</a:t>
+            </a:r>
+          </a:p>
+        </p:txBody>
+      </p:sp>
+      <p:sp>
+        <p:nvSpPr>
+          <p:cNvPr id="10" name="TextBox 9"/>
+          <p:cNvSpPr txBox="1"/>
+          <p:nvPr/>
+        </p:nvSpPr>
+        <p:spPr>
+          <a:xfrm>
+            <a:off x="1097280" y="5486400"/>
             <a:ext cx="9966960" cy="457200"/>
           </a:xfrm>
           <a:prstGeom prst="rect">
@@ -7352,15 +8032,15 @@
           <a:lstStyle/>
           <a:p>
             <a:pPr algn="l">
-              <a:defRPr sz="1200" b="1" i="0">
-                <a:solidFill>
-                  <a:srgbClr val="9B59B6"/>
-                </a:solidFill>
-                <a:latin typeface="Calibri"/>
-              </a:defRPr>
-            </a:pPr>
-            <a:r>
-              <a:t>Innovation · Excellence</a:t>
+              <a:defRPr sz="1300" b="0" i="1">
+                <a:solidFill>
+                  <a:srgbClr val="8F95A3"/>
+                </a:solidFill>
+                <a:latin typeface="Calibri"/>
+              </a:defRPr>
+            </a:pPr>
+            <a:r>
+              <a:t>💬 "Democratizing deployment for all teams"</a:t>
             </a:r>
           </a:p>
         </p:txBody>
@@ -7406,7 +8086,7 @@
             <a:avLst/>
           </a:prstGeom>
           <a:solidFill>
-            <a:srgbClr val="E74C3C"/>
+            <a:srgbClr val="8B5CF6"/>
           </a:solidFill>
           <a:ln>
             <a:noFill/>
@@ -7459,13 +8139,13 @@
             <a:pPr algn="l">
               <a:defRPr sz="1000" b="1">
                 <a:solidFill>
-                  <a:srgbClr val="E74C3C"/>
-                </a:solidFill>
-                <a:latin typeface="Calibri"/>
-              </a:defRPr>
-            </a:pPr>
-            <a:r>
-              <a:t>🔥  CLAPS</a:t>
+                  <a:srgbClr val="8B5CF6"/>
+                </a:solidFill>
+                <a:latin typeface="Calibri"/>
+              </a:defRPr>
+            </a:pPr>
+            <a:r>
+              <a:t>💡  OFFICE LIFE</a:t>
             </a:r>
           </a:p>
         </p:txBody>
@@ -7495,13 +8175,13 @@
             <a:pPr algn="l">
               <a:defRPr sz="3200" b="1" i="0">
                 <a:solidFill>
-                  <a:srgbClr val="E74C3C"/>
-                </a:solidFill>
-                <a:latin typeface="Calibri"/>
-              </a:defRPr>
-            </a:pPr>
-            <a:r>
-              <a:t>UI Excellence</a:t>
+                  <a:srgbClr val="8B5CF6"/>
+                </a:solidFill>
+                <a:latin typeface="Calibri"/>
+              </a:defRPr>
+            </a:pPr>
+            <a:r>
+              <a:t>Innovation Mindset</a:t>
             </a:r>
           </a:p>
         </p:txBody>
@@ -7515,29 +8195,29 @@
         <p:spPr>
           <a:xfrm>
             <a:off x="1097280" y="2103120"/>
-            <a:ext cx="2743200" cy="548640"/>
-          </a:xfrm>
-          <a:prstGeom prst="rect">
-            <a:avLst/>
-          </a:prstGeom>
-          <a:noFill/>
-        </p:spPr>
-        <p:txBody>
-          <a:bodyPr wrap="square">
-            <a:spAutoFit/>
-          </a:bodyPr>
-          <a:lstStyle/>
-          <a:p>
-            <a:pPr algn="l">
-              <a:defRPr sz="2800" b="1" i="0">
-                <a:solidFill>
-                  <a:srgbClr val="E74C3C"/>
-                </a:solidFill>
-                <a:latin typeface="Calibri"/>
-              </a:defRPr>
-            </a:pPr>
-            <a:r>
-              <a:t>50</a:t>
+            <a:ext cx="9966960" cy="457200"/>
+          </a:xfrm>
+          <a:prstGeom prst="rect">
+            <a:avLst/>
+          </a:prstGeom>
+          <a:noFill/>
+        </p:spPr>
+        <p:txBody>
+          <a:bodyPr wrap="square">
+            <a:spAutoFit/>
+          </a:bodyPr>
+          <a:lstStyle/>
+          <a:p>
+            <a:pPr algn="l">
+              <a:defRPr sz="1800" b="1" i="0">
+                <a:solidFill>
+                  <a:srgbClr val="FFFFFF"/>
+                </a:solidFill>
+                <a:latin typeface="Calibri"/>
+              </a:defRPr>
+            </a:pPr>
+            <a:r>
+              <a:t>Non-Engineering Teams Building Tools</a:t>
             </a:r>
           </a:p>
         </p:txBody>
@@ -7550,7 +8230,43 @@
         </p:nvSpPr>
         <p:spPr>
           <a:xfrm>
-            <a:off x="1097280" y="2651760"/>
+            <a:off x="1371600" y="2743200"/>
+            <a:ext cx="9692640" cy="1828800"/>
+          </a:xfrm>
+          <a:prstGeom prst="rect">
+            <a:avLst/>
+          </a:prstGeom>
+          <a:noFill/>
+        </p:spPr>
+        <p:txBody>
+          <a:bodyPr wrap="square">
+            <a:spAutoFit/>
+          </a:bodyPr>
+          <a:lstStyle/>
+          <a:p>
+            <a:pPr algn="l">
+              <a:defRPr sz="1500" b="0" i="1">
+                <a:solidFill>
+                  <a:srgbClr val="E2E2EA"/>
+                </a:solidFill>
+                <a:latin typeface="Calibri"/>
+              </a:defRPr>
+            </a:pPr>
+            <a:r>
+              <a:t>"We're making great progress in building products, and it's especially exciting to see how quickly non-engineering teams have created so many useful tools. This is a strong sign that we're learning fast and moving in the right direction."</a:t>
+            </a:r>
+          </a:p>
+        </p:txBody>
+      </p:sp>
+      <p:sp>
+        <p:nvSpPr>
+          <p:cNvPr id="7" name="TextBox 6"/>
+          <p:cNvSpPr txBox="1"/>
+          <p:nvPr/>
+        </p:nvSpPr>
+        <p:spPr>
+          <a:xfrm>
+            <a:off x="1097280" y="4754880"/>
             <a:ext cx="9966960" cy="365760"/>
           </a:xfrm>
           <a:prstGeom prst="rect">
@@ -7567,26 +8283,26 @@
             <a:pPr algn="l">
               <a:defRPr sz="1400" b="0" i="0">
                 <a:solidFill>
-                  <a:srgbClr val="E2E2EA"/>
-                </a:solidFill>
-                <a:latin typeface="Calibri"/>
-              </a:defRPr>
-            </a:pPr>
-            <a:r>
-              <a:t>from Viktor Trykolenko</a:t>
-            </a:r>
-          </a:p>
-        </p:txBody>
-      </p:sp>
-      <p:sp>
-        <p:nvSpPr>
-          <p:cNvPr id="7" name="TextBox 6"/>
-          <p:cNvSpPr txBox="1"/>
-          <p:nvPr/>
-        </p:nvSpPr>
-        <p:spPr>
-          <a:xfrm>
-            <a:off x="1097280" y="3108960"/>
+                  <a:srgbClr val="8F95A3"/>
+                </a:solidFill>
+                <a:latin typeface="Calibri"/>
+              </a:defRPr>
+            </a:pPr>
+            <a:r>
+              <a:t>— Alexandr Zhitlukhin</a:t>
+            </a:r>
+          </a:p>
+        </p:txBody>
+      </p:sp>
+      <p:sp>
+        <p:nvSpPr>
+          <p:cNvPr id="8" name="TextBox 7"/>
+          <p:cNvSpPr txBox="1"/>
+          <p:nvPr/>
+        </p:nvSpPr>
+        <p:spPr>
+          <a:xfrm>
+            <a:off x="1097280" y="5212080"/>
             <a:ext cx="9966960" cy="365760"/>
           </a:xfrm>
           <a:prstGeom prst="rect">
@@ -7603,49 +8319,13 @@
             <a:pPr algn="l">
               <a:defRPr sz="1400" b="1" i="0">
                 <a:solidFill>
-                  <a:srgbClr val="FFFFFF"/>
-                </a:solidFill>
-                <a:latin typeface="Calibri"/>
-              </a:defRPr>
-            </a:pPr>
-            <a:r>
-              <a:t>to: Iurii Kotov</a:t>
-            </a:r>
-          </a:p>
-        </p:txBody>
-      </p:sp>
-      <p:sp>
-        <p:nvSpPr>
-          <p:cNvPr id="8" name="TextBox 7"/>
-          <p:cNvSpPr txBox="1"/>
-          <p:nvPr/>
-        </p:nvSpPr>
-        <p:spPr>
-          <a:xfrm>
-            <a:off x="1097280" y="3749039"/>
-            <a:ext cx="9966960" cy="1097280"/>
-          </a:xfrm>
-          <a:prstGeom prst="rect">
-            <a:avLst/>
-          </a:prstGeom>
-          <a:noFill/>
-        </p:spPr>
-        <p:txBody>
-          <a:bodyPr wrap="square">
-            <a:spAutoFit/>
-          </a:bodyPr>
-          <a:lstStyle/>
-          <a:p>
-            <a:pPr algn="l">
-              <a:defRPr sz="1500" b="0" i="1">
-                <a:solidFill>
-                  <a:srgbClr val="E2E2EA"/>
-                </a:solidFill>
-                <a:latin typeface="Calibri"/>
-              </a:defRPr>
-            </a:pPr>
-            <a:r>
-              <a:t>"Outstanding UI development work"</a:t>
+                  <a:srgbClr val="8B5CF6"/>
+                </a:solidFill>
+                <a:latin typeface="Calibri"/>
+              </a:defRPr>
+            </a:pPr>
+            <a:r>
+              <a:t>🔥 ×16, 👏 ×11, 🫡 ×7</a:t>
             </a:r>
           </a:p>
         </p:txBody>
@@ -7658,30 +8338,30 @@
         </p:nvSpPr>
         <p:spPr>
           <a:xfrm>
-            <a:off x="1097280" y="5120640"/>
-            <a:ext cx="9966960" cy="457200"/>
-          </a:xfrm>
-          <a:prstGeom prst="rect">
-            <a:avLst/>
-          </a:prstGeom>
-          <a:noFill/>
-        </p:spPr>
-        <p:txBody>
-          <a:bodyPr wrap="square">
-            <a:spAutoFit/>
-          </a:bodyPr>
-          <a:lstStyle/>
-          <a:p>
-            <a:pPr algn="l">
-              <a:defRPr sz="1200" b="1" i="0">
-                <a:solidFill>
-                  <a:srgbClr val="E74C3C"/>
-                </a:solidFill>
-                <a:latin typeface="Calibri"/>
-              </a:defRPr>
-            </a:pPr>
-            <a:r>
-              <a:t>Craftsmanship · Quality</a:t>
+            <a:off x="1097280" y="5760720"/>
+            <a:ext cx="9966960" cy="274320"/>
+          </a:xfrm>
+          <a:prstGeom prst="rect">
+            <a:avLst/>
+          </a:prstGeom>
+          <a:noFill/>
+        </p:spPr>
+        <p:txBody>
+          <a:bodyPr wrap="square">
+            <a:spAutoFit/>
+          </a:bodyPr>
+          <a:lstStyle/>
+          <a:p>
+            <a:pPr algn="l">
+              <a:defRPr sz="1100" b="0" i="0">
+                <a:solidFill>
+                  <a:srgbClr val="5C6270"/>
+                </a:solidFill>
+                <a:latin typeface="Calibri"/>
+              </a:defRPr>
+            </a:pPr>
+            <a:r>
+              <a:t>#general</a:t>
             </a:r>
           </a:p>
         </p:txBody>
@@ -7727,7 +8407,7 @@
             <a:avLst/>
           </a:prstGeom>
           <a:solidFill>
-            <a:srgbClr val="F39C12"/>
+            <a:srgbClr val="F59E0B"/>
           </a:solidFill>
           <a:ln>
             <a:noFill/>
@@ -7780,13 +8460,13 @@
             <a:pPr algn="l">
               <a:defRPr sz="1000" b="1">
                 <a:solidFill>
-                  <a:srgbClr val="F39C12"/>
-                </a:solidFill>
-                <a:latin typeface="Calibri"/>
-              </a:defRPr>
-            </a:pPr>
-            <a:r>
-              <a:t>🌟  CLAPS</a:t>
+                  <a:srgbClr val="F59E0B"/>
+                </a:solidFill>
+                <a:latin typeface="Calibri"/>
+              </a:defRPr>
+            </a:pPr>
+            <a:r>
+              <a:t>👏  CLAPS</a:t>
             </a:r>
           </a:p>
         </p:txBody>
@@ -7816,13 +8496,13 @@
             <a:pPr algn="l">
               <a:defRPr sz="3200" b="1" i="0">
                 <a:solidFill>
-                  <a:srgbClr val="F39C12"/>
-                </a:solidFill>
-                <a:latin typeface="Calibri"/>
-              </a:defRPr>
-            </a:pPr>
-            <a:r>
-              <a:t>Marketing Excellence</a:t>
+                  <a:srgbClr val="F59E0B"/>
+                </a:solidFill>
+                <a:latin typeface="Calibri"/>
+              </a:defRPr>
+            </a:pPr>
+            <a:r>
+              <a:t>DevOps Excellence</a:t>
             </a:r>
           </a:p>
         </p:txBody>
@@ -7852,7 +8532,7 @@
             <a:pPr algn="l">
               <a:defRPr sz="2800" b="1" i="0">
                 <a:solidFill>
-                  <a:srgbClr val="F39C12"/>
+                  <a:srgbClr val="F59E0B"/>
                 </a:solidFill>
                 <a:latin typeface="Calibri"/>
               </a:defRPr>
@@ -7894,7 +8574,7 @@
               </a:defRPr>
             </a:pPr>
             <a:r>
-              <a:t>from Jasmine Nunez</a:t>
+              <a:t>from Mykhailo Kukharskyi</a:t>
             </a:r>
           </a:p>
         </p:txBody>
@@ -7930,7 +8610,7 @@
               </a:defRPr>
             </a:pPr>
             <a:r>
-              <a:t>to: Michelle Walter</a:t>
+              <a:t>to: Gleb Krahotkin</a:t>
             </a:r>
           </a:p>
         </p:txBody>
@@ -7966,7 +8646,7 @@
               </a:defRPr>
             </a:pPr>
             <a:r>
-              <a:t>"Exceptional marketing campaign performance"</a:t>
+              <a:t>"Outstanding infrastructure work and platform development"</a:t>
             </a:r>
           </a:p>
         </p:txBody>
@@ -7996,13 +8676,13 @@
             <a:pPr algn="l">
               <a:defRPr sz="1200" b="1" i="0">
                 <a:solidFill>
-                  <a:srgbClr val="F39C12"/>
-                </a:solidFill>
-                <a:latin typeface="Calibri"/>
-              </a:defRPr>
-            </a:pPr>
-            <a:r>
-              <a:t>Excellence · Impact</a:t>
+                  <a:srgbClr val="F59E0B"/>
+                </a:solidFill>
+                <a:latin typeface="Calibri"/>
+              </a:defRPr>
+            </a:pPr>
+            <a:r>
+              <a:t>Innovation · Technical Excellence</a:t>
             </a:r>
           </a:p>
         </p:txBody>
@@ -8048,7 +8728,7 @@
             <a:avLst/>
           </a:prstGeom>
           <a:solidFill>
-            <a:srgbClr val="1ABC9C"/>
+            <a:srgbClr val="EF4444"/>
           </a:solidFill>
           <a:ln>
             <a:noFill/>
@@ -8101,13 +8781,13 @@
             <a:pPr algn="l">
               <a:defRPr sz="1000" b="1">
                 <a:solidFill>
-                  <a:srgbClr val="1ABC9C"/>
-                </a:solidFill>
-                <a:latin typeface="Calibri"/>
-              </a:defRPr>
-            </a:pPr>
-            <a:r>
-              <a:t>⭐  CLAPS</a:t>
+                  <a:srgbClr val="EF4444"/>
+                </a:solidFill>
+                <a:latin typeface="Calibri"/>
+              </a:defRPr>
+            </a:pPr>
+            <a:r>
+              <a:t>👏  CLAPS</a:t>
             </a:r>
           </a:p>
         </p:txBody>
@@ -8137,7 +8817,7 @@
             <a:pPr algn="l">
               <a:defRPr sz="3200" b="1" i="0">
                 <a:solidFill>
-                  <a:srgbClr val="1ABC9C"/>
+                  <a:srgbClr val="EF4444"/>
                 </a:solidFill>
                 <a:latin typeface="Calibri"/>
               </a:defRPr>
@@ -8173,7 +8853,7 @@
             <a:pPr algn="l">
               <a:defRPr sz="2800" b="1" i="0">
                 <a:solidFill>
-                  <a:srgbClr val="1ABC9C"/>
+                  <a:srgbClr val="EF4444"/>
                 </a:solidFill>
                 <a:latin typeface="Calibri"/>
               </a:defRPr>
@@ -8215,7 +8895,7 @@
               </a:defRPr>
             </a:pPr>
             <a:r>
-              <a:t>from Valentino Agazzi Mandozzi</a:t>
+              <a:t>from Viktor Trykolenko</a:t>
             </a:r>
           </a:p>
         </p:txBody>
@@ -8251,7 +8931,7 @@
               </a:defRPr>
             </a:pPr>
             <a:r>
-              <a:t>to: Eren Sakarya</a:t>
+              <a:t>to: Iurii Kotov</a:t>
             </a:r>
           </a:p>
         </p:txBody>
@@ -8287,7 +8967,7 @@
               </a:defRPr>
             </a:pPr>
             <a:r>
-              <a:t>"Excellent teamwork and collaboration"</a:t>
+              <a:t>"Exceptional teamwork and project delivery"</a:t>
             </a:r>
           </a:p>
         </p:txBody>
@@ -8317,13 +8997,13 @@
             <a:pPr algn="l">
               <a:defRPr sz="1200" b="1" i="0">
                 <a:solidFill>
-                  <a:srgbClr val="1ABC9C"/>
-                </a:solidFill>
-                <a:latin typeface="Calibri"/>
-              </a:defRPr>
-            </a:pPr>
-            <a:r>
-              <a:t>Teamwork · Support</a:t>
+                  <a:srgbClr val="EF4444"/>
+                </a:solidFill>
+                <a:latin typeface="Calibri"/>
+              </a:defRPr>
+            </a:pPr>
+            <a:r>
+              <a:t>Collaboration · Excellence</a:t>
             </a:r>
           </a:p>
         </p:txBody>
@@ -8369,7 +9049,7 @@
             <a:avLst/>
           </a:prstGeom>
           <a:solidFill>
-            <a:srgbClr val="8E44AD"/>
+            <a:srgbClr val="10B981"/>
           </a:solidFill>
           <a:ln>
             <a:noFill/>
@@ -8422,13 +9102,13 @@
             <a:pPr algn="l">
               <a:defRPr sz="1000" b="1">
                 <a:solidFill>
-                  <a:srgbClr val="8E44AD"/>
-                </a:solidFill>
-                <a:latin typeface="Calibri"/>
-              </a:defRPr>
-            </a:pPr>
-            <a:r>
-              <a:t>💪  CLAPS</a:t>
+                  <a:srgbClr val="10B981"/>
+                </a:solidFill>
+                <a:latin typeface="Calibri"/>
+              </a:defRPr>
+            </a:pPr>
+            <a:r>
+              <a:t>👏  CLAPS</a:t>
             </a:r>
           </a:p>
         </p:txBody>
@@ -8458,13 +9138,13 @@
             <a:pPr algn="l">
               <a:defRPr sz="3200" b="1" i="0">
                 <a:solidFill>
-                  <a:srgbClr val="8E44AD"/>
-                </a:solidFill>
-                <a:latin typeface="Calibri"/>
-              </a:defRPr>
-            </a:pPr>
-            <a:r>
-              <a:t>Product Leadership</a:t>
+                  <a:srgbClr val="10B981"/>
+                </a:solidFill>
+                <a:latin typeface="Calibri"/>
+              </a:defRPr>
+            </a:pPr>
+            <a:r>
+              <a:t>Leadership Recognition</a:t>
             </a:r>
           </a:p>
         </p:txBody>
@@ -8494,7 +9174,7 @@
             <a:pPr algn="l">
               <a:defRPr sz="2800" b="1" i="0">
                 <a:solidFill>
-                  <a:srgbClr val="8E44AD"/>
+                  <a:srgbClr val="10B981"/>
                 </a:solidFill>
                 <a:latin typeface="Calibri"/>
               </a:defRPr>
@@ -8536,7 +9216,7 @@
               </a:defRPr>
             </a:pPr>
             <a:r>
-              <a:t>from Michael Lotfy</a:t>
+              <a:t>from Jasmine Nunez</a:t>
             </a:r>
           </a:p>
         </p:txBody>
@@ -8572,7 +9252,7 @@
               </a:defRPr>
             </a:pPr>
             <a:r>
-              <a:t>to: Issa Isahakyan</a:t>
+              <a:t>to: Michelle Walter</a:t>
             </a:r>
           </a:p>
         </p:txBody>
@@ -8608,7 +9288,7 @@
               </a:defRPr>
             </a:pPr>
             <a:r>
-              <a:t>"Outstanding product management and leadership"</a:t>
+              <a:t>"Outstanding leadership and team management"</a:t>
             </a:r>
           </a:p>
         </p:txBody>
@@ -8638,13 +9318,13 @@
             <a:pPr algn="l">
               <a:defRPr sz="1200" b="1" i="0">
                 <a:solidFill>
-                  <a:srgbClr val="8E44AD"/>
-                </a:solidFill>
-                <a:latin typeface="Calibri"/>
-              </a:defRPr>
-            </a:pPr>
-            <a:r>
-              <a:t>Leadership · Vision</a:t>
+                  <a:srgbClr val="10B981"/>
+                </a:solidFill>
+                <a:latin typeface="Calibri"/>
+              </a:defRPr>
+            </a:pPr>
+            <a:r>
+              <a:t>Leadership · Team Success</a:t>
             </a:r>
           </a:p>
         </p:txBody>
